--- a/workshop/Better-by-Default.pptx
+++ b/workshop/Better-by-Default.pptx
@@ -617,7 +617,7 @@
           <a:p>
             <a:r>
               <a:rPr lang="en-US" dirty="0"/>
-              <a:t>Never trust the client. The JS meter is UX; the server-side rule is enforcement. 12 chars + mixed classes is a reasonable floor.</a:t>
+              <a:t>Never trust the client — the JS meter is UX, the server rule is the wall. Length + breach screening is the modern NIST/OWASP guidance; composition rules are out.</a:t>
             </a:r>
             <a:endParaRPr lang="en-US" dirty="0"/>
           </a:p>
@@ -1321,7 +1321,7 @@
           <a:p>
             <a:r>
               <a:rPr lang="en-US" dirty="0"/>
-              <a:t>Note the is_admin() guard — we scope the search change so we never touch the visitor-facing search. Scoping filters correctly is the craft here.</a:t>
+              <a:t>post_search_columns (WP 6.2+) narrows the columns instead of rewriting the SQL clause — it keeps core's term parsing and the logged-out password guard intact. Scoping filters correctly is the craft here.</a:t>
             </a:r>
             <a:endParaRPr lang="en-US" dirty="0"/>
           </a:p>
@@ -1673,7 +1673,7 @@
           <a:p>
             <a:r>
               <a:rPr lang="en-US" dirty="0"/>
-              <a:t>Swap display:none for a background-image to drop in the client's own logo. Tiny detail clients always notice.</a:t>
+              <a:t>Default is keep_default — leave the login screen untouched. Swap in a background-image to drop in the client's own logo. Tiny detail clients always notice.</a:t>
             </a:r>
             <a:endParaRPr lang="en-US" dirty="0"/>
           </a:p>
@@ -2817,7 +2817,7 @@
           <a:p>
             <a:r>
               <a:rPr lang="en-US" dirty="0"/>
-              <a:t>Check with the client before disabling if they use the WordPress mobile app or older Jetpack features over XML-RPC. Most sites don't.</a:t>
+              <a:t>system.multicall can't be removed by the xmlrpc_methods filter — IXR re-adds it — so we swap in a server that refuses it. Don't *block the endpoint* on a Jetpack site: that breaks its WordPress.com connection; the method toggles leave jetpack.* alone.</a:t>
             </a:r>
             <a:endParaRPr lang="en-US" dirty="0"/>
           </a:p>
@@ -2905,7 +2905,7 @@
           <a:p>
             <a:r>
               <a:rPr lang="en-US" dirty="0"/>
-              <a:t>One-liner. The only caveat: if the site talks to an external app via REST auth, leave the feature on.</a:t>
+              <a:t>Turning them off just pushes people to worse habits like sharing the login password. They stay available by default — the safer, revocable REST credential.</a:t>
             </a:r>
             <a:endParaRPr lang="en-US" dirty="0"/>
           </a:p>
@@ -3676,7 +3676,7 @@
                 <a:ea typeface="Calibri" pitchFamily="34" charset="-122"/>
                 <a:cs typeface="Calibri" pitchFamily="34" charset="-120"/>
               </a:rPr>
-              <a:t>Core shows a strength meter but never enforces it — a determined user can still save “password1”. We validate server-side on profile save and password reset, turning the warning into a wall.</a:t>
+              <a:t>NIST 800-63B and OWASP now say length plus breach screening beats composition rules. Forcing upper/lower/number/symbol just herds users to Password1! — predictable, not strong. We require 15+ chars and screen against known breaches, server-side.</a:t>
             </a:r>
             <a:endParaRPr lang="en-US" sz="1600" dirty="0"/>
           </a:p>
@@ -3898,13 +3898,13 @@
             <a:r>
               <a:rPr lang="en-US" sz="1150" dirty="0">
                 <a:solidFill>
-                  <a:srgbClr val="DCEAF1"/>
+                  <a:srgbClr val="E7C070"/>
                 </a:solidFill>
                 <a:latin typeface="Courier New" pitchFamily="34" charset="0"/>
                 <a:ea typeface="Courier New" pitchFamily="34" charset="-122"/>
                 <a:cs typeface="Courier New" pitchFamily="34" charset="-120"/>
               </a:rPr>
-              <a:t>$ok = strlen( $pw ) &gt;= 12</a:t>
+              <a:t>if ( strlen( $pw ) &lt; 15 ) {</a:t>
             </a:r>
             <a:endParaRPr lang="en-US" sz="1150" dirty="0"/>
           </a:p>
@@ -3918,13 +3918,13 @@
             <a:r>
               <a:rPr lang="en-US" sz="1150" dirty="0">
                 <a:solidFill>
-                  <a:srgbClr val="E7C070"/>
+                  <a:srgbClr val="DCEAF1"/>
                 </a:solidFill>
                 <a:latin typeface="Courier New" pitchFamily="34" charset="0"/>
                 <a:ea typeface="Courier New" pitchFamily="34" charset="-122"/>
                 <a:cs typeface="Courier New" pitchFamily="34" charset="-120"/>
               </a:rPr>
-              <a:t>   &amp;&amp; preg_match( '/[A-Z]/', $pw )</a:t>
+              <a:t>    $errors-&gt;add( 'short', 'Use 15+ chars.' );</a:t>
             </a:r>
             <a:endParaRPr lang="en-US" sz="1150" dirty="0"/>
           </a:p>
@@ -3938,13 +3938,13 @@
             <a:r>
               <a:rPr lang="en-US" sz="1150" dirty="0">
                 <a:solidFill>
-                  <a:srgbClr val="E7C070"/>
+                  <a:srgbClr val="DCEAF1"/>
                 </a:solidFill>
                 <a:latin typeface="Courier New" pitchFamily="34" charset="0"/>
                 <a:ea typeface="Courier New" pitchFamily="34" charset="-122"/>
                 <a:cs typeface="Courier New" pitchFamily="34" charset="-120"/>
               </a:rPr>
-              <a:t>   &amp;&amp; preg_match( '/[a-z]/', $pw )</a:t>
+              <a:t>}</a:t>
             </a:r>
             <a:endParaRPr lang="en-US" sz="1150" dirty="0"/>
           </a:p>
@@ -3958,13 +3958,13 @@
             <a:r>
               <a:rPr lang="en-US" sz="1150" dirty="0">
                 <a:solidFill>
-                  <a:srgbClr val="E7C070"/>
+                  <a:srgbClr val="DCEAF1"/>
                 </a:solidFill>
                 <a:latin typeface="Courier New" pitchFamily="34" charset="0"/>
                 <a:ea typeface="Courier New" pitchFamily="34" charset="-122"/>
                 <a:cs typeface="Courier New" pitchFamily="34" charset="-120"/>
               </a:rPr>
-              <a:t>   &amp;&amp; preg_match( '/[0-9]/', $pw )</a:t>
+              <a:t> </a:t>
             </a:r>
             <a:endParaRPr lang="en-US" sz="1150" dirty="0"/>
           </a:p>
@@ -3978,13 +3978,13 @@
             <a:r>
               <a:rPr lang="en-US" sz="1150" dirty="0">
                 <a:solidFill>
-                  <a:srgbClr val="E7C070"/>
+                  <a:srgbClr val="8FBF9F"/>
                 </a:solidFill>
                 <a:latin typeface="Courier New" pitchFamily="34" charset="0"/>
                 <a:ea typeface="Courier New" pitchFamily="34" charset="-122"/>
                 <a:cs typeface="Courier New" pitchFamily="34" charset="-120"/>
               </a:rPr>
-              <a:t>   &amp;&amp; preg_match( '/[^A-Za-z0-9]/', $pw );</a:t>
+              <a:t>// screen against breaches (HIBP),</a:t>
             </a:r>
             <a:endParaRPr lang="en-US" sz="1150" dirty="0"/>
           </a:p>
@@ -3998,13 +3998,13 @@
             <a:r>
               <a:rPr lang="en-US" sz="1150" dirty="0">
                 <a:solidFill>
-                  <a:srgbClr val="DCEAF1"/>
+                  <a:srgbClr val="8FBF9F"/>
                 </a:solidFill>
                 <a:latin typeface="Courier New" pitchFamily="34" charset="0"/>
                 <a:ea typeface="Courier New" pitchFamily="34" charset="-122"/>
                 <a:cs typeface="Courier New" pitchFamily="34" charset="-120"/>
               </a:rPr>
-              <a:t> </a:t>
+              <a:t>// not composition rules</a:t>
             </a:r>
             <a:endParaRPr lang="en-US" sz="1150" dirty="0"/>
           </a:p>
@@ -4018,13 +4018,13 @@
             <a:r>
               <a:rPr lang="en-US" sz="1150" dirty="0">
                 <a:solidFill>
-                  <a:srgbClr val="DCEAF1"/>
+                  <a:srgbClr val="E7C070"/>
                 </a:solidFill>
                 <a:latin typeface="Courier New" pitchFamily="34" charset="0"/>
                 <a:ea typeface="Courier New" pitchFamily="34" charset="-122"/>
                 <a:cs typeface="Courier New" pitchFamily="34" charset="-120"/>
               </a:rPr>
-              <a:t>if ( ! $ok ) {</a:t>
+              <a:t>if ( wpyeg_password_is_pwned( $pw ) ) {</a:t>
             </a:r>
             <a:endParaRPr lang="en-US" sz="1150" dirty="0"/>
           </a:p>
@@ -4044,7 +4044,7 @@
                 <a:ea typeface="Courier New" pitchFamily="34" charset="-122"/>
                 <a:cs typeface="Courier New" pitchFamily="34" charset="-120"/>
               </a:rPr>
-              <a:t>    $errors-&gt;add( 'weak', 'Too weak.' );</a:t>
+              <a:t>    $errors-&gt;add( 'pwned', 'Seen in a breach.' );</a:t>
             </a:r>
             <a:endParaRPr lang="en-US" sz="1150" dirty="0"/>
           </a:p>
@@ -8066,7 +8066,7 @@
                 <a:ea typeface="Courier New" pitchFamily="34" charset="-122"/>
                 <a:cs typeface="Courier New" pitchFamily="34" charset="-120"/>
               </a:rPr>
-              <a:t>// title-only admin search (scoped!)</a:t>
+              <a:t>// title-only admin search — narrow the COLUMNS</a:t>
             </a:r>
             <a:endParaRPr lang="en-US" sz="1100" dirty="0"/>
           </a:p>
@@ -8086,7 +8086,7 @@
                 <a:ea typeface="Courier New" pitchFamily="34" charset="-122"/>
                 <a:cs typeface="Courier New" pitchFamily="34" charset="-120"/>
               </a:rPr>
-              <a:t>add_filter( 'posts_search', function ( $sql, $q ) {</a:t>
+              <a:t>add_filter( 'post_search_columns',</a:t>
             </a:r>
             <a:endParaRPr lang="en-US" sz="1100" dirty="0"/>
           </a:p>
@@ -8106,7 +8106,7 @@
                 <a:ea typeface="Courier New" pitchFamily="34" charset="-122"/>
                 <a:cs typeface="Courier New" pitchFamily="34" charset="-120"/>
               </a:rPr>
-              <a:t>  if ( ! is_admin() || ! $q-&gt;is_main_query() )</a:t>
+              <a:t>  function ( $cols, $s, $q ) {</a:t>
             </a:r>
             <a:endParaRPr lang="en-US" sz="1100" dirty="0"/>
           </a:p>
@@ -8120,13 +8120,13 @@
             <a:r>
               <a:rPr lang="en-US" sz="1100" dirty="0">
                 <a:solidFill>
-                  <a:srgbClr val="E7C070"/>
+                  <a:srgbClr val="DCEAF1"/>
                 </a:solidFill>
                 <a:latin typeface="Courier New" pitchFamily="34" charset="0"/>
                 <a:ea typeface="Courier New" pitchFamily="34" charset="-122"/>
                 <a:cs typeface="Courier New" pitchFamily="34" charset="-120"/>
               </a:rPr>
-              <a:t>      return $sql;   // front-end untouched</a:t>
+              <a:t>    if ( is_admin() &amp;&amp; $q-&gt;is_main_query() )</a:t>
             </a:r>
             <a:endParaRPr lang="en-US" sz="1100" dirty="0"/>
           </a:p>
@@ -8140,13 +8140,13 @@
             <a:r>
               <a:rPr lang="en-US" sz="1100" dirty="0">
                 <a:solidFill>
-                  <a:srgbClr val="8FBF9F"/>
+                  <a:srgbClr val="E7C070"/>
                 </a:solidFill>
                 <a:latin typeface="Courier New" pitchFamily="34" charset="0"/>
                 <a:ea typeface="Courier New" pitchFamily="34" charset="-122"/>
                 <a:cs typeface="Courier New" pitchFamily="34" charset="-120"/>
               </a:rPr>
-              <a:t>  // ...match post_title only</a:t>
+              <a:t>        return array( 'post_title' );</a:t>
             </a:r>
             <a:endParaRPr lang="en-US" sz="1100" dirty="0"/>
           </a:p>
@@ -8166,7 +8166,7 @@
                 <a:ea typeface="Courier New" pitchFamily="34" charset="-122"/>
                 <a:cs typeface="Courier New" pitchFamily="34" charset="-120"/>
               </a:rPr>
-              <a:t>}, 10, 2 );</a:t>
+              <a:t>    return $cols;   // front-end untouched</a:t>
             </a:r>
             <a:endParaRPr lang="en-US" sz="1100" dirty="0"/>
           </a:p>
@@ -8186,7 +8186,7 @@
                 <a:ea typeface="Courier New" pitchFamily="34" charset="-122"/>
                 <a:cs typeface="Courier New" pitchFamily="34" charset="-120"/>
               </a:rPr>
-              <a:t> </a:t>
+              <a:t>  }, 10, 3 );</a:t>
             </a:r>
             <a:endParaRPr lang="en-US" sz="1100" dirty="0"/>
           </a:p>
@@ -9363,7 +9363,7 @@
                 <a:ea typeface="Cambria" pitchFamily="34" charset="-122"/>
                 <a:cs typeface="Cambria" pitchFamily="34" charset="-120"/>
               </a:rPr>
-              <a:t>Legacy endpoints open</a:t>
+              <a:t>Legacy XML-RPC wide open</a:t>
             </a:r>
             <a:endParaRPr lang="en-US" sz="1900" dirty="0"/>
           </a:p>
@@ -9402,7 +9402,7 @@
                 <a:ea typeface="Calibri" pitchFamily="34" charset="-122"/>
                 <a:cs typeface="Calibri" pitchFamily="34" charset="-120"/>
               </a:rPr>
-              <a:t>XML-RPC and Application Passwords stay on — classic brute-force amplifiers.</a:t>
+              <a:t>pingback and system.multicall amplifiers answer by default.</a:t>
             </a:r>
             <a:endParaRPr lang="en-US" sz="1400" dirty="0"/>
           </a:p>
@@ -10233,7 +10233,7 @@
                 <a:ea typeface="Calibri" pitchFamily="34" charset="-122"/>
                 <a:cs typeface="Calibri" pitchFamily="34" charset="-120"/>
               </a:rPr>
-              <a:t>The default WordPress “W” on wp-login.php links out to wordpress.org — a subtle trust and brand leak on the one page where trust matters most. Remove or replace it, and point the link back home.</a:t>
+              <a:t>The default WordPress “W” on wp-login.php links out to wordpress.org — a subtle trust leak. But changing the login screen out of the box is intrusive, so the default is to leave it alone; removing, unlinking, or replacing the logo is an opt-in, and any change points the link home.</a:t>
             </a:r>
             <a:endParaRPr lang="en-US" sz="1600" dirty="0"/>
           </a:p>
@@ -10319,7 +10319,7 @@
                 <a:ea typeface="Courier New" pitchFamily="34" charset="-122"/>
                 <a:cs typeface="Courier New" pitchFamily="34" charset="-120"/>
               </a:rPr>
-              <a:t>wpyeg_login_logo_behavior / _login_logo_link_home</a:t>
+              <a:t>wpyeg_login_logo_behavior</a:t>
             </a:r>
             <a:pPr indent="0" marL="0">
               <a:lnSpc>
@@ -10365,7 +10365,7 @@
                 <a:ea typeface="Courier New" pitchFamily="34" charset="-122"/>
                 <a:cs typeface="Courier New" pitchFamily="34" charset="-120"/>
               </a:rPr>
-              <a:t>remove_logo / yes</a:t>
+              <a:t>keep_default (keep / remove / unlink / replace)</a:t>
             </a:r>
             <a:endParaRPr lang="en-US" sz="1150" dirty="0"/>
           </a:p>
@@ -10435,13 +10435,13 @@
             <a:r>
               <a:rPr lang="en-US" sz="1200" dirty="0">
                 <a:solidFill>
-                  <a:srgbClr val="DCEAF1"/>
+                  <a:srgbClr val="8FBF9F"/>
                 </a:solidFill>
                 <a:latin typeface="Courier New" pitchFamily="34" charset="0"/>
                 <a:ea typeface="Courier New" pitchFamily="34" charset="-122"/>
                 <a:cs typeface="Courier New" pitchFamily="34" charset="-120"/>
               </a:rPr>
-              <a:t>add_action( 'login_head', function () {</a:t>
+              <a:t>// remove, unlink, or replace — a choice</a:t>
             </a:r>
             <a:endParaRPr lang="en-US" sz="1200" dirty="0"/>
           </a:p>
@@ -10461,7 +10461,7 @@
                 <a:ea typeface="Courier New" pitchFamily="34" charset="-122"/>
                 <a:cs typeface="Courier New" pitchFamily="34" charset="-120"/>
               </a:rPr>
-              <a:t>  echo '&lt;style&gt;#login h1 a{display:none}&lt;/style&gt;';</a:t>
+              <a:t>add_action( 'login_head', $logo_css );</a:t>
             </a:r>
             <a:endParaRPr lang="en-US" sz="1200" dirty="0"/>
           </a:p>
@@ -10481,7 +10481,7 @@
                 <a:ea typeface="Courier New" pitchFamily="34" charset="-122"/>
                 <a:cs typeface="Courier New" pitchFamily="34" charset="-120"/>
               </a:rPr>
-              <a:t>} );</a:t>
+              <a:t> </a:t>
             </a:r>
             <a:endParaRPr lang="en-US" sz="1200" dirty="0"/>
           </a:p>
@@ -10495,13 +10495,33 @@
             <a:r>
               <a:rPr lang="en-US" sz="1200" dirty="0">
                 <a:solidFill>
-                  <a:srgbClr val="DCEAF1"/>
+                  <a:srgbClr val="8FBF9F"/>
                 </a:solidFill>
                 <a:latin typeface="Courier New" pitchFamily="34" charset="0"/>
                 <a:ea typeface="Courier New" pitchFamily="34" charset="-122"/>
                 <a:cs typeface="Courier New" pitchFamily="34" charset="-120"/>
               </a:rPr>
-              <a:t> </a:t>
+              <a:t>// any change points the link home</a:t>
+            </a:r>
+            <a:endParaRPr lang="en-US" sz="1200" dirty="0"/>
+          </a:p>
+          <a:p>
+            <a:pPr algn="l" indent="0" marL="0">
+              <a:lnSpc>
+                <a:spcPct val="108000"/>
+              </a:lnSpc>
+              <a:buNone/>
+            </a:pPr>
+            <a:r>
+              <a:rPr lang="en-US" sz="1200" dirty="0">
+                <a:solidFill>
+                  <a:srgbClr val="8FBF9F"/>
+                </a:solidFill>
+                <a:latin typeface="Courier New" pitchFamily="34" charset="0"/>
+                <a:ea typeface="Courier New" pitchFamily="34" charset="-122"/>
+                <a:cs typeface="Courier New" pitchFamily="34" charset="-120"/>
+              </a:rPr>
+              <a:t>// (no separate toggle)</a:t>
             </a:r>
             <a:endParaRPr lang="en-US" sz="1200" dirty="0"/>
           </a:p>
@@ -14845,7 +14865,7 @@
                           <a:ea typeface="Calibri" pitchFamily="34" charset="-122"/>
                           <a:cs typeface="Calibri" pitchFamily="34" charset="-120"/>
                         </a:rPr>
-                        <a:t>Disable XML-RPC</a:t>
+                        <a:t>Lock down XML-RPC by category</a:t>
                       </a:r>
                       <a:endParaRPr lang="en-US" sz="1250" dirty="0">
                         <a:latin typeface="Calibri" charset="0"/>
@@ -14913,7 +14933,7 @@
                           <a:ea typeface="Courier New" pitchFamily="34" charset="-122"/>
                           <a:cs typeface="Courier New" pitchFamily="34" charset="-120"/>
                         </a:rPr>
-                        <a:t>xmlrpc_enabled</a:t>
+                        <a:t>xmlrpc_methods / wp_xmlrpc_server_class</a:t>
                       </a:r>
                       <a:endParaRPr lang="en-US" sz="1100" dirty="0">
                         <a:latin typeface="Courier New" charset="0"/>
@@ -15051,7 +15071,7 @@
                           <a:ea typeface="Calibri" pitchFamily="34" charset="-122"/>
                           <a:cs typeface="Calibri" pitchFamily="34" charset="-120"/>
                         </a:rPr>
-                        <a:t>Disable Application Passwords</a:t>
+                        <a:t>Require strong passwords (15+ / breach-screened)</a:t>
                       </a:r>
                       <a:endParaRPr lang="en-US" sz="1250" dirty="0">
                         <a:latin typeface="Calibri" charset="0"/>
@@ -15119,7 +15139,7 @@
                           <a:ea typeface="Courier New" pitchFamily="34" charset="-122"/>
                           <a:cs typeface="Courier New" pitchFamily="34" charset="-120"/>
                         </a:rPr>
-                        <a:t>wp_is_application_passwords_available</a:t>
+                        <a:t>user_profile_update_errors</a:t>
                       </a:r>
                       <a:endParaRPr lang="en-US" sz="1100" dirty="0">
                         <a:latin typeface="Courier New" charset="0"/>
@@ -15257,7 +15277,7 @@
                           <a:ea typeface="Calibri" pitchFamily="34" charset="-122"/>
                           <a:cs typeface="Calibri" pitchFamily="34" charset="-120"/>
                         </a:rPr>
-                        <a:t>Require strong passwords</a:t>
+                        <a:t>Remove version + security headers</a:t>
                       </a:r>
                       <a:endParaRPr lang="en-US" sz="1250" dirty="0">
                         <a:latin typeface="Calibri" charset="0"/>
@@ -15325,7 +15345,7 @@
                           <a:ea typeface="Courier New" pitchFamily="34" charset="-122"/>
                           <a:cs typeface="Courier New" pitchFamily="34" charset="-120"/>
                         </a:rPr>
-                        <a:t>user_profile_update_errors</a:t>
+                        <a:t>wp_generator / wp_headers</a:t>
                       </a:r>
                       <a:endParaRPr lang="en-US" sz="1100" dirty="0">
                         <a:latin typeface="Courier New" charset="0"/>
@@ -15463,7 +15483,7 @@
                           <a:ea typeface="Calibri" pitchFamily="34" charset="-122"/>
                           <a:cs typeface="Calibri" pitchFamily="34" charset="-120"/>
                         </a:rPr>
-                        <a:t>Remove version + security headers</a:t>
+                        <a:t>Disable comments &amp; pingbacks</a:t>
                       </a:r>
                       <a:endParaRPr lang="en-US" sz="1250" dirty="0">
                         <a:latin typeface="Calibri" charset="0"/>
@@ -15531,7 +15551,7 @@
                           <a:ea typeface="Courier New" pitchFamily="34" charset="-122"/>
                           <a:cs typeface="Courier New" pitchFamily="34" charset="-120"/>
                         </a:rPr>
-                        <a:t>wp_generator / wp_headers</a:t>
+                        <a:t>comments_open / pings_open</a:t>
                       </a:r>
                       <a:endParaRPr lang="en-US" sz="1100" dirty="0">
                         <a:latin typeface="Courier New" charset="0"/>
@@ -15599,7 +15619,7 @@
                           <a:ea typeface="Calibri" pitchFamily="34" charset="-122"/>
                           <a:cs typeface="Calibri" pitchFamily="34" charset="-120"/>
                         </a:rPr>
-                        <a:t>Security</a:t>
+                        <a:t>Content</a:t>
                       </a:r>
                       <a:endParaRPr lang="en-US" sz="1200" dirty="0">
                         <a:latin typeface="Calibri" charset="0"/>
@@ -15669,7 +15689,7 @@
                           <a:ea typeface="Calibri" pitchFamily="34" charset="-122"/>
                           <a:cs typeface="Calibri" pitchFamily="34" charset="-120"/>
                         </a:rPr>
-                        <a:t>Disable comments &amp; pingbacks</a:t>
+                        <a:t>Redirect author + attachment pages</a:t>
                       </a:r>
                       <a:endParaRPr lang="en-US" sz="1250" dirty="0">
                         <a:latin typeface="Calibri" charset="0"/>
@@ -15737,7 +15757,7 @@
                           <a:ea typeface="Courier New" pitchFamily="34" charset="-122"/>
                           <a:cs typeface="Courier New" pitchFamily="34" charset="-120"/>
                         </a:rPr>
-                        <a:t>comments_open / pings_open</a:t>
+                        <a:t>template_redirect</a:t>
                       </a:r>
                       <a:endParaRPr lang="en-US" sz="1100" dirty="0">
                         <a:latin typeface="Courier New" charset="0"/>
@@ -15805,7 +15825,7 @@
                           <a:ea typeface="Calibri" pitchFamily="34" charset="-122"/>
                           <a:cs typeface="Calibri" pitchFamily="34" charset="-120"/>
                         </a:rPr>
-                        <a:t>Content</a:t>
+                        <a:t>Content / SEO</a:t>
                       </a:r>
                       <a:endParaRPr lang="en-US" sz="1200" dirty="0">
                         <a:latin typeface="Calibri" charset="0"/>
@@ -15875,7 +15895,7 @@
                           <a:ea typeface="Calibri" pitchFamily="34" charset="-122"/>
                           <a:cs typeface="Calibri" pitchFamily="34" charset="-120"/>
                         </a:rPr>
-                        <a:t>Redirect author + attachment pages</a:t>
+                        <a:t>Disable emoji script</a:t>
                       </a:r>
                       <a:endParaRPr lang="en-US" sz="1250" dirty="0">
                         <a:latin typeface="Calibri" charset="0"/>
@@ -15943,7 +15963,7 @@
                           <a:ea typeface="Courier New" pitchFamily="34" charset="-122"/>
                           <a:cs typeface="Courier New" pitchFamily="34" charset="-120"/>
                         </a:rPr>
-                        <a:t>template_redirect</a:t>
+                        <a:t>init (remove_action)</a:t>
                       </a:r>
                       <a:endParaRPr lang="en-US" sz="1100" dirty="0">
                         <a:latin typeface="Courier New" charset="0"/>
@@ -16011,419 +16031,7 @@
                           <a:ea typeface="Calibri" pitchFamily="34" charset="-122"/>
                           <a:cs typeface="Calibri" pitchFamily="34" charset="-120"/>
                         </a:rPr>
-                        <a:t>Content / SEO</a:t>
-                      </a:r>
-                      <a:endParaRPr lang="en-US" sz="1200" dirty="0">
-                        <a:latin typeface="Calibri" charset="0"/>
-                        <a:ea typeface="Calibri" charset="0"/>
-                        <a:cs typeface="Calibri" charset="0"/>
-                      </a:endParaRPr>
-                    </a:p>
-                  </a:txBody>
-                  <a:tcPr marL="50800" marR="50800" marT="50800" marB="50800" anchor="ctr">
-                    <a:lnL w="12700" cap="flat" cmpd="sng" algn="ctr">
-                      <a:solidFill>
-                        <a:srgbClr val="DCE6EB"/>
-                      </a:solidFill>
-                      <a:prstDash val="solid"/>
-                      <a:round/>
-                      <a:headEnd type="none" w="med" len="med"/>
-                      <a:tailEnd type="none" w="med" len="med"/>
-                    </a:lnL>
-                    <a:lnR w="12700" cap="flat" cmpd="sng" algn="ctr">
-                      <a:solidFill>
-                        <a:srgbClr val="DCE6EB"/>
-                      </a:solidFill>
-                      <a:prstDash val="solid"/>
-                      <a:round/>
-                      <a:headEnd type="none" w="med" len="med"/>
-                      <a:tailEnd type="none" w="med" len="med"/>
-                    </a:lnR>
-                    <a:lnT w="12700" cap="flat" cmpd="sng" algn="ctr">
-                      <a:solidFill>
-                        <a:srgbClr val="DCE6EB"/>
-                      </a:solidFill>
-                      <a:prstDash val="solid"/>
-                      <a:round/>
-                      <a:headEnd type="none" w="med" len="med"/>
-                      <a:tailEnd type="none" w="med" len="med"/>
-                    </a:lnT>
-                    <a:lnB w="12700" cap="flat" cmpd="sng" algn="ctr">
-                      <a:solidFill>
-                        <a:srgbClr val="DCE6EB"/>
-                      </a:solidFill>
-                      <a:prstDash val="solid"/>
-                      <a:round/>
-                      <a:headEnd type="none" w="med" len="med"/>
-                      <a:tailEnd type="none" w="med" len="med"/>
-                    </a:lnB>
-                    <a:solidFill>
-                      <a:srgbClr val="FFFFFF"/>
-                    </a:solidFill>
-                  </a:tcPr>
-                </a:tc>
-              </a:tr>
-              <a:tr h="402336">
-                <a:tc>
-                  <a:txBody>
-                    <a:bodyPr/>
-                    <a:lstStyle/>
-                    <a:p>
-                      <a:pPr algn="l" indent="0" marL="0">
-                        <a:buNone/>
-                      </a:pPr>
-                      <a:r>
-                        <a:rPr lang="en-US" sz="1250" dirty="0">
-                          <a:solidFill>
-                            <a:srgbClr val="0F2733"/>
-                          </a:solidFill>
-                          <a:latin typeface="Calibri" pitchFamily="34" charset="0"/>
-                          <a:ea typeface="Calibri" pitchFamily="34" charset="-122"/>
-                          <a:cs typeface="Calibri" pitchFamily="34" charset="-120"/>
-                        </a:rPr>
-                        <a:t>Disable emoji script</a:t>
-                      </a:r>
-                      <a:endParaRPr lang="en-US" sz="1250" dirty="0">
-                        <a:latin typeface="Calibri" charset="0"/>
-                        <a:ea typeface="Calibri" charset="0"/>
-                        <a:cs typeface="Calibri" charset="0"/>
-                      </a:endParaRPr>
-                    </a:p>
-                  </a:txBody>
-                  <a:tcPr marL="50800" marR="50800" marT="50800" marB="50800" anchor="ctr">
-                    <a:lnL w="12700" cap="flat" cmpd="sng" algn="ctr">
-                      <a:solidFill>
-                        <a:srgbClr val="DCE6EB"/>
-                      </a:solidFill>
-                      <a:prstDash val="solid"/>
-                      <a:round/>
-                      <a:headEnd type="none" w="med" len="med"/>
-                      <a:tailEnd type="none" w="med" len="med"/>
-                    </a:lnL>
-                    <a:lnR w="12700" cap="flat" cmpd="sng" algn="ctr">
-                      <a:solidFill>
-                        <a:srgbClr val="DCE6EB"/>
-                      </a:solidFill>
-                      <a:prstDash val="solid"/>
-                      <a:round/>
-                      <a:headEnd type="none" w="med" len="med"/>
-                      <a:tailEnd type="none" w="med" len="med"/>
-                    </a:lnR>
-                    <a:lnT w="12700" cap="flat" cmpd="sng" algn="ctr">
-                      <a:solidFill>
-                        <a:srgbClr val="DCE6EB"/>
-                      </a:solidFill>
-                      <a:prstDash val="solid"/>
-                      <a:round/>
-                      <a:headEnd type="none" w="med" len="med"/>
-                      <a:tailEnd type="none" w="med" len="med"/>
-                    </a:lnT>
-                    <a:lnB w="12700" cap="flat" cmpd="sng" algn="ctr">
-                      <a:solidFill>
-                        <a:srgbClr val="DCE6EB"/>
-                      </a:solidFill>
-                      <a:prstDash val="solid"/>
-                      <a:round/>
-                      <a:headEnd type="none" w="med" len="med"/>
-                      <a:tailEnd type="none" w="med" len="med"/>
-                    </a:lnB>
-                    <a:solidFill>
-                      <a:srgbClr val="EAF1F5"/>
-                    </a:solidFill>
-                  </a:tcPr>
-                </a:tc>
-                <a:tc>
-                  <a:txBody>
-                    <a:bodyPr/>
-                    <a:lstStyle/>
-                    <a:p>
-                      <a:pPr algn="l" indent="0" marL="0">
-                        <a:buNone/>
-                      </a:pPr>
-                      <a:r>
-                        <a:rPr lang="en-US" sz="1100" dirty="0">
-                          <a:solidFill>
-                            <a:srgbClr val="27607A"/>
-                          </a:solidFill>
-                          <a:latin typeface="Courier New" pitchFamily="34" charset="0"/>
-                          <a:ea typeface="Courier New" pitchFamily="34" charset="-122"/>
-                          <a:cs typeface="Courier New" pitchFamily="34" charset="-120"/>
-                        </a:rPr>
-                        <a:t>init (remove_action)</a:t>
-                      </a:r>
-                      <a:endParaRPr lang="en-US" sz="1100" dirty="0">
-                        <a:latin typeface="Courier New" charset="0"/>
-                        <a:ea typeface="Courier New" charset="0"/>
-                        <a:cs typeface="Courier New" charset="0"/>
-                      </a:endParaRPr>
-                    </a:p>
-                  </a:txBody>
-                  <a:tcPr marL="50800" marR="50800" marT="50800" marB="50800" anchor="ctr">
-                    <a:lnL w="12700" cap="flat" cmpd="sng" algn="ctr">
-                      <a:solidFill>
-                        <a:srgbClr val="DCE6EB"/>
-                      </a:solidFill>
-                      <a:prstDash val="solid"/>
-                      <a:round/>
-                      <a:headEnd type="none" w="med" len="med"/>
-                      <a:tailEnd type="none" w="med" len="med"/>
-                    </a:lnL>
-                    <a:lnR w="12700" cap="flat" cmpd="sng" algn="ctr">
-                      <a:solidFill>
-                        <a:srgbClr val="DCE6EB"/>
-                      </a:solidFill>
-                      <a:prstDash val="solid"/>
-                      <a:round/>
-                      <a:headEnd type="none" w="med" len="med"/>
-                      <a:tailEnd type="none" w="med" len="med"/>
-                    </a:lnR>
-                    <a:lnT w="12700" cap="flat" cmpd="sng" algn="ctr">
-                      <a:solidFill>
-                        <a:srgbClr val="DCE6EB"/>
-                      </a:solidFill>
-                      <a:prstDash val="solid"/>
-                      <a:round/>
-                      <a:headEnd type="none" w="med" len="med"/>
-                      <a:tailEnd type="none" w="med" len="med"/>
-                    </a:lnT>
-                    <a:lnB w="12700" cap="flat" cmpd="sng" algn="ctr">
-                      <a:solidFill>
-                        <a:srgbClr val="DCE6EB"/>
-                      </a:solidFill>
-                      <a:prstDash val="solid"/>
-                      <a:round/>
-                      <a:headEnd type="none" w="med" len="med"/>
-                      <a:tailEnd type="none" w="med" len="med"/>
-                    </a:lnB>
-                    <a:solidFill>
-                      <a:srgbClr val="EAF1F5"/>
-                    </a:solidFill>
-                  </a:tcPr>
-                </a:tc>
-                <a:tc>
-                  <a:txBody>
-                    <a:bodyPr/>
-                    <a:lstStyle/>
-                    <a:p>
-                      <a:pPr algn="l" indent="0" marL="0">
-                        <a:buNone/>
-                      </a:pPr>
-                      <a:r>
-                        <a:rPr lang="en-US" sz="1200" dirty="0">
-                          <a:solidFill>
-                            <a:srgbClr val="4A5A63"/>
-                          </a:solidFill>
-                          <a:latin typeface="Calibri" pitchFamily="34" charset="0"/>
-                          <a:ea typeface="Calibri" pitchFamily="34" charset="-122"/>
-                          <a:cs typeface="Calibri" pitchFamily="34" charset="-120"/>
-                        </a:rPr>
                         <a:t>Performance</a:t>
-                      </a:r>
-                      <a:endParaRPr lang="en-US" sz="1200" dirty="0">
-                        <a:latin typeface="Calibri" charset="0"/>
-                        <a:ea typeface="Calibri" charset="0"/>
-                        <a:cs typeface="Calibri" charset="0"/>
-                      </a:endParaRPr>
-                    </a:p>
-                  </a:txBody>
-                  <a:tcPr marL="50800" marR="50800" marT="50800" marB="50800" anchor="ctr">
-                    <a:lnL w="12700" cap="flat" cmpd="sng" algn="ctr">
-                      <a:solidFill>
-                        <a:srgbClr val="DCE6EB"/>
-                      </a:solidFill>
-                      <a:prstDash val="solid"/>
-                      <a:round/>
-                      <a:headEnd type="none" w="med" len="med"/>
-                      <a:tailEnd type="none" w="med" len="med"/>
-                    </a:lnL>
-                    <a:lnR w="12700" cap="flat" cmpd="sng" algn="ctr">
-                      <a:solidFill>
-                        <a:srgbClr val="DCE6EB"/>
-                      </a:solidFill>
-                      <a:prstDash val="solid"/>
-                      <a:round/>
-                      <a:headEnd type="none" w="med" len="med"/>
-                      <a:tailEnd type="none" w="med" len="med"/>
-                    </a:lnR>
-                    <a:lnT w="12700" cap="flat" cmpd="sng" algn="ctr">
-                      <a:solidFill>
-                        <a:srgbClr val="DCE6EB"/>
-                      </a:solidFill>
-                      <a:prstDash val="solid"/>
-                      <a:round/>
-                      <a:headEnd type="none" w="med" len="med"/>
-                      <a:tailEnd type="none" w="med" len="med"/>
-                    </a:lnT>
-                    <a:lnB w="12700" cap="flat" cmpd="sng" algn="ctr">
-                      <a:solidFill>
-                        <a:srgbClr val="DCE6EB"/>
-                      </a:solidFill>
-                      <a:prstDash val="solid"/>
-                      <a:round/>
-                      <a:headEnd type="none" w="med" len="med"/>
-                      <a:tailEnd type="none" w="med" len="med"/>
-                    </a:lnB>
-                    <a:solidFill>
-                      <a:srgbClr val="EAF1F5"/>
-                    </a:solidFill>
-                  </a:tcPr>
-                </a:tc>
-              </a:tr>
-              <a:tr h="402336">
-                <a:tc>
-                  <a:txBody>
-                    <a:bodyPr/>
-                    <a:lstStyle/>
-                    <a:p>
-                      <a:pPr algn="l" indent="0" marL="0">
-                        <a:buNone/>
-                      </a:pPr>
-                      <a:r>
-                        <a:rPr lang="en-US" sz="1250" dirty="0">
-                          <a:solidFill>
-                            <a:srgbClr val="0F2733"/>
-                          </a:solidFill>
-                          <a:latin typeface="Calibri" pitchFamily="34" charset="0"/>
-                          <a:ea typeface="Calibri" pitchFamily="34" charset="-122"/>
-                          <a:cs typeface="Calibri" pitchFamily="34" charset="-120"/>
-                        </a:rPr>
-                        <a:t>Own the login logo + link</a:t>
-                      </a:r>
-                      <a:endParaRPr lang="en-US" sz="1250" dirty="0">
-                        <a:latin typeface="Calibri" charset="0"/>
-                        <a:ea typeface="Calibri" charset="0"/>
-                        <a:cs typeface="Calibri" charset="0"/>
-                      </a:endParaRPr>
-                    </a:p>
-                  </a:txBody>
-                  <a:tcPr marL="50800" marR="50800" marT="50800" marB="50800" anchor="ctr">
-                    <a:lnL w="12700" cap="flat" cmpd="sng" algn="ctr">
-                      <a:solidFill>
-                        <a:srgbClr val="DCE6EB"/>
-                      </a:solidFill>
-                      <a:prstDash val="solid"/>
-                      <a:round/>
-                      <a:headEnd type="none" w="med" len="med"/>
-                      <a:tailEnd type="none" w="med" len="med"/>
-                    </a:lnL>
-                    <a:lnR w="12700" cap="flat" cmpd="sng" algn="ctr">
-                      <a:solidFill>
-                        <a:srgbClr val="DCE6EB"/>
-                      </a:solidFill>
-                      <a:prstDash val="solid"/>
-                      <a:round/>
-                      <a:headEnd type="none" w="med" len="med"/>
-                      <a:tailEnd type="none" w="med" len="med"/>
-                    </a:lnR>
-                    <a:lnT w="12700" cap="flat" cmpd="sng" algn="ctr">
-                      <a:solidFill>
-                        <a:srgbClr val="DCE6EB"/>
-                      </a:solidFill>
-                      <a:prstDash val="solid"/>
-                      <a:round/>
-                      <a:headEnd type="none" w="med" len="med"/>
-                      <a:tailEnd type="none" w="med" len="med"/>
-                    </a:lnT>
-                    <a:lnB w="12700" cap="flat" cmpd="sng" algn="ctr">
-                      <a:solidFill>
-                        <a:srgbClr val="DCE6EB"/>
-                      </a:solidFill>
-                      <a:prstDash val="solid"/>
-                      <a:round/>
-                      <a:headEnd type="none" w="med" len="med"/>
-                      <a:tailEnd type="none" w="med" len="med"/>
-                    </a:lnB>
-                    <a:solidFill>
-                      <a:srgbClr val="FFFFFF"/>
-                    </a:solidFill>
-                  </a:tcPr>
-                </a:tc>
-                <a:tc>
-                  <a:txBody>
-                    <a:bodyPr/>
-                    <a:lstStyle/>
-                    <a:p>
-                      <a:pPr algn="l" indent="0" marL="0">
-                        <a:buNone/>
-                      </a:pPr>
-                      <a:r>
-                        <a:rPr lang="en-US" sz="1100" dirty="0">
-                          <a:solidFill>
-                            <a:srgbClr val="27607A"/>
-                          </a:solidFill>
-                          <a:latin typeface="Courier New" pitchFamily="34" charset="0"/>
-                          <a:ea typeface="Courier New" pitchFamily="34" charset="-122"/>
-                          <a:cs typeface="Courier New" pitchFamily="34" charset="-120"/>
-                        </a:rPr>
-                        <a:t>login_head / login_headerurl</a:t>
-                      </a:r>
-                      <a:endParaRPr lang="en-US" sz="1100" dirty="0">
-                        <a:latin typeface="Courier New" charset="0"/>
-                        <a:ea typeface="Courier New" charset="0"/>
-                        <a:cs typeface="Courier New" charset="0"/>
-                      </a:endParaRPr>
-                    </a:p>
-                  </a:txBody>
-                  <a:tcPr marL="50800" marR="50800" marT="50800" marB="50800" anchor="ctr">
-                    <a:lnL w="12700" cap="flat" cmpd="sng" algn="ctr">
-                      <a:solidFill>
-                        <a:srgbClr val="DCE6EB"/>
-                      </a:solidFill>
-                      <a:prstDash val="solid"/>
-                      <a:round/>
-                      <a:headEnd type="none" w="med" len="med"/>
-                      <a:tailEnd type="none" w="med" len="med"/>
-                    </a:lnL>
-                    <a:lnR w="12700" cap="flat" cmpd="sng" algn="ctr">
-                      <a:solidFill>
-                        <a:srgbClr val="DCE6EB"/>
-                      </a:solidFill>
-                      <a:prstDash val="solid"/>
-                      <a:round/>
-                      <a:headEnd type="none" w="med" len="med"/>
-                      <a:tailEnd type="none" w="med" len="med"/>
-                    </a:lnR>
-                    <a:lnT w="12700" cap="flat" cmpd="sng" algn="ctr">
-                      <a:solidFill>
-                        <a:srgbClr val="DCE6EB"/>
-                      </a:solidFill>
-                      <a:prstDash val="solid"/>
-                      <a:round/>
-                      <a:headEnd type="none" w="med" len="med"/>
-                      <a:tailEnd type="none" w="med" len="med"/>
-                    </a:lnT>
-                    <a:lnB w="12700" cap="flat" cmpd="sng" algn="ctr">
-                      <a:solidFill>
-                        <a:srgbClr val="DCE6EB"/>
-                      </a:solidFill>
-                      <a:prstDash val="solid"/>
-                      <a:round/>
-                      <a:headEnd type="none" w="med" len="med"/>
-                      <a:tailEnd type="none" w="med" len="med"/>
-                    </a:lnB>
-                    <a:solidFill>
-                      <a:srgbClr val="FFFFFF"/>
-                    </a:solidFill>
-                  </a:tcPr>
-                </a:tc>
-                <a:tc>
-                  <a:txBody>
-                    <a:bodyPr/>
-                    <a:lstStyle/>
-                    <a:p>
-                      <a:pPr algn="l" indent="0" marL="0">
-                        <a:buNone/>
-                      </a:pPr>
-                      <a:r>
-                        <a:rPr lang="en-US" sz="1200" dirty="0">
-                          <a:solidFill>
-                            <a:srgbClr val="4A5A63"/>
-                          </a:solidFill>
-                          <a:latin typeface="Calibri" pitchFamily="34" charset="0"/>
-                          <a:ea typeface="Calibri" pitchFamily="34" charset="-122"/>
-                          <a:cs typeface="Calibri" pitchFamily="34" charset="-120"/>
-                        </a:rPr>
-                        <a:t>Branding</a:t>
                       </a:r>
                       <a:endParaRPr lang="en-US" sz="1200" dirty="0">
                         <a:latin typeface="Calibri" charset="0"/>
@@ -17117,7 +16725,7 @@
                 <a:ea typeface="Courier New" pitchFamily="34" charset="-122"/>
                 <a:cs typeface="Courier New" pitchFamily="34" charset="-120"/>
               </a:rPr>
-              <a:t>if ( wpyeg_defaults_enabled( 'disable_xmlrpc' ) ) {</a:t>
+              <a:t>if ( wpyeg_defaults_enabled( 'restrict_rest_user_discovery' ) ) {</a:t>
             </a:r>
             <a:endParaRPr lang="en-US" sz="1500" dirty="0"/>
           </a:p>
@@ -17137,7 +16745,7 @@
                 <a:ea typeface="Courier New" pitchFamily="34" charset="-122"/>
                 <a:cs typeface="Courier New" pitchFamily="34" charset="-120"/>
               </a:rPr>
-              <a:t>    add_filter( 'xmlrpc_enabled', '__return_false' );</a:t>
+              <a:t>    add_filter( 'rest_endpoints', $hide_users_endpoint );</a:t>
             </a:r>
             <a:endParaRPr lang="en-US" sz="1500" dirty="0"/>
           </a:p>
@@ -19979,7 +19587,7 @@
                 <a:ea typeface="Cambria" pitchFamily="34" charset="-122"/>
                 <a:cs typeface="Cambria" pitchFamily="34" charset="-120"/>
               </a:rPr>
-              <a:t>Disable XML-RPC</a:t>
+              <a:t>Lock XML-RPC down by category</a:t>
             </a:r>
             <a:endParaRPr lang="en-US" sz="3000" dirty="0"/>
           </a:p>
@@ -20021,7 +19629,7 @@
                 <a:ea typeface="Calibri" pitchFamily="34" charset="-122"/>
                 <a:cs typeface="Calibri" pitchFamily="34" charset="-120"/>
               </a:rPr>
-              <a:t>xmlrpc.php is a classic amplifier: one request can attempt hundreds of logins, and its pingback method has been used to bounce DDoS traffic. Unless you rely on the legacy mobile app or some Jetpack paths, switch it off.</a:t>
+              <a:t>Not all-or-nothing. Pingbacks (spam/DDoS) and the credential-authenticated blogging APIs (the brute-force target) come off via a method filter; system.multicall can't be filtered off, so a replacement server refuses it. Jetpack's jetpack.* methods are left untouched.</a:t>
             </a:r>
             <a:endParaRPr lang="en-US" sz="1600" dirty="0"/>
           </a:p>
@@ -20107,7 +19715,7 @@
                 <a:ea typeface="Courier New" pitchFamily="34" charset="-122"/>
                 <a:cs typeface="Courier New" pitchFamily="34" charset="-120"/>
               </a:rPr>
-              <a:t>wpyeg_disable_xmlrpc</a:t>
+              <a:t>wpyeg_xmlrpc_allow_pingbacks / _remote_publishing / _multicall</a:t>
             </a:r>
             <a:pPr indent="0" marL="0">
               <a:lnSpc>
@@ -20147,13 +19755,13 @@
             <a:r>
               <a:rPr lang="en-US" sz="1150" b="1" dirty="0">
                 <a:solidFill>
-                  <a:srgbClr val="27607A"/>
+                  <a:srgbClr val="C88F33"/>
                 </a:solidFill>
                 <a:latin typeface="Courier New" pitchFamily="34" charset="0"/>
                 <a:ea typeface="Courier New" pitchFamily="34" charset="-122"/>
                 <a:cs typeface="Courier New" pitchFamily="34" charset="-120"/>
               </a:rPr>
-              <a:t>yes</a:t>
+              <a:t>no (each)</a:t>
             </a:r>
             <a:endParaRPr lang="en-US" sz="1150" dirty="0"/>
           </a:p>
@@ -20223,13 +19831,13 @@
             <a:r>
               <a:rPr lang="en-US" sz="1150" dirty="0">
                 <a:solidFill>
-                  <a:srgbClr val="DCEAF1"/>
+                  <a:srgbClr val="8FBF9F"/>
                 </a:solidFill>
                 <a:latin typeface="Courier New" pitchFamily="34" charset="0"/>
                 <a:ea typeface="Courier New" pitchFamily="34" charset="-122"/>
                 <a:cs typeface="Courier New" pitchFamily="34" charset="-120"/>
               </a:rPr>
-              <a:t>add_filter( 'xmlrpc_enabled',</a:t>
+              <a:t>// each category off → remove its methods</a:t>
             </a:r>
             <a:endParaRPr lang="en-US" sz="1150" dirty="0"/>
           </a:p>
@@ -20243,13 +19851,13 @@
             <a:r>
               <a:rPr lang="en-US" sz="1150" dirty="0">
                 <a:solidFill>
-                  <a:srgbClr val="E7C070"/>
+                  <a:srgbClr val="DCEAF1"/>
                 </a:solidFill>
                 <a:latin typeface="Courier New" pitchFamily="34" charset="0"/>
                 <a:ea typeface="Courier New" pitchFamily="34" charset="-122"/>
                 <a:cs typeface="Courier New" pitchFamily="34" charset="-120"/>
               </a:rPr>
-              <a:t>            '__return_false' );</a:t>
+              <a:t>add_filter( 'xmlrpc_methods', function ( $m ) {</a:t>
             </a:r>
             <a:endParaRPr lang="en-US" sz="1150" dirty="0"/>
           </a:p>
@@ -20269,7 +19877,7 @@
                 <a:ea typeface="Courier New" pitchFamily="34" charset="-122"/>
                 <a:cs typeface="Courier New" pitchFamily="34" charset="-120"/>
               </a:rPr>
-              <a:t> </a:t>
+              <a:t>  if ( ! allow( 'pingbacks' ) )</a:t>
             </a:r>
             <a:endParaRPr lang="en-US" sz="1150" dirty="0"/>
           </a:p>
@@ -20283,13 +19891,13 @@
             <a:r>
               <a:rPr lang="en-US" sz="1150" dirty="0">
                 <a:solidFill>
-                  <a:srgbClr val="8FBF9F"/>
+                  <a:srgbClr val="E7C070"/>
                 </a:solidFill>
                 <a:latin typeface="Courier New" pitchFamily="34" charset="0"/>
                 <a:ea typeface="Courier New" pitchFamily="34" charset="-122"/>
                 <a:cs typeface="Courier New" pitchFamily="34" charset="-120"/>
               </a:rPr>
-              <a:t>// stop bots probing the discovery header</a:t>
+              <a:t>    unset( $m['pingback.ping'] );</a:t>
             </a:r>
             <a:endParaRPr lang="en-US" sz="1150" dirty="0"/>
           </a:p>
@@ -20309,7 +19917,7 @@
                 <a:ea typeface="Courier New" pitchFamily="34" charset="-122"/>
                 <a:cs typeface="Courier New" pitchFamily="34" charset="-120"/>
               </a:rPr>
-              <a:t>add_filter( 'wp_headers', function ( $h ) {</a:t>
+              <a:t>  if ( ! allow( 'remote_publishing' ) )</a:t>
             </a:r>
             <a:endParaRPr lang="en-US" sz="1150" dirty="0"/>
           </a:p>
@@ -20323,13 +19931,13 @@
             <a:r>
               <a:rPr lang="en-US" sz="1150" dirty="0">
                 <a:solidFill>
-                  <a:srgbClr val="E7C070"/>
+                  <a:srgbClr val="8FBF9F"/>
                 </a:solidFill>
                 <a:latin typeface="Courier New" pitchFamily="34" charset="0"/>
                 <a:ea typeface="Courier New" pitchFamily="34" charset="-122"/>
                 <a:cs typeface="Courier New" pitchFamily="34" charset="-120"/>
               </a:rPr>
-              <a:t>    unset( $h['X-Pingback'] );</a:t>
+              <a:t>    // drop wp.* metaWeblog.* mt.* blogger.*</a:t>
             </a:r>
             <a:endParaRPr lang="en-US" sz="1150" dirty="0"/>
           </a:p>
@@ -20349,7 +19957,7 @@
                 <a:ea typeface="Courier New" pitchFamily="34" charset="-122"/>
                 <a:cs typeface="Courier New" pitchFamily="34" charset="-120"/>
               </a:rPr>
-              <a:t>    return $h;</a:t>
+              <a:t>  return $m;</a:t>
             </a:r>
             <a:endParaRPr lang="en-US" sz="1150" dirty="0"/>
           </a:p>
@@ -20383,13 +19991,33 @@
             <a:r>
               <a:rPr lang="en-US" sz="1150" dirty="0">
                 <a:solidFill>
-                  <a:srgbClr val="DCEAF1"/>
+                  <a:srgbClr val="8FBF9F"/>
                 </a:solidFill>
                 <a:latin typeface="Courier New" pitchFamily="34" charset="0"/>
                 <a:ea typeface="Courier New" pitchFamily="34" charset="-122"/>
                 <a:cs typeface="Courier New" pitchFamily="34" charset="-120"/>
               </a:rPr>
-              <a:t>remove_action( 'wp_head', 'rsd_link' );</a:t>
+              <a:t>// multicall: swap in a server that refuses it</a:t>
+            </a:r>
+            <a:endParaRPr lang="en-US" sz="1150" dirty="0"/>
+          </a:p>
+          <a:p>
+            <a:pPr algn="l" indent="0" marL="0">
+              <a:lnSpc>
+                <a:spcPct val="108000"/>
+              </a:lnSpc>
+              <a:buNone/>
+            </a:pPr>
+            <a:r>
+              <a:rPr lang="en-US" sz="1150" dirty="0">
+                <a:solidFill>
+                  <a:srgbClr val="E7C070"/>
+                </a:solidFill>
+                <a:latin typeface="Courier New" pitchFamily="34" charset="0"/>
+                <a:ea typeface="Courier New" pitchFamily="34" charset="-122"/>
+                <a:cs typeface="Courier New" pitchFamily="34" charset="-120"/>
+              </a:rPr>
+              <a:t>add_filter( 'wp_xmlrpc_server_class', $refuse );</a:t>
             </a:r>
             <a:endParaRPr lang="en-US" sz="1150" dirty="0"/>
           </a:p>
@@ -20591,7 +20219,7 @@
                 <a:ea typeface="Cambria" pitchFamily="34" charset="-122"/>
                 <a:cs typeface="Cambria" pitchFamily="34" charset="-120"/>
               </a:rPr>
-              <a:t>Disable Application Passwords</a:t>
+              <a:t>Keep Application Passwords available</a:t>
             </a:r>
             <a:endParaRPr lang="en-US" sz="3000" dirty="0"/>
           </a:p>
@@ -20633,7 +20261,7 @@
                 <a:ea typeface="Calibri" pitchFamily="34" charset="-122"/>
                 <a:cs typeface="Calibri" pitchFamily="34" charset="-120"/>
               </a:rPr>
-              <a:t>Application Passwords mint long-lived credentials for the REST API. Great for headless setups — but if nobody's using them, they're just a secret waiting to leak. No feature, nothing to steal.</a:t>
+              <a:t>The one we don't lock down. Application Passwords are hashed, per-application, and individually revocable — the safer REST credential, and the only one core accepts for REST Basic Auth. So they stay on; prohibit them only if policy forbids non-interactive credentials.</a:t>
             </a:r>
             <a:endParaRPr lang="en-US" sz="1600" dirty="0"/>
           </a:p>
@@ -20759,13 +20387,13 @@
             <a:r>
               <a:rPr lang="en-US" sz="1150" b="1" dirty="0">
                 <a:solidFill>
-                  <a:srgbClr val="27607A"/>
+                  <a:srgbClr val="C88F33"/>
                 </a:solidFill>
                 <a:latin typeface="Courier New" pitchFamily="34" charset="0"/>
                 <a:ea typeface="Courier New" pitchFamily="34" charset="-122"/>
                 <a:cs typeface="Courier New" pitchFamily="34" charset="-120"/>
               </a:rPr>
-              <a:t>yes</a:t>
+              <a:t>no (available)</a:t>
             </a:r>
             <a:endParaRPr lang="en-US" sz="1150" dirty="0"/>
           </a:p>
@@ -20835,13 +20463,13 @@
             <a:r>
               <a:rPr lang="en-US" sz="1250" dirty="0">
                 <a:solidFill>
-                  <a:srgbClr val="DCEAF1"/>
+                  <a:srgbClr val="8FBF9F"/>
                 </a:solidFill>
                 <a:latin typeface="Courier New" pitchFamily="34" charset="0"/>
                 <a:ea typeface="Courier New" pitchFamily="34" charset="-122"/>
                 <a:cs typeface="Courier New" pitchFamily="34" charset="-120"/>
               </a:rPr>
-              <a:t>add_filter(</a:t>
+              <a:t>// available by default —</a:t>
             </a:r>
             <a:endParaRPr lang="en-US" sz="1250" dirty="0"/>
           </a:p>
@@ -20855,13 +20483,13 @@
             <a:r>
               <a:rPr lang="en-US" sz="1250" dirty="0">
                 <a:solidFill>
-                  <a:srgbClr val="E7C070"/>
+                  <a:srgbClr val="8FBF9F"/>
                 </a:solidFill>
                 <a:latin typeface="Courier New" pitchFamily="34" charset="0"/>
                 <a:ea typeface="Courier New" pitchFamily="34" charset="-122"/>
                 <a:cs typeface="Courier New" pitchFamily="34" charset="-120"/>
               </a:rPr>
-              <a:t>  'wp_is_application_passwords_available',</a:t>
+              <a:t>// prohibit only if opted in</a:t>
             </a:r>
             <a:endParaRPr lang="en-US" sz="1250" dirty="0"/>
           </a:p>
@@ -20875,13 +20503,13 @@
             <a:r>
               <a:rPr lang="en-US" sz="1250" dirty="0">
                 <a:solidFill>
-                  <a:srgbClr val="E7C070"/>
+                  <a:srgbClr val="DCEAF1"/>
                 </a:solidFill>
                 <a:latin typeface="Courier New" pitchFamily="34" charset="0"/>
                 <a:ea typeface="Courier New" pitchFamily="34" charset="-122"/>
                 <a:cs typeface="Courier New" pitchFamily="34" charset="-120"/>
               </a:rPr>
-              <a:t>  '__return_false'</a:t>
+              <a:t>if ( wpyeg_defaults_enabled(</a:t>
             </a:r>
             <a:endParaRPr lang="en-US" sz="1250" dirty="0"/>
           </a:p>
@@ -20901,7 +20529,7 @@
                 <a:ea typeface="Courier New" pitchFamily="34" charset="-122"/>
                 <a:cs typeface="Courier New" pitchFamily="34" charset="-120"/>
               </a:rPr>
-              <a:t>);</a:t>
+              <a:t>       'disable_application_passwords' ) ) {</a:t>
             </a:r>
             <a:endParaRPr lang="en-US" sz="1250" dirty="0"/>
           </a:p>
@@ -20921,7 +20549,7 @@
                 <a:ea typeface="Courier New" pitchFamily="34" charset="-122"/>
                 <a:cs typeface="Courier New" pitchFamily="34" charset="-120"/>
               </a:rPr>
-              <a:t> </a:t>
+              <a:t>  add_filter(</a:t>
             </a:r>
             <a:endParaRPr lang="en-US" sz="1250" dirty="0"/>
           </a:p>
@@ -20935,13 +20563,13 @@
             <a:r>
               <a:rPr lang="en-US" sz="1250" dirty="0">
                 <a:solidFill>
-                  <a:srgbClr val="8FBF9F"/>
+                  <a:srgbClr val="E7C070"/>
                 </a:solidFill>
                 <a:latin typeface="Courier New" pitchFamily="34" charset="0"/>
                 <a:ea typeface="Courier New" pitchFamily="34" charset="-122"/>
                 <a:cs typeface="Courier New" pitchFamily="34" charset="-120"/>
               </a:rPr>
-              <a:t>// Turn this OFF again if you run a</a:t>
+              <a:t>    'wp_is_application_passwords_available',</a:t>
             </a:r>
             <a:endParaRPr lang="en-US" sz="1250" dirty="0"/>
           </a:p>
@@ -20955,13 +20583,53 @@
             <a:r>
               <a:rPr lang="en-US" sz="1250" dirty="0">
                 <a:solidFill>
-                  <a:srgbClr val="8FBF9F"/>
+                  <a:srgbClr val="E7C070"/>
                 </a:solidFill>
                 <a:latin typeface="Courier New" pitchFamily="34" charset="0"/>
                 <a:ea typeface="Courier New" pitchFamily="34" charset="-122"/>
                 <a:cs typeface="Courier New" pitchFamily="34" charset="-120"/>
               </a:rPr>
-              <a:t>// headless / external integration.</a:t>
+              <a:t>    '__return_false'</a:t>
+            </a:r>
+            <a:endParaRPr lang="en-US" sz="1250" dirty="0"/>
+          </a:p>
+          <a:p>
+            <a:pPr algn="l" indent="0" marL="0">
+              <a:lnSpc>
+                <a:spcPct val="108000"/>
+              </a:lnSpc>
+              <a:buNone/>
+            </a:pPr>
+            <a:r>
+              <a:rPr lang="en-US" sz="1250" dirty="0">
+                <a:solidFill>
+                  <a:srgbClr val="DCEAF1"/>
+                </a:solidFill>
+                <a:latin typeface="Courier New" pitchFamily="34" charset="0"/>
+                <a:ea typeface="Courier New" pitchFamily="34" charset="-122"/>
+                <a:cs typeface="Courier New" pitchFamily="34" charset="-120"/>
+              </a:rPr>
+              <a:t>  );</a:t>
+            </a:r>
+            <a:endParaRPr lang="en-US" sz="1250" dirty="0"/>
+          </a:p>
+          <a:p>
+            <a:pPr algn="l" indent="0" marL="0">
+              <a:lnSpc>
+                <a:spcPct val="108000"/>
+              </a:lnSpc>
+              <a:buNone/>
+            </a:pPr>
+            <a:r>
+              <a:rPr lang="en-US" sz="1250" dirty="0">
+                <a:solidFill>
+                  <a:srgbClr val="DCEAF1"/>
+                </a:solidFill>
+                <a:latin typeface="Courier New" pitchFamily="34" charset="0"/>
+                <a:ea typeface="Courier New" pitchFamily="34" charset="-122"/>
+                <a:cs typeface="Courier New" pitchFamily="34" charset="-120"/>
+              </a:rPr>
+              <a:t>}</a:t>
             </a:r>
             <a:endParaRPr lang="en-US" sz="1250" dirty="0"/>
           </a:p>

--- a/workshop/Better-by-Default.pptx
+++ b/workshop/Better-by-Default.pptx
@@ -1321,7 +1321,7 @@
           <a:p>
             <a:r>
               <a:rPr lang="en-US" dirty="0"/>
-              <a:t>post_search_columns (WP 6.2+) narrows the columns instead of rewriting the SQL clause — it keeps core's term parsing and the logged-out password guard intact. Scoping filters correctly is the craft here.</a:t>
+              <a:t>post_search_columns (WP 6.2+) narrows the columns instead of rewriting the SQL clause — core's term parsing and the logged-out password guard stay intact. Scope the filter; don't bulldoze the query. That's the craft here.</a:t>
             </a:r>
             <a:endParaRPr lang="en-US" dirty="0"/>
           </a:p>
@@ -1497,7 +1497,7 @@
           <a:p>
             <a:r>
               <a:rPr lang="en-US" dirty="0"/>
-              <a:t>These aren't hypothetical. Every one is a default you can flip. The rest of the talk is: which doors, and the one line of code that closes each.</a:t>
+              <a:t>These aren't hypothetical. Every one is a default you can flip. The rest of tonight is just: which doors, and the one line of code that closes each.</a:t>
             </a:r>
             <a:endParaRPr lang="en-US" dirty="0"/>
           </a:p>
@@ -1673,7 +1673,7 @@
           <a:p>
             <a:r>
               <a:rPr lang="en-US" dirty="0"/>
-              <a:t>Default is keep_default — leave the login screen untouched. Swap in a background-image to drop in the client's own logo. Tiny detail clients always notice.</a:t>
+              <a:t>Default is keep_default — leave the login screen untouched. Swap in a background-image to drop in the client's own logo. Tiny detail — clients always notice it.</a:t>
             </a:r>
             <a:endParaRPr lang="en-US" dirty="0"/>
           </a:p>
@@ -2817,7 +2817,7 @@
           <a:p>
             <a:r>
               <a:rPr lang="en-US" dirty="0"/>
-              <a:t>system.multicall can't be removed by the xmlrpc_methods filter — IXR re-adds it — so we swap in a server that refuses it. Don't *block the endpoint* on a Jetpack site: that breaks its WordPress.com connection; the method toggles leave jetpack.* alone.</a:t>
+              <a:t>system.multicall is the stubborn line: the xmlrpc_methods filter can't remove it — IXR plugs it right back in — so we swap in a server that refuses the call. And don't *block the endpoint* on a Jetpack site: that breaks its WordPress.com connection. The method toggles leave jetpack.* alone.</a:t>
             </a:r>
             <a:endParaRPr lang="en-US" dirty="0"/>
           </a:p>
@@ -2905,7 +2905,7 @@
           <a:p>
             <a:r>
               <a:rPr lang="en-US" dirty="0"/>
-              <a:t>Turning them off just pushes people to worse habits like sharing the login password. They stay available by default — the safer, revocable REST credential.</a:t>
+              <a:t>Switching them off doesn't stop people connecting things — it just pushes them to worse habits, like sharing the login password. So they stay available by default: the safer, revocable REST credential.</a:t>
             </a:r>
             <a:endParaRPr lang="en-US" dirty="0"/>
           </a:p>
@@ -3676,7 +3676,7 @@
                 <a:ea typeface="Calibri" pitchFamily="34" charset="-122"/>
                 <a:cs typeface="Calibri" pitchFamily="34" charset="-120"/>
               </a:rPr>
-              <a:t>NIST 800-63B and OWASP now say length plus breach screening beats composition rules. Forcing upper/lower/number/symbol just herds users to Password1! — predictable, not strong. We require 15+ chars and screen against known breaches, server-side.</a:t>
+              <a:t>The rules changed: NIST 800-63B and OWASP now say length plus breach screening beats composition rules. Forcing upper/lower/number/symbol just herds everyone to Password1! — predictable, not strong. We require 15+ chars and screen against known breaches, server-side.</a:t>
             </a:r>
             <a:endParaRPr lang="en-US" sz="1600" dirty="0"/>
           </a:p>
@@ -7858,7 +7858,7 @@
                 <a:ea typeface="Calibri" pitchFamily="34" charset="-122"/>
                 <a:cs typeface="Calibri" pitchFamily="34" charset="-120"/>
               </a:rPr>
-              <a:t>On big sites the admin list-table search scans post content and crawls. Title-only search is far faster (off by default — it changes editor expectations). And the floating front-end admin bar can be hidden for non-admins.</a:t>
+              <a:t>On big sites the admin list-table search reads every word of every post — and crawls. Title-only search checks just the spines, far faster (off by default — it changes editor expectations). And the floating front-end admin bar can be hidden for non-admins.</a:t>
             </a:r>
             <a:endParaRPr lang="en-US" sz="1600" dirty="0"/>
           </a:p>
@@ -10233,7 +10233,7 @@
                 <a:ea typeface="Calibri" pitchFamily="34" charset="-122"/>
                 <a:cs typeface="Calibri" pitchFamily="34" charset="-120"/>
               </a:rPr>
-              <a:t>The default WordPress “W” on wp-login.php links out to wordpress.org — a subtle trust leak. But changing the login screen out of the box is intrusive, so the default is to leave it alone; removing, unlinking, or replacing the logo is an opt-in, and any change points the link home.</a:t>
+              <a:t>The login page is the site's front door — and the default “W” on wp-login.php links out to wordpress.org, a subtle trust leak. But repainting a client's front door uninvited is rude, so the default is to leave it alone; removing, unlinking, or replacing the logo is an opt-in, and any change points the link home.</a:t>
             </a:r>
             <a:endParaRPr lang="en-US" sz="1600" dirty="0"/>
           </a:p>
@@ -19629,7 +19629,7 @@
                 <a:ea typeface="Calibri" pitchFamily="34" charset="-122"/>
                 <a:cs typeface="Calibri" pitchFamily="34" charset="-120"/>
               </a:rPr>
-              <a:t>Not all-or-nothing. Pingbacks (spam/DDoS) and the credential-authenticated blogging APIs (the brute-force target) come off via a method filter; system.multicall can't be filtered off, so a replacement server refuses it. Jetpack's jetpack.* methods are left untouched.</a:t>
+              <a:t>XML-RPC is an old switchboard — every method is a line. We unplug the lines we don't want: pingbacks (spam/DDoS) and the credential-authenticated blogging APIs (the brute-force target), via a method filter. system.multicall can't be filtered off, so a replacement server refuses it. Jetpack's jetpack.* lines stay untouched.</a:t>
             </a:r>
             <a:endParaRPr lang="en-US" sz="1600" dirty="0"/>
           </a:p>
@@ -20261,7 +20261,7 @@
                 <a:ea typeface="Calibri" pitchFamily="34" charset="-122"/>
                 <a:cs typeface="Calibri" pitchFamily="34" charset="-120"/>
               </a:rPr>
-              <a:t>The one we don't lock down. Application Passwords are hashed, per-application, and individually revocable — the safer REST credential, and the only one core accepts for REST Basic Auth. So they stay on; prohibit them only if policy forbids non-interactive credentials.</a:t>
+              <a:t>The one we don't lock down. An Application Password is a spare key cut for one app — hashed, per-application, revocable on its own. It's the safer REST credential, and the only one core accepts for REST Basic Auth. So they stay on; prohibit them only if policy forbids non-interactive credentials.</a:t>
             </a:r>
             <a:endParaRPr lang="en-US" sz="1600" dirty="0"/>
           </a:p>

--- a/workshop/Better-by-Default.pptx
+++ b/workshop/Better-by-Default.pptx
@@ -529,7 +529,7 @@
           <a:p>
             <a:r>
               <a:rPr lang="en-US" dirty="0"/>
-              <a:t>Welcome to WPYEG. Tonight we build one small plugin that flips a menu of sensible defaults on any WordPress site. Whether you write PHP daily or just manage sites, you'll leave knowing WHY each default matters and HOW to toggle it.</a:t>
+              <a:t>Welcome to WPYEG. In this workshop we're building and reviewing a small plugin that defines and activates a dozen sensible defaults for WordPress sites in 2026. Whether you write PHP daily or just manage WordPress sites, you'll leave knowing why each default matters and how to enable (or disable) it.</a:t>
             </a:r>
             <a:endParaRPr lang="en-US" dirty="0"/>
           </a:p>
@@ -617,7 +617,7 @@
           <a:p>
             <a:r>
               <a:rPr lang="en-US" dirty="0"/>
-              <a:t>Never trust the client — the JS meter is UX, the server rule is the wall. Length + breach screening is the modern NIST/OWASP guidance; composition rules are out.</a:t>
+              <a:t>This is an existing default we *don't* lock down. An Application Password is like a spare key cut for one app: each app gets its own hashed key, so you can revoke one without touching the others or changing the account password. That makes it the safer REST credential and the only one core accepts for REST Basic Auth. So they are good — they just don't have a toggle in WordPress core settings. You might need to prohibit application passwords on a site that forbids non-interactive credentials, but switching them off doesn't stop people connecting things, it just pushes them to worse habits, like sharing an account.</a:t>
             </a:r>
             <a:endParaRPr lang="en-US" dirty="0"/>
           </a:p>
@@ -705,7 +705,7 @@
           <a:p>
             <a:r>
               <a:rPr lang="en-US" dirty="0"/>
-              <a:t>Version hiding is obscurity, not security — but it cuts automated noise. The three headers are safe defaults; a full CSP is a bigger conversation.</a:t>
+              <a:t>The rules changed recently, and most people didn't notice: NIST 800-63B and OWASP now say LENGTH PLUS BREACH SCREENING BEATS COMPOSITION RULES. Forcing upper/lower/number/symbol just herds everyone to Password1! — predictable, not strong. So we require 15+ characters and screen every new password against Have I Been Pwned — by k-anonymity, meaning only the first five characters of the SHA-1 hash ever leave the site; HIBP returns every hash sharing that prefix and the match happens locally, so the password itself is never transmitted. If HIBP is unreachable the check FAILS OPEN rather than locking someone out of a password change. All enforced server-side on save and reset: the JS meter is UX; the server rule is the wall.</a:t>
             </a:r>
             <a:endParaRPr lang="en-US" dirty="0"/>
           </a:p>
@@ -793,7 +793,11 @@
           <a:p>
             <a:r>
               <a:rPr lang="en-US" dirty="0"/>
-              <a:t>Big red switch. Default off on purpose. Great teaching moment: not every default should default to ON — some are opt-in because they trade functionality for safety.</a:t>
+              <a:t>Two quick wins. Version hiding is obscurity, not security — but it cuts automated scanner noise. The three headers are safe defaults most sites can adopt without breaking anything:
+- X-Content-Type-Options: nosniff — the browser must trust the declared Content-Type instead of guessing; kills "a .txt the browser decides to run as JavaScript" tricks.
+- X-Frame-Options: SAMEORIGIN — only your own site may load the page in an iframe; blocks clickjacking, where your login or admin is hidden under an attacker's page.
+- Referrer-Policy: strict-origin-when-cross-origin — sends the full URL within your own site, only the bare domain to other sites, and nothing on an HTTPS→HTTP downgrade; keeps tokens and private paths from leaking in the Referer.
+A full Content-Security-Policy is a bigger conversation for another time!</a:t>
             </a:r>
             <a:endParaRPr lang="en-US" dirty="0"/>
           </a:p>
@@ -881,7 +885,7 @@
           <a:p>
             <a:r>
               <a:rPr lang="en-US" dirty="0"/>
-              <a:t>Content section. These reduce spam surface and clean up thin, duplicate URLs that hurt SEO.</a:t>
+              <a:t>These reduce channels for spam and clean up the thin, duplicate URLs that bots and search engines get lost in.</a:t>
             </a:r>
             <a:endParaRPr lang="en-US" dirty="0"/>
           </a:p>
@@ -969,7 +973,7 @@
           <a:p>
             <a:r>
               <a:rPr lang="en-US" dirty="0"/>
-              <a:t>If the client wants comments, leave this off — but still consider closing pingbacks/trackbacks, which are almost pure spam.</a:t>
+              <a:t>For many sites, comments are a spam magnet with little upside. Here we close them everywhere, hide existing threads, and drop the admin menu. If you want comments, leave this tuned off — but consider closing pingbacks and trackbacks, which are almost pure spam.</a:t>
             </a:r>
             <a:endParaRPr lang="en-US" dirty="0"/>
           </a:p>
@@ -1057,7 +1061,7 @@
           <a:p>
             <a:r>
               <a:rPr lang="en-US" dirty="0"/>
-              <a:t>template_redirect fires before a template loads — the perfect place to bounce a request. Same hook, two conditions.</a:t>
+              <a:t>Like the REST user routes, author archives expose the authors' usernames in the URL, and attachment pages are near-empty media wrappers. Both dilute SEO and are targets for trouble. template_redirect fires before a template loads — the perfect place to bounce the unwanted requests. Same hook, two conditions.</a:t>
             </a:r>
             <a:endParaRPr lang="en-US" dirty="0"/>
           </a:p>
@@ -1145,7 +1149,7 @@
           <a:p>
             <a:r>
               <a:rPr lang="en-US" dirty="0"/>
-              <a:t>Small win, but it's on literally every page. Good example of a 'why is this even on?' default.</a:t>
+              <a:t>WordPress core injects an emoji-detection script and inline CSS on every page load, plus a DNS-prefetch hint. Modern browsers render emoji natively, so this is pure dead weight. Small win, but it's on literally every page — a good example of a "why is this even on?" default that's not included in core settings.</a:t>
             </a:r>
             <a:endParaRPr lang="en-US" dirty="0"/>
           </a:p>
@@ -1233,7 +1237,7 @@
           <a:p>
             <a:r>
               <a:rPr lang="en-US" dirty="0"/>
-              <a:t>Now the quality-of-life defaults. These are more about daily experience and session safety than raw hardening.</a:t>
+              <a:t>Now the quality-of-life defaults. These are more about your daily user experience and session safety than raw hardening.</a:t>
             </a:r>
             <a:endParaRPr lang="en-US" dirty="0"/>
           </a:p>
@@ -1321,7 +1325,7 @@
           <a:p>
             <a:r>
               <a:rPr lang="en-US" dirty="0"/>
-              <a:t>post_search_columns (WP 6.2+) narrows the columns instead of rewriting the SQL clause — core's term parsing and the logged-out password guard stay intact. Scope the filter; don't bulldoze the query. That's the craft here.</a:t>
+              <a:t>Search the admin post list on a big site and WordPress reads every word of every post — like finding a book by reading the whole library. Title-only search checks just the spines, and it's far faster. The craft is in the *how*: post_search_columns (WP 6.2+) narrows the columns instead of rewriting the whole SQL clause, so core's term parsing and the logged-out password guard stay intact. Scope the filter; don't bulldoze the query.</a:t>
             </a:r>
             <a:endParaRPr lang="en-US" dirty="0"/>
           </a:p>
@@ -1409,7 +1413,7 @@
           <a:p>
             <a:r>
               <a:rPr lang="en-US" dirty="0"/>
-              <a:t>WordPress ships handy time constants — DAY_IN_SECONDS, HOUR_IN_SECONDS — so you never hand-count seconds. Good habit to point out.</a:t>
+              <a:t>If you click the "Remember Me" checkbox when you log in, you stay logged in for 14 days. Cap that extended session length, optionally shorten the regular session, or hide the "Remember Me" checkbox entirely. (Good idea for shared machines.) One filter covers all three. WordPress ships handy time constants like DAY_IN_SECONDS, so you never need to do the math.</a:t>
             </a:r>
             <a:endParaRPr lang="en-US" dirty="0"/>
           </a:p>
@@ -1497,7 +1501,7 @@
           <a:p>
             <a:r>
               <a:rPr lang="en-US" dirty="0"/>
-              <a:t>These aren't hypothetical. Every one is a default you can flip. The rest of tonight is just: which doors, and the one line of code that closes each.</a:t>
+              <a:t>None of these are bugs. They are defaults chosen for maximum compatibility on a 20+ year-old web application. You probably don't need them and can tighten up your own WordPress sites. This is also a good way to learn some important fundamentals about how WordPress works and how to keep it secure, fast, and pretty.</a:t>
             </a:r>
             <a:endParaRPr lang="en-US" dirty="0"/>
           </a:p>
@@ -1585,7 +1589,7 @@
           <a:p>
             <a:r>
               <a:rPr lang="en-US" dirty="0"/>
-              <a:t>Last pair of sections: a branding touch on the login screen, then two performance levers.</a:t>
+              <a:t>The last pair brands the login screen. Then we end with two performance levers to shave some weight off every page.</a:t>
             </a:r>
             <a:endParaRPr lang="en-US" dirty="0"/>
           </a:p>
@@ -1673,7 +1677,7 @@
           <a:p>
             <a:r>
               <a:rPr lang="en-US" dirty="0"/>
-              <a:t>Default is keep_default — leave the login screen untouched. Swap in a background-image to drop in the client's own logo. Tiny detail — clients always notice it.</a:t>
+              <a:t>The login page is a WordPress site's staff entrance — the one door you and your clients actually log in through — and by default the welcome mat links to someone else's house! That little WordPress "W" on wp-login.php points out to wordpress.org. Changing a site's login screen out of the box is intrusive, though, so the default is to LEAVE IT ALONE. Removing, unlinking, or replacing the logo is an opt-in — and whichever you choose, the link always points home. Swap in a background-image to drop in the site's own logo.</a:t>
             </a:r>
             <a:endParaRPr lang="en-US" dirty="0"/>
           </a:p>
@@ -1761,7 +1765,7 @@
           <a:p>
             <a:r>
               <a:rPr lang="en-US" dirty="0"/>
-              <a:t>Off by default because deferring scripts can break plugins that expect synchronous jQuery. Test before shipping — hence opt-in.</a:t>
+              <a:t>The Heartbeat API polls admin-ajax every 15–60s. Throttle it to ease up on weak shared hosting. Deferring non-critical scripts keeps them from being render-blocking, but this can also break plugins expecting synchronous jQuery.</a:t>
             </a:r>
             <a:endParaRPr lang="en-US" dirty="0"/>
           </a:p>
@@ -1849,7 +1853,7 @@
           <a:p>
             <a:r>
               <a:rPr lang="en-US" dirty="0"/>
-              <a:t>These constants can't be options because they must load before plugins do. Put them in your standard wp-config template.</a:t>
+              <a:t>Some defaults live in wp-config.php, above the plugin layer, because they must load before plugins do. They can't be options — so document them as manual steps in your onboarding checklist and put them in your standard wp-config template.</a:t>
             </a:r>
             <a:endParaRPr lang="en-US" dirty="0"/>
           </a:p>
@@ -1937,7 +1941,7 @@
           <a:p>
             <a:r>
               <a:rPr lang="en-US" dirty="0"/>
-              <a:t>The design lesson: a data-driven plugin. Adding a new default = one array entry + one if-block in bootstrap. No new settings-page code. That's the pattern to steal.</a:t>
+              <a:t>The design lesson is a data-driven plugin. Adding a new default equals one array entry plus one if-block in bootstrap — no new settings-page code. That's the pattern to steal for your own projects.</a:t>
             </a:r>
             <a:endParaRPr lang="en-US" dirty="0"/>
           </a:p>
@@ -2113,7 +2117,7 @@
           <a:p>
             <a:r>
               <a:rPr lang="en-US" dirty="0"/>
-              <a:t>Great confidence-builder. It proves the data-driven pattern: they touch two spots and a real feature toggles. If time is short, walk it verbally.</a:t>
+              <a:t>A great confidence-builder: it proves the data-driven pattern. Touch two spots and a real feature toggles. If time is short, walk it through verbally instead of live.</a:t>
             </a:r>
             <a:endParaRPr lang="en-US" dirty="0"/>
           </a:p>
@@ -2201,7 +2205,7 @@
           <a:p>
             <a:r>
               <a:rPr lang="en-US" dirty="0"/>
-              <a:t>Screenshot slide. Everything ON-by-default in one view, mapped to the core hook so they can find it in the code.</a:t>
+              <a:t>This is your screenshot slide — everything on-by-default in one view, mapped to the core hook. Two deliberate *non*-defaults worth calling out: Application Passwords stay AVAILABLE (the safer REST credential), and the login logo is LEFT ALONE unless you opt in — both are choices, not oversights.</a:t>
             </a:r>
             <a:endParaRPr lang="en-US" dirty="0"/>
           </a:p>
@@ -2289,7 +2293,7 @@
           <a:p>
             <a:r>
               <a:rPr lang="en-US" dirty="0"/>
-              <a:t>Wrap: hand out the zip and the reference doc. Invite them to add their own favorite default to the schema and share it back with the group.</a:t>
+              <a:t>Hand out the zip and the reference doc. Invite everyone to add their own favorite default to the schema and share it back with the group.</a:t>
             </a:r>
             <a:endParaRPr lang="en-US" dirty="0"/>
           </a:p>
@@ -2377,7 +2381,7 @@
           <a:p>
             <a:r>
               <a:rPr lang="en-US" dirty="0"/>
-              <a:t>If you remember nothing else: a default is an add_filter behind an if( option ). Once you see that shape, the entire plugin is just twenty variations of it.</a:t>
+              <a:t>In our demo plugin, a default is an add_filter behind an if ( option ). We have twenty of them.</a:t>
             </a:r>
             <a:endParaRPr lang="en-US" dirty="0"/>
           </a:p>
@@ -2465,7 +2469,7 @@
           <a:p>
             <a:r>
               <a:rPr lang="en-US" dirty="0"/>
-              <a:t>Analogy for non-devs: an action is a doorbell (do something at a moment); a filter is a mail slot (change a value in transit). __return_false is a tiny helper that just hands back false — perfect for switching a feature off.</a:t>
+              <a:t>WordPress is built to be interrupted at labeled moments (hooks) so you never edit core code. __return_false is a tiny built-in helper that just hands back false — perfect for switching a feature off.</a:t>
             </a:r>
             <a:endParaRPr lang="en-US" dirty="0"/>
           </a:p>
@@ -2553,7 +2557,7 @@
           <a:p>
             <a:r>
               <a:rPr lang="en-US" dirty="0"/>
-              <a:t>Roadmap. We'll spend most time on security and content, then move fast through UX, login, branding, performance, and end at the plugin that bundles them.</a:t>
+              <a:t>We'll spend most of our time on security and content, then move quickly through UX, login, branding, and performance, and end up with a plugin that covers them all.</a:t>
             </a:r>
             <a:endParaRPr lang="en-US" dirty="0"/>
           </a:p>
@@ -2641,7 +2645,7 @@
           <a:p>
             <a:r>
               <a:rPr lang="en-US" dirty="0"/>
-              <a:t>Security first. The theme: close what you don't use. You can't exploit an endpoint that isn't there.</a:t>
+              <a:t>Every item in this section removes something an attacker can poke — usually in one line. The theme is simple: disable what you don't use. You can't exploit an endpoint that isn't there.</a:t>
             </a:r>
             <a:endParaRPr lang="en-US" dirty="0"/>
           </a:p>
@@ -2729,7 +2733,7 @@
           <a:p>
             <a:r>
               <a:rPr lang="en-US" dirty="0"/>
-              <a:t>Author enumeration is step one of most brute-force scripts. This closes it for logged-out requests only, so your editor and integrations keep working.</a:t>
+              <a:t>The /wp/v2/users endpoint hands out every author's login name to anyone — half of a brute-force guess, for free. Author enumeration is step one of many attack scripts. By closing it for logged-out requests only, the editor and legit integrations will keep working. It's arguably an example of security-by-obscurity, but it also prevents a lot of junk traffic and bots that are up to no good.</a:t>
             </a:r>
             <a:endParaRPr lang="en-US" dirty="0"/>
           </a:p>
@@ -2817,7 +2821,7 @@
           <a:p>
             <a:r>
               <a:rPr lang="en-US" dirty="0"/>
-              <a:t>system.multicall is the stubborn line: the xmlrpc_methods filter can't remove it — IXR plugs it right back in — so we swap in a server that refuses the call. And don't *block the endpoint* on a Jetpack site: that breaks its WordPress.com connection. The method toggles leave jetpack.* alone.</a:t>
+              <a:t>The sledgehammer version of the slide before. Requiring auth for ALL REST calls stops anonymous scraping cold. It does *not* break the block editor, though — you're logged in there, and the editor authenticates with your cookie plus a REST nonce, so it sails through this filter. What it breaks is ANONYMOUS REST: front-end blocks that fetch data for logged-out visitors, embeds, search, and outside integrations. That's why it ships off. Not every default should default to on; some are opt-in because they trade functionality for safety. Usually it's a better tradeoff to restrict a few REST routes — like the users endpoint we just closed — than to lock ALL of them.</a:t>
             </a:r>
             <a:endParaRPr lang="en-US" dirty="0"/>
           </a:p>
@@ -2905,7 +2909,13 @@
           <a:p>
             <a:r>
               <a:rPr lang="en-US" dirty="0"/>
-              <a:t>Switching them off doesn't stop people connecting things — it just pushes them to worse habits, like sharing the login password. So they stay available by default: the safer, revocable REST credential.</a:t>
+              <a:t>XML-RPC isn't one door — it's an old switchboard, and every method is a phone line. Rather than rip the box off the wall, we unplug lines by category. Four switches, all off by default:
+1. Pingbacks — drop pingback.ping, a spam and reflection-DDoS relay.
+2. Remote publishing — drop the credential-authenticated blogging methods (wp.*, metaWeblog.*, mt.*, blogger.*), the classic brute-force target. This also flips xmlrpc_enabled off and removes the RSD discovery link.
+3. system.multicall — the amplifier that batches thousands of login guesses into one request. You can't just unset it: IXR_Server::setCallbacks() re-adds it after the filter runs, so we swap in a replacement server that refuses it.
+4. Block the endpoint — the blunt hammer: xmlrpc.php returns 403 for everything.
+The first three are surgical — they leave third-party methods like Jetpack's jetpack.* connected, so the endpoint stays usable. The fourth nukes the lot, which breaks Jetpack; reach for it only if nothing on the site speaks XML-RPC.
+[Aside — what's "IXR"? The Incutio XML-RPC library. Simon Willison released it in September 2002, one of his first open-source projects, while blogging from the University of Bath; both WordPress *and* Drupal adopted it, and it then sat largely untouched for 15+ years — long enough to pick up a CVE. Willison went on to co-create Django (2003–05 at the Lawrence Journal-World), build Lanyrd (sold to Eventbrite in 2013) and Datasette (2017), and is now one of the most-read writers on LLMs.]</a:t>
             </a:r>
             <a:endParaRPr lang="en-US" dirty="0"/>
           </a:p>
@@ -3471,7 +3481,7 @@
                 <a:ea typeface="Calibri" pitchFamily="34" charset="-122"/>
                 <a:cs typeface="Calibri" pitchFamily="34" charset="-120"/>
               </a:rPr>
-              <a:t>Sane defaults for every new WordPress site — one toggle at a time.</a:t>
+              <a:t>Secure defaults for every WordPress site.</a:t>
             </a:r>
             <a:endParaRPr lang="en-US" sz="2100" dirty="0"/>
           </a:p>
@@ -3510,7 +3520,7 @@
                 <a:ea typeface="Courier New" pitchFamily="34" charset="-122"/>
                 <a:cs typeface="Courier New" pitchFamily="34" charset="-120"/>
               </a:rPr>
-              <a:t>A hands-on workshop  </a:t>
+              <a:t>a hands-on workshop  </a:t>
             </a:r>
             <a:pPr indent="0" marL="0">
               <a:buNone/>
@@ -3524,7 +3534,7 @@
                 <a:ea typeface="Courier New" pitchFamily="34" charset="-122"/>
                 <a:cs typeface="Courier New" pitchFamily="34" charset="-120"/>
               </a:rPr>
-              <a:t>·  the better-by-default plugin</a:t>
+              <a:t>·  build the “sane-defaults” plugin</a:t>
             </a:r>
             <a:endParaRPr lang="en-US" sz="1400" dirty="0"/>
           </a:p>
@@ -3634,7 +3644,7 @@
                 <a:ea typeface="Cambria" pitchFamily="34" charset="-122"/>
                 <a:cs typeface="Cambria" pitchFamily="34" charset="-120"/>
               </a:rPr>
-              <a:t>Require strong passwords</a:t>
+              <a:t>Keep Application Passwords available</a:t>
             </a:r>
             <a:endParaRPr lang="en-US" sz="3000" dirty="0"/>
           </a:p>
@@ -3676,7 +3686,7 @@
                 <a:ea typeface="Calibri" pitchFamily="34" charset="-122"/>
                 <a:cs typeface="Calibri" pitchFamily="34" charset="-120"/>
               </a:rPr>
-              <a:t>The rules changed: NIST 800-63B and OWASP now say length plus breach screening beats composition rules. Forcing upper/lower/number/symbol just herds everyone to Password1! — predictable, not strong. We require 15+ chars and screen against known breaches, server-side.</a:t>
+              <a:t>This is an existing default we don't lock down. An Application Password is like a spare key cut for one app: hashed, per-application, revocable on its own — the safer REST credential, and the only one core accepts for REST Basic Auth.</a:t>
             </a:r>
             <a:endParaRPr lang="en-US" sz="1600" dirty="0"/>
           </a:p>
@@ -3762,7 +3772,7 @@
                 <a:ea typeface="Courier New" pitchFamily="34" charset="-122"/>
                 <a:cs typeface="Courier New" pitchFamily="34" charset="-120"/>
               </a:rPr>
-              <a:t>wpyeg_require_strong_passwords</a:t>
+              <a:t>wpyeg_disable_application_passwords</a:t>
             </a:r>
             <a:pPr indent="0" marL="0">
               <a:lnSpc>
@@ -3802,13 +3812,13 @@
             <a:r>
               <a:rPr lang="en-US" sz="1150" b="1" dirty="0">
                 <a:solidFill>
-                  <a:srgbClr val="27607A"/>
+                  <a:srgbClr val="C88F33"/>
                 </a:solidFill>
                 <a:latin typeface="Courier New" pitchFamily="34" charset="0"/>
                 <a:ea typeface="Courier New" pitchFamily="34" charset="-122"/>
                 <a:cs typeface="Courier New" pitchFamily="34" charset="-120"/>
               </a:rPr>
-              <a:t>yes</a:t>
+              <a:t>no (available)</a:t>
             </a:r>
             <a:endParaRPr lang="en-US" sz="1150" dirty="0"/>
           </a:p>
@@ -3876,7 +3886,7 @@
               <a:buNone/>
             </a:pPr>
             <a:r>
-              <a:rPr lang="en-US" sz="1150" dirty="0">
+              <a:rPr lang="en-US" sz="1250" dirty="0">
                 <a:solidFill>
                   <a:srgbClr val="8FBF9F"/>
                 </a:solidFill>
@@ -3884,9 +3894,9 @@
                 <a:ea typeface="Courier New" pitchFamily="34" charset="-122"/>
                 <a:cs typeface="Courier New" pitchFamily="34" charset="-120"/>
               </a:rPr>
-              <a:t>// hooked on user_profile_update_errors</a:t>
-            </a:r>
-            <a:endParaRPr lang="en-US" sz="1150" dirty="0"/>
+              <a:t>// available by default —</a:t>
+            </a:r>
+            <a:endParaRPr lang="en-US" sz="1250" dirty="0"/>
           </a:p>
           <a:p>
             <a:pPr algn="l" indent="0" marL="0">
@@ -3896,17 +3906,17 @@
               <a:buNone/>
             </a:pPr>
             <a:r>
-              <a:rPr lang="en-US" sz="1150" dirty="0">
-                <a:solidFill>
-                  <a:srgbClr val="E7C070"/>
+              <a:rPr lang="en-US" sz="1250" dirty="0">
+                <a:solidFill>
+                  <a:srgbClr val="8FBF9F"/>
                 </a:solidFill>
                 <a:latin typeface="Courier New" pitchFamily="34" charset="0"/>
                 <a:ea typeface="Courier New" pitchFamily="34" charset="-122"/>
                 <a:cs typeface="Courier New" pitchFamily="34" charset="-120"/>
               </a:rPr>
-              <a:t>if ( strlen( $pw ) &lt; 15 ) {</a:t>
-            </a:r>
-            <a:endParaRPr lang="en-US" sz="1150" dirty="0"/>
+              <a:t>// prohibit only if opted in</a:t>
+            </a:r>
+            <a:endParaRPr lang="en-US" sz="1250" dirty="0"/>
           </a:p>
           <a:p>
             <a:pPr algn="l" indent="0" marL="0">
@@ -3916,7 +3926,7 @@
               <a:buNone/>
             </a:pPr>
             <a:r>
-              <a:rPr lang="en-US" sz="1150" dirty="0">
+              <a:rPr lang="en-US" sz="1250" dirty="0">
                 <a:solidFill>
                   <a:srgbClr val="DCEAF1"/>
                 </a:solidFill>
@@ -3924,9 +3934,9 @@
                 <a:ea typeface="Courier New" pitchFamily="34" charset="-122"/>
                 <a:cs typeface="Courier New" pitchFamily="34" charset="-120"/>
               </a:rPr>
-              <a:t>    $errors-&gt;add( 'short', 'Use 15+ chars.' );</a:t>
-            </a:r>
-            <a:endParaRPr lang="en-US" sz="1150" dirty="0"/>
+              <a:t>if ( wpyeg_defaults_enabled(</a:t>
+            </a:r>
+            <a:endParaRPr lang="en-US" sz="1250" dirty="0"/>
           </a:p>
           <a:p>
             <a:pPr algn="l" indent="0" marL="0">
@@ -3936,7 +3946,7 @@
               <a:buNone/>
             </a:pPr>
             <a:r>
-              <a:rPr lang="en-US" sz="1150" dirty="0">
+              <a:rPr lang="en-US" sz="1250" dirty="0">
                 <a:solidFill>
                   <a:srgbClr val="DCEAF1"/>
                 </a:solidFill>
@@ -3944,9 +3954,9 @@
                 <a:ea typeface="Courier New" pitchFamily="34" charset="-122"/>
                 <a:cs typeface="Courier New" pitchFamily="34" charset="-120"/>
               </a:rPr>
-              <a:t>}</a:t>
-            </a:r>
-            <a:endParaRPr lang="en-US" sz="1150" dirty="0"/>
+              <a:t>       'disable_application_passwords' ) ) {</a:t>
+            </a:r>
+            <a:endParaRPr lang="en-US" sz="1250" dirty="0"/>
           </a:p>
           <a:p>
             <a:pPr algn="l" indent="0" marL="0">
@@ -3956,7 +3966,7 @@
               <a:buNone/>
             </a:pPr>
             <a:r>
-              <a:rPr lang="en-US" sz="1150" dirty="0">
+              <a:rPr lang="en-US" sz="1250" dirty="0">
                 <a:solidFill>
                   <a:srgbClr val="DCEAF1"/>
                 </a:solidFill>
@@ -3964,9 +3974,9 @@
                 <a:ea typeface="Courier New" pitchFamily="34" charset="-122"/>
                 <a:cs typeface="Courier New" pitchFamily="34" charset="-120"/>
               </a:rPr>
-              <a:t> </a:t>
-            </a:r>
-            <a:endParaRPr lang="en-US" sz="1150" dirty="0"/>
+              <a:t>  add_filter(</a:t>
+            </a:r>
+            <a:endParaRPr lang="en-US" sz="1250" dirty="0"/>
           </a:p>
           <a:p>
             <a:pPr algn="l" indent="0" marL="0">
@@ -3976,17 +3986,17 @@
               <a:buNone/>
             </a:pPr>
             <a:r>
-              <a:rPr lang="en-US" sz="1150" dirty="0">
-                <a:solidFill>
-                  <a:srgbClr val="8FBF9F"/>
+              <a:rPr lang="en-US" sz="1250" dirty="0">
+                <a:solidFill>
+                  <a:srgbClr val="E7C070"/>
                 </a:solidFill>
                 <a:latin typeface="Courier New" pitchFamily="34" charset="0"/>
                 <a:ea typeface="Courier New" pitchFamily="34" charset="-122"/>
                 <a:cs typeface="Courier New" pitchFamily="34" charset="-120"/>
               </a:rPr>
-              <a:t>// screen against breaches (HIBP),</a:t>
-            </a:r>
-            <a:endParaRPr lang="en-US" sz="1150" dirty="0"/>
+              <a:t>    'wp_is_application_passwords_available',</a:t>
+            </a:r>
+            <a:endParaRPr lang="en-US" sz="1250" dirty="0"/>
           </a:p>
           <a:p>
             <a:pPr algn="l" indent="0" marL="0">
@@ -3996,17 +4006,17 @@
               <a:buNone/>
             </a:pPr>
             <a:r>
-              <a:rPr lang="en-US" sz="1150" dirty="0">
-                <a:solidFill>
-                  <a:srgbClr val="8FBF9F"/>
+              <a:rPr lang="en-US" sz="1250" dirty="0">
+                <a:solidFill>
+                  <a:srgbClr val="E7C070"/>
                 </a:solidFill>
                 <a:latin typeface="Courier New" pitchFamily="34" charset="0"/>
                 <a:ea typeface="Courier New" pitchFamily="34" charset="-122"/>
                 <a:cs typeface="Courier New" pitchFamily="34" charset="-120"/>
               </a:rPr>
-              <a:t>// not composition rules</a:t>
-            </a:r>
-            <a:endParaRPr lang="en-US" sz="1150" dirty="0"/>
+              <a:t>    '__return_false'</a:t>
+            </a:r>
+            <a:endParaRPr lang="en-US" sz="1250" dirty="0"/>
           </a:p>
           <a:p>
             <a:pPr algn="l" indent="0" marL="0">
@@ -4016,17 +4026,17 @@
               <a:buNone/>
             </a:pPr>
             <a:r>
-              <a:rPr lang="en-US" sz="1150" dirty="0">
-                <a:solidFill>
-                  <a:srgbClr val="E7C070"/>
+              <a:rPr lang="en-US" sz="1250" dirty="0">
+                <a:solidFill>
+                  <a:srgbClr val="DCEAF1"/>
                 </a:solidFill>
                 <a:latin typeface="Courier New" pitchFamily="34" charset="0"/>
                 <a:ea typeface="Courier New" pitchFamily="34" charset="-122"/>
                 <a:cs typeface="Courier New" pitchFamily="34" charset="-120"/>
               </a:rPr>
-              <a:t>if ( wpyeg_password_is_pwned( $pw ) ) {</a:t>
-            </a:r>
-            <a:endParaRPr lang="en-US" sz="1150" dirty="0"/>
+              <a:t>  );</a:t>
+            </a:r>
+            <a:endParaRPr lang="en-US" sz="1250" dirty="0"/>
           </a:p>
           <a:p>
             <a:pPr algn="l" indent="0" marL="0">
@@ -4036,7 +4046,7 @@
               <a:buNone/>
             </a:pPr>
             <a:r>
-              <a:rPr lang="en-US" sz="1150" dirty="0">
+              <a:rPr lang="en-US" sz="1250" dirty="0">
                 <a:solidFill>
                   <a:srgbClr val="DCEAF1"/>
                 </a:solidFill>
@@ -4044,29 +4054,9 @@
                 <a:ea typeface="Courier New" pitchFamily="34" charset="-122"/>
                 <a:cs typeface="Courier New" pitchFamily="34" charset="-120"/>
               </a:rPr>
-              <a:t>    $errors-&gt;add( 'pwned', 'Seen in a breach.' );</a:t>
-            </a:r>
-            <a:endParaRPr lang="en-US" sz="1150" dirty="0"/>
-          </a:p>
-          <a:p>
-            <a:pPr algn="l" indent="0" marL="0">
-              <a:lnSpc>
-                <a:spcPct val="108000"/>
-              </a:lnSpc>
-              <a:buNone/>
-            </a:pPr>
-            <a:r>
-              <a:rPr lang="en-US" sz="1150" dirty="0">
-                <a:solidFill>
-                  <a:srgbClr val="DCEAF1"/>
-                </a:solidFill>
-                <a:latin typeface="Courier New" pitchFamily="34" charset="0"/>
-                <a:ea typeface="Courier New" pitchFamily="34" charset="-122"/>
-                <a:cs typeface="Courier New" pitchFamily="34" charset="-120"/>
-              </a:rPr>
               <a:t>}</a:t>
             </a:r>
-            <a:endParaRPr lang="en-US" sz="1150" dirty="0"/>
+            <a:endParaRPr lang="en-US" sz="1250" dirty="0"/>
           </a:p>
         </p:txBody>
       </p:sp>
@@ -4266,7 +4256,7 @@
                 <a:ea typeface="Cambria" pitchFamily="34" charset="-122"/>
                 <a:cs typeface="Cambria" pitchFamily="34" charset="-120"/>
               </a:rPr>
-              <a:t>Remove fingerprints, add headers</a:t>
+              <a:t>Require strong passwords</a:t>
             </a:r>
             <a:endParaRPr lang="en-US" sz="3000" dirty="0"/>
           </a:p>
@@ -4308,7 +4298,7 @@
                 <a:ea typeface="Calibri" pitchFamily="34" charset="-122"/>
                 <a:cs typeface="Calibri" pitchFamily="34" charset="-120"/>
               </a:rPr>
-              <a:t>Two quick wins: stop broadcasting your exact core version to vulnerability scanners, and send three low-risk security headers that most sites can adopt without breaking anything.</a:t>
+              <a:t>NIST 800-63B and OWASP now say length plus breach screening beats composition rules. So we require 15+ characters and screen every new password against Have I Been Pwned — all enforced server-side.</a:t>
             </a:r>
             <a:endParaRPr lang="en-US" sz="1600" dirty="0"/>
           </a:p>
@@ -4394,7 +4384,7 @@
                 <a:ea typeface="Courier New" pitchFamily="34" charset="-122"/>
                 <a:cs typeface="Courier New" pitchFamily="34" charset="-120"/>
               </a:rPr>
-              <a:t>wpyeg_remove_version / _security_headers</a:t>
+              <a:t>wpyeg_require_strong_passwords</a:t>
             </a:r>
             <a:pPr indent="0" marL="0">
               <a:lnSpc>
@@ -4440,7 +4430,7 @@
                 <a:ea typeface="Courier New" pitchFamily="34" charset="-122"/>
                 <a:cs typeface="Courier New" pitchFamily="34" charset="-120"/>
               </a:rPr>
-              <a:t>yes / yes</a:t>
+              <a:t>yes</a:t>
             </a:r>
             <a:endParaRPr lang="en-US" sz="1150" dirty="0"/>
           </a:p>
@@ -4510,13 +4500,13 @@
             <a:r>
               <a:rPr lang="en-US" sz="1150" dirty="0">
                 <a:solidFill>
-                  <a:srgbClr val="E7C070"/>
+                  <a:srgbClr val="8FBF9F"/>
                 </a:solidFill>
                 <a:latin typeface="Courier New" pitchFamily="34" charset="0"/>
                 <a:ea typeface="Courier New" pitchFamily="34" charset="-122"/>
                 <a:cs typeface="Courier New" pitchFamily="34" charset="-120"/>
               </a:rPr>
-              <a:t>remove_action( 'wp_head', 'wp_generator' );</a:t>
+              <a:t>// hooked on user_profile_update_errors</a:t>
             </a:r>
             <a:endParaRPr lang="en-US" sz="1150" dirty="0"/>
           </a:p>
@@ -4530,13 +4520,13 @@
             <a:r>
               <a:rPr lang="en-US" sz="1150" dirty="0">
                 <a:solidFill>
-                  <a:srgbClr val="DCEAF1"/>
+                  <a:srgbClr val="E7C070"/>
                 </a:solidFill>
                 <a:latin typeface="Courier New" pitchFamily="34" charset="0"/>
                 <a:ea typeface="Courier New" pitchFamily="34" charset="-122"/>
                 <a:cs typeface="Courier New" pitchFamily="34" charset="-120"/>
               </a:rPr>
-              <a:t> </a:t>
+              <a:t>if ( strlen( $pw ) &lt; 15 ) {</a:t>
             </a:r>
             <a:endParaRPr lang="en-US" sz="1150" dirty="0"/>
           </a:p>
@@ -4556,7 +4546,7 @@
                 <a:ea typeface="Courier New" pitchFamily="34" charset="-122"/>
                 <a:cs typeface="Courier New" pitchFamily="34" charset="-120"/>
               </a:rPr>
-              <a:t>add_filter( 'wp_headers', function ( $h ) {</a:t>
+              <a:t>    $errors-&gt;add( 'short', 'Use 15+ characters.' );</a:t>
             </a:r>
             <a:endParaRPr lang="en-US" sz="1150" dirty="0"/>
           </a:p>
@@ -4570,13 +4560,13 @@
             <a:r>
               <a:rPr lang="en-US" sz="1150" dirty="0">
                 <a:solidFill>
-                  <a:srgbClr val="E7C070"/>
+                  <a:srgbClr val="DCEAF1"/>
                 </a:solidFill>
                 <a:latin typeface="Courier New" pitchFamily="34" charset="0"/>
                 <a:ea typeface="Courier New" pitchFamily="34" charset="-122"/>
                 <a:cs typeface="Courier New" pitchFamily="34" charset="-120"/>
               </a:rPr>
-              <a:t>  $h['X-Content-Type-Options'] = 'nosniff';</a:t>
+              <a:t>}</a:t>
             </a:r>
             <a:endParaRPr lang="en-US" sz="1150" dirty="0"/>
           </a:p>
@@ -4590,13 +4580,13 @@
             <a:r>
               <a:rPr lang="en-US" sz="1150" dirty="0">
                 <a:solidFill>
-                  <a:srgbClr val="E7C070"/>
+                  <a:srgbClr val="DCEAF1"/>
                 </a:solidFill>
                 <a:latin typeface="Courier New" pitchFamily="34" charset="0"/>
                 <a:ea typeface="Courier New" pitchFamily="34" charset="-122"/>
                 <a:cs typeface="Courier New" pitchFamily="34" charset="-120"/>
               </a:rPr>
-              <a:t>  $h['X-Frame-Options']        = 'SAMEORIGIN';</a:t>
+              <a:t> </a:t>
             </a:r>
             <a:endParaRPr lang="en-US" sz="1150" dirty="0"/>
           </a:p>
@@ -4610,13 +4600,13 @@
             <a:r>
               <a:rPr lang="en-US" sz="1150" dirty="0">
                 <a:solidFill>
-                  <a:srgbClr val="E7C070"/>
+                  <a:srgbClr val="8FBF9F"/>
                 </a:solidFill>
                 <a:latin typeface="Courier New" pitchFamily="34" charset="0"/>
                 <a:ea typeface="Courier New" pitchFamily="34" charset="-122"/>
                 <a:cs typeface="Courier New" pitchFamily="34" charset="-120"/>
               </a:rPr>
-              <a:t>  $h['Referrer-Policy'] =</a:t>
+              <a:t>// screen against known breaches (HIBP) —</a:t>
             </a:r>
             <a:endParaRPr lang="en-US" sz="1150" dirty="0"/>
           </a:p>
@@ -4630,13 +4620,13 @@
             <a:r>
               <a:rPr lang="en-US" sz="1150" dirty="0">
                 <a:solidFill>
-                  <a:srgbClr val="E7C070"/>
+                  <a:srgbClr val="8FBF9F"/>
                 </a:solidFill>
                 <a:latin typeface="Courier New" pitchFamily="34" charset="0"/>
                 <a:ea typeface="Courier New" pitchFamily="34" charset="-122"/>
                 <a:cs typeface="Courier New" pitchFamily="34" charset="-120"/>
               </a:rPr>
-              <a:t>        'strict-origin-when-cross-origin';</a:t>
+              <a:t>// length + screening, not composition rules</a:t>
             </a:r>
             <a:endParaRPr lang="en-US" sz="1150" dirty="0"/>
           </a:p>
@@ -4650,13 +4640,13 @@
             <a:r>
               <a:rPr lang="en-US" sz="1150" dirty="0">
                 <a:solidFill>
-                  <a:srgbClr val="DCEAF1"/>
+                  <a:srgbClr val="E7C070"/>
                 </a:solidFill>
                 <a:latin typeface="Courier New" pitchFamily="34" charset="0"/>
                 <a:ea typeface="Courier New" pitchFamily="34" charset="-122"/>
                 <a:cs typeface="Courier New" pitchFamily="34" charset="-120"/>
               </a:rPr>
-              <a:t>  return $h;</a:t>
+              <a:t>if ( wpyeg_password_is_pwned( $pw ) ) {</a:t>
             </a:r>
             <a:endParaRPr lang="en-US" sz="1150" dirty="0"/>
           </a:p>
@@ -4676,7 +4666,27 @@
                 <a:ea typeface="Courier New" pitchFamily="34" charset="-122"/>
                 <a:cs typeface="Courier New" pitchFamily="34" charset="-120"/>
               </a:rPr>
-              <a:t>} );</a:t>
+              <a:t>    $errors-&gt;add( 'pwned', 'Seen in a breach.' );</a:t>
+            </a:r>
+            <a:endParaRPr lang="en-US" sz="1150" dirty="0"/>
+          </a:p>
+          <a:p>
+            <a:pPr algn="l" indent="0" marL="0">
+              <a:lnSpc>
+                <a:spcPct val="108000"/>
+              </a:lnSpc>
+              <a:buNone/>
+            </a:pPr>
+            <a:r>
+              <a:rPr lang="en-US" sz="1150" dirty="0">
+                <a:solidFill>
+                  <a:srgbClr val="DCEAF1"/>
+                </a:solidFill>
+                <a:latin typeface="Courier New" pitchFamily="34" charset="0"/>
+                <a:ea typeface="Courier New" pitchFamily="34" charset="-122"/>
+                <a:cs typeface="Courier New" pitchFamily="34" charset="-120"/>
+              </a:rPr>
+              <a:t>}</a:t>
             </a:r>
             <a:endParaRPr lang="en-US" sz="1150" dirty="0"/>
           </a:p>
@@ -4839,7 +4849,7 @@
                 <a:ea typeface="Calibri" pitchFamily="34" charset="-122"/>
                 <a:cs typeface="Calibri" pitchFamily="34" charset="-120"/>
               </a:rPr>
-              <a:t>SECURITY · 6 of 6 · opt-in</a:t>
+              <a:t>SECURITY · 6 of 6</a:t>
             </a:r>
             <a:endParaRPr lang="en-US" sz="1300" dirty="0"/>
           </a:p>
@@ -4878,7 +4888,7 @@
                 <a:ea typeface="Cambria" pitchFamily="34" charset="-122"/>
                 <a:cs typeface="Cambria" pitchFamily="34" charset="-120"/>
               </a:rPr>
-              <a:t>Lock REST to logged-in users</a:t>
+              <a:t>Remove fingerprints, add headers</a:t>
             </a:r>
             <a:endParaRPr lang="en-US" sz="3000" dirty="0"/>
           </a:p>
@@ -4920,7 +4930,7 @@
                 <a:ea typeface="Calibri" pitchFamily="34" charset="-122"/>
                 <a:cs typeface="Calibri" pitchFamily="34" charset="-120"/>
               </a:rPr>
-              <a:t>The nuclear option. Requiring auth for ALL REST calls stops anonymous scraping cold — but it also breaks the block editor and many blocks. That's why it ships OFF. Reach for it only on pure brochure sites.</a:t>
+              <a:t>Two quick wins. Version hiding is obscurity, not security — but it cuts automated scanner noise. The three headers are safe defaults most sites can adopt without breaking anything.</a:t>
             </a:r>
             <a:endParaRPr lang="en-US" sz="1600" dirty="0"/>
           </a:p>
@@ -5006,7 +5016,7 @@
                 <a:ea typeface="Courier New" pitchFamily="34" charset="-122"/>
                 <a:cs typeface="Courier New" pitchFamily="34" charset="-120"/>
               </a:rPr>
-              <a:t>wpyeg_disable_rest</a:t>
+              <a:t>wpyeg_remove_version / wpyeg_security_headers</a:t>
             </a:r>
             <a:pPr indent="0" marL="0">
               <a:lnSpc>
@@ -5046,13 +5056,13 @@
             <a:r>
               <a:rPr lang="en-US" sz="1150" b="1" dirty="0">
                 <a:solidFill>
-                  <a:srgbClr val="C88F33"/>
+                  <a:srgbClr val="27607A"/>
                 </a:solidFill>
                 <a:latin typeface="Courier New" pitchFamily="34" charset="0"/>
                 <a:ea typeface="Courier New" pitchFamily="34" charset="-122"/>
                 <a:cs typeface="Courier New" pitchFamily="34" charset="-120"/>
               </a:rPr>
-              <a:t>no</a:t>
+              <a:t>yes / yes</a:t>
             </a:r>
             <a:endParaRPr lang="en-US" sz="1150" dirty="0"/>
           </a:p>
@@ -5122,13 +5132,13 @@
             <a:r>
               <a:rPr lang="en-US" sz="1150" dirty="0">
                 <a:solidFill>
-                  <a:srgbClr val="DCEAF1"/>
+                  <a:srgbClr val="E7C070"/>
                 </a:solidFill>
                 <a:latin typeface="Courier New" pitchFamily="34" charset="0"/>
                 <a:ea typeface="Courier New" pitchFamily="34" charset="-122"/>
                 <a:cs typeface="Courier New" pitchFamily="34" charset="-120"/>
               </a:rPr>
-              <a:t>add_filter( 'rest_authentication_errors',</a:t>
+              <a:t>remove_action( 'wp_head', 'wp_generator' );</a:t>
             </a:r>
             <a:endParaRPr lang="en-US" sz="1150" dirty="0"/>
           </a:p>
@@ -5148,7 +5158,7 @@
                 <a:ea typeface="Courier New" pitchFamily="34" charset="-122"/>
                 <a:cs typeface="Courier New" pitchFamily="34" charset="-120"/>
               </a:rPr>
-              <a:t>  function ( $result ) {</a:t>
+              <a:t> </a:t>
             </a:r>
             <a:endParaRPr lang="en-US" sz="1150" dirty="0"/>
           </a:p>
@@ -5168,7 +5178,7 @@
                 <a:ea typeface="Courier New" pitchFamily="34" charset="-122"/>
                 <a:cs typeface="Courier New" pitchFamily="34" charset="-120"/>
               </a:rPr>
-              <a:t>    if ( ! empty( $result ) ) return $result;</a:t>
+              <a:t>add_filter( 'wp_headers', function ( $h ) {</a:t>
             </a:r>
             <a:endParaRPr lang="en-US" sz="1150" dirty="0"/>
           </a:p>
@@ -5182,13 +5192,13 @@
             <a:r>
               <a:rPr lang="en-US" sz="1150" dirty="0">
                 <a:solidFill>
-                  <a:srgbClr val="DCEAF1"/>
+                  <a:srgbClr val="E7C070"/>
                 </a:solidFill>
                 <a:latin typeface="Courier New" pitchFamily="34" charset="0"/>
                 <a:ea typeface="Courier New" pitchFamily="34" charset="-122"/>
                 <a:cs typeface="Courier New" pitchFamily="34" charset="-120"/>
               </a:rPr>
-              <a:t>    if ( ! is_user_logged_in() ) {</a:t>
+              <a:t>  $h['X-Content-Type-Options'] = 'nosniff';</a:t>
             </a:r>
             <a:endParaRPr lang="en-US" sz="1150" dirty="0"/>
           </a:p>
@@ -5208,7 +5218,7 @@
                 <a:ea typeface="Courier New" pitchFamily="34" charset="-122"/>
                 <a:cs typeface="Courier New" pitchFamily="34" charset="-120"/>
               </a:rPr>
-              <a:t>      return new WP_Error(</a:t>
+              <a:t>  $h['X-Frame-Options']        = 'SAMEORIGIN';</a:t>
             </a:r>
             <a:endParaRPr lang="en-US" sz="1150" dirty="0"/>
           </a:p>
@@ -5228,7 +5238,7 @@
                 <a:ea typeface="Courier New" pitchFamily="34" charset="-122"/>
                 <a:cs typeface="Courier New" pitchFamily="34" charset="-120"/>
               </a:rPr>
-              <a:t>        'rest_not_logged_in', 'Auth required.',</a:t>
+              <a:t>  $h['Referrer-Policy'] =</a:t>
             </a:r>
             <a:endParaRPr lang="en-US" sz="1150" dirty="0"/>
           </a:p>
@@ -5248,7 +5258,7 @@
                 <a:ea typeface="Courier New" pitchFamily="34" charset="-122"/>
                 <a:cs typeface="Courier New" pitchFamily="34" charset="-120"/>
               </a:rPr>
-              <a:t>        array( 'status' =&gt; 401 ) );</a:t>
+              <a:t>        'strict-origin-when-cross-origin';</a:t>
             </a:r>
             <a:endParaRPr lang="en-US" sz="1150" dirty="0"/>
           </a:p>
@@ -5268,27 +5278,7 @@
                 <a:ea typeface="Courier New" pitchFamily="34" charset="-122"/>
                 <a:cs typeface="Courier New" pitchFamily="34" charset="-120"/>
               </a:rPr>
-              <a:t>    }</a:t>
-            </a:r>
-            <a:endParaRPr lang="en-US" sz="1150" dirty="0"/>
-          </a:p>
-          <a:p>
-            <a:pPr algn="l" indent="0" marL="0">
-              <a:lnSpc>
-                <a:spcPct val="108000"/>
-              </a:lnSpc>
-              <a:buNone/>
-            </a:pPr>
-            <a:r>
-              <a:rPr lang="en-US" sz="1150" dirty="0">
-                <a:solidFill>
-                  <a:srgbClr val="DCEAF1"/>
-                </a:solidFill>
-                <a:latin typeface="Courier New" pitchFamily="34" charset="0"/>
-                <a:ea typeface="Courier New" pitchFamily="34" charset="-122"/>
-                <a:cs typeface="Courier New" pitchFamily="34" charset="-120"/>
-              </a:rPr>
-              <a:t>    return $result;</a:t>
+              <a:t>  return $h;</a:t>
             </a:r>
             <a:endParaRPr lang="en-US" sz="1150" dirty="0"/>
           </a:p>
@@ -5797,7 +5787,7 @@
                 <a:ea typeface="Calibri" pitchFamily="34" charset="-122"/>
                 <a:cs typeface="Calibri" pitchFamily="34" charset="-120"/>
               </a:rPr>
-              <a:t>For most business sites, comments are a spam magnet with little upside. We close them everywhere, hide existing threads, drop the admin menu, and default new posts to pings-closed.</a:t>
+              <a:t>For many sites, comments are a spam magnet with little upside. Here we close them everywhere, hide existing threads, and drop the admin menu.</a:t>
             </a:r>
             <a:endParaRPr lang="en-US" sz="1600" dirty="0"/>
           </a:p>
@@ -6389,7 +6379,7 @@
                 <a:ea typeface="Calibri" pitchFamily="34" charset="-122"/>
                 <a:cs typeface="Calibri" pitchFamily="34" charset="-120"/>
               </a:rPr>
-              <a:t>Two thin-content leaks, same fix. Author archives expose login slugs; attachment pages are near-empty media wrappers. Both dilute SEO and add surface. Send them home with a 301.</a:t>
+              <a:t>Author archives expose the authors' usernames in the URL, and attachment pages are near-empty media wrappers. Both dilute SEO and are targets for trouble. Same hook, two conditions.</a:t>
             </a:r>
             <a:endParaRPr lang="en-US" sz="1600" dirty="0"/>
           </a:p>
@@ -7001,7 +6991,7 @@
                 <a:ea typeface="Calibri" pitchFamily="34" charset="-122"/>
                 <a:cs typeface="Calibri" pitchFamily="34" charset="-120"/>
               </a:rPr>
-              <a:t>Core injects an emoji-detection script and inline CSS on every page load, plus a DNS-prefetch hint. Modern browsers render emoji natively, so this is pure dead weight you can shed.</a:t>
+              <a:t>WordPress core injects an emoji-detection script and inline CSS on every page load, plus a DNS-prefetch hint. Modern browsers render emoji natively, so this is pure dead weight.</a:t>
             </a:r>
             <a:endParaRPr lang="en-US" sz="1600" dirty="0"/>
           </a:p>
@@ -7858,7 +7848,7 @@
                 <a:ea typeface="Calibri" pitchFamily="34" charset="-122"/>
                 <a:cs typeface="Calibri" pitchFamily="34" charset="-120"/>
               </a:rPr>
-              <a:t>On big sites the admin list-table search reads every word of every post — and crawls. Title-only search checks just the spines, far faster (off by default — it changes editor expectations). And the floating front-end admin bar can be hidden for non-admins.</a:t>
+              <a:t>Search the admin post list on a big site and WordPress reads every word of every post — like finding a book by reading the whole library. Title-only search checks just the spines, and it's far faster.</a:t>
             </a:r>
             <a:endParaRPr lang="en-US" sz="1600" dirty="0"/>
           </a:p>
@@ -8490,7 +8480,7 @@
                 <a:ea typeface="Calibri" pitchFamily="34" charset="-122"/>
                 <a:cs typeface="Calibri" pitchFamily="34" charset="-120"/>
               </a:rPr>
-              <a:t>Core's “Remember Me” lasts 14 days — often too long. Cap it (say 5 days), optionally shorten regular logins, or hide the checkbox entirely for shared machines. One filter does all three.</a:t>
+              <a:t>Click “Remember Me” and you stay logged in for 14 days. Cap that extended session, optionally shorten the regular one, or hide the checkbox entirely. One filter covers all three.</a:t>
             </a:r>
             <a:endParaRPr lang="en-US" sz="1600" dirty="0"/>
           </a:p>
@@ -9021,7 +9011,7 @@
                 <a:ea typeface="Cambria" pitchFamily="34" charset="-122"/>
                 <a:cs typeface="Cambria" pitchFamily="34" charset="-120"/>
               </a:rPr>
-              <a:t>A fresh WordPress install ships wide open</a:t>
+              <a:t>WordPress is open by default; hosts vary in what they close.</a:t>
             </a:r>
             <a:endParaRPr lang="en-US" sz="3400" dirty="0"/>
           </a:p>
@@ -9060,7 +9050,7 @@
                 <a:ea typeface="Calibri" pitchFamily="34" charset="-122"/>
                 <a:cs typeface="Calibri" pitchFamily="34" charset="-120"/>
               </a:rPr>
-              <a:t>Out of the box, core leaves a lot of doors ajar and a lot of noise switched on. None of it is a bug — it's just defaults chosen for maximum compatibility, not for your site.</a:t>
+              <a:t>None of these are bugs. They are defaults chosen for maximum compatibility on a 20+ year-old web application — you probably don't need them.</a:t>
             </a:r>
             <a:endParaRPr lang="en-US" sz="1600" dirty="0"/>
           </a:p>
@@ -9231,7 +9221,7 @@
                 <a:ea typeface="Calibri" pitchFamily="34" charset="-122"/>
                 <a:cs typeface="Calibri" pitchFamily="34" charset="-120"/>
               </a:rPr>
-              <a:t>REST + author archives happily list every login name to anonymous visitors.</a:t>
+              <a:t>REST + author archives list every login name to anonymous visitors.</a:t>
             </a:r>
             <a:endParaRPr lang="en-US" sz="1400" dirty="0"/>
           </a:p>
@@ -9402,7 +9392,7 @@
                 <a:ea typeface="Calibri" pitchFamily="34" charset="-122"/>
                 <a:cs typeface="Calibri" pitchFamily="34" charset="-120"/>
               </a:rPr>
-              <a:t>pingback and system.multicall amplifiers answer by default.</a:t>
+              <a:t>Pingback and system.multicall amplifiers answer by default.</a:t>
             </a:r>
             <a:endParaRPr lang="en-US" sz="1400" dirty="0"/>
           </a:p>
@@ -9573,7 +9563,7 @@
                 <a:ea typeface="Calibri" pitchFamily="34" charset="-122"/>
                 <a:cs typeface="Calibri" pitchFamily="34" charset="-120"/>
               </a:rPr>
-              <a:t>Emoji scripts, version tags, and RSD links ship on every single page view.</a:t>
+              <a:t>Emoji scripts, version tags, and RSD links on every page.</a:t>
             </a:r>
             <a:endParaRPr lang="en-US" sz="1400" dirty="0"/>
           </a:p>
@@ -9744,7 +9734,7 @@
                 <a:ea typeface="Calibri" pitchFamily="34" charset="-122"/>
                 <a:cs typeface="Calibri" pitchFamily="34" charset="-120"/>
               </a:rPr>
-              <a:t>Comments, pingbacks, and trackbacks are open by default on new content.</a:t>
+              <a:t>Comments, pingbacks, and trackbacks open by default.</a:t>
             </a:r>
             <a:endParaRPr lang="en-US" sz="1400" dirty="0"/>
           </a:p>
@@ -10233,7 +10223,7 @@
                 <a:ea typeface="Calibri" pitchFamily="34" charset="-122"/>
                 <a:cs typeface="Calibri" pitchFamily="34" charset="-120"/>
               </a:rPr>
-              <a:t>The login page is the site's front door — and the default “W” on wp-login.php links out to wordpress.org, a subtle trust leak. But repainting a client's front door uninvited is rude, so the default is to leave it alone; removing, unlinking, or replacing the logo is an opt-in, and any change points the link home.</a:t>
+              <a:t>The login page is a site's staff entrance, and by default the welcome mat links to someone else's house — that “W” points out to wordpress.org. Changing it uninvited is intrusive, so the default is to leave it alone.</a:t>
             </a:r>
             <a:endParaRPr lang="en-US" sz="1600" dirty="0"/>
           </a:p>
@@ -10783,7 +10773,7 @@
                 <a:ea typeface="Cambria" pitchFamily="34" charset="-122"/>
                 <a:cs typeface="Cambria" pitchFamily="34" charset="-120"/>
               </a:rPr>
-              <a:t>Throttle Heartbeat, defer scripts</a:t>
+              <a:t>Throttle Heartbeat, defer scripts (opt-in)</a:t>
             </a:r>
             <a:endParaRPr lang="en-US" sz="3000" dirty="0"/>
           </a:p>
@@ -10825,7 +10815,7 @@
                 <a:ea typeface="Calibri" pitchFamily="34" charset="-122"/>
                 <a:cs typeface="Calibri" pitchFamily="34" charset="-120"/>
               </a:rPr>
-              <a:t>Two opt-in levers. The Heartbeat API polls admin-ajax every 15–60s — throttle it (and drop it on the dashboard home) to ease shared hosting. And defer non-critical front-end scripts so they stop blocking render.</a:t>
+              <a:t>The Heartbeat API polls admin-ajax every 15–60s; throttle it to ease up on weak shared hosting. Deferring non-critical scripts keeps them from being render-blocking.</a:t>
             </a:r>
             <a:endParaRPr lang="en-US" sz="1600" dirty="0"/>
           </a:p>
@@ -10911,7 +10901,7 @@
                 <a:ea typeface="Courier New" pitchFamily="34" charset="-122"/>
                 <a:cs typeface="Courier New" pitchFamily="34" charset="-120"/>
               </a:rPr>
-              <a:t>wpyeg_throttle_heartbeat / _defer_scripts</a:t>
+              <a:t>wpyeg_throttle_heartbeat / wpyeg_defer_scripts</a:t>
             </a:r>
             <a:pPr indent="0" marL="0">
               <a:lnSpc>
@@ -11395,7 +11385,7 @@
                 <a:ea typeface="Calibri" pitchFamily="34" charset="-122"/>
                 <a:cs typeface="Calibri" pitchFamily="34" charset="-120"/>
               </a:rPr>
-              <a:t>Some defaults live in wp-config.php, above the plugin layer. Document these as manual steps in your onboarding checklist.</a:t>
+              <a:t>Some defaults live in wp-config.php, above the plugin layer, because they must load before plugins do. Document them as manual steps in your onboarding checklist.</a:t>
             </a:r>
             <a:endParaRPr lang="en-US" sz="1600" dirty="0"/>
           </a:p>
@@ -11682,7 +11672,7 @@
                 <a:ea typeface="Calibri" pitchFamily="34" charset="-122"/>
                 <a:cs typeface="Calibri" pitchFamily="34" charset="-120"/>
               </a:rPr>
-              <a:t>A stolen admin login can't rewrite your PHP from the dashboard.</a:t>
+              <a:t>A stolen admin login can't rewrite your PHP.</a:t>
             </a:r>
             <a:endParaRPr lang="en-US" sz="1250" dirty="0"/>
           </a:p>
@@ -13202,7 +13192,7 @@
                 <a:ea typeface="Calibri" pitchFamily="34" charset="-122"/>
                 <a:cs typeface="Calibri" pitchFamily="34" charset="-120"/>
               </a:rPr>
-              <a:t>Plugins → Add New → Upload Plugin → choose better-by-default.zip → Activate.</a:t>
+              <a:t>Plugins → Add New → Upload Plugin → choose sane-defaults.zip → Activate.</a:t>
             </a:r>
             <a:endParaRPr lang="en-US" sz="1400" dirty="0"/>
           </a:p>
@@ -13373,7 +13363,7 @@
                 <a:ea typeface="Calibri" pitchFamily="34" charset="-122"/>
                 <a:cs typeface="Calibri" pitchFamily="34" charset="-120"/>
               </a:rPr>
-              <a:t>Settings → Better by Default. Every toggle is grouped by category.</a:t>
+              <a:t>Settings → Better by Default; every toggle grouped by category.</a:t>
             </a:r>
             <a:endParaRPr lang="en-US" sz="1400" dirty="0"/>
           </a:p>
@@ -13544,7 +13534,7 @@
                 <a:ea typeface="Calibri" pitchFamily="34" charset="-122"/>
                 <a:cs typeface="Calibri" pitchFamily="34" charset="-120"/>
               </a:rPr>
-              <a:t>Visit /wp-json/wp/v2/users logged out — 401 or empty, not a list of usernames.</a:t>
+              <a:t>Visit /wp-json/wp/v2/users logged out → 401 or empty, not a list of usernames.</a:t>
             </a:r>
             <a:endParaRPr lang="en-US" sz="1400" dirty="0"/>
           </a:p>
@@ -13715,7 +13705,7 @@
                 <a:ea typeface="Calibri" pitchFamily="34" charset="-122"/>
                 <a:cs typeface="Calibri" pitchFamily="34" charset="-120"/>
               </a:rPr>
-              <a:t>Flip a switch off, reload, watch the behavior change. That's the filter turning on and off.</a:t>
+              <a:t>Flip a switch off, reload, watch the behavior change.</a:t>
             </a:r>
             <a:endParaRPr lang="en-US" sz="1400" dirty="0"/>
           </a:p>
@@ -13795,7 +13785,7 @@
                 <a:ea typeface="Courier New" pitchFamily="34" charset="-122"/>
                 <a:cs typeface="Courier New" pitchFamily="34" charset="-120"/>
               </a:rPr>
-              <a:t>wp plugin install ./better-by-default.zip --activate</a:t>
+              <a:t>wp plugin install ./sane-defaults.zip --activate</a:t>
             </a:r>
             <a:endParaRPr lang="en-US" sz="1300" dirty="0"/>
           </a:p>
@@ -14363,7 +14353,7 @@
                 <a:ea typeface="Cambria" pitchFamily="34" charset="-122"/>
                 <a:cs typeface="Cambria" pitchFamily="34" charset="-120"/>
               </a:rPr>
-              <a:t>The cheat sheet</a:t>
+              <a:t>The cheat sheet — defaults that ship ON</a:t>
             </a:r>
             <a:endParaRPr lang="en-US" sz="3000" dirty="0"/>
           </a:p>
@@ -14402,7 +14392,7 @@
                 <a:ea typeface="Calibri" pitchFamily="34" charset="-122"/>
                 <a:cs typeface="Calibri" pitchFamily="34" charset="-120"/>
               </a:rPr>
-              <a:t>Defaults that ship ON — safe for nearly any site.</a:t>
+              <a:t>Everything on-by-default in one view, mapped to the core hook.</a:t>
             </a:r>
             <a:endParaRPr lang="en-US" sz="1400" dirty="0"/>
           </a:p>
@@ -16362,7 +16352,7 @@
                 <a:ea typeface="Calibri" pitchFamily="34" charset="-122"/>
                 <a:cs typeface="Calibri" pitchFamily="34" charset="-120"/>
               </a:rPr>
-              <a:t>Take the plugin, fork it, teach it. A default is just an opinionated filter behind a toggle.</a:t>
+              <a:t>Set your defaults wisely.</a:t>
             </a:r>
             <a:endParaRPr lang="en-US" sz="1900" dirty="0"/>
           </a:p>
@@ -16415,7 +16405,7 @@
                 <a:ea typeface="Courier New" pitchFamily="34" charset="-122"/>
                 <a:cs typeface="Courier New" pitchFamily="34" charset="-120"/>
               </a:rPr>
-              <a:t>better-by-default.zip</a:t>
+              <a:t>sane-defaults.zip</a:t>
             </a:r>
             <a:pPr indent="0" marL="0">
               <a:buNone/>
@@ -16496,7 +16486,7 @@
                 <a:ea typeface="Calibri" pitchFamily="34" charset="-122"/>
                 <a:cs typeface="Calibri" pitchFamily="34" charset="-120"/>
               </a:rPr>
-              <a:t>License GPL-2.0-or-later — ship it.</a:t>
+              <a:t>License GPL-3.0-or-later</a:t>
             </a:r>
             <a:endParaRPr lang="en-US" sz="1600" dirty="0"/>
           </a:p>
@@ -16836,7 +16826,7 @@
                 <a:ea typeface="Cambria" pitchFamily="34" charset="-122"/>
                 <a:cs typeface="Cambria" pitchFamily="34" charset="-120"/>
               </a:rPr>
-              <a:t>Two words, gently: hooks &amp; filters</a:t>
+              <a:t>Hooks &amp; filters</a:t>
             </a:r>
             <a:endParaRPr lang="en-US" sz="3200" dirty="0"/>
           </a:p>
@@ -16875,7 +16865,7 @@
                 <a:ea typeface="Calibri" pitchFamily="34" charset="-122"/>
                 <a:cs typeface="Calibri" pitchFamily="34" charset="-120"/>
               </a:rPr>
-              <a:t>WordPress is built to be interrupted on purpose. You don't edit core — you hop in at labeled moments.</a:t>
+              <a:t>WordPress is built to be interrupted at labeled moments (hooks) so you never edit core code.</a:t>
             </a:r>
             <a:endParaRPr lang="en-US" sz="1600" dirty="0"/>
           </a:p>
@@ -17046,7 +17036,7 @@
                 <a:ea typeface="Calibri" pitchFamily="34" charset="-122"/>
                 <a:cs typeface="Calibri" pitchFamily="34" charset="-120"/>
               </a:rPr>
-              <a:t>“When you reach this moment, also DO this.” A doorbell you answer.</a:t>
+              <a:t>“When you reach this moment, also DO this.”</a:t>
             </a:r>
             <a:endParaRPr lang="en-US" sz="1450" dirty="0"/>
           </a:p>
@@ -17278,7 +17268,7 @@
                 <a:ea typeface="Calibri" pitchFamily="34" charset="-122"/>
                 <a:cs typeface="Calibri" pitchFamily="34" charset="-120"/>
               </a:rPr>
-              <a:t>“Before you use this value, let me CHANGE it first.” A mail slot that edits the letter.</a:t>
+              <a:t>“Before you use this value, let me CHANGE it first.”</a:t>
             </a:r>
             <a:endParaRPr lang="en-US" sz="1450" dirty="0"/>
           </a:p>
@@ -17502,7 +17492,7 @@
                 <a:ea typeface="Cambria" pitchFamily="34" charset="-122"/>
                 <a:cs typeface="Cambria" pitchFamily="34" charset="-120"/>
               </a:rPr>
-              <a:t>Six categories of default</a:t>
+              <a:t>Six categories of defaults</a:t>
             </a:r>
             <a:endParaRPr lang="en-US" sz="3400" dirty="0"/>
           </a:p>
@@ -17844,7 +17834,7 @@
                 <a:ea typeface="Calibri" pitchFamily="34" charset="-122"/>
                 <a:cs typeface="Calibri" pitchFamily="34" charset="-120"/>
               </a:rPr>
-              <a:t>Close public spam &amp; leaks</a:t>
+              <a:t>Close spam channels &amp; info leaks</a:t>
             </a:r>
             <a:endParaRPr lang="en-US" sz="1350" dirty="0"/>
           </a:p>
@@ -18015,7 +18005,7 @@
                 <a:ea typeface="Calibri" pitchFamily="34" charset="-122"/>
                 <a:cs typeface="Calibri" pitchFamily="34" charset="-120"/>
               </a:rPr>
-              <a:t>Calmer, faster dashboard</a:t>
+              <a:t>A calmer, faster dashboard</a:t>
             </a:r>
             <a:endParaRPr lang="en-US" sz="1350" dirty="0"/>
           </a:p>
@@ -19017,7 +19007,7 @@
                 <a:ea typeface="Calibri" pitchFamily="34" charset="-122"/>
                 <a:cs typeface="Calibri" pitchFamily="34" charset="-120"/>
               </a:rPr>
-              <a:t>The /wp/v2/users endpoint hands out every author's login name to anyone — half of a brute-force guess, free. We keep REST working for logged-in tools but slam the door on anonymous enumeration.</a:t>
+              <a:t>The /wp/v2/users endpoint hands out every author's login name to anyone — half of a brute-force guess, for free. Closing it for logged-out requests only keeps the editor and legit integrations working.</a:t>
             </a:r>
             <a:endParaRPr lang="en-US" sz="1600" dirty="0"/>
           </a:p>
@@ -19548,7 +19538,7 @@
                 <a:ea typeface="Calibri" pitchFamily="34" charset="-122"/>
                 <a:cs typeface="Calibri" pitchFamily="34" charset="-120"/>
               </a:rPr>
-              <a:t>SECURITY · 2 of 6</a:t>
+              <a:t>SECURITY · 2 of 6 · opt-in</a:t>
             </a:r>
             <a:endParaRPr lang="en-US" sz="1300" dirty="0"/>
           </a:p>
@@ -19587,7 +19577,7 @@
                 <a:ea typeface="Cambria" pitchFamily="34" charset="-122"/>
                 <a:cs typeface="Cambria" pitchFamily="34" charset="-120"/>
               </a:rPr>
-              <a:t>Lock XML-RPC down by category</a:t>
+              <a:t>Lock REST to logged-in users (opt-in)</a:t>
             </a:r>
             <a:endParaRPr lang="en-US" sz="3000" dirty="0"/>
           </a:p>
@@ -19629,7 +19619,7 @@
                 <a:ea typeface="Calibri" pitchFamily="34" charset="-122"/>
                 <a:cs typeface="Calibri" pitchFamily="34" charset="-120"/>
               </a:rPr>
-              <a:t>XML-RPC is an old switchboard — every method is a line. We unplug the lines we don't want: pingbacks (spam/DDoS) and the credential-authenticated blogging APIs (the brute-force target), via a method filter. system.multicall can't be filtered off, so a replacement server refuses it. Jetpack's jetpack.* lines stay untouched.</a:t>
+              <a:t>The sledgehammer version of the slide before: requiring auth for ALL REST calls stops anonymous scraping cold. It breaks anonymous REST — front-end blocks, embeds, search, outside integrations — so it ships off.</a:t>
             </a:r>
             <a:endParaRPr lang="en-US" sz="1600" dirty="0"/>
           </a:p>
@@ -19715,7 +19705,7 @@
                 <a:ea typeface="Courier New" pitchFamily="34" charset="-122"/>
                 <a:cs typeface="Courier New" pitchFamily="34" charset="-120"/>
               </a:rPr>
-              <a:t>wpyeg_xmlrpc_allow_pingbacks / _remote_publishing / _multicall</a:t>
+              <a:t>wpyeg_disable_rest</a:t>
             </a:r>
             <a:pPr indent="0" marL="0">
               <a:lnSpc>
@@ -19761,7 +19751,7 @@
                 <a:ea typeface="Courier New" pitchFamily="34" charset="-122"/>
                 <a:cs typeface="Courier New" pitchFamily="34" charset="-120"/>
               </a:rPr>
-              <a:t>no (each)</a:t>
+              <a:t>no</a:t>
             </a:r>
             <a:endParaRPr lang="en-US" sz="1150" dirty="0"/>
           </a:p>
@@ -19831,13 +19821,13 @@
             <a:r>
               <a:rPr lang="en-US" sz="1150" dirty="0">
                 <a:solidFill>
-                  <a:srgbClr val="8FBF9F"/>
+                  <a:srgbClr val="DCEAF1"/>
                 </a:solidFill>
                 <a:latin typeface="Courier New" pitchFamily="34" charset="0"/>
                 <a:ea typeface="Courier New" pitchFamily="34" charset="-122"/>
                 <a:cs typeface="Courier New" pitchFamily="34" charset="-120"/>
               </a:rPr>
-              <a:t>// each category off → remove its methods</a:t>
+              <a:t>add_filter( 'rest_authentication_errors',</a:t>
             </a:r>
             <a:endParaRPr lang="en-US" sz="1150" dirty="0"/>
           </a:p>
@@ -19857,7 +19847,7 @@
                 <a:ea typeface="Courier New" pitchFamily="34" charset="-122"/>
                 <a:cs typeface="Courier New" pitchFamily="34" charset="-120"/>
               </a:rPr>
-              <a:t>add_filter( 'xmlrpc_methods', function ( $m ) {</a:t>
+              <a:t>  function ( $result ) {</a:t>
             </a:r>
             <a:endParaRPr lang="en-US" sz="1150" dirty="0"/>
           </a:p>
@@ -19877,7 +19867,7 @@
                 <a:ea typeface="Courier New" pitchFamily="34" charset="-122"/>
                 <a:cs typeface="Courier New" pitchFamily="34" charset="-120"/>
               </a:rPr>
-              <a:t>  if ( ! allow( 'pingbacks' ) )</a:t>
+              <a:t>    if ( ! empty( $result ) ) return $result;</a:t>
             </a:r>
             <a:endParaRPr lang="en-US" sz="1150" dirty="0"/>
           </a:p>
@@ -19891,13 +19881,13 @@
             <a:r>
               <a:rPr lang="en-US" sz="1150" dirty="0">
                 <a:solidFill>
-                  <a:srgbClr val="E7C070"/>
+                  <a:srgbClr val="DCEAF1"/>
                 </a:solidFill>
                 <a:latin typeface="Courier New" pitchFamily="34" charset="0"/>
                 <a:ea typeface="Courier New" pitchFamily="34" charset="-122"/>
                 <a:cs typeface="Courier New" pitchFamily="34" charset="-120"/>
               </a:rPr>
-              <a:t>    unset( $m['pingback.ping'] );</a:t>
+              <a:t>    if ( ! is_user_logged_in() ) {</a:t>
             </a:r>
             <a:endParaRPr lang="en-US" sz="1150" dirty="0"/>
           </a:p>
@@ -19911,13 +19901,13 @@
             <a:r>
               <a:rPr lang="en-US" sz="1150" dirty="0">
                 <a:solidFill>
-                  <a:srgbClr val="DCEAF1"/>
+                  <a:srgbClr val="E7C070"/>
                 </a:solidFill>
                 <a:latin typeface="Courier New" pitchFamily="34" charset="0"/>
                 <a:ea typeface="Courier New" pitchFamily="34" charset="-122"/>
                 <a:cs typeface="Courier New" pitchFamily="34" charset="-120"/>
               </a:rPr>
-              <a:t>  if ( ! allow( 'remote_publishing' ) )</a:t>
+              <a:t>      return new WP_Error(</a:t>
             </a:r>
             <a:endParaRPr lang="en-US" sz="1150" dirty="0"/>
           </a:p>
@@ -19931,13 +19921,13 @@
             <a:r>
               <a:rPr lang="en-US" sz="1150" dirty="0">
                 <a:solidFill>
-                  <a:srgbClr val="8FBF9F"/>
+                  <a:srgbClr val="E7C070"/>
                 </a:solidFill>
                 <a:latin typeface="Courier New" pitchFamily="34" charset="0"/>
                 <a:ea typeface="Courier New" pitchFamily="34" charset="-122"/>
                 <a:cs typeface="Courier New" pitchFamily="34" charset="-120"/>
               </a:rPr>
-              <a:t>    // drop wp.* metaWeblog.* mt.* blogger.*</a:t>
+              <a:t>        'rest_not_logged_in', 'Auth required.',</a:t>
             </a:r>
             <a:endParaRPr lang="en-US" sz="1150" dirty="0"/>
           </a:p>
@@ -19951,13 +19941,13 @@
             <a:r>
               <a:rPr lang="en-US" sz="1150" dirty="0">
                 <a:solidFill>
-                  <a:srgbClr val="DCEAF1"/>
+                  <a:srgbClr val="E7C070"/>
                 </a:solidFill>
                 <a:latin typeface="Courier New" pitchFamily="34" charset="0"/>
                 <a:ea typeface="Courier New" pitchFamily="34" charset="-122"/>
                 <a:cs typeface="Courier New" pitchFamily="34" charset="-120"/>
               </a:rPr>
-              <a:t>  return $m;</a:t>
+              <a:t>        array( 'status' =&gt; 401 ) );</a:t>
             </a:r>
             <a:endParaRPr lang="en-US" sz="1150" dirty="0"/>
           </a:p>
@@ -19977,7 +19967,7 @@
                 <a:ea typeface="Courier New" pitchFamily="34" charset="-122"/>
                 <a:cs typeface="Courier New" pitchFamily="34" charset="-120"/>
               </a:rPr>
-              <a:t>} );</a:t>
+              <a:t>    }</a:t>
             </a:r>
             <a:endParaRPr lang="en-US" sz="1150" dirty="0"/>
           </a:p>
@@ -19991,13 +19981,13 @@
             <a:r>
               <a:rPr lang="en-US" sz="1150" dirty="0">
                 <a:solidFill>
-                  <a:srgbClr val="8FBF9F"/>
+                  <a:srgbClr val="DCEAF1"/>
                 </a:solidFill>
                 <a:latin typeface="Courier New" pitchFamily="34" charset="0"/>
                 <a:ea typeface="Courier New" pitchFamily="34" charset="-122"/>
                 <a:cs typeface="Courier New" pitchFamily="34" charset="-120"/>
               </a:rPr>
-              <a:t>// multicall: swap in a server that refuses it</a:t>
+              <a:t>    return $result;</a:t>
             </a:r>
             <a:endParaRPr lang="en-US" sz="1150" dirty="0"/>
           </a:p>
@@ -20011,13 +20001,13 @@
             <a:r>
               <a:rPr lang="en-US" sz="1150" dirty="0">
                 <a:solidFill>
-                  <a:srgbClr val="E7C070"/>
+                  <a:srgbClr val="DCEAF1"/>
                 </a:solidFill>
                 <a:latin typeface="Courier New" pitchFamily="34" charset="0"/>
                 <a:ea typeface="Courier New" pitchFamily="34" charset="-122"/>
                 <a:cs typeface="Courier New" pitchFamily="34" charset="-120"/>
               </a:rPr>
-              <a:t>add_filter( 'wp_xmlrpc_server_class', $refuse );</a:t>
+              <a:t>} );</a:t>
             </a:r>
             <a:endParaRPr lang="en-US" sz="1150" dirty="0"/>
           </a:p>
@@ -20219,7 +20209,7 @@
                 <a:ea typeface="Cambria" pitchFamily="34" charset="-122"/>
                 <a:cs typeface="Cambria" pitchFamily="34" charset="-120"/>
               </a:rPr>
-              <a:t>Keep Application Passwords available</a:t>
+              <a:t>Lock XML-RPC down by category</a:t>
             </a:r>
             <a:endParaRPr lang="en-US" sz="3000" dirty="0"/>
           </a:p>
@@ -20261,7 +20251,7 @@
                 <a:ea typeface="Calibri" pitchFamily="34" charset="-122"/>
                 <a:cs typeface="Calibri" pitchFamily="34" charset="-120"/>
               </a:rPr>
-              <a:t>The one we don't lock down. An Application Password is a spare key cut for one app — hashed, per-application, revocable on its own. It's the safer REST credential, and the only one core accepts for REST Basic Auth. So they stay on; prohibit them only if policy forbids non-interactive credentials.</a:t>
+              <a:t>XML-RPC isn't one door — it's an old switchboard, and every method is a phone line. Rather than rip the box off the wall, we unplug lines by category. Four switches, all off by default.</a:t>
             </a:r>
             <a:endParaRPr lang="en-US" sz="1600" dirty="0"/>
           </a:p>
@@ -20347,7 +20337,7 @@
                 <a:ea typeface="Courier New" pitchFamily="34" charset="-122"/>
                 <a:cs typeface="Courier New" pitchFamily="34" charset="-120"/>
               </a:rPr>
-              <a:t>wpyeg_disable_application_passwords</a:t>
+              <a:t>wpyeg_xmlrpc_allow_* + _block_xmlrpc_endpoint</a:t>
             </a:r>
             <a:pPr indent="0" marL="0">
               <a:lnSpc>
@@ -20393,7 +20383,7 @@
                 <a:ea typeface="Courier New" pitchFamily="34" charset="-122"/>
                 <a:cs typeface="Courier New" pitchFamily="34" charset="-120"/>
               </a:rPr>
-              <a:t>no (available)</a:t>
+              <a:t>no (all four)</a:t>
             </a:r>
             <a:endParaRPr lang="en-US" sz="1150" dirty="0"/>
           </a:p>
@@ -20461,7 +20451,7 @@
               <a:buNone/>
             </a:pPr>
             <a:r>
-              <a:rPr lang="en-US" sz="1250" dirty="0">
+              <a:rPr lang="en-US" sz="1100" dirty="0">
                 <a:solidFill>
                   <a:srgbClr val="8FBF9F"/>
                 </a:solidFill>
@@ -20469,9 +20459,9 @@
                 <a:ea typeface="Courier New" pitchFamily="34" charset="-122"/>
                 <a:cs typeface="Courier New" pitchFamily="34" charset="-120"/>
               </a:rPr>
-              <a:t>// available by default —</a:t>
-            </a:r>
-            <a:endParaRPr lang="en-US" sz="1250" dirty="0"/>
+              <a:t>// each category off → remove its methods</a:t>
+            </a:r>
+            <a:endParaRPr lang="en-US" sz="1100" dirty="0"/>
           </a:p>
           <a:p>
             <a:pPr algn="l" indent="0" marL="0">
@@ -20481,17 +20471,17 @@
               <a:buNone/>
             </a:pPr>
             <a:r>
-              <a:rPr lang="en-US" sz="1250" dirty="0">
-                <a:solidFill>
-                  <a:srgbClr val="8FBF9F"/>
+              <a:rPr lang="en-US" sz="1100" dirty="0">
+                <a:solidFill>
+                  <a:srgbClr val="DCEAF1"/>
                 </a:solidFill>
                 <a:latin typeface="Courier New" pitchFamily="34" charset="0"/>
                 <a:ea typeface="Courier New" pitchFamily="34" charset="-122"/>
                 <a:cs typeface="Courier New" pitchFamily="34" charset="-120"/>
               </a:rPr>
-              <a:t>// prohibit only if opted in</a:t>
-            </a:r>
-            <a:endParaRPr lang="en-US" sz="1250" dirty="0"/>
+              <a:t>add_filter( 'xmlrpc_methods', function ( $m ) {</a:t>
+            </a:r>
+            <a:endParaRPr lang="en-US" sz="1100" dirty="0"/>
           </a:p>
           <a:p>
             <a:pPr algn="l" indent="0" marL="0">
@@ -20501,7 +20491,7 @@
               <a:buNone/>
             </a:pPr>
             <a:r>
-              <a:rPr lang="en-US" sz="1250" dirty="0">
+              <a:rPr lang="en-US" sz="1100" dirty="0">
                 <a:solidFill>
                   <a:srgbClr val="DCEAF1"/>
                 </a:solidFill>
@@ -20509,9 +20499,9 @@
                 <a:ea typeface="Courier New" pitchFamily="34" charset="-122"/>
                 <a:cs typeface="Courier New" pitchFamily="34" charset="-120"/>
               </a:rPr>
-              <a:t>if ( wpyeg_defaults_enabled(</a:t>
-            </a:r>
-            <a:endParaRPr lang="en-US" sz="1250" dirty="0"/>
+              <a:t>  if ( ! allow( 'pingbacks' ) )</a:t>
+            </a:r>
+            <a:endParaRPr lang="en-US" sz="1100" dirty="0"/>
           </a:p>
           <a:p>
             <a:pPr algn="l" indent="0" marL="0">
@@ -20521,17 +20511,17 @@
               <a:buNone/>
             </a:pPr>
             <a:r>
-              <a:rPr lang="en-US" sz="1250" dirty="0">
-                <a:solidFill>
-                  <a:srgbClr val="DCEAF1"/>
+              <a:rPr lang="en-US" sz="1100" dirty="0">
+                <a:solidFill>
+                  <a:srgbClr val="E7C070"/>
                 </a:solidFill>
                 <a:latin typeface="Courier New" pitchFamily="34" charset="0"/>
                 <a:ea typeface="Courier New" pitchFamily="34" charset="-122"/>
                 <a:cs typeface="Courier New" pitchFamily="34" charset="-120"/>
               </a:rPr>
-              <a:t>       'disable_application_passwords' ) ) {</a:t>
-            </a:r>
-            <a:endParaRPr lang="en-US" sz="1250" dirty="0"/>
+              <a:t>    unset( $m['pingback.ping'] );</a:t>
+            </a:r>
+            <a:endParaRPr lang="en-US" sz="1100" dirty="0"/>
           </a:p>
           <a:p>
             <a:pPr algn="l" indent="0" marL="0">
@@ -20541,7 +20531,7 @@
               <a:buNone/>
             </a:pPr>
             <a:r>
-              <a:rPr lang="en-US" sz="1250" dirty="0">
+              <a:rPr lang="en-US" sz="1100" dirty="0">
                 <a:solidFill>
                   <a:srgbClr val="DCEAF1"/>
                 </a:solidFill>
@@ -20549,9 +20539,9 @@
                 <a:ea typeface="Courier New" pitchFamily="34" charset="-122"/>
                 <a:cs typeface="Courier New" pitchFamily="34" charset="-120"/>
               </a:rPr>
-              <a:t>  add_filter(</a:t>
-            </a:r>
-            <a:endParaRPr lang="en-US" sz="1250" dirty="0"/>
+              <a:t>  if ( ! allow( 'remote_publishing' ) )</a:t>
+            </a:r>
+            <a:endParaRPr lang="en-US" sz="1100" dirty="0"/>
           </a:p>
           <a:p>
             <a:pPr algn="l" indent="0" marL="0">
@@ -20561,17 +20551,17 @@
               <a:buNone/>
             </a:pPr>
             <a:r>
-              <a:rPr lang="en-US" sz="1250" dirty="0">
-                <a:solidFill>
-                  <a:srgbClr val="E7C070"/>
+              <a:rPr lang="en-US" sz="1100" dirty="0">
+                <a:solidFill>
+                  <a:srgbClr val="8FBF9F"/>
                 </a:solidFill>
                 <a:latin typeface="Courier New" pitchFamily="34" charset="0"/>
                 <a:ea typeface="Courier New" pitchFamily="34" charset="-122"/>
                 <a:cs typeface="Courier New" pitchFamily="34" charset="-120"/>
               </a:rPr>
-              <a:t>    'wp_is_application_passwords_available',</a:t>
-            </a:r>
-            <a:endParaRPr lang="en-US" sz="1250" dirty="0"/>
+              <a:t>    // drop wp.* metaWeblog.* mt.* blogger.*</a:t>
+            </a:r>
+            <a:endParaRPr lang="en-US" sz="1100" dirty="0"/>
           </a:p>
           <a:p>
             <a:pPr algn="l" indent="0" marL="0">
@@ -20581,17 +20571,17 @@
               <a:buNone/>
             </a:pPr>
             <a:r>
-              <a:rPr lang="en-US" sz="1250" dirty="0">
-                <a:solidFill>
-                  <a:srgbClr val="E7C070"/>
+              <a:rPr lang="en-US" sz="1100" dirty="0">
+                <a:solidFill>
+                  <a:srgbClr val="DCEAF1"/>
                 </a:solidFill>
                 <a:latin typeface="Courier New" pitchFamily="34" charset="0"/>
                 <a:ea typeface="Courier New" pitchFamily="34" charset="-122"/>
                 <a:cs typeface="Courier New" pitchFamily="34" charset="-120"/>
               </a:rPr>
-              <a:t>    '__return_false'</a:t>
-            </a:r>
-            <a:endParaRPr lang="en-US" sz="1250" dirty="0"/>
+              <a:t>  return $m;</a:t>
+            </a:r>
+            <a:endParaRPr lang="en-US" sz="1100" dirty="0"/>
           </a:p>
           <a:p>
             <a:pPr algn="l" indent="0" marL="0">
@@ -20601,7 +20591,7 @@
               <a:buNone/>
             </a:pPr>
             <a:r>
-              <a:rPr lang="en-US" sz="1250" dirty="0">
+              <a:rPr lang="en-US" sz="1100" dirty="0">
                 <a:solidFill>
                   <a:srgbClr val="DCEAF1"/>
                 </a:solidFill>
@@ -20609,9 +20599,9 @@
                 <a:ea typeface="Courier New" pitchFamily="34" charset="-122"/>
                 <a:cs typeface="Courier New" pitchFamily="34" charset="-120"/>
               </a:rPr>
-              <a:t>  );</a:t>
-            </a:r>
-            <a:endParaRPr lang="en-US" sz="1250" dirty="0"/>
+              <a:t>} );</a:t>
+            </a:r>
+            <a:endParaRPr lang="en-US" sz="1100" dirty="0"/>
           </a:p>
           <a:p>
             <a:pPr algn="l" indent="0" marL="0">
@@ -20621,7 +20611,7 @@
               <a:buNone/>
             </a:pPr>
             <a:r>
-              <a:rPr lang="en-US" sz="1250" dirty="0">
+              <a:rPr lang="en-US" sz="1100" dirty="0">
                 <a:solidFill>
                   <a:srgbClr val="DCEAF1"/>
                 </a:solidFill>
@@ -20629,9 +20619,69 @@
                 <a:ea typeface="Courier New" pitchFamily="34" charset="-122"/>
                 <a:cs typeface="Courier New" pitchFamily="34" charset="-120"/>
               </a:rPr>
-              <a:t>}</a:t>
-            </a:r>
-            <a:endParaRPr lang="en-US" sz="1250" dirty="0"/>
+              <a:t> </a:t>
+            </a:r>
+            <a:endParaRPr lang="en-US" sz="1100" dirty="0"/>
+          </a:p>
+          <a:p>
+            <a:pPr algn="l" indent="0" marL="0">
+              <a:lnSpc>
+                <a:spcPct val="108000"/>
+              </a:lnSpc>
+              <a:buNone/>
+            </a:pPr>
+            <a:r>
+              <a:rPr lang="en-US" sz="1100" dirty="0">
+                <a:solidFill>
+                  <a:srgbClr val="8FBF9F"/>
+                </a:solidFill>
+                <a:latin typeface="Courier New" pitchFamily="34" charset="0"/>
+                <a:ea typeface="Courier New" pitchFamily="34" charset="-122"/>
+                <a:cs typeface="Courier New" pitchFamily="34" charset="-120"/>
+              </a:rPr>
+              <a:t>// multicall can't be filtered off (IXR re-adds it)</a:t>
+            </a:r>
+            <a:endParaRPr lang="en-US" sz="1100" dirty="0"/>
+          </a:p>
+          <a:p>
+            <a:pPr algn="l" indent="0" marL="0">
+              <a:lnSpc>
+                <a:spcPct val="108000"/>
+              </a:lnSpc>
+              <a:buNone/>
+            </a:pPr>
+            <a:r>
+              <a:rPr lang="en-US" sz="1100" dirty="0">
+                <a:solidFill>
+                  <a:srgbClr val="8FBF9F"/>
+                </a:solidFill>
+                <a:latin typeface="Courier New" pitchFamily="34" charset="0"/>
+                <a:ea typeface="Courier New" pitchFamily="34" charset="-122"/>
+                <a:cs typeface="Courier New" pitchFamily="34" charset="-120"/>
+              </a:rPr>
+              <a:t>// → swap in a server that refuses it</a:t>
+            </a:r>
+            <a:endParaRPr lang="en-US" sz="1100" dirty="0"/>
+          </a:p>
+          <a:p>
+            <a:pPr algn="l" indent="0" marL="0">
+              <a:lnSpc>
+                <a:spcPct val="108000"/>
+              </a:lnSpc>
+              <a:buNone/>
+            </a:pPr>
+            <a:r>
+              <a:rPr lang="en-US" sz="1100" dirty="0">
+                <a:solidFill>
+                  <a:srgbClr val="E7C070"/>
+                </a:solidFill>
+                <a:latin typeface="Courier New" pitchFamily="34" charset="0"/>
+                <a:ea typeface="Courier New" pitchFamily="34" charset="-122"/>
+                <a:cs typeface="Courier New" pitchFamily="34" charset="-120"/>
+              </a:rPr>
+              <a:t>add_filter( 'wp_xmlrpc_server_class', $refuse );</a:t>
+            </a:r>
+            <a:endParaRPr lang="en-US" sz="1100" dirty="0"/>
           </a:p>
         </p:txBody>
       </p:sp>

--- a/workshop/Better-by-Default.pptx
+++ b/workshop/Better-by-Default.pptx
@@ -793,7 +793,7 @@
           <a:p>
             <a:r>
               <a:rPr lang="en-US" dirty="0"/>
-              <a:t>Two quick wins. Version hiding is obscurity, not security — but it cuts automated scanner noise. The three headers are safe defaults most sites can adopt without breaking anything:
+              <a:t>One default and one deliberate non-default — and the difference is the lesson. Hiding the version is obscurity, not hardening: it does not make an out-of-date site any safer, and it does not even hide much, since the version still leaks from asset query strings and feeds. What it genuinely buys is quieter logs. That is worth opting into, not worth shipping on and calling security — so it defaults to off. The headers are the opposite: real, low-risk defaults most sites can adopt without breaking anything:
 - X-Content-Type-Options: nosniff — the browser must trust the declared Content-Type instead of guessing; kills "a .txt the browser decides to run as JavaScript" tricks.
 - X-Frame-Options: SAMEORIGIN — only your own site may load the page in an iframe; blocks clickjacking, where your login or admin is hidden under an attacker's page.
 - Referrer-Policy: strict-origin-when-cross-origin — sends the full URL within your own site, only the bare domain to other sites, and nothing on an HTTPS→HTTP downgrade; keeps tokens and private paths from leaking in the Referer.
@@ -2205,7 +2205,7 @@
           <a:p>
             <a:r>
               <a:rPr lang="en-US" dirty="0"/>
-              <a:t>This is your screenshot slide — everything on-by-default in one view, mapped to the core hook. Two deliberate *non*-defaults worth calling out: Application Passwords stay AVAILABLE (the safer REST credential), and the login logo is LEFT ALONE unless you opt in — both are choices, not oversights.</a:t>
+              <a:t>This is your screenshot slide — everything on-by-default in one view, mapped to the core hook. Three deliberate *non*-defaults worth calling out: Application Passwords stay AVAILABLE (the safer REST credential), the login logo is LEFT ALONE unless you opt in, and removing the version fingerprint is OFF, because it is obscurity rather than hardening. All three are choices, not oversights — and the last one is the honest test of the whole talk: if a default doesn't actually make the site safer, don't ship it as security.</a:t>
             </a:r>
             <a:endParaRPr lang="en-US" dirty="0"/>
           </a:p>
@@ -4930,7 +4930,7 @@
                 <a:ea typeface="Calibri" pitchFamily="34" charset="-122"/>
                 <a:cs typeface="Calibri" pitchFamily="34" charset="-120"/>
               </a:rPr>
-              <a:t>Two quick wins. Version hiding is obscurity, not security — but it cuts automated scanner noise. The three headers are safe defaults most sites can adopt without breaking anything.</a:t>
+              <a:t>One default and one deliberate non-default. Hiding the version is obscurity, not hardening — it buys quieter logs, not a safer site — so it ships off. The three headers are real, low-risk defaults most sites can adopt without breaking anything.</a:t>
             </a:r>
             <a:endParaRPr lang="en-US" sz="1600" dirty="0"/>
           </a:p>
@@ -5016,7 +5016,7 @@
                 <a:ea typeface="Courier New" pitchFamily="34" charset="-122"/>
                 <a:cs typeface="Courier New" pitchFamily="34" charset="-120"/>
               </a:rPr>
-              <a:t>wpyeg_remove_version / wpyeg_security_headers</a:t>
+              <a:t>wpyeg_remove_version (no) / wpyeg_security_headers (yes)</a:t>
             </a:r>
             <a:pPr indent="0" marL="0">
               <a:lnSpc>
@@ -5062,7 +5062,7 @@
                 <a:ea typeface="Courier New" pitchFamily="34" charset="-122"/>
                 <a:cs typeface="Courier New" pitchFamily="34" charset="-120"/>
               </a:rPr>
-              <a:t>yes / yes</a:t>
+              <a:t>opt-in / on</a:t>
             </a:r>
             <a:endParaRPr lang="en-US" sz="1150" dirty="0"/>
           </a:p>
@@ -15267,7 +15267,7 @@
                           <a:ea typeface="Calibri" pitchFamily="34" charset="-122"/>
                           <a:cs typeface="Calibri" pitchFamily="34" charset="-120"/>
                         </a:rPr>
-                        <a:t>Remove version + security headers</a:t>
+                        <a:t>Send baseline security headers</a:t>
                       </a:r>
                       <a:endParaRPr lang="en-US" sz="1250" dirty="0">
                         <a:latin typeface="Calibri" charset="0"/>
@@ -15335,7 +15335,7 @@
                           <a:ea typeface="Courier New" pitchFamily="34" charset="-122"/>
                           <a:cs typeface="Courier New" pitchFamily="34" charset="-120"/>
                         </a:rPr>
-                        <a:t>wp_generator / wp_headers</a:t>
+                        <a:t>wp_headers</a:t>
                       </a:r>
                       <a:endParaRPr lang="en-US" sz="1100" dirty="0">
                         <a:latin typeface="Courier New" charset="0"/>

--- a/workshop/Better-by-Default.pptx
+++ b/workshop/Better-by-Default.pptx
@@ -795,9 +795,9 @@
               <a:rPr lang="en-US" dirty="0"/>
               <a:t>One default and one deliberate non-default — and the difference is the lesson. Hiding the version is obscurity, not hardening: it does not make an out-of-date site any safer, and it does not even hide much, since the version still leaks from asset query strings and feeds. What it genuinely buys is quieter logs. That is worth opting into, not worth shipping on and calling security — so it defaults to off. The headers are the opposite: real, low-risk defaults most sites can adopt without breaking anything:
 - X-Content-Type-Options: nosniff — the browser must trust the declared Content-Type instead of guessing; kills "a .txt the browser decides to run as JavaScript" tricks.
-- X-Frame-Options: SAMEORIGIN — only your own site may load the page in an iframe; blocks clickjacking, where your login or admin is hidden under an attacker's page.
 - Referrer-Policy: strict-origin-when-cross-origin — sends the full URL within your own site, only the bare domain to other sites, and nothing on an HTTPS→HTTP downgrade; keeps tokens and private paths from leaking in the Referer.
-A full Content-Security-Policy is a bigger conversation for another time!</a:t>
+X-Frame-Options is deliberately a SEPARATE setting (wpyeg_frame_options, default SAMEORIGIN), and that split is the point worth teaching. It is the only one of the three that can break a working site: blocking cross-origin framing also blocks legitimate embedding — a client intranet, a partner site, a preview tool — and it fails as a silent blank frame, which is miserable to debug. Bundled with the other two, a site that needs to be embeddable would have to give up nosniff as well.
+Note the isset() guards: a managed host or CDN often sets these already and we should not fight that layer. Be honest about the limit though — PHP only sees headers set in PHP, so one added by nginx or a CDN is invisible here. Check the response, not just the code. A full Content-Security-Policy is a bigger conversation for another time!</a:t>
             </a:r>
             <a:endParaRPr lang="en-US" dirty="0"/>
           </a:p>
@@ -1765,7 +1765,9 @@
           <a:p>
             <a:r>
               <a:rPr lang="en-US" dirty="0"/>
-              <a:t>The Heartbeat API polls admin-ajax every 15–60s. Throttle it to ease up on weak shared hosting. Deferring non-critical scripts keeps them from being render-blocking, but this can also break plugins expecting synchronous jQuery.</a:t>
+              <a:t>The Heartbeat API polls admin-ajax every 15-60s. Throttle it to ease up on weak shared hosting.
+The more interesting half of this slide is the toggle that USED to be here. We shipped a "defer front-end scripts" default that hooked script_loader_tag and string-replaced ' src=' with ' defer src=' on every handle. It had to skip jQuery core, and it still broke anything expecting a particular execution order — because a blanket filter cannot know which scripts are safe to defer.
+WordPress 6.3 added a per-script loading strategy, so core now answers this precisely, at the point of enqueue, where the person who wrote the script decides. Keeping our version would have meant teaching a workaround for a problem the platform already solved. Deleting a default is a legitimate result.</a:t>
             </a:r>
             <a:endParaRPr lang="en-US" dirty="0"/>
           </a:p>
@@ -4930,7 +4932,7 @@
                 <a:ea typeface="Calibri" pitchFamily="34" charset="-122"/>
                 <a:cs typeface="Calibri" pitchFamily="34" charset="-120"/>
               </a:rPr>
-              <a:t>One default and one deliberate non-default. Hiding the version is obscurity, not hardening — it buys quieter logs, not a safer site — so it ships off. The three headers are real, low-risk defaults most sites can adopt without breaking anything.</a:t>
+              <a:t>Two headers with no real downside ship on; framing is its own setting, because it is the only one that can break a working site. Hiding the version is obscurity, not hardening, so it ships off.</a:t>
             </a:r>
             <a:endParaRPr lang="en-US" sz="1600" dirty="0"/>
           </a:p>
@@ -5016,7 +5018,7 @@
                 <a:ea typeface="Courier New" pitchFamily="34" charset="-122"/>
                 <a:cs typeface="Courier New" pitchFamily="34" charset="-120"/>
               </a:rPr>
-              <a:t>wpyeg_remove_version (no) / wpyeg_security_headers (yes)</a:t>
+              <a:t>wpyeg_security_headers (yes) / wpyeg_frame_options (SAMEORIGIN)</a:t>
             </a:r>
             <a:pPr indent="0" marL="0">
               <a:lnSpc>
@@ -5062,7 +5064,7 @@
                 <a:ea typeface="Courier New" pitchFamily="34" charset="-122"/>
                 <a:cs typeface="Courier New" pitchFamily="34" charset="-120"/>
               </a:rPr>
-              <a:t>opt-in / on</a:t>
+              <a:t>on / separate</a:t>
             </a:r>
             <a:endParaRPr lang="en-US" sz="1150" dirty="0"/>
           </a:p>
@@ -5192,13 +5194,13 @@
             <a:r>
               <a:rPr lang="en-US" sz="1150" dirty="0">
                 <a:solidFill>
-                  <a:srgbClr val="E7C070"/>
+                  <a:srgbClr val="8FBF9F"/>
                 </a:solidFill>
                 <a:latin typeface="Courier New" pitchFamily="34" charset="0"/>
                 <a:ea typeface="Courier New" pitchFamily="34" charset="-122"/>
                 <a:cs typeface="Courier New" pitchFamily="34" charset="-120"/>
               </a:rPr>
-              <a:t>  $h['X-Content-Type-Options'] = 'nosniff';</a:t>
+              <a:t>  // only fill in what nothing else set</a:t>
             </a:r>
             <a:endParaRPr lang="en-US" sz="1150" dirty="0"/>
           </a:p>
@@ -5212,13 +5214,13 @@
             <a:r>
               <a:rPr lang="en-US" sz="1150" dirty="0">
                 <a:solidFill>
-                  <a:srgbClr val="E7C070"/>
+                  <a:srgbClr val="DCEAF1"/>
                 </a:solidFill>
                 <a:latin typeface="Courier New" pitchFamily="34" charset="0"/>
                 <a:ea typeface="Courier New" pitchFamily="34" charset="-122"/>
                 <a:cs typeface="Courier New" pitchFamily="34" charset="-120"/>
               </a:rPr>
-              <a:t>  $h['X-Frame-Options']        = 'SAMEORIGIN';</a:t>
+              <a:t>  if ( ! isset( $h['X-Content-Type-Options'] ) )</a:t>
             </a:r>
             <a:endParaRPr lang="en-US" sz="1150" dirty="0"/>
           </a:p>
@@ -5238,7 +5240,7 @@
                 <a:ea typeface="Courier New" pitchFamily="34" charset="-122"/>
                 <a:cs typeface="Courier New" pitchFamily="34" charset="-120"/>
               </a:rPr>
-              <a:t>  $h['Referrer-Policy'] =</a:t>
+              <a:t>    $h['X-Content-Type-Options'] = 'nosniff';</a:t>
             </a:r>
             <a:endParaRPr lang="en-US" sz="1150" dirty="0"/>
           </a:p>
@@ -5252,13 +5254,13 @@
             <a:r>
               <a:rPr lang="en-US" sz="1150" dirty="0">
                 <a:solidFill>
-                  <a:srgbClr val="E7C070"/>
+                  <a:srgbClr val="DCEAF1"/>
                 </a:solidFill>
                 <a:latin typeface="Courier New" pitchFamily="34" charset="0"/>
                 <a:ea typeface="Courier New" pitchFamily="34" charset="-122"/>
                 <a:cs typeface="Courier New" pitchFamily="34" charset="-120"/>
               </a:rPr>
-              <a:t>        'strict-origin-when-cross-origin';</a:t>
+              <a:t>  if ( ! isset( $h['Referrer-Policy'] ) )</a:t>
             </a:r>
             <a:endParaRPr lang="en-US" sz="1150" dirty="0"/>
           </a:p>
@@ -5272,13 +5274,13 @@
             <a:r>
               <a:rPr lang="en-US" sz="1150" dirty="0">
                 <a:solidFill>
-                  <a:srgbClr val="DCEAF1"/>
+                  <a:srgbClr val="E7C070"/>
                 </a:solidFill>
                 <a:latin typeface="Courier New" pitchFamily="34" charset="0"/>
                 <a:ea typeface="Courier New" pitchFamily="34" charset="-122"/>
                 <a:cs typeface="Courier New" pitchFamily="34" charset="-120"/>
               </a:rPr>
-              <a:t>  return $h;</a:t>
+              <a:t>    $h['Referrer-Policy'] =</a:t>
             </a:r>
             <a:endParaRPr lang="en-US" sz="1150" dirty="0"/>
           </a:p>
@@ -5292,13 +5294,73 @@
             <a:r>
               <a:rPr lang="en-US" sz="1150" dirty="0">
                 <a:solidFill>
-                  <a:srgbClr val="DCEAF1"/>
+                  <a:srgbClr val="E7C070"/>
                 </a:solidFill>
                 <a:latin typeface="Courier New" pitchFamily="34" charset="0"/>
                 <a:ea typeface="Courier New" pitchFamily="34" charset="-122"/>
                 <a:cs typeface="Courier New" pitchFamily="34" charset="-120"/>
               </a:rPr>
+              <a:t>      'strict-origin-when-cross-origin';</a:t>
+            </a:r>
+            <a:endParaRPr lang="en-US" sz="1150" dirty="0"/>
+          </a:p>
+          <a:p>
+            <a:pPr algn="l" indent="0" marL="0">
+              <a:lnSpc>
+                <a:spcPct val="108000"/>
+              </a:lnSpc>
+              <a:buNone/>
+            </a:pPr>
+            <a:r>
+              <a:rPr lang="en-US" sz="1150" dirty="0">
+                <a:solidFill>
+                  <a:srgbClr val="DCEAF1"/>
+                </a:solidFill>
+                <a:latin typeface="Courier New" pitchFamily="34" charset="0"/>
+                <a:ea typeface="Courier New" pitchFamily="34" charset="-122"/>
+                <a:cs typeface="Courier New" pitchFamily="34" charset="-120"/>
+              </a:rPr>
+              <a:t>  return $h;</a:t>
+            </a:r>
+            <a:endParaRPr lang="en-US" sz="1150" dirty="0"/>
+          </a:p>
+          <a:p>
+            <a:pPr algn="l" indent="0" marL="0">
+              <a:lnSpc>
+                <a:spcPct val="108000"/>
+              </a:lnSpc>
+              <a:buNone/>
+            </a:pPr>
+            <a:r>
+              <a:rPr lang="en-US" sz="1150" dirty="0">
+                <a:solidFill>
+                  <a:srgbClr val="DCEAF1"/>
+                </a:solidFill>
+                <a:latin typeface="Courier New" pitchFamily="34" charset="0"/>
+                <a:ea typeface="Courier New" pitchFamily="34" charset="-122"/>
+                <a:cs typeface="Courier New" pitchFamily="34" charset="-120"/>
+              </a:rPr>
               <a:t>} );</a:t>
+            </a:r>
+            <a:endParaRPr lang="en-US" sz="1150" dirty="0"/>
+          </a:p>
+          <a:p>
+            <a:pPr algn="l" indent="0" marL="0">
+              <a:lnSpc>
+                <a:spcPct val="108000"/>
+              </a:lnSpc>
+              <a:buNone/>
+            </a:pPr>
+            <a:r>
+              <a:rPr lang="en-US" sz="1150" dirty="0">
+                <a:solidFill>
+                  <a:srgbClr val="8FBF9F"/>
+                </a:solidFill>
+                <a:latin typeface="Courier New" pitchFamily="34" charset="0"/>
+                <a:ea typeface="Courier New" pitchFamily="34" charset="-122"/>
+                <a:cs typeface="Courier New" pitchFamily="34" charset="-120"/>
+              </a:rPr>
+              <a:t>// framing is its own setting - see the notes</a:t>
             </a:r>
             <a:endParaRPr lang="en-US" sz="1150" dirty="0"/>
           </a:p>
@@ -10773,7 +10835,7 @@
                 <a:ea typeface="Cambria" pitchFamily="34" charset="-122"/>
                 <a:cs typeface="Cambria" pitchFamily="34" charset="-120"/>
               </a:rPr>
-              <a:t>Throttle Heartbeat, defer scripts (opt-in)</a:t>
+              <a:t>Throttle Heartbeat — and a default we deleted</a:t>
             </a:r>
             <a:endParaRPr lang="en-US" sz="3000" dirty="0"/>
           </a:p>
@@ -10815,7 +10877,7 @@
                 <a:ea typeface="Calibri" pitchFamily="34" charset="-122"/>
                 <a:cs typeface="Calibri" pitchFamily="34" charset="-120"/>
               </a:rPr>
-              <a:t>The Heartbeat API polls admin-ajax every 15–60s; throttle it to ease up on weak shared hosting. Deferring non-critical scripts keeps them from being render-blocking.</a:t>
+              <a:t>Throttle Heartbeat to ease up on weak shared hosting. The more interesting half is the toggle that used to be here: WordPress 6.3 gave scripts a per-script loading strategy, so our blanket defer filter had to go.</a:t>
             </a:r>
             <a:endParaRPr lang="en-US" sz="1600" dirty="0"/>
           </a:p>
@@ -10901,7 +10963,7 @@
                 <a:ea typeface="Courier New" pitchFamily="34" charset="-122"/>
                 <a:cs typeface="Courier New" pitchFamily="34" charset="-120"/>
               </a:rPr>
-              <a:t>wpyeg_throttle_heartbeat / wpyeg_defer_scripts</a:t>
+              <a:t>wpyeg_throttle_heartbeat</a:t>
             </a:r>
             <a:pPr indent="0" marL="0">
               <a:lnSpc>
@@ -10947,7 +11009,7 @@
                 <a:ea typeface="Courier New" pitchFamily="34" charset="-122"/>
                 <a:cs typeface="Courier New" pitchFamily="34" charset="-120"/>
               </a:rPr>
-              <a:t>no / no</a:t>
+              <a:t>no (opt-in)</a:t>
             </a:r>
             <a:endParaRPr lang="en-US" sz="1150" dirty="0"/>
           </a:p>
@@ -11097,13 +11159,13 @@
             <a:r>
               <a:rPr lang="en-US" sz="1150" dirty="0">
                 <a:solidFill>
-                  <a:srgbClr val="DCEAF1"/>
+                  <a:srgbClr val="8FBF9F"/>
                 </a:solidFill>
                 <a:latin typeface="Courier New" pitchFamily="34" charset="0"/>
                 <a:ea typeface="Courier New" pitchFamily="34" charset="-122"/>
                 <a:cs typeface="Courier New" pitchFamily="34" charset="-120"/>
               </a:rPr>
-              <a:t>add_filter( 'script_loader_tag',</a:t>
+              <a:t>// Deferring is NOT a setting here. Since WP 6.3:</a:t>
             </a:r>
             <a:endParaRPr lang="en-US" sz="1150" dirty="0"/>
           </a:p>
@@ -11123,7 +11185,7 @@
                 <a:ea typeface="Courier New" pitchFamily="34" charset="-122"/>
                 <a:cs typeface="Courier New" pitchFamily="34" charset="-120"/>
               </a:rPr>
-              <a:t>  function ( $tag, $handle ) {</a:t>
+              <a:t>wp_enqueue_script( 'front', $src, array(), '1.0',</a:t>
             </a:r>
             <a:endParaRPr lang="en-US" sz="1150" dirty="0"/>
           </a:p>
@@ -11137,53 +11199,13 @@
             <a:r>
               <a:rPr lang="en-US" sz="1150" dirty="0">
                 <a:solidFill>
-                  <a:srgbClr val="8FBF9F"/>
+                  <a:srgbClr val="E7C070"/>
                 </a:solidFill>
                 <a:latin typeface="Courier New" pitchFamily="34" charset="0"/>
                 <a:ea typeface="Courier New" pitchFamily="34" charset="-122"/>
                 <a:cs typeface="Courier New" pitchFamily="34" charset="-120"/>
               </a:rPr>
-              <a:t>    // add ' defer' (skip jquery-core)</a:t>
-            </a:r>
-            <a:endParaRPr lang="en-US" sz="1150" dirty="0"/>
-          </a:p>
-          <a:p>
-            <a:pPr algn="l" indent="0" marL="0">
-              <a:lnSpc>
-                <a:spcPct val="108000"/>
-              </a:lnSpc>
-              <a:buNone/>
-            </a:pPr>
-            <a:r>
-              <a:rPr lang="en-US" sz="1150" dirty="0">
-                <a:solidFill>
-                  <a:srgbClr val="DCEAF1"/>
-                </a:solidFill>
-                <a:latin typeface="Courier New" pitchFamily="34" charset="0"/>
-                <a:ea typeface="Courier New" pitchFamily="34" charset="-122"/>
-                <a:cs typeface="Courier New" pitchFamily="34" charset="-120"/>
-              </a:rPr>
-              <a:t>    return $tag;</a:t>
-            </a:r>
-            <a:endParaRPr lang="en-US" sz="1150" dirty="0"/>
-          </a:p>
-          <a:p>
-            <a:pPr algn="l" indent="0" marL="0">
-              <a:lnSpc>
-                <a:spcPct val="108000"/>
-              </a:lnSpc>
-              <a:buNone/>
-            </a:pPr>
-            <a:r>
-              <a:rPr lang="en-US" sz="1150" dirty="0">
-                <a:solidFill>
-                  <a:srgbClr val="DCEAF1"/>
-                </a:solidFill>
-                <a:latin typeface="Courier New" pitchFamily="34" charset="0"/>
-                <a:ea typeface="Courier New" pitchFamily="34" charset="-122"/>
-                <a:cs typeface="Courier New" pitchFamily="34" charset="-120"/>
-              </a:rPr>
-              <a:t>}, 10, 2 );</a:t>
+              <a:t>  array( 'strategy' =&gt; 'defer' ) );</a:t>
             </a:r>
             <a:endParaRPr lang="en-US" sz="1150" dirty="0"/>
           </a:p>

--- a/workshop/Better-by-Default.pptx
+++ b/workshop/Better-by-Default.pptx
@@ -1061,7 +1061,9 @@
           <a:p>
             <a:r>
               <a:rPr lang="en-US" dirty="0"/>
-              <a:t>Like the REST user routes, author archives expose the authors' usernames in the URL, and attachment pages are near-empty media wrappers. Both dilute SEO and are targets for trouble. template_redirect fires before a template loads — the perfect place to bounce the unwanted requests. Same hook, two conditions.</a:t>
+              <a:t>Like the REST user routes, author archives expose the authors' usernames in the URL, and attachment pages are near-empty media wrappers. template_redirect fires before a template loads - the perfect place to bounce the unwanted requests. Same hook, two conditions.
+Two details on the attachment half, because the obvious version is subtly wrong. Unattached media has no parent - and that is most of the Media Library - so a naive else-home_url() points every one of those at your homepage, which search engines read as a soft 404. Fall back to the FILE instead, which is what core does. And skip the redirect entirely when the theme ships attachment.php or image.php: that theme built those pages deliberately (the photography case), and quietly bouncing past it deletes someone's feature.
+Core moved here too: WordPress 6.4 added wp_attachment_pages_enabled, off for new installs. So this default is not adding the redirect so much as choosing a better destination than the bare file.</a:t>
             </a:r>
             <a:endParaRPr lang="en-US" dirty="0"/>
           </a:p>
@@ -6769,7 +6771,7 @@
                 <a:ea typeface="Courier New" pitchFamily="34" charset="-122"/>
                 <a:cs typeface="Courier New" pitchFamily="34" charset="-120"/>
               </a:rPr>
-              <a:t>    // 301 to parent post, or home</a:t>
+              <a:t>    // parent post, else the FILE - never home</a:t>
             </a:r>
             <a:endParaRPr lang="en-US" sz="1150" dirty="0"/>
           </a:p>

--- a/workshop/Better-by-Default.pptx
+++ b/workshop/Better-by-Default.pptx
@@ -2209,7 +2209,7 @@
           <a:p>
             <a:r>
               <a:rPr lang="en-US" dirty="0"/>
-              <a:t>This is your screenshot slide — everything on-by-default in one view, mapped to the core hook. Three deliberate *non*-defaults worth calling out: Application Passwords stay AVAILABLE (the safer REST credential), the login logo is LEFT ALONE unless you opt in, and removing the version fingerprint is OFF, because it is obscurity rather than hardening. All three are choices, not oversights — and the last one is the honest test of the whole talk: if a default doesn't actually make the site safer, don't ship it as security.</a:t>
+              <a:t>This is your screenshot slide — everything on-by-default in one view, mapped to the core hook. Updates follow the same principle: maintenance/security core releases and translations install automatically; major core releases wait for testing; plugin and theme code keeps its per-item WordPress setting because version numbers do not reliably identify risk. Three deliberate non-defaults worth calling out: Application Passwords stay AVAILABLE, the login logo is LEFT ALONE, and removing the version fingerprint is OFF because it is obscurity rather than hardening.</a:t>
             </a:r>
             <a:endParaRPr lang="en-US" dirty="0"/>
           </a:p>
@@ -2913,12 +2913,12 @@
           <a:p>
             <a:r>
               <a:rPr lang="en-US" dirty="0"/>
-              <a:t>XML-RPC isn't one door — it's an old switchboard, and every method is a phone line. Rather than rip the box off the wall, we unplug lines by category. Four switches, all off by default:
-1. Pingbacks — drop pingback.ping, a spam and reflection-DDoS relay.
-2. Remote publishing — drop the credential-authenticated blogging methods (wp.*, metaWeblog.*, mt.*, blogger.*), the classic brute-force target. This also flips xmlrpc_enabled off and removes the RSD discovery link.
-3. system.multicall — the amplifier that batches thousands of login guesses into one request. You can't just unset it: IXR_Server::setCallbacks() re-adds it after the filter runs, so we swap in a replacement server that refuses it.
-4. Block the endpoint — the blunt hammer: xmlrpc.php returns 403 for everything.
-The first three are surgical — they leave third-party methods like Jetpack's jetpack.* connected, so the endpoint stays usable. The fourth nukes the lot, which breaks Jetpack; reach for it only if nothing on the site speaks XML-RPC.
+              <a:t>XML-RPC is a legitimate but aging API, not a backdoor or an emergency. It is an old switchboard where every method is a phone line. Rather than rip out a connection that Jetpack or a publishing client may need, we unplug unused lines by category. Four switches, all off by default:
+1. Pingbacks — drop pingback.ping, the clearest live nuisance and reflection-DDoS surface. A valid call performs database work, waits a second, and fetches the claimed source URL.
+2. Remote publishing — drop the credential-authenticated blogging methods (wp.*, metaWeblog.*, mt.*, blogger.*), another password-guessing entrance when legacy clients are not needed. This also flips xmlrpc_enabled off and removes the RSD discovery link.
+3. system.multicall — refuse a general batching wrapper with little established modern use. WordPress 4.4 stopped testing credentials after the first failed login in one XML-RPC request, so the old 'thousands of guesses' story is obsolete. Multicall can still batch other work, including pingbacks, but it does not enable pingback abuse.
+4. Block the endpoint — the blunt hammer: xmlrpc.php returns 403 for everything. Prefer doing this at the CDN, WAF, or web server so the request never consumes PHP.
+The first three are surgical and leave third-party registrations such as Jetpack's jetpack.* in place. That is not a compatibility guarantee: keep the endpoint reachable, leave Remote Publishing enabled until testing proves it unnecessary, and test the Jetpack connection and features after method changes. Block the endpoint only when nothing on the site speaks XML-RPC.
 [Aside — what's "IXR"? The Incutio XML-RPC library. Simon Willison released it in September 2002, one of his first open-source projects, while blogging from the University of Bath; both WordPress *and* Drupal adopted it, and it then sat largely untouched for 15+ years — long enough to pick up a CVE. Willison went on to co-create Django (2003–05 at the Lawrence Journal-World), build Lanyrd (sold to Eventbrite in 2013) and Datasette (2017), and is now one of the most-read writers on LLMs.]</a:t>
             </a:r>
             <a:endParaRPr lang="en-US" dirty="0"/>
@@ -9417,7 +9417,7 @@
                 <a:ea typeface="Cambria" pitchFamily="34" charset="-122"/>
                 <a:cs typeface="Cambria" pitchFamily="34" charset="-120"/>
               </a:rPr>
-              <a:t>Legacy XML-RPC wide open</a:t>
+              <a:t>Aging XML-RPC exposed</a:t>
             </a:r>
             <a:endParaRPr lang="en-US" sz="1900" dirty="0"/>
           </a:p>
@@ -9456,7 +9456,7 @@
                 <a:ea typeface="Calibri" pitchFamily="34" charset="-122"/>
                 <a:cs typeface="Calibri" pitchFamily="34" charset="-120"/>
               </a:rPr>
-              <a:t>Pingback and system.multicall amplifiers answer by default.</a:t>
+              <a:t>Unwanted pingbacks and unused methods add work and attack surface.</a:t>
             </a:r>
             <a:endParaRPr lang="en-US" sz="1400" dirty="0"/>
           </a:p>
@@ -16097,6 +16097,212 @@
                   </a:tcPr>
                 </a:tc>
               </a:tr>
+              <a:tr h="402336">
+                <a:tc>
+                  <a:txBody>
+                    <a:bodyPr/>
+                    <a:lstStyle/>
+                    <a:p>
+                      <a:pPr algn="l" indent="0" marL="0">
+                        <a:buNone/>
+                      </a:pPr>
+                      <a:r>
+                        <a:rPr lang="en-US" sz="1250" dirty="0">
+                          <a:solidFill>
+                            <a:srgbClr val="0F2733"/>
+                          </a:solidFill>
+                          <a:latin typeface="Calibri" pitchFamily="34" charset="0"/>
+                          <a:ea typeface="Calibri" pitchFamily="34" charset="-122"/>
+                          <a:cs typeface="Calibri" pitchFamily="34" charset="-120"/>
+                        </a:rPr>
+                        <a:t>Auto-update core security/maintenance + translations</a:t>
+                      </a:r>
+                      <a:endParaRPr lang="en-US" sz="1250" dirty="0">
+                        <a:latin typeface="Calibri" charset="0"/>
+                        <a:ea typeface="Calibri" charset="0"/>
+                        <a:cs typeface="Calibri" charset="0"/>
+                      </a:endParaRPr>
+                    </a:p>
+                  </a:txBody>
+                  <a:tcPr marL="50800" marR="50800" marT="50800" marB="50800" anchor="ctr">
+                    <a:lnL w="12700" cap="flat" cmpd="sng" algn="ctr">
+                      <a:solidFill>
+                        <a:srgbClr val="DCE6EB"/>
+                      </a:solidFill>
+                      <a:prstDash val="solid"/>
+                      <a:round/>
+                      <a:headEnd type="none" w="med" len="med"/>
+                      <a:tailEnd type="none" w="med" len="med"/>
+                    </a:lnL>
+                    <a:lnR w="12700" cap="flat" cmpd="sng" algn="ctr">
+                      <a:solidFill>
+                        <a:srgbClr val="DCE6EB"/>
+                      </a:solidFill>
+                      <a:prstDash val="solid"/>
+                      <a:round/>
+                      <a:headEnd type="none" w="med" len="med"/>
+                      <a:tailEnd type="none" w="med" len="med"/>
+                    </a:lnR>
+                    <a:lnT w="12700" cap="flat" cmpd="sng" algn="ctr">
+                      <a:solidFill>
+                        <a:srgbClr val="DCE6EB"/>
+                      </a:solidFill>
+                      <a:prstDash val="solid"/>
+                      <a:round/>
+                      <a:headEnd type="none" w="med" len="med"/>
+                      <a:tailEnd type="none" w="med" len="med"/>
+                    </a:lnT>
+                    <a:lnB w="12700" cap="flat" cmpd="sng" algn="ctr">
+                      <a:solidFill>
+                        <a:srgbClr val="DCE6EB"/>
+                      </a:solidFill>
+                      <a:prstDash val="solid"/>
+                      <a:round/>
+                      <a:headEnd type="none" w="med" len="med"/>
+                      <a:tailEnd type="none" w="med" len="med"/>
+                    </a:lnB>
+                    <a:solidFill>
+                      <a:srgbClr val="EAF1F5"/>
+                    </a:solidFill>
+                  </a:tcPr>
+                </a:tc>
+                <a:tc>
+                  <a:txBody>
+                    <a:bodyPr/>
+                    <a:lstStyle/>
+                    <a:p>
+                      <a:pPr algn="l" indent="0" marL="0">
+                        <a:buNone/>
+                      </a:pPr>
+                      <a:r>
+                        <a:rPr lang="en-US" sz="1100" dirty="0">
+                          <a:solidFill>
+                            <a:srgbClr val="27607A"/>
+                          </a:solidFill>
+                          <a:latin typeface="Courier New" pitchFamily="34" charset="0"/>
+                          <a:ea typeface="Courier New" pitchFamily="34" charset="-122"/>
+                          <a:cs typeface="Courier New" pitchFamily="34" charset="-120"/>
+                        </a:rPr>
+                        <a:t>allow_minor_auto_core_updates / auto_update_translation</a:t>
+                      </a:r>
+                      <a:endParaRPr lang="en-US" sz="1100" dirty="0">
+                        <a:latin typeface="Courier New" charset="0"/>
+                        <a:ea typeface="Courier New" charset="0"/>
+                        <a:cs typeface="Courier New" charset="0"/>
+                      </a:endParaRPr>
+                    </a:p>
+                  </a:txBody>
+                  <a:tcPr marL="50800" marR="50800" marT="50800" marB="50800" anchor="ctr">
+                    <a:lnL w="12700" cap="flat" cmpd="sng" algn="ctr">
+                      <a:solidFill>
+                        <a:srgbClr val="DCE6EB"/>
+                      </a:solidFill>
+                      <a:prstDash val="solid"/>
+                      <a:round/>
+                      <a:headEnd type="none" w="med" len="med"/>
+                      <a:tailEnd type="none" w="med" len="med"/>
+                    </a:lnL>
+                    <a:lnR w="12700" cap="flat" cmpd="sng" algn="ctr">
+                      <a:solidFill>
+                        <a:srgbClr val="DCE6EB"/>
+                      </a:solidFill>
+                      <a:prstDash val="solid"/>
+                      <a:round/>
+                      <a:headEnd type="none" w="med" len="med"/>
+                      <a:tailEnd type="none" w="med" len="med"/>
+                    </a:lnR>
+                    <a:lnT w="12700" cap="flat" cmpd="sng" algn="ctr">
+                      <a:solidFill>
+                        <a:srgbClr val="DCE6EB"/>
+                      </a:solidFill>
+                      <a:prstDash val="solid"/>
+                      <a:round/>
+                      <a:headEnd type="none" w="med" len="med"/>
+                      <a:tailEnd type="none" w="med" len="med"/>
+                    </a:lnT>
+                    <a:lnB w="12700" cap="flat" cmpd="sng" algn="ctr">
+                      <a:solidFill>
+                        <a:srgbClr val="DCE6EB"/>
+                      </a:solidFill>
+                      <a:prstDash val="solid"/>
+                      <a:round/>
+                      <a:headEnd type="none" w="med" len="med"/>
+                      <a:tailEnd type="none" w="med" len="med"/>
+                    </a:lnB>
+                    <a:solidFill>
+                      <a:srgbClr val="EAF1F5"/>
+                    </a:solidFill>
+                  </a:tcPr>
+                </a:tc>
+                <a:tc>
+                  <a:txBody>
+                    <a:bodyPr/>
+                    <a:lstStyle/>
+                    <a:p>
+                      <a:pPr algn="l" indent="0" marL="0">
+                        <a:buNone/>
+                      </a:pPr>
+                      <a:r>
+                        <a:rPr lang="en-US" sz="1200" dirty="0">
+                          <a:solidFill>
+                            <a:srgbClr val="4A5A63"/>
+                          </a:solidFill>
+                          <a:latin typeface="Calibri" pitchFamily="34" charset="0"/>
+                          <a:ea typeface="Calibri" pitchFamily="34" charset="-122"/>
+                          <a:cs typeface="Calibri" pitchFamily="34" charset="-120"/>
+                        </a:rPr>
+                        <a:t>Updates</a:t>
+                      </a:r>
+                      <a:endParaRPr lang="en-US" sz="1200" dirty="0">
+                        <a:latin typeface="Calibri" charset="0"/>
+                        <a:ea typeface="Calibri" charset="0"/>
+                        <a:cs typeface="Calibri" charset="0"/>
+                      </a:endParaRPr>
+                    </a:p>
+                  </a:txBody>
+                  <a:tcPr marL="50800" marR="50800" marT="50800" marB="50800" anchor="ctr">
+                    <a:lnL w="12700" cap="flat" cmpd="sng" algn="ctr">
+                      <a:solidFill>
+                        <a:srgbClr val="DCE6EB"/>
+                      </a:solidFill>
+                      <a:prstDash val="solid"/>
+                      <a:round/>
+                      <a:headEnd type="none" w="med" len="med"/>
+                      <a:tailEnd type="none" w="med" len="med"/>
+                    </a:lnL>
+                    <a:lnR w="12700" cap="flat" cmpd="sng" algn="ctr">
+                      <a:solidFill>
+                        <a:srgbClr val="DCE6EB"/>
+                      </a:solidFill>
+                      <a:prstDash val="solid"/>
+                      <a:round/>
+                      <a:headEnd type="none" w="med" len="med"/>
+                      <a:tailEnd type="none" w="med" len="med"/>
+                    </a:lnR>
+                    <a:lnT w="12700" cap="flat" cmpd="sng" algn="ctr">
+                      <a:solidFill>
+                        <a:srgbClr val="DCE6EB"/>
+                      </a:solidFill>
+                      <a:prstDash val="solid"/>
+                      <a:round/>
+                      <a:headEnd type="none" w="med" len="med"/>
+                      <a:tailEnd type="none" w="med" len="med"/>
+                    </a:lnT>
+                    <a:lnB w="12700" cap="flat" cmpd="sng" algn="ctr">
+                      <a:solidFill>
+                        <a:srgbClr val="DCE6EB"/>
+                      </a:solidFill>
+                      <a:prstDash val="solid"/>
+                      <a:round/>
+                      <a:headEnd type="none" w="med" len="med"/>
+                      <a:tailEnd type="none" w="med" len="med"/>
+                    </a:lnB>
+                    <a:solidFill>
+                      <a:srgbClr val="EAF1F5"/>
+                    </a:solidFill>
+                  </a:tcPr>
+                </a:tc>
+              </a:tr>
             </a:tbl>
           </a:graphicData>
         </a:graphic>
@@ -20275,7 +20481,7 @@
                 <a:ea typeface="Calibri" pitchFamily="34" charset="-122"/>
                 <a:cs typeface="Calibri" pitchFamily="34" charset="-120"/>
               </a:rPr>
-              <a:t>XML-RPC isn't one door — it's an old switchboard, and every method is a phone line. Rather than rip the box off the wall, we unplug lines by category. Four switches, all off by default.</a:t>
+              <a:t>XML-RPC is legitimate but aging — an extra surface, not a backdoor. We unplug unused method families while preserving the endpoint for integrations that need it.</a:t>
             </a:r>
             <a:endParaRPr lang="en-US" sz="1600" dirty="0"/>
           </a:p>

--- a/workshop/Better-by-Default.pptx
+++ b/workshop/Better-by-Default.pptx
@@ -2297,7 +2297,7 @@
           <a:p>
             <a:r>
               <a:rPr lang="en-US" dirty="0"/>
-              <a:t>Hand out the zip and the reference doc. Invite everyone to add their own favorite default to the schema and share it back with the group.</a:t>
+              <a:t>Hand out the zip and the reference doc. Invite everyone to add their own favourite default to the schema and share it back with the group.</a:t>
             </a:r>
             <a:endParaRPr lang="en-US" dirty="0"/>
           </a:p>
@@ -2473,7 +2473,7 @@
           <a:p>
             <a:r>
               <a:rPr lang="en-US" dirty="0"/>
-              <a:t>WordPress is built to be interrupted at labeled moments (hooks) so you never edit core code. __return_false is a tiny built-in helper that just hands back false — perfect for switching a feature off.</a:t>
+              <a:t>WordPress is built to be interrupted at labelled moments (hooks) so you never edit core code. __return_false is a tiny built-in helper that just hands back false — perfect for switching a feature off.</a:t>
             </a:r>
             <a:endParaRPr lang="en-US" dirty="0"/>
           </a:p>
@@ -13729,7 +13729,7 @@
                 <a:ea typeface="Calibri" pitchFamily="34" charset="-122"/>
                 <a:cs typeface="Calibri" pitchFamily="34" charset="-120"/>
               </a:rPr>
-              <a:t>Flip a switch off, reload, watch the behavior change.</a:t>
+              <a:t>Flip a switch off, reload, watch the behaviour change.</a:t>
             </a:r>
             <a:endParaRPr lang="en-US" sz="1400" dirty="0"/>
           </a:p>
@@ -17095,7 +17095,7 @@
                 <a:ea typeface="Calibri" pitchFamily="34" charset="-122"/>
                 <a:cs typeface="Calibri" pitchFamily="34" charset="-120"/>
               </a:rPr>
-              <a:t>WordPress is built to be interrupted at labeled moments (hooks) so you never edit core code.</a:t>
+              <a:t>WordPress is built to be interrupted at labelled moments (hooks) so you never edit core code.</a:t>
             </a:r>
             <a:endParaRPr lang="en-US" sz="1600" dirty="0"/>
           </a:p>

--- a/workshop/Better-by-Default.pptx
+++ b/workshop/Better-by-Default.pptx
@@ -529,7 +529,7 @@
           <a:p>
             <a:r>
               <a:rPr lang="en-US" dirty="0"/>
-              <a:t>Welcome to WPYEG. In this workshop we're building and reviewing a small plugin that defines and activates a dozen sensible defaults for WordPress sites in 2026. Whether you write PHP daily or just manage WordPress sites, you'll leave knowing why each default matters and how to enable (or disable) it.</a:t>
+              <a:t>Welcome to WPYEG. In this workshop we're building and reviewing a small plugin that defines and activates 27 sensible but little-known and seldom used defaults for WordPress sites in 2026. Whether you write PHP daily or just manage WordPress sites, you'll leave knowing why each default matters and how to enable (or disable) it. This workshop and plugin distils years of experience and new learning from a recent project that I've summed up in this workshop.</a:t>
             </a:r>
             <a:endParaRPr lang="en-US" dirty="0"/>
           </a:p>
@@ -1503,7 +1503,7 @@
           <a:p>
             <a:r>
               <a:rPr lang="en-US" dirty="0"/>
-              <a:t>None of these are bugs. They are defaults chosen for maximum compatibility on a 20+ year-old web application. You probably don't need them and can tighten up your own WordPress sites. This is also a good way to learn some important fundamentals about how WordPress works and how to keep it secure, fast, and pretty.</a:t>
+              <a:t>NONE OF THESE ARE BUGS or quite the security risks popular human and AI opinion allege. They are defaults chosen for maximum compatibility on a 20+ year-old web application. You probably don't need them and can tighten up your own WordPress sites unless you're into the IndieWeb and radical open source anarchism, which I highly recommend. Probing the oldest parts of WordPress is a good way to learn some history and important fundamentals about how WordPress works — and how to keep it secure, fast, and pretty.</a:t>
             </a:r>
             <a:endParaRPr lang="en-US" dirty="0"/>
           </a:p>
@@ -2385,7 +2385,7 @@
           <a:p>
             <a:r>
               <a:rPr lang="en-US" dirty="0"/>
-              <a:t>In our demo plugin, a default is an add_filter behind an if ( option ). We have twenty of them.</a:t>
+              <a:t>In our demo plugin, a default is an add_filter behind an if ( option ). We have 27 settings built around that pattern.</a:t>
             </a:r>
             <a:endParaRPr lang="en-US" dirty="0"/>
           </a:p>
@@ -2561,7 +2561,7 @@
           <a:p>
             <a:r>
               <a:rPr lang="en-US" dirty="0"/>
-              <a:t>We'll spend most of our time on security and content, then move quickly through UX, login, branding, and performance, and end up with a plugin that covers them all.</a:t>
+              <a:t>We'll spend most of our time on security and content, then move quickly through updates, UX, login, branding, and performance, and we'll end up with a plugin that covers them all.</a:t>
             </a:r>
             <a:endParaRPr lang="en-US" dirty="0"/>
           </a:p>
@@ -2737,7 +2737,7 @@
           <a:p>
             <a:r>
               <a:rPr lang="en-US" dirty="0"/>
-              <a:t>The /wp/v2/users endpoint hands out every author's login name to anyone — half of a brute-force guess, for free. Author enumeration is step one of many attack scripts. By closing it for logged-out requests only, the editor and legit integrations will keep working. It's arguably an example of security-by-obscurity, but it also prevents a lot of junk traffic and bots that are up to no good.</a:t>
+              <a:t>The /wp/v2/users endpoint exposes every public author's name, ID, profile link, and slug to anyone. Because an author slug often resembles a login name, that gives attack scripts a useful credential hint for free. By closing the user-list and numeric user routes for logged-out requests only, the editor and legitimate integrations keep working while anonymous enumeration attempts receive an ordinary 404. It's partly security by obscurity — not a substitute for strong passwords, MFA, or rate limiting — but it also rejects junk requests from bots that are up to no good. Why spend even a few extra electrons helping them? Author archives take the separate path we'll see later: a 301 to the homepage. If probes persist, a properly configured host can count those request patterns and ban the source IP with Fail2Ban or a similar tool such as CrowdSec, SSHGuard, or Defensia.</a:t>
             </a:r>
             <a:endParaRPr lang="en-US" dirty="0"/>
           </a:p>
@@ -2825,7 +2825,7 @@
           <a:p>
             <a:r>
               <a:rPr lang="en-US" dirty="0"/>
-              <a:t>The sledgehammer version of the slide before. Requiring auth for ALL REST calls stops anonymous scraping cold. It does *not* break the block editor, though — you're logged in there, and the editor authenticates with your cookie plus a REST nonce, so it sails through this filter. What it breaks is ANONYMOUS REST: front-end blocks that fetch data for logged-out visitors, embeds, search, and outside integrations. That's why it ships off. Not every default should default to on; some are opt-in because they trade functionality for safety. Usually it's a better tradeoff to restrict a few REST routes — like the users endpoint we just closed — than to lock ALL of them.</a:t>
+              <a:t>This is the sledgehammer version of the slide before. Requiring auth for ALL REST calls stops anonymous scraping cold. It does *not* break the block editor, though — you're logged in there, and the editor authenticates with your cookie plus a REST nonce, so it sails through this filter. What it breaks is ANONYMOUS REST: front-end blocks that fetch data for logged-out visitors, embeds, search, and outside integrations. That's why it ships off. Not every default should default to on; some are opt-in because they trade functionality for safety. Usually it's a better tradeoff to restrict a few REST routes — like the users endpoint we just closed — than to lock ALL of them.</a:t>
             </a:r>
             <a:endParaRPr lang="en-US" dirty="0"/>
           </a:p>
@@ -2913,10 +2913,10 @@
           <a:p>
             <a:r>
               <a:rPr lang="en-US" dirty="0"/>
-              <a:t>XML-RPC is a legitimate but aging API, not a backdoor or an emergency. It is an old switchboard where every method is a phone line. Rather than rip out a connection that Jetpack or a publishing client may need, we unplug unused lines by category. Four switches, all off by default:
-1. Pingbacks — drop pingback.ping, the clearest live nuisance and reflection-DDoS surface. A valid call performs database work, waits a second, and fetches the claimed source URL.
+              <a:t>XML-RPC is a legitimate but aging API. (Mad love to Dave Winer!) It's not a backdoor or an emergency. It is an old switchboard where every method is a phone line. Rather than rip out a connection that Jetpack or a publishing client may need, we unplug unused lines by category. Four switches, all off by default:
+1. Pingbacks — drop pingback.ping, the clearest live nuisance and reflection-DDoS surface. A valid call performs database work, waits a second, and fetches the claimed source URL. Keep it if you're a crusty punk who loves the IndieWeb and everything before Facebook turned everything to shit, ca. 2005.
 2. Remote publishing — drop the credential-authenticated blogging methods (wp.*, metaWeblog.*, mt.*, blogger.*), another password-guessing entrance when legacy clients are not needed. This also flips xmlrpc_enabled off and removes the RSD discovery link.
-3. system.multicall — refuse a general batching wrapper with little established modern use. WordPress 4.4 stopped testing credentials after the first failed login in one XML-RPC request, so the old 'thousands of guesses' story is obsolete. Multicall can still batch other work, including pingbacks, but it does not enable pingback abuse.
+3. system.multicall — refuse a general batching wrapper with little established modern use. WordPress 4.4 stopped testing credentials after the first failed login in one XML-RPC request, so the old 'thousands of guesses' story is obsolete. (To this day, people say XML-RPC is some kind of open, free credential verification oracle — NOT TRUE.) Multicall can still batch other work, including pingbacks, but it does not enable pingback abuse.
 4. Block the endpoint — the blunt hammer: xmlrpc.php returns 403 for everything. Prefer doing this at the CDN, WAF, or web server so the request never consumes PHP.
 The first three are surgical and leave third-party registrations such as Jetpack's jetpack.* in place. That is not a compatibility guarantee: keep the endpoint reachable, leave Remote Publishing enabled until testing proves it unnecessary, and test the Jetpack connection and features after method changes. Block the endpoint only when nothing on the site speaks XML-RPC.
 [Aside — what's "IXR"? The Incutio XML-RPC library. Simon Willison released it in September 2002, one of his first open-source projects, while blogging from the University of Bath; both WordPress *and* Drupal adopted it, and it then sat largely untouched for 15+ years — long enough to pick up a CVE. Willison went on to co-create Django (2003–05 at the Lawrence Journal-World), build Lanyrd (sold to Eventbrite in 2013) and Datasette (2017), and is now one of the most-read writers on LLMs.]</a:t>
@@ -9114,7 +9114,7 @@
                 <a:ea typeface="Calibri" pitchFamily="34" charset="-122"/>
                 <a:cs typeface="Calibri" pitchFamily="34" charset="-120"/>
               </a:rPr>
-              <a:t>None of these are bugs. They are defaults chosen for maximum compatibility on a 20+ year-old web application — you probably don't need them.</a:t>
+              <a:t>None of these are bugs — or quite the security risks popular opinion alleges. They are defaults chosen for maximum compatibility on a 20+ year-old web application.</a:t>
             </a:r>
             <a:endParaRPr lang="en-US" sz="1600" dirty="0"/>
           </a:p>
@@ -9285,7 +9285,7 @@
                 <a:ea typeface="Calibri" pitchFamily="34" charset="-122"/>
                 <a:cs typeface="Calibri" pitchFamily="34" charset="-120"/>
               </a:rPr>
-              <a:t>REST + author archives list every login name to anonymous visitors.</a:t>
+              <a:t>REST and author archives expose public author slugs that often resemble login names.</a:t>
             </a:r>
             <a:endParaRPr lang="en-US" sz="1400" dirty="0"/>
           </a:p>
@@ -9417,7 +9417,7 @@
                 <a:ea typeface="Cambria" pitchFamily="34" charset="-122"/>
                 <a:cs typeface="Cambria" pitchFamily="34" charset="-120"/>
               </a:rPr>
-              <a:t>Aging XML-RPC exposed</a:t>
+              <a:t>XML-RPC exposed</a:t>
             </a:r>
             <a:endParaRPr lang="en-US" sz="1900" dirty="0"/>
           </a:p>
@@ -9456,7 +9456,7 @@
                 <a:ea typeface="Calibri" pitchFamily="34" charset="-122"/>
                 <a:cs typeface="Calibri" pitchFamily="34" charset="-120"/>
               </a:rPr>
-              <a:t>Unwanted pingbacks and unused methods add work and attack surface.</a:t>
+              <a:t>A venerable interop protocol Jetpack still uses. If you don't need it, it just adds attack surface.</a:t>
             </a:r>
             <a:endParaRPr lang="en-US" sz="1400" dirty="0"/>
           </a:p>
@@ -9627,7 +9627,7 @@
                 <a:ea typeface="Calibri" pitchFamily="34" charset="-122"/>
                 <a:cs typeface="Calibri" pitchFamily="34" charset="-120"/>
               </a:rPr>
-              <a:t>Emoji scripts, version tags, and RSD links on every page.</a:t>
+              <a:t>Emoji scripts, version tags, and RSD links on every page. Do you need them?</a:t>
             </a:r>
             <a:endParaRPr lang="en-US" sz="1400" dirty="0"/>
           </a:p>
@@ -9798,7 +9798,7 @@
                 <a:ea typeface="Calibri" pitchFamily="34" charset="-122"/>
                 <a:cs typeface="Calibri" pitchFamily="34" charset="-120"/>
               </a:rPr>
-              <a:t>Comments, pingbacks, and trackbacks open by default.</a:t>
+              <a:t>Comments, pingbacks, and trackbacks are open by default. Legacy cruft, or the heart of the open web?</a:t>
             </a:r>
             <a:endParaRPr lang="en-US" sz="1400" dirty="0"/>
           </a:p>
@@ -16985,7 +16985,7 @@
                 <a:ea typeface="Courier New" pitchFamily="34" charset="-122"/>
                 <a:cs typeface="Courier New" pitchFamily="34" charset="-120"/>
               </a:rPr>
-              <a:t>}   // that's the whole pattern, repeated ~20 times</a:t>
+              <a:t>}   // that's the whole pattern, repeated across the plugin</a:t>
             </a:r>
             <a:endParaRPr lang="en-US" sz="1500" dirty="0"/>
           </a:p>
@@ -17056,7 +17056,7 @@
                 <a:ea typeface="Cambria" pitchFamily="34" charset="-122"/>
                 <a:cs typeface="Cambria" pitchFamily="34" charset="-120"/>
               </a:rPr>
-              <a:t>Hooks &amp; filters</a:t>
+              <a:t>Hooks</a:t>
             </a:r>
             <a:endParaRPr lang="en-US" sz="3200" dirty="0"/>
           </a:p>
@@ -17227,7 +17227,7 @@
                 <a:ea typeface="Cambria" pitchFamily="34" charset="-122"/>
                 <a:cs typeface="Cambria" pitchFamily="34" charset="-120"/>
               </a:rPr>
-              <a:t>Action</a:t>
+              <a:t>Actions</a:t>
             </a:r>
             <a:endParaRPr lang="en-US" sz="2200" dirty="0"/>
           </a:p>
@@ -17459,7 +17459,7 @@
                 <a:ea typeface="Cambria" pitchFamily="34" charset="-122"/>
                 <a:cs typeface="Cambria" pitchFamily="34" charset="-120"/>
               </a:rPr>
-              <a:t>Filter</a:t>
+              <a:t>Filters</a:t>
             </a:r>
             <a:endParaRPr lang="en-US" sz="2200" dirty="0"/>
           </a:p>
@@ -17722,7 +17722,7 @@
                 <a:ea typeface="Cambria" pitchFamily="34" charset="-122"/>
                 <a:cs typeface="Cambria" pitchFamily="34" charset="-120"/>
               </a:rPr>
-              <a:t>Six categories of defaults</a:t>
+              <a:t>Seven categories of defaults</a:t>
             </a:r>
             <a:endParaRPr lang="en-US" sz="3400" dirty="0"/>
           </a:p>
@@ -17737,7 +17737,7 @@
         <p:spPr>
           <a:xfrm>
             <a:off x="548640" y="1554480"/>
-            <a:ext cx="3502152" cy="1965960"/>
+            <a:ext cx="2487168" cy="1965960"/>
           </a:xfrm>
           <a:prstGeom prst="roundRect">
             <a:avLst>
@@ -17829,8 +17829,8 @@
         </p:nvSpPr>
         <p:spPr>
           <a:xfrm>
-            <a:off x="868680" y="2606040"/>
-            <a:ext cx="2862072" cy="457200"/>
+            <a:off x="868680" y="2560320"/>
+            <a:ext cx="1984248" cy="411480"/>
           </a:xfrm>
           <a:prstGeom prst="rect">
             <a:avLst/>
@@ -17846,7 +17846,7 @@
               <a:buNone/>
             </a:pPr>
             <a:r>
-              <a:rPr lang="en-US" sz="2100" b="1" dirty="0">
+              <a:rPr lang="en-US" sz="1900" b="1" dirty="0">
                 <a:solidFill>
                   <a:srgbClr val="0F2733"/>
                 </a:solidFill>
@@ -17856,7 +17856,7 @@
               </a:rPr>
               <a:t>Security</a:t>
             </a:r>
-            <a:endParaRPr lang="en-US" sz="2100" dirty="0"/>
+            <a:endParaRPr lang="en-US" sz="1900" dirty="0"/>
           </a:p>
         </p:txBody>
       </p:sp>
@@ -17868,24 +17868,24 @@
         </p:nvSpPr>
         <p:spPr>
           <a:xfrm>
-            <a:off x="868680" y="3017520"/>
-            <a:ext cx="2862072" cy="411480"/>
-          </a:xfrm>
-          <a:prstGeom prst="rect">
-            <a:avLst/>
-          </a:prstGeom>
-          <a:noFill/>
-          <a:ln/>
-        </p:spPr>
-        <p:txBody>
-          <a:bodyPr wrap="square" lIns="0" tIns="0" rIns="0" bIns="0" rtlCol="0" anchor="ctr"/>
+            <a:off x="868680" y="2944368"/>
+            <a:ext cx="1984248" cy="548640"/>
+          </a:xfrm>
+          <a:prstGeom prst="rect">
+            <a:avLst/>
+          </a:prstGeom>
+          <a:noFill/>
+          <a:ln/>
+        </p:spPr>
+        <p:txBody>
+          <a:bodyPr wrap="square" lIns="0" tIns="0" rIns="0" bIns="0" rtlCol="0" anchor="t"/>
           <a:lstStyle/>
           <a:p>
             <a:pPr indent="0" marL="0">
               <a:buNone/>
             </a:pPr>
             <a:r>
-              <a:rPr lang="en-US" sz="1350" dirty="0">
+              <a:rPr lang="en-US" sz="1250" dirty="0">
                 <a:solidFill>
                   <a:srgbClr val="4A5A63"/>
                 </a:solidFill>
@@ -17893,9 +17893,9 @@
                 <a:ea typeface="Calibri" pitchFamily="34" charset="-122"/>
                 <a:cs typeface="Calibri" pitchFamily="34" charset="-120"/>
               </a:rPr>
-              <a:t>Shrink the attack surface</a:t>
-            </a:r>
-            <a:endParaRPr lang="en-US" sz="1350" dirty="0"/>
+              <a:t>Make the attack surface smaller</a:t>
+            </a:r>
+            <a:endParaRPr lang="en-US" sz="1250" dirty="0"/>
           </a:p>
         </p:txBody>
       </p:sp>
@@ -17907,8 +17907,8 @@
         </p:nvSpPr>
         <p:spPr>
           <a:xfrm>
-            <a:off x="4507992" y="1554480"/>
-            <a:ext cx="3502152" cy="1965960"/>
+            <a:off x="3419856" y="1554480"/>
+            <a:ext cx="2487168" cy="1965960"/>
           </a:xfrm>
           <a:prstGeom prst="roundRect">
             <a:avLst>
@@ -17941,7 +17941,7 @@
         </p:nvSpPr>
         <p:spPr>
           <a:xfrm>
-            <a:off x="4828032" y="1874520"/>
+            <a:off x="3739896" y="1874520"/>
             <a:ext cx="640080" cy="640080"/>
           </a:xfrm>
           <a:prstGeom prst="ellipse">
@@ -17961,7 +17961,7 @@
         </p:nvSpPr>
         <p:spPr>
           <a:xfrm>
-            <a:off x="4828032" y="1874520"/>
+            <a:off x="3739896" y="1874520"/>
             <a:ext cx="640080" cy="640080"/>
           </a:xfrm>
           <a:prstGeom prst="rect">
@@ -18000,8 +18000,8 @@
         </p:nvSpPr>
         <p:spPr>
           <a:xfrm>
-            <a:off x="4828032" y="2606040"/>
-            <a:ext cx="2862072" cy="457200"/>
+            <a:off x="3739896" y="2560320"/>
+            <a:ext cx="1984248" cy="411480"/>
           </a:xfrm>
           <a:prstGeom prst="rect">
             <a:avLst/>
@@ -18017,7 +18017,7 @@
               <a:buNone/>
             </a:pPr>
             <a:r>
-              <a:rPr lang="en-US" sz="2100" b="1" dirty="0">
+              <a:rPr lang="en-US" sz="1900" b="1" dirty="0">
                 <a:solidFill>
                   <a:srgbClr val="0F2733"/>
                 </a:solidFill>
@@ -18025,9 +18025,9 @@
                 <a:ea typeface="Cambria" pitchFamily="34" charset="-122"/>
                 <a:cs typeface="Cambria" pitchFamily="34" charset="-120"/>
               </a:rPr>
-              <a:t>Content</a:t>
-            </a:r>
-            <a:endParaRPr lang="en-US" sz="2100" dirty="0"/>
+              <a:t>Updates</a:t>
+            </a:r>
+            <a:endParaRPr lang="en-US" sz="1900" dirty="0"/>
           </a:p>
         </p:txBody>
       </p:sp>
@@ -18039,24 +18039,24 @@
         </p:nvSpPr>
         <p:spPr>
           <a:xfrm>
-            <a:off x="4828032" y="3017520"/>
-            <a:ext cx="2862072" cy="411480"/>
-          </a:xfrm>
-          <a:prstGeom prst="rect">
-            <a:avLst/>
-          </a:prstGeom>
-          <a:noFill/>
-          <a:ln/>
-        </p:spPr>
-        <p:txBody>
-          <a:bodyPr wrap="square" lIns="0" tIns="0" rIns="0" bIns="0" rtlCol="0" anchor="ctr"/>
+            <a:off x="3739896" y="2944368"/>
+            <a:ext cx="1984248" cy="548640"/>
+          </a:xfrm>
+          <a:prstGeom prst="rect">
+            <a:avLst/>
+          </a:prstGeom>
+          <a:noFill/>
+          <a:ln/>
+        </p:spPr>
+        <p:txBody>
+          <a:bodyPr wrap="square" lIns="0" tIns="0" rIns="0" bIns="0" rtlCol="0" anchor="t"/>
           <a:lstStyle/>
           <a:p>
             <a:pPr indent="0" marL="0">
               <a:buNone/>
             </a:pPr>
             <a:r>
-              <a:rPr lang="en-US" sz="1350" dirty="0">
+              <a:rPr lang="en-US" sz="1250" dirty="0">
                 <a:solidFill>
                   <a:srgbClr val="4A5A63"/>
                 </a:solidFill>
@@ -18064,9 +18064,9 @@
                 <a:ea typeface="Calibri" pitchFamily="34" charset="-122"/>
                 <a:cs typeface="Calibri" pitchFamily="34" charset="-120"/>
               </a:rPr>
-              <a:t>Close spam channels &amp; info leaks</a:t>
-            </a:r>
-            <a:endParaRPr lang="en-US" sz="1350" dirty="0"/>
+              <a:t>A deliberate core &amp; translation policy</a:t>
+            </a:r>
+            <a:endParaRPr lang="en-US" sz="1250" dirty="0"/>
           </a:p>
         </p:txBody>
       </p:sp>
@@ -18078,8 +18078,8 @@
         </p:nvSpPr>
         <p:spPr>
           <a:xfrm>
-            <a:off x="8467344" y="1554480"/>
-            <a:ext cx="3502152" cy="1965960"/>
+            <a:off x="6291072" y="1554480"/>
+            <a:ext cx="2487168" cy="1965960"/>
           </a:xfrm>
           <a:prstGeom prst="roundRect">
             <a:avLst>
@@ -18112,7 +18112,7 @@
         </p:nvSpPr>
         <p:spPr>
           <a:xfrm>
-            <a:off x="8787384" y="1874520"/>
+            <a:off x="6611112" y="1874520"/>
             <a:ext cx="640080" cy="640080"/>
           </a:xfrm>
           <a:prstGeom prst="ellipse">
@@ -18132,7 +18132,7 @@
         </p:nvSpPr>
         <p:spPr>
           <a:xfrm>
-            <a:off x="8787384" y="1874520"/>
+            <a:off x="6611112" y="1874520"/>
             <a:ext cx="640080" cy="640080"/>
           </a:xfrm>
           <a:prstGeom prst="rect">
@@ -18171,8 +18171,8 @@
         </p:nvSpPr>
         <p:spPr>
           <a:xfrm>
-            <a:off x="8787384" y="2606040"/>
-            <a:ext cx="2862072" cy="457200"/>
+            <a:off x="6611112" y="2560320"/>
+            <a:ext cx="1984248" cy="411480"/>
           </a:xfrm>
           <a:prstGeom prst="rect">
             <a:avLst/>
@@ -18188,7 +18188,7 @@
               <a:buNone/>
             </a:pPr>
             <a:r>
-              <a:rPr lang="en-US" sz="2100" b="1" dirty="0">
+              <a:rPr lang="en-US" sz="1900" b="1" dirty="0">
                 <a:solidFill>
                   <a:srgbClr val="0F2733"/>
                 </a:solidFill>
@@ -18196,9 +18196,9 @@
                 <a:ea typeface="Cambria" pitchFamily="34" charset="-122"/>
                 <a:cs typeface="Cambria" pitchFamily="34" charset="-120"/>
               </a:rPr>
-              <a:t>Admin UX</a:t>
-            </a:r>
-            <a:endParaRPr lang="en-US" sz="2100" dirty="0"/>
+              <a:t>Content</a:t>
+            </a:r>
+            <a:endParaRPr lang="en-US" sz="1900" dirty="0"/>
           </a:p>
         </p:txBody>
       </p:sp>
@@ -18210,24 +18210,24 @@
         </p:nvSpPr>
         <p:spPr>
           <a:xfrm>
-            <a:off x="8787384" y="3017520"/>
-            <a:ext cx="2862072" cy="411480"/>
-          </a:xfrm>
-          <a:prstGeom prst="rect">
-            <a:avLst/>
-          </a:prstGeom>
-          <a:noFill/>
-          <a:ln/>
-        </p:spPr>
-        <p:txBody>
-          <a:bodyPr wrap="square" lIns="0" tIns="0" rIns="0" bIns="0" rtlCol="0" anchor="ctr"/>
+            <a:off x="6611112" y="2944368"/>
+            <a:ext cx="1984248" cy="548640"/>
+          </a:xfrm>
+          <a:prstGeom prst="rect">
+            <a:avLst/>
+          </a:prstGeom>
+          <a:noFill/>
+          <a:ln/>
+        </p:spPr>
+        <p:txBody>
+          <a:bodyPr wrap="square" lIns="0" tIns="0" rIns="0" bIns="0" rtlCol="0" anchor="t"/>
           <a:lstStyle/>
           <a:p>
             <a:pPr indent="0" marL="0">
               <a:buNone/>
             </a:pPr>
             <a:r>
-              <a:rPr lang="en-US" sz="1350" dirty="0">
+              <a:rPr lang="en-US" sz="1250" dirty="0">
                 <a:solidFill>
                   <a:srgbClr val="4A5A63"/>
                 </a:solidFill>
@@ -18235,9 +18235,9 @@
                 <a:ea typeface="Calibri" pitchFamily="34" charset="-122"/>
                 <a:cs typeface="Calibri" pitchFamily="34" charset="-120"/>
               </a:rPr>
-              <a:t>A calmer, faster dashboard</a:t>
-            </a:r>
-            <a:endParaRPr lang="en-US" sz="1350" dirty="0"/>
+              <a:t>Close spam channels &amp; info leaks</a:t>
+            </a:r>
+            <a:endParaRPr lang="en-US" sz="1250" dirty="0"/>
           </a:p>
         </p:txBody>
       </p:sp>
@@ -18249,8 +18249,8 @@
         </p:nvSpPr>
         <p:spPr>
           <a:xfrm>
-            <a:off x="548640" y="3977640"/>
-            <a:ext cx="3502152" cy="1965960"/>
+            <a:off x="9162288" y="1554480"/>
+            <a:ext cx="2487168" cy="1965960"/>
           </a:xfrm>
           <a:prstGeom prst="roundRect">
             <a:avLst>
@@ -18283,7 +18283,7 @@
         </p:nvSpPr>
         <p:spPr>
           <a:xfrm>
-            <a:off x="868680" y="4297680"/>
+            <a:off x="9482328" y="1874520"/>
             <a:ext cx="640080" cy="640080"/>
           </a:xfrm>
           <a:prstGeom prst="ellipse">
@@ -18303,7 +18303,7 @@
         </p:nvSpPr>
         <p:spPr>
           <a:xfrm>
-            <a:off x="868680" y="4297680"/>
+            <a:off x="9482328" y="1874520"/>
             <a:ext cx="640080" cy="640080"/>
           </a:xfrm>
           <a:prstGeom prst="rect">
@@ -18342,8 +18342,8 @@
         </p:nvSpPr>
         <p:spPr>
           <a:xfrm>
-            <a:off x="868680" y="5029200"/>
-            <a:ext cx="2862072" cy="457200"/>
+            <a:off x="9482328" y="2560320"/>
+            <a:ext cx="1984248" cy="411480"/>
           </a:xfrm>
           <a:prstGeom prst="rect">
             <a:avLst/>
@@ -18359,7 +18359,7 @@
               <a:buNone/>
             </a:pPr>
             <a:r>
-              <a:rPr lang="en-US" sz="2100" b="1" dirty="0">
+              <a:rPr lang="en-US" sz="1900" b="1" dirty="0">
                 <a:solidFill>
                   <a:srgbClr val="0F2733"/>
                 </a:solidFill>
@@ -18367,9 +18367,9 @@
                 <a:ea typeface="Cambria" pitchFamily="34" charset="-122"/>
                 <a:cs typeface="Cambria" pitchFamily="34" charset="-120"/>
               </a:rPr>
-              <a:t>Login</a:t>
-            </a:r>
-            <a:endParaRPr lang="en-US" sz="2100" dirty="0"/>
+              <a:t>Admin UX</a:t>
+            </a:r>
+            <a:endParaRPr lang="en-US" sz="1900" dirty="0"/>
           </a:p>
         </p:txBody>
       </p:sp>
@@ -18381,24 +18381,24 @@
         </p:nvSpPr>
         <p:spPr>
           <a:xfrm>
-            <a:off x="868680" y="5440680"/>
-            <a:ext cx="2862072" cy="411480"/>
-          </a:xfrm>
-          <a:prstGeom prst="rect">
-            <a:avLst/>
-          </a:prstGeom>
-          <a:noFill/>
-          <a:ln/>
-        </p:spPr>
-        <p:txBody>
-          <a:bodyPr wrap="square" lIns="0" tIns="0" rIns="0" bIns="0" rtlCol="0" anchor="ctr"/>
+            <a:off x="9482328" y="2944368"/>
+            <a:ext cx="1984248" cy="548640"/>
+          </a:xfrm>
+          <a:prstGeom prst="rect">
+            <a:avLst/>
+          </a:prstGeom>
+          <a:noFill/>
+          <a:ln/>
+        </p:spPr>
+        <p:txBody>
+          <a:bodyPr wrap="square" lIns="0" tIns="0" rIns="0" bIns="0" rtlCol="0" anchor="t"/>
           <a:lstStyle/>
           <a:p>
             <a:pPr indent="0" marL="0">
               <a:buNone/>
             </a:pPr>
             <a:r>
-              <a:rPr lang="en-US" sz="1350" dirty="0">
+              <a:rPr lang="en-US" sz="1250" dirty="0">
                 <a:solidFill>
                   <a:srgbClr val="4A5A63"/>
                 </a:solidFill>
@@ -18406,9 +18406,9 @@
                 <a:ea typeface="Calibri" pitchFamily="34" charset="-122"/>
                 <a:cs typeface="Calibri" pitchFamily="34" charset="-120"/>
               </a:rPr>
-              <a:t>Sessions &amp; credentials</a:t>
-            </a:r>
-            <a:endParaRPr lang="en-US" sz="1350" dirty="0"/>
+              <a:t>A calmer, faster, prettier dashboard</a:t>
+            </a:r>
+            <a:endParaRPr lang="en-US" sz="1250" dirty="0"/>
           </a:p>
         </p:txBody>
       </p:sp>
@@ -18420,8 +18420,8 @@
         </p:nvSpPr>
         <p:spPr>
           <a:xfrm>
-            <a:off x="4507992" y="3977640"/>
-            <a:ext cx="3502152" cy="1965960"/>
+            <a:off x="548640" y="3977640"/>
+            <a:ext cx="2487168" cy="1965960"/>
           </a:xfrm>
           <a:prstGeom prst="roundRect">
             <a:avLst>
@@ -18454,7 +18454,7 @@
         </p:nvSpPr>
         <p:spPr>
           <a:xfrm>
-            <a:off x="4828032" y="4297680"/>
+            <a:off x="868680" y="4297680"/>
             <a:ext cx="640080" cy="640080"/>
           </a:xfrm>
           <a:prstGeom prst="ellipse">
@@ -18474,7 +18474,7 @@
         </p:nvSpPr>
         <p:spPr>
           <a:xfrm>
-            <a:off x="4828032" y="4297680"/>
+            <a:off x="868680" y="4297680"/>
             <a:ext cx="640080" cy="640080"/>
           </a:xfrm>
           <a:prstGeom prst="rect">
@@ -18513,8 +18513,8 @@
         </p:nvSpPr>
         <p:spPr>
           <a:xfrm>
-            <a:off x="4828032" y="5029200"/>
-            <a:ext cx="2862072" cy="457200"/>
+            <a:off x="868680" y="4983480"/>
+            <a:ext cx="1984248" cy="411480"/>
           </a:xfrm>
           <a:prstGeom prst="rect">
             <a:avLst/>
@@ -18530,7 +18530,7 @@
               <a:buNone/>
             </a:pPr>
             <a:r>
-              <a:rPr lang="en-US" sz="2100" b="1" dirty="0">
+              <a:rPr lang="en-US" sz="1900" b="1" dirty="0">
                 <a:solidFill>
                   <a:srgbClr val="0F2733"/>
                 </a:solidFill>
@@ -18538,9 +18538,9 @@
                 <a:ea typeface="Cambria" pitchFamily="34" charset="-122"/>
                 <a:cs typeface="Cambria" pitchFamily="34" charset="-120"/>
               </a:rPr>
-              <a:t>Branding</a:t>
-            </a:r>
-            <a:endParaRPr lang="en-US" sz="2100" dirty="0"/>
+              <a:t>Login</a:t>
+            </a:r>
+            <a:endParaRPr lang="en-US" sz="1900" dirty="0"/>
           </a:p>
         </p:txBody>
       </p:sp>
@@ -18552,24 +18552,24 @@
         </p:nvSpPr>
         <p:spPr>
           <a:xfrm>
-            <a:off x="4828032" y="5440680"/>
-            <a:ext cx="2862072" cy="411480"/>
-          </a:xfrm>
-          <a:prstGeom prst="rect">
-            <a:avLst/>
-          </a:prstGeom>
-          <a:noFill/>
-          <a:ln/>
-        </p:spPr>
-        <p:txBody>
-          <a:bodyPr wrap="square" lIns="0" tIns="0" rIns="0" bIns="0" rtlCol="0" anchor="ctr"/>
+            <a:off x="868680" y="5367528"/>
+            <a:ext cx="1984248" cy="548640"/>
+          </a:xfrm>
+          <a:prstGeom prst="rect">
+            <a:avLst/>
+          </a:prstGeom>
+          <a:noFill/>
+          <a:ln/>
+        </p:spPr>
+        <p:txBody>
+          <a:bodyPr wrap="square" lIns="0" tIns="0" rIns="0" bIns="0" rtlCol="0" anchor="t"/>
           <a:lstStyle/>
           <a:p>
             <a:pPr indent="0" marL="0">
               <a:buNone/>
             </a:pPr>
             <a:r>
-              <a:rPr lang="en-US" sz="1350" dirty="0">
+              <a:rPr lang="en-US" sz="1250" dirty="0">
                 <a:solidFill>
                   <a:srgbClr val="4A5A63"/>
                 </a:solidFill>
@@ -18577,9 +18577,9 @@
                 <a:ea typeface="Calibri" pitchFamily="34" charset="-122"/>
                 <a:cs typeface="Calibri" pitchFamily="34" charset="-120"/>
               </a:rPr>
-              <a:t>Own the login screen</a:t>
-            </a:r>
-            <a:endParaRPr lang="en-US" sz="1350" dirty="0"/>
+              <a:t>Sessions &amp; credentials</a:t>
+            </a:r>
+            <a:endParaRPr lang="en-US" sz="1250" dirty="0"/>
           </a:p>
         </p:txBody>
       </p:sp>
@@ -18591,8 +18591,8 @@
         </p:nvSpPr>
         <p:spPr>
           <a:xfrm>
-            <a:off x="8467344" y="3977640"/>
-            <a:ext cx="3502152" cy="1965960"/>
+            <a:off x="3419856" y="3977640"/>
+            <a:ext cx="2487168" cy="1965960"/>
           </a:xfrm>
           <a:prstGeom prst="roundRect">
             <a:avLst>
@@ -18625,7 +18625,7 @@
         </p:nvSpPr>
         <p:spPr>
           <a:xfrm>
-            <a:off x="8787384" y="4297680"/>
+            <a:off x="3739896" y="4297680"/>
             <a:ext cx="640080" cy="640080"/>
           </a:xfrm>
           <a:prstGeom prst="ellipse">
@@ -18645,7 +18645,7 @@
         </p:nvSpPr>
         <p:spPr>
           <a:xfrm>
-            <a:off x="8787384" y="4297680"/>
+            <a:off x="3739896" y="4297680"/>
             <a:ext cx="640080" cy="640080"/>
           </a:xfrm>
           <a:prstGeom prst="rect">
@@ -18684,8 +18684,8 @@
         </p:nvSpPr>
         <p:spPr>
           <a:xfrm>
-            <a:off x="8787384" y="5029200"/>
-            <a:ext cx="2862072" cy="457200"/>
+            <a:off x="3739896" y="4983480"/>
+            <a:ext cx="1984248" cy="411480"/>
           </a:xfrm>
           <a:prstGeom prst="rect">
             <a:avLst/>
@@ -18701,7 +18701,7 @@
               <a:buNone/>
             </a:pPr>
             <a:r>
-              <a:rPr lang="en-US" sz="2100" b="1" dirty="0">
+              <a:rPr lang="en-US" sz="1900" b="1" dirty="0">
                 <a:solidFill>
                   <a:srgbClr val="0F2733"/>
                 </a:solidFill>
@@ -18709,9 +18709,9 @@
                 <a:ea typeface="Cambria" pitchFamily="34" charset="-122"/>
                 <a:cs typeface="Cambria" pitchFamily="34" charset="-120"/>
               </a:rPr>
-              <a:t>Performance</a:t>
-            </a:r>
-            <a:endParaRPr lang="en-US" sz="2100" dirty="0"/>
+              <a:t>Branding</a:t>
+            </a:r>
+            <a:endParaRPr lang="en-US" sz="1900" dirty="0"/>
           </a:p>
         </p:txBody>
       </p:sp>
@@ -18723,24 +18723,24 @@
         </p:nvSpPr>
         <p:spPr>
           <a:xfrm>
-            <a:off x="8787384" y="5440680"/>
-            <a:ext cx="2862072" cy="411480"/>
-          </a:xfrm>
-          <a:prstGeom prst="rect">
-            <a:avLst/>
-          </a:prstGeom>
-          <a:noFill/>
-          <a:ln/>
-        </p:spPr>
-        <p:txBody>
-          <a:bodyPr wrap="square" lIns="0" tIns="0" rIns="0" bIns="0" rtlCol="0" anchor="ctr"/>
+            <a:off x="3739896" y="5367528"/>
+            <a:ext cx="1984248" cy="548640"/>
+          </a:xfrm>
+          <a:prstGeom prst="rect">
+            <a:avLst/>
+          </a:prstGeom>
+          <a:noFill/>
+          <a:ln/>
+        </p:spPr>
+        <p:txBody>
+          <a:bodyPr wrap="square" lIns="0" tIns="0" rIns="0" bIns="0" rtlCol="0" anchor="t"/>
           <a:lstStyle/>
           <a:p>
             <a:pPr indent="0" marL="0">
               <a:buNone/>
             </a:pPr>
             <a:r>
-              <a:rPr lang="en-US" sz="1350" dirty="0">
+              <a:rPr lang="en-US" sz="1250" dirty="0">
                 <a:solidFill>
                   <a:srgbClr val="4A5A63"/>
                 </a:solidFill>
@@ -18748,22 +18748,76 @@
                 <a:ea typeface="Calibri" pitchFamily="34" charset="-122"/>
                 <a:cs typeface="Calibri" pitchFamily="34" charset="-120"/>
               </a:rPr>
-              <a:t>Trim the page weight</a:t>
-            </a:r>
-            <a:endParaRPr lang="en-US" sz="1350" dirty="0"/>
-          </a:p>
-        </p:txBody>
-      </p:sp>
-      <p:sp>
-        <p:nvSpPr>
-          <p:cNvPr id="33" name="Text 31"/>
-          <p:cNvSpPr/>
-          <p:nvPr/>
-        </p:nvSpPr>
-        <p:spPr>
-          <a:xfrm>
-            <a:off x="502920" y="6428232"/>
-            <a:ext cx="7315200" cy="274320"/>
+              <a:t>Own your login screen</a:t>
+            </a:r>
+            <a:endParaRPr lang="en-US" sz="1250" dirty="0"/>
+          </a:p>
+        </p:txBody>
+      </p:sp>
+      <p:sp>
+        <p:nvSpPr>
+          <p:cNvPr id="33" name="Shape 31"/>
+          <p:cNvSpPr/>
+          <p:nvPr/>
+        </p:nvSpPr>
+        <p:spPr>
+          <a:xfrm>
+            <a:off x="6291072" y="3977640"/>
+            <a:ext cx="2487168" cy="1965960"/>
+          </a:xfrm>
+          <a:prstGeom prst="roundRect">
+            <a:avLst>
+              <a:gd name="adj" fmla="val 4651"/>
+            </a:avLst>
+          </a:prstGeom>
+          <a:solidFill>
+            <a:srgbClr val="FFFFFF"/>
+          </a:solidFill>
+          <a:ln w="12700">
+            <a:solidFill>
+              <a:srgbClr val="DCE6EB"/>
+            </a:solidFill>
+            <a:prstDash val="solid"/>
+          </a:ln>
+          <a:effectLst>
+            <a:outerShdw sx="100000" sy="100000" kx="0" ky="0" algn="bl" rotWithShape="0" blurRad="63500" dist="25400" dir="5400000">
+              <a:srgbClr val="C7D4DB">
+                <a:alpha val="50000"/>
+              </a:srgbClr>
+            </a:outerShdw>
+          </a:effectLst>
+        </p:spPr>
+      </p:sp>
+      <p:sp>
+        <p:nvSpPr>
+          <p:cNvPr id="34" name="Shape 32"/>
+          <p:cNvSpPr/>
+          <p:nvPr/>
+        </p:nvSpPr>
+        <p:spPr>
+          <a:xfrm>
+            <a:off x="6611112" y="4297680"/>
+            <a:ext cx="640080" cy="640080"/>
+          </a:xfrm>
+          <a:prstGeom prst="ellipse">
+            <a:avLst/>
+          </a:prstGeom>
+          <a:solidFill>
+            <a:srgbClr val="E0A94B"/>
+          </a:solidFill>
+          <a:ln/>
+        </p:spPr>
+      </p:sp>
+      <p:sp>
+        <p:nvSpPr>
+          <p:cNvPr id="35" name="Text 33"/>
+          <p:cNvSpPr/>
+          <p:nvPr/>
+        </p:nvSpPr>
+        <p:spPr>
+          <a:xfrm>
+            <a:off x="6611112" y="4297680"/>
+            <a:ext cx="640080" cy="640080"/>
           </a:xfrm>
           <a:prstGeom prst="rect">
             <a:avLst/>
@@ -18775,32 +18829,149 @@
           <a:bodyPr wrap="square" lIns="0" tIns="0" rIns="0" bIns="0" rtlCol="0" anchor="ctr"/>
           <a:lstStyle/>
           <a:p>
-            <a:pPr algn="l" indent="0" marL="0">
-              <a:buNone/>
-            </a:pPr>
-            <a:r>
-              <a:rPr lang="en-US" sz="900" b="1" dirty="0">
-                <a:solidFill>
-                  <a:srgbClr val="C88F33"/>
+            <a:pPr algn="ctr" indent="0" marL="0">
+              <a:buNone/>
+            </a:pPr>
+            <a:r>
+              <a:rPr lang="en-US" sz="1820" b="1" dirty="0">
+                <a:solidFill>
+                  <a:srgbClr val="0F2733"/>
+                </a:solidFill>
+                <a:latin typeface="Cambria" pitchFamily="34" charset="0"/>
+                <a:ea typeface="Cambria" pitchFamily="34" charset="-122"/>
+                <a:cs typeface="Cambria" pitchFamily="34" charset="-120"/>
+              </a:rPr>
+              <a:t>7</a:t>
+            </a:r>
+            <a:endParaRPr lang="en-US" sz="1820" dirty="0"/>
+          </a:p>
+        </p:txBody>
+      </p:sp>
+      <p:sp>
+        <p:nvSpPr>
+          <p:cNvPr id="36" name="Text 34"/>
+          <p:cNvSpPr/>
+          <p:nvPr/>
+        </p:nvSpPr>
+        <p:spPr>
+          <a:xfrm>
+            <a:off x="6611112" y="4983480"/>
+            <a:ext cx="1984248" cy="411480"/>
+          </a:xfrm>
+          <a:prstGeom prst="rect">
+            <a:avLst/>
+          </a:prstGeom>
+          <a:noFill/>
+          <a:ln/>
+        </p:spPr>
+        <p:txBody>
+          <a:bodyPr wrap="square" lIns="0" tIns="0" rIns="0" bIns="0" rtlCol="0" anchor="ctr"/>
+          <a:lstStyle/>
+          <a:p>
+            <a:pPr indent="0" marL="0">
+              <a:buNone/>
+            </a:pPr>
+            <a:r>
+              <a:rPr lang="en-US" sz="1900" b="1" dirty="0">
+                <a:solidFill>
+                  <a:srgbClr val="0F2733"/>
+                </a:solidFill>
+                <a:latin typeface="Cambria" pitchFamily="34" charset="0"/>
+                <a:ea typeface="Cambria" pitchFamily="34" charset="-122"/>
+                <a:cs typeface="Cambria" pitchFamily="34" charset="-120"/>
+              </a:rPr>
+              <a:t>Performance</a:t>
+            </a:r>
+            <a:endParaRPr lang="en-US" sz="1900" dirty="0"/>
+          </a:p>
+        </p:txBody>
+      </p:sp>
+      <p:sp>
+        <p:nvSpPr>
+          <p:cNvPr id="37" name="Text 35"/>
+          <p:cNvSpPr/>
+          <p:nvPr/>
+        </p:nvSpPr>
+        <p:spPr>
+          <a:xfrm>
+            <a:off x="6611112" y="5367528"/>
+            <a:ext cx="1984248" cy="548640"/>
+          </a:xfrm>
+          <a:prstGeom prst="rect">
+            <a:avLst/>
+          </a:prstGeom>
+          <a:noFill/>
+          <a:ln/>
+        </p:spPr>
+        <p:txBody>
+          <a:bodyPr wrap="square" lIns="0" tIns="0" rIns="0" bIns="0" rtlCol="0" anchor="t"/>
+          <a:lstStyle/>
+          <a:p>
+            <a:pPr indent="0" marL="0">
+              <a:buNone/>
+            </a:pPr>
+            <a:r>
+              <a:rPr lang="en-US" sz="1250" dirty="0">
+                <a:solidFill>
+                  <a:srgbClr val="4A5A63"/>
                 </a:solidFill>
                 <a:latin typeface="Calibri" pitchFamily="34" charset="0"/>
                 <a:ea typeface="Calibri" pitchFamily="34" charset="-122"/>
                 <a:cs typeface="Calibri" pitchFamily="34" charset="-120"/>
               </a:rPr>
-              <a:t>WPYEG</a:t>
-            </a:r>
+              <a:t>Trim the fat</a:t>
+            </a:r>
+            <a:endParaRPr lang="en-US" sz="1250" dirty="0"/>
+          </a:p>
+        </p:txBody>
+      </p:sp>
+      <p:sp>
+        <p:nvSpPr>
+          <p:cNvPr id="38" name="Text 36"/>
+          <p:cNvSpPr/>
+          <p:nvPr/>
+        </p:nvSpPr>
+        <p:spPr>
+          <a:xfrm>
+            <a:off x="502920" y="6428232"/>
+            <a:ext cx="7315200" cy="274320"/>
+          </a:xfrm>
+          <a:prstGeom prst="rect">
+            <a:avLst/>
+          </a:prstGeom>
+          <a:noFill/>
+          <a:ln/>
+        </p:spPr>
+        <p:txBody>
+          <a:bodyPr wrap="square" lIns="0" tIns="0" rIns="0" bIns="0" rtlCol="0" anchor="ctr"/>
+          <a:lstStyle/>
+          <a:p>
             <a:pPr algn="l" indent="0" marL="0">
               <a:buNone/>
             </a:pPr>
             <a:r>
-              <a:rPr lang="en-US" sz="900" dirty="0">
-                <a:solidFill>
-                  <a:srgbClr val="8A9AA3"/>
+              <a:rPr lang="en-US" sz="900" b="1" dirty="0">
+                <a:solidFill>
+                  <a:srgbClr val="C88F33"/>
                 </a:solidFill>
                 <a:latin typeface="Calibri" pitchFamily="34" charset="0"/>
                 <a:ea typeface="Calibri" pitchFamily="34" charset="-122"/>
                 <a:cs typeface="Calibri" pitchFamily="34" charset="-120"/>
               </a:rPr>
+              <a:t>WPYEG</a:t>
+            </a:r>
+            <a:pPr algn="l" indent="0" marL="0">
+              <a:buNone/>
+            </a:pPr>
+            <a:r>
+              <a:rPr lang="en-US" sz="900" dirty="0">
+                <a:solidFill>
+                  <a:srgbClr val="8A9AA3"/>
+                </a:solidFill>
+                <a:latin typeface="Calibri" pitchFamily="34" charset="0"/>
+                <a:ea typeface="Calibri" pitchFamily="34" charset="-122"/>
+                <a:cs typeface="Calibri" pitchFamily="34" charset="-120"/>
+              </a:rPr>
               <a:t>  ·  Better by Default</a:t>
             </a:r>
             <a:endParaRPr lang="en-US" sz="900" dirty="0"/>
@@ -18809,7 +18980,7 @@
       </p:sp>
       <p:sp>
         <p:nvSpPr>
-          <p:cNvPr id="34" name="Text 32"/>
+          <p:cNvPr id="39" name="Text 37"/>
           <p:cNvSpPr/>
           <p:nvPr/>
         </p:nvSpPr>

--- a/workshop/Better-by-Default.pptx
+++ b/workshop/Better-by-Default.pptx
@@ -7774,7 +7774,7 @@
                 <a:ea typeface="Courier New" pitchFamily="34" charset="-122"/>
                 <a:cs typeface="Courier New" pitchFamily="34" charset="-120"/>
               </a:rPr>
-              <a:t>disable_comments, continued</a:t>
+              <a:t>disable_comments</a:t>
             </a:r>
             <a:pPr indent="0" marL="0">
               <a:lnSpc>

--- a/workshop/Better-by-Default.pptx
+++ b/workshop/Better-by-Default.pptx
@@ -807,6 +807,7 @@
               <a:t>NIST SP 800-63B-4 § 3.1.1.2 calls for at least 15 characters for single-factor passwords, no composition rules, and a blocklist of commonly used, expected, or compromised passwords. BBD first applies its length rule, a small local blocklist, and checks for the username or email name. It then screens the candidate against the Have I Been Pwned Pwned Passwords range API.
 The privacy trick is k-anonymity. BBD computes the candidate's SHA-1 hash locally, sends HIBP only the first five hexadecimal characters, and receives roughly 800–1,000 suffixes that share that prefix. BBD compares the remaining 35 characters locally. The password and its full hash never leave WordPress. SHA-1 is only HIBP's lookup format here; WordPress still owns password storage and uses its normal password hashing.
 BBD also sends Add-Padding: true, so response size does not disclose how many real matches exist; synthetic rows have a count of zero and are ignored. WordPress caps the response at 128 KiB with limit_response_size. Because a response reaching that cap may be truncated, capped, empty, malformed, failed, and non-200 responses are treated as unavailable and fail open. Only structurally valid prefix responses are cached for 12 hours; the local length, blocklist, and personal-context checks still apply. The same server-side validator covers profile changes, password resets, and REST user-password requests.
+AND YOU CAN SWITCH IT OFF — WPYEG_DISABLE_HIBP in wp-config.php, or the wpyeg_disable_hibp filter for a per-password decision. This is the only thing the whole plugin does that leaves your server, and everything on this slide is an argument that it is safe to do: hashed locally, five characters sent, padded response, nothing recoverable. All true, and none of it is an answer to "may I decline." Someone under a data-protection regime, on an air-gapped network, or just unwilling to make an outbound call on every password change does not owe anyone a justification. Which is the whole talk, pointed back at us: a default you cannot turn off is not a default, it is a requirement wearing a default's clothes. Every other setting here has a toggle. This one is the test of whether we meant it.
 Sources: HIBP API v3, Pwned Passwords — Searching by hash range using k-anonymity and Introducing padding: https://haveibeenpwned.com/API/v3#SearchingPwnedPasswordsByRange ; NIST SP 800-63B-4 § 3.1.1.2, Password Verifiers: https://pages.nist.gov/800-63-4/sp800-63b/authenticators/#passwordver</a:t>
             </a:r>
             <a:endParaRPr lang="en-US" dirty="0"/>

--- a/workshop/Better-by-Default.pptx
+++ b/workshop/Better-by-Default.pptx
@@ -535,7 +535,7 @@
           <a:p>
             <a:r>
               <a:rPr lang="en-US" dirty="0"/>
-              <a:t>Welcome to WPYEG. In this workshop we're building and reviewing a small plugin that defines and activates 31 sensible but little-known and seldom used defaults for WordPress sites in 2026. Whether you write PHP daily or just manage WordPress sites, you'll leave knowing why each default matters and how to enable (or disable) it. This workshop and plugin distils years of experience and new learning from a recent project that I've summed up in this workshop.</a:t>
+              <a:t>Welcome to WPYEG. In this workshop we're building and reviewing a small plugin that defines and activates 32 sensible but little-known and seldom used defaults for WordPress sites in 2026. Whether you write PHP daily or just manage WordPress sites, you'll leave knowing why each default matters and how to enable (or disable) it. This workshop and plugin distils years of experience and new learning from a recent project that I've summed up in this workshop.</a:t>
             </a:r>
             <a:endParaRPr lang="en-US" dirty="0"/>
           </a:p>
@@ -2499,7 +2499,7 @@
           <a:p>
             <a:r>
               <a:rPr lang="en-US" dirty="0"/>
-              <a:t>In our demo plugin, a default is an add_filter behind an if ( option ). We have 31 settings built around that pattern.</a:t>
+              <a:t>In our demo plugin, a default is an add_filter behind an if ( option ). We have 32 settings built around that pattern.</a:t>
             </a:r>
             <a:endParaRPr lang="en-US" dirty="0"/>
           </a:p>
@@ -23882,7 +23882,7 @@
                           <a:ea typeface="Courier New" pitchFamily="34" charset="-122"/>
                           <a:cs typeface="Courier New" pitchFamily="34" charset="-120"/>
                         </a:rPr>
-                        <a:t>no</a:t>
+                        <a:t>yes</a:t>
                       </a:r>
                       <a:endParaRPr lang="en-US" sz="1100" dirty="0">
                         <a:latin typeface="Courier New" charset="0"/>
@@ -24088,7 +24088,7 @@
                           <a:ea typeface="Courier New" pitchFamily="34" charset="-122"/>
                           <a:cs typeface="Courier New" pitchFamily="34" charset="-120"/>
                         </a:rPr>
-                        <a:t>no</a:t>
+                        <a:t>yes</a:t>
                       </a:r>
                       <a:endParaRPr lang="en-US" sz="1100" dirty="0">
                         <a:latin typeface="Courier New" charset="0"/>
@@ -25901,6 +25901,212 @@
                           <a:ea typeface="Calibri" pitchFamily="34" charset="-122"/>
                           <a:cs typeface="Calibri" pitchFamily="34" charset="-120"/>
                         </a:rPr>
+                        <a:t>mail_deliverability_notice</a:t>
+                      </a:r>
+                      <a:endParaRPr lang="en-US" sz="1250" dirty="0">
+                        <a:latin typeface="Calibri" charset="0"/>
+                        <a:ea typeface="Calibri" charset="0"/>
+                        <a:cs typeface="Calibri" charset="0"/>
+                      </a:endParaRPr>
+                    </a:p>
+                  </a:txBody>
+                  <a:tcPr marL="50800" marR="50800" marT="50800" marB="50800" anchor="ctr">
+                    <a:lnL w="12700" cap="flat" cmpd="sng" algn="ctr">
+                      <a:solidFill>
+                        <a:srgbClr val="DCE6EB"/>
+                      </a:solidFill>
+                      <a:prstDash val="solid"/>
+                      <a:round/>
+                      <a:headEnd type="none" w="med" len="med"/>
+                      <a:tailEnd type="none" w="med" len="med"/>
+                    </a:lnL>
+                    <a:lnR w="12700" cap="flat" cmpd="sng" algn="ctr">
+                      <a:solidFill>
+                        <a:srgbClr val="DCE6EB"/>
+                      </a:solidFill>
+                      <a:prstDash val="solid"/>
+                      <a:round/>
+                      <a:headEnd type="none" w="med" len="med"/>
+                      <a:tailEnd type="none" w="med" len="med"/>
+                    </a:lnR>
+                    <a:lnT w="12700" cap="flat" cmpd="sng" algn="ctr">
+                      <a:solidFill>
+                        <a:srgbClr val="DCE6EB"/>
+                      </a:solidFill>
+                      <a:prstDash val="solid"/>
+                      <a:round/>
+                      <a:headEnd type="none" w="med" len="med"/>
+                      <a:tailEnd type="none" w="med" len="med"/>
+                    </a:lnT>
+                    <a:lnB w="12700" cap="flat" cmpd="sng" algn="ctr">
+                      <a:solidFill>
+                        <a:srgbClr val="DCE6EB"/>
+                      </a:solidFill>
+                      <a:prstDash val="solid"/>
+                      <a:round/>
+                      <a:headEnd type="none" w="med" len="med"/>
+                      <a:tailEnd type="none" w="med" len="med"/>
+                    </a:lnB>
+                    <a:solidFill>
+                      <a:srgbClr val="FFFFFF"/>
+                    </a:solidFill>
+                  </a:tcPr>
+                </a:tc>
+                <a:tc>
+                  <a:txBody>
+                    <a:bodyPr/>
+                    <a:lstStyle/>
+                    <a:p>
+                      <a:pPr algn="l" indent="0" marL="0">
+                        <a:buNone/>
+                      </a:pPr>
+                      <a:r>
+                        <a:rPr lang="en-US" sz="1100" dirty="0">
+                          <a:solidFill>
+                            <a:srgbClr val="27607A"/>
+                          </a:solidFill>
+                          <a:latin typeface="Courier New" pitchFamily="34" charset="0"/>
+                          <a:ea typeface="Courier New" pitchFamily="34" charset="-122"/>
+                          <a:cs typeface="Courier New" pitchFamily="34" charset="-120"/>
+                        </a:rPr>
+                        <a:t>yes</a:t>
+                      </a:r>
+                      <a:endParaRPr lang="en-US" sz="1100" dirty="0">
+                        <a:latin typeface="Courier New" charset="0"/>
+                        <a:ea typeface="Courier New" charset="0"/>
+                        <a:cs typeface="Courier New" charset="0"/>
+                      </a:endParaRPr>
+                    </a:p>
+                  </a:txBody>
+                  <a:tcPr marL="50800" marR="50800" marT="50800" marB="50800" anchor="ctr">
+                    <a:lnL w="12700" cap="flat" cmpd="sng" algn="ctr">
+                      <a:solidFill>
+                        <a:srgbClr val="DCE6EB"/>
+                      </a:solidFill>
+                      <a:prstDash val="solid"/>
+                      <a:round/>
+                      <a:headEnd type="none" w="med" len="med"/>
+                      <a:tailEnd type="none" w="med" len="med"/>
+                    </a:lnL>
+                    <a:lnR w="12700" cap="flat" cmpd="sng" algn="ctr">
+                      <a:solidFill>
+                        <a:srgbClr val="DCE6EB"/>
+                      </a:solidFill>
+                      <a:prstDash val="solid"/>
+                      <a:round/>
+                      <a:headEnd type="none" w="med" len="med"/>
+                      <a:tailEnd type="none" w="med" len="med"/>
+                    </a:lnR>
+                    <a:lnT w="12700" cap="flat" cmpd="sng" algn="ctr">
+                      <a:solidFill>
+                        <a:srgbClr val="DCE6EB"/>
+                      </a:solidFill>
+                      <a:prstDash val="solid"/>
+                      <a:round/>
+                      <a:headEnd type="none" w="med" len="med"/>
+                      <a:tailEnd type="none" w="med" len="med"/>
+                    </a:lnT>
+                    <a:lnB w="12700" cap="flat" cmpd="sng" algn="ctr">
+                      <a:solidFill>
+                        <a:srgbClr val="DCE6EB"/>
+                      </a:solidFill>
+                      <a:prstDash val="solid"/>
+                      <a:round/>
+                      <a:headEnd type="none" w="med" len="med"/>
+                      <a:tailEnd type="none" w="med" len="med"/>
+                    </a:lnB>
+                    <a:solidFill>
+                      <a:srgbClr val="FFFFFF"/>
+                    </a:solidFill>
+                  </a:tcPr>
+                </a:tc>
+                <a:tc>
+                  <a:txBody>
+                    <a:bodyPr/>
+                    <a:lstStyle/>
+                    <a:p>
+                      <a:pPr algn="l" indent="0" marL="0">
+                        <a:buNone/>
+                      </a:pPr>
+                      <a:r>
+                        <a:rPr lang="en-US" sz="1200" dirty="0">
+                          <a:solidFill>
+                            <a:srgbClr val="4A5A63"/>
+                          </a:solidFill>
+                          <a:latin typeface="Calibri" pitchFamily="34" charset="0"/>
+                          <a:ea typeface="Calibri" pitchFamily="34" charset="-122"/>
+                          <a:cs typeface="Calibri" pitchFamily="34" charset="-120"/>
+                        </a:rPr>
+                        <a:t>admin_notices when the From address looks undeliverable</a:t>
+                      </a:r>
+                      <a:endParaRPr lang="en-US" sz="1200" dirty="0">
+                        <a:latin typeface="Calibri" charset="0"/>
+                        <a:ea typeface="Calibri" charset="0"/>
+                        <a:cs typeface="Calibri" charset="0"/>
+                      </a:endParaRPr>
+                    </a:p>
+                  </a:txBody>
+                  <a:tcPr marL="50800" marR="50800" marT="50800" marB="50800" anchor="ctr">
+                    <a:lnL w="12700" cap="flat" cmpd="sng" algn="ctr">
+                      <a:solidFill>
+                        <a:srgbClr val="DCE6EB"/>
+                      </a:solidFill>
+                      <a:prstDash val="solid"/>
+                      <a:round/>
+                      <a:headEnd type="none" w="med" len="med"/>
+                      <a:tailEnd type="none" w="med" len="med"/>
+                    </a:lnL>
+                    <a:lnR w="12700" cap="flat" cmpd="sng" algn="ctr">
+                      <a:solidFill>
+                        <a:srgbClr val="DCE6EB"/>
+                      </a:solidFill>
+                      <a:prstDash val="solid"/>
+                      <a:round/>
+                      <a:headEnd type="none" w="med" len="med"/>
+                      <a:tailEnd type="none" w="med" len="med"/>
+                    </a:lnR>
+                    <a:lnT w="12700" cap="flat" cmpd="sng" algn="ctr">
+                      <a:solidFill>
+                        <a:srgbClr val="DCE6EB"/>
+                      </a:solidFill>
+                      <a:prstDash val="solid"/>
+                      <a:round/>
+                      <a:headEnd type="none" w="med" len="med"/>
+                      <a:tailEnd type="none" w="med" len="med"/>
+                    </a:lnT>
+                    <a:lnB w="12700" cap="flat" cmpd="sng" algn="ctr">
+                      <a:solidFill>
+                        <a:srgbClr val="DCE6EB"/>
+                      </a:solidFill>
+                      <a:prstDash val="solid"/>
+                      <a:round/>
+                      <a:headEnd type="none" w="med" len="med"/>
+                      <a:tailEnd type="none" w="med" len="med"/>
+                    </a:lnB>
+                    <a:solidFill>
+                      <a:srgbClr val="FFFFFF"/>
+                    </a:solidFill>
+                  </a:tcPr>
+                </a:tc>
+              </a:tr>
+              <a:tr h="402336">
+                <a:tc>
+                  <a:txBody>
+                    <a:bodyPr/>
+                    <a:lstStyle/>
+                    <a:p>
+                      <a:pPr algn="l" indent="0" marL="0">
+                        <a:buNone/>
+                      </a:pPr>
+                      <a:r>
+                        <a:rPr lang="en-US" sz="1250" dirty="0">
+                          <a:solidFill>
+                            <a:srgbClr val="0F2733"/>
+                          </a:solidFill>
+                          <a:latin typeface="Calibri" pitchFamily="34" charset="0"/>
+                          <a:ea typeface="Calibri" pitchFamily="34" charset="-122"/>
+                          <a:cs typeface="Calibri" pitchFamily="34" charset="-120"/>
+                        </a:rPr>
                         <a:t>throttle_heartbeat</a:t>
                       </a:r>
                       <a:endParaRPr lang="en-US" sz="1250" dirty="0">
@@ -25948,7 +26154,7 @@
                       <a:tailEnd type="none" w="med" len="med"/>
                     </a:lnB>
                     <a:solidFill>
-                      <a:srgbClr val="FFFFFF"/>
+                      <a:srgbClr val="EAF1F5"/>
                     </a:solidFill>
                   </a:tcPr>
                 </a:tc>
@@ -26016,7 +26222,7 @@
                       <a:tailEnd type="none" w="med" len="med"/>
                     </a:lnB>
                     <a:solidFill>
-                      <a:srgbClr val="FFFFFF"/>
+                      <a:srgbClr val="EAF1F5"/>
                     </a:solidFill>
                   </a:tcPr>
                 </a:tc>
@@ -26084,7 +26290,7 @@
                       <a:tailEnd type="none" w="med" len="med"/>
                     </a:lnB>
                     <a:solidFill>
-                      <a:srgbClr val="FFFFFF"/>
+                      <a:srgbClr val="EAF1F5"/>
                     </a:solidFill>
                   </a:tcPr>
                 </a:tc>
@@ -26154,7 +26360,7 @@
                       <a:tailEnd type="none" w="med" len="med"/>
                     </a:lnB>
                     <a:solidFill>
-                      <a:srgbClr val="EAF1F5"/>
+                      <a:srgbClr val="FFFFFF"/>
                     </a:solidFill>
                   </a:tcPr>
                 </a:tc>
@@ -26222,7 +26428,7 @@
                       <a:tailEnd type="none" w="med" len="med"/>
                     </a:lnB>
                     <a:solidFill>
-                      <a:srgbClr val="EAF1F5"/>
+                      <a:srgbClr val="FFFFFF"/>
                     </a:solidFill>
                   </a:tcPr>
                 </a:tc>
@@ -26290,6 +26496,212 @@
                       <a:tailEnd type="none" w="med" len="med"/>
                     </a:lnB>
                     <a:solidFill>
+                      <a:srgbClr val="FFFFFF"/>
+                    </a:solidFill>
+                  </a:tcPr>
+                </a:tc>
+              </a:tr>
+              <a:tr h="402336">
+                <a:tc>
+                  <a:txBody>
+                    <a:bodyPr/>
+                    <a:lstStyle/>
+                    <a:p>
+                      <a:pPr algn="l" indent="0" marL="0">
+                        <a:buNone/>
+                      </a:pPr>
+                      <a:r>
+                        <a:rPr lang="en-US" sz="1250" dirty="0">
+                          <a:solidFill>
+                            <a:srgbClr val="0F2733"/>
+                          </a:solidFill>
+                          <a:latin typeface="Calibri" pitchFamily="34" charset="0"/>
+                          <a:ea typeface="Calibri" pitchFamily="34" charset="-122"/>
+                          <a:cs typeface="Calibri" pitchFamily="34" charset="-120"/>
+                        </a:rPr>
+                        <a:t>DISALLOW_FILE_EDIT</a:t>
+                      </a:r>
+                      <a:endParaRPr lang="en-US" sz="1250" dirty="0">
+                        <a:latin typeface="Calibri" charset="0"/>
+                        <a:ea typeface="Calibri" charset="0"/>
+                        <a:cs typeface="Calibri" charset="0"/>
+                      </a:endParaRPr>
+                    </a:p>
+                  </a:txBody>
+                  <a:tcPr marL="50800" marR="50800" marT="50800" marB="50800" anchor="ctr">
+                    <a:lnL w="12700" cap="flat" cmpd="sng" algn="ctr">
+                      <a:solidFill>
+                        <a:srgbClr val="DCE6EB"/>
+                      </a:solidFill>
+                      <a:prstDash val="solid"/>
+                      <a:round/>
+                      <a:headEnd type="none" w="med" len="med"/>
+                      <a:tailEnd type="none" w="med" len="med"/>
+                    </a:lnL>
+                    <a:lnR w="12700" cap="flat" cmpd="sng" algn="ctr">
+                      <a:solidFill>
+                        <a:srgbClr val="DCE6EB"/>
+                      </a:solidFill>
+                      <a:prstDash val="solid"/>
+                      <a:round/>
+                      <a:headEnd type="none" w="med" len="med"/>
+                      <a:tailEnd type="none" w="med" len="med"/>
+                    </a:lnR>
+                    <a:lnT w="12700" cap="flat" cmpd="sng" algn="ctr">
+                      <a:solidFill>
+                        <a:srgbClr val="DCE6EB"/>
+                      </a:solidFill>
+                      <a:prstDash val="solid"/>
+                      <a:round/>
+                      <a:headEnd type="none" w="med" len="med"/>
+                      <a:tailEnd type="none" w="med" len="med"/>
+                    </a:lnT>
+                    <a:lnB w="12700" cap="flat" cmpd="sng" algn="ctr">
+                      <a:solidFill>
+                        <a:srgbClr val="DCE6EB"/>
+                      </a:solidFill>
+                      <a:prstDash val="solid"/>
+                      <a:round/>
+                      <a:headEnd type="none" w="med" len="med"/>
+                      <a:tailEnd type="none" w="med" len="med"/>
+                    </a:lnB>
+                    <a:solidFill>
+                      <a:srgbClr val="EAF1F5"/>
+                    </a:solidFill>
+                  </a:tcPr>
+                </a:tc>
+                <a:tc>
+                  <a:txBody>
+                    <a:bodyPr/>
+                    <a:lstStyle/>
+                    <a:p>
+                      <a:pPr algn="l" indent="0" marL="0">
+                        <a:buNone/>
+                      </a:pPr>
+                      <a:r>
+                        <a:rPr lang="en-US" sz="1100" dirty="0">
+                          <a:solidFill>
+                            <a:srgbClr val="27607A"/>
+                          </a:solidFill>
+                          <a:latin typeface="Courier New" pitchFamily="34" charset="0"/>
+                          <a:ea typeface="Courier New" pitchFamily="34" charset="-122"/>
+                          <a:cs typeface="Courier New" pitchFamily="34" charset="-120"/>
+                        </a:rPr>
+                        <a:t>manual</a:t>
+                      </a:r>
+                      <a:endParaRPr lang="en-US" sz="1100" dirty="0">
+                        <a:latin typeface="Courier New" charset="0"/>
+                        <a:ea typeface="Courier New" charset="0"/>
+                        <a:cs typeface="Courier New" charset="0"/>
+                      </a:endParaRPr>
+                    </a:p>
+                  </a:txBody>
+                  <a:tcPr marL="50800" marR="50800" marT="50800" marB="50800" anchor="ctr">
+                    <a:lnL w="12700" cap="flat" cmpd="sng" algn="ctr">
+                      <a:solidFill>
+                        <a:srgbClr val="DCE6EB"/>
+                      </a:solidFill>
+                      <a:prstDash val="solid"/>
+                      <a:round/>
+                      <a:headEnd type="none" w="med" len="med"/>
+                      <a:tailEnd type="none" w="med" len="med"/>
+                    </a:lnL>
+                    <a:lnR w="12700" cap="flat" cmpd="sng" algn="ctr">
+                      <a:solidFill>
+                        <a:srgbClr val="DCE6EB"/>
+                      </a:solidFill>
+                      <a:prstDash val="solid"/>
+                      <a:round/>
+                      <a:headEnd type="none" w="med" len="med"/>
+                      <a:tailEnd type="none" w="med" len="med"/>
+                    </a:lnR>
+                    <a:lnT w="12700" cap="flat" cmpd="sng" algn="ctr">
+                      <a:solidFill>
+                        <a:srgbClr val="DCE6EB"/>
+                      </a:solidFill>
+                      <a:prstDash val="solid"/>
+                      <a:round/>
+                      <a:headEnd type="none" w="med" len="med"/>
+                      <a:tailEnd type="none" w="med" len="med"/>
+                    </a:lnT>
+                    <a:lnB w="12700" cap="flat" cmpd="sng" algn="ctr">
+                      <a:solidFill>
+                        <a:srgbClr val="DCE6EB"/>
+                      </a:solidFill>
+                      <a:prstDash val="solid"/>
+                      <a:round/>
+                      <a:headEnd type="none" w="med" len="med"/>
+                      <a:tailEnd type="none" w="med" len="med"/>
+                    </a:lnB>
+                    <a:solidFill>
+                      <a:srgbClr val="EAF1F5"/>
+                    </a:solidFill>
+                  </a:tcPr>
+                </a:tc>
+                <a:tc>
+                  <a:txBody>
+                    <a:bodyPr/>
+                    <a:lstStyle/>
+                    <a:p>
+                      <a:pPr algn="l" indent="0" marL="0">
+                        <a:buNone/>
+                      </a:pPr>
+                      <a:r>
+                        <a:rPr lang="en-US" sz="1200" dirty="0">
+                          <a:solidFill>
+                            <a:srgbClr val="4A5A63"/>
+                          </a:solidFill>
+                          <a:latin typeface="Calibri" pitchFamily="34" charset="0"/>
+                          <a:ea typeface="Calibri" pitchFamily="34" charset="-122"/>
+                          <a:cs typeface="Calibri" pitchFamily="34" charset="-120"/>
+                        </a:rPr>
+                        <a:t>wp-config.php</a:t>
+                      </a:r>
+                      <a:endParaRPr lang="en-US" sz="1200" dirty="0">
+                        <a:latin typeface="Calibri" charset="0"/>
+                        <a:ea typeface="Calibri" charset="0"/>
+                        <a:cs typeface="Calibri" charset="0"/>
+                      </a:endParaRPr>
+                    </a:p>
+                  </a:txBody>
+                  <a:tcPr marL="50800" marR="50800" marT="50800" marB="50800" anchor="ctr">
+                    <a:lnL w="12700" cap="flat" cmpd="sng" algn="ctr">
+                      <a:solidFill>
+                        <a:srgbClr val="DCE6EB"/>
+                      </a:solidFill>
+                      <a:prstDash val="solid"/>
+                      <a:round/>
+                      <a:headEnd type="none" w="med" len="med"/>
+                      <a:tailEnd type="none" w="med" len="med"/>
+                    </a:lnL>
+                    <a:lnR w="12700" cap="flat" cmpd="sng" algn="ctr">
+                      <a:solidFill>
+                        <a:srgbClr val="DCE6EB"/>
+                      </a:solidFill>
+                      <a:prstDash val="solid"/>
+                      <a:round/>
+                      <a:headEnd type="none" w="med" len="med"/>
+                      <a:tailEnd type="none" w="med" len="med"/>
+                    </a:lnR>
+                    <a:lnT w="12700" cap="flat" cmpd="sng" algn="ctr">
+                      <a:solidFill>
+                        <a:srgbClr val="DCE6EB"/>
+                      </a:solidFill>
+                      <a:prstDash val="solid"/>
+                      <a:round/>
+                      <a:headEnd type="none" w="med" len="med"/>
+                      <a:tailEnd type="none" w="med" len="med"/>
+                    </a:lnT>
+                    <a:lnB w="12700" cap="flat" cmpd="sng" algn="ctr">
+                      <a:solidFill>
+                        <a:srgbClr val="DCE6EB"/>
+                      </a:solidFill>
+                      <a:prstDash val="solid"/>
+                      <a:round/>
+                      <a:headEnd type="none" w="med" len="med"/>
+                      <a:tailEnd type="none" w="med" len="med"/>
+                    </a:lnB>
+                    <a:solidFill>
                       <a:srgbClr val="EAF1F5"/>
                     </a:solidFill>
                   </a:tcPr>
@@ -26313,7 +26725,7 @@
                           <a:ea typeface="Calibri" pitchFamily="34" charset="-122"/>
                           <a:cs typeface="Calibri" pitchFamily="34" charset="-120"/>
                         </a:rPr>
-                        <a:t>DISALLOW_FILE_EDIT</a:t>
+                        <a:t>revisions / autosave</a:t>
                       </a:r>
                       <a:endParaRPr lang="en-US" sz="1250" dirty="0">
                         <a:latin typeface="Calibri" charset="0"/>
@@ -26449,212 +26861,6 @@
                           <a:ea typeface="Calibri" pitchFamily="34" charset="-122"/>
                           <a:cs typeface="Calibri" pitchFamily="34" charset="-120"/>
                         </a:rPr>
-                        <a:t>wp-config.php</a:t>
-                      </a:r>
-                      <a:endParaRPr lang="en-US" sz="1200" dirty="0">
-                        <a:latin typeface="Calibri" charset="0"/>
-                        <a:ea typeface="Calibri" charset="0"/>
-                        <a:cs typeface="Calibri" charset="0"/>
-                      </a:endParaRPr>
-                    </a:p>
-                  </a:txBody>
-                  <a:tcPr marL="50800" marR="50800" marT="50800" marB="50800" anchor="ctr">
-                    <a:lnL w="12700" cap="flat" cmpd="sng" algn="ctr">
-                      <a:solidFill>
-                        <a:srgbClr val="DCE6EB"/>
-                      </a:solidFill>
-                      <a:prstDash val="solid"/>
-                      <a:round/>
-                      <a:headEnd type="none" w="med" len="med"/>
-                      <a:tailEnd type="none" w="med" len="med"/>
-                    </a:lnL>
-                    <a:lnR w="12700" cap="flat" cmpd="sng" algn="ctr">
-                      <a:solidFill>
-                        <a:srgbClr val="DCE6EB"/>
-                      </a:solidFill>
-                      <a:prstDash val="solid"/>
-                      <a:round/>
-                      <a:headEnd type="none" w="med" len="med"/>
-                      <a:tailEnd type="none" w="med" len="med"/>
-                    </a:lnR>
-                    <a:lnT w="12700" cap="flat" cmpd="sng" algn="ctr">
-                      <a:solidFill>
-                        <a:srgbClr val="DCE6EB"/>
-                      </a:solidFill>
-                      <a:prstDash val="solid"/>
-                      <a:round/>
-                      <a:headEnd type="none" w="med" len="med"/>
-                      <a:tailEnd type="none" w="med" len="med"/>
-                    </a:lnT>
-                    <a:lnB w="12700" cap="flat" cmpd="sng" algn="ctr">
-                      <a:solidFill>
-                        <a:srgbClr val="DCE6EB"/>
-                      </a:solidFill>
-                      <a:prstDash val="solid"/>
-                      <a:round/>
-                      <a:headEnd type="none" w="med" len="med"/>
-                      <a:tailEnd type="none" w="med" len="med"/>
-                    </a:lnB>
-                    <a:solidFill>
-                      <a:srgbClr val="FFFFFF"/>
-                    </a:solidFill>
-                  </a:tcPr>
-                </a:tc>
-              </a:tr>
-              <a:tr h="402336">
-                <a:tc>
-                  <a:txBody>
-                    <a:bodyPr/>
-                    <a:lstStyle/>
-                    <a:p>
-                      <a:pPr algn="l" indent="0" marL="0">
-                        <a:buNone/>
-                      </a:pPr>
-                      <a:r>
-                        <a:rPr lang="en-US" sz="1250" dirty="0">
-                          <a:solidFill>
-                            <a:srgbClr val="0F2733"/>
-                          </a:solidFill>
-                          <a:latin typeface="Calibri" pitchFamily="34" charset="0"/>
-                          <a:ea typeface="Calibri" pitchFamily="34" charset="-122"/>
-                          <a:cs typeface="Calibri" pitchFamily="34" charset="-120"/>
-                        </a:rPr>
-                        <a:t>revisions / autosave</a:t>
-                      </a:r>
-                      <a:endParaRPr lang="en-US" sz="1250" dirty="0">
-                        <a:latin typeface="Calibri" charset="0"/>
-                        <a:ea typeface="Calibri" charset="0"/>
-                        <a:cs typeface="Calibri" charset="0"/>
-                      </a:endParaRPr>
-                    </a:p>
-                  </a:txBody>
-                  <a:tcPr marL="50800" marR="50800" marT="50800" marB="50800" anchor="ctr">
-                    <a:lnL w="12700" cap="flat" cmpd="sng" algn="ctr">
-                      <a:solidFill>
-                        <a:srgbClr val="DCE6EB"/>
-                      </a:solidFill>
-                      <a:prstDash val="solid"/>
-                      <a:round/>
-                      <a:headEnd type="none" w="med" len="med"/>
-                      <a:tailEnd type="none" w="med" len="med"/>
-                    </a:lnL>
-                    <a:lnR w="12700" cap="flat" cmpd="sng" algn="ctr">
-                      <a:solidFill>
-                        <a:srgbClr val="DCE6EB"/>
-                      </a:solidFill>
-                      <a:prstDash val="solid"/>
-                      <a:round/>
-                      <a:headEnd type="none" w="med" len="med"/>
-                      <a:tailEnd type="none" w="med" len="med"/>
-                    </a:lnR>
-                    <a:lnT w="12700" cap="flat" cmpd="sng" algn="ctr">
-                      <a:solidFill>
-                        <a:srgbClr val="DCE6EB"/>
-                      </a:solidFill>
-                      <a:prstDash val="solid"/>
-                      <a:round/>
-                      <a:headEnd type="none" w="med" len="med"/>
-                      <a:tailEnd type="none" w="med" len="med"/>
-                    </a:lnT>
-                    <a:lnB w="12700" cap="flat" cmpd="sng" algn="ctr">
-                      <a:solidFill>
-                        <a:srgbClr val="DCE6EB"/>
-                      </a:solidFill>
-                      <a:prstDash val="solid"/>
-                      <a:round/>
-                      <a:headEnd type="none" w="med" len="med"/>
-                      <a:tailEnd type="none" w="med" len="med"/>
-                    </a:lnB>
-                    <a:solidFill>
-                      <a:srgbClr val="EAF1F5"/>
-                    </a:solidFill>
-                  </a:tcPr>
-                </a:tc>
-                <a:tc>
-                  <a:txBody>
-                    <a:bodyPr/>
-                    <a:lstStyle/>
-                    <a:p>
-                      <a:pPr algn="l" indent="0" marL="0">
-                        <a:buNone/>
-                      </a:pPr>
-                      <a:r>
-                        <a:rPr lang="en-US" sz="1100" dirty="0">
-                          <a:solidFill>
-                            <a:srgbClr val="27607A"/>
-                          </a:solidFill>
-                          <a:latin typeface="Courier New" pitchFamily="34" charset="0"/>
-                          <a:ea typeface="Courier New" pitchFamily="34" charset="-122"/>
-                          <a:cs typeface="Courier New" pitchFamily="34" charset="-120"/>
-                        </a:rPr>
-                        <a:t>manual</a:t>
-                      </a:r>
-                      <a:endParaRPr lang="en-US" sz="1100" dirty="0">
-                        <a:latin typeface="Courier New" charset="0"/>
-                        <a:ea typeface="Courier New" charset="0"/>
-                        <a:cs typeface="Courier New" charset="0"/>
-                      </a:endParaRPr>
-                    </a:p>
-                  </a:txBody>
-                  <a:tcPr marL="50800" marR="50800" marT="50800" marB="50800" anchor="ctr">
-                    <a:lnL w="12700" cap="flat" cmpd="sng" algn="ctr">
-                      <a:solidFill>
-                        <a:srgbClr val="DCE6EB"/>
-                      </a:solidFill>
-                      <a:prstDash val="solid"/>
-                      <a:round/>
-                      <a:headEnd type="none" w="med" len="med"/>
-                      <a:tailEnd type="none" w="med" len="med"/>
-                    </a:lnL>
-                    <a:lnR w="12700" cap="flat" cmpd="sng" algn="ctr">
-                      <a:solidFill>
-                        <a:srgbClr val="DCE6EB"/>
-                      </a:solidFill>
-                      <a:prstDash val="solid"/>
-                      <a:round/>
-                      <a:headEnd type="none" w="med" len="med"/>
-                      <a:tailEnd type="none" w="med" len="med"/>
-                    </a:lnR>
-                    <a:lnT w="12700" cap="flat" cmpd="sng" algn="ctr">
-                      <a:solidFill>
-                        <a:srgbClr val="DCE6EB"/>
-                      </a:solidFill>
-                      <a:prstDash val="solid"/>
-                      <a:round/>
-                      <a:headEnd type="none" w="med" len="med"/>
-                      <a:tailEnd type="none" w="med" len="med"/>
-                    </a:lnT>
-                    <a:lnB w="12700" cap="flat" cmpd="sng" algn="ctr">
-                      <a:solidFill>
-                        <a:srgbClr val="DCE6EB"/>
-                      </a:solidFill>
-                      <a:prstDash val="solid"/>
-                      <a:round/>
-                      <a:headEnd type="none" w="med" len="med"/>
-                      <a:tailEnd type="none" w="med" len="med"/>
-                    </a:lnB>
-                    <a:solidFill>
-                      <a:srgbClr val="EAF1F5"/>
-                    </a:solidFill>
-                  </a:tcPr>
-                </a:tc>
-                <a:tc>
-                  <a:txBody>
-                    <a:bodyPr/>
-                    <a:lstStyle/>
-                    <a:p>
-                      <a:pPr algn="l" indent="0" marL="0">
-                        <a:buNone/>
-                      </a:pPr>
-                      <a:r>
-                        <a:rPr lang="en-US" sz="1200" dirty="0">
-                          <a:solidFill>
-                            <a:srgbClr val="4A5A63"/>
-                          </a:solidFill>
-                          <a:latin typeface="Calibri" pitchFamily="34" charset="0"/>
-                          <a:ea typeface="Calibri" pitchFamily="34" charset="-122"/>
-                          <a:cs typeface="Calibri" pitchFamily="34" charset="-120"/>
-                        </a:rPr>
                         <a:t>wp-config.php constants</a:t>
                       </a:r>
                       <a:endParaRPr lang="en-US" sz="1200" dirty="0">
@@ -26702,7 +26908,7 @@
                       <a:tailEnd type="none" w="med" len="med"/>
                     </a:lnB>
                     <a:solidFill>
-                      <a:srgbClr val="EAF1F5"/>
+                      <a:srgbClr val="FFFFFF"/>
                     </a:solidFill>
                   </a:tcPr>
                 </a:tc>
@@ -28829,7 +29035,7 @@
                 <a:ea typeface="Cambria" pitchFamily="34" charset="-122"/>
                 <a:cs typeface="Cambria" pitchFamily="34" charset="-120"/>
               </a:rPr>
-              <a:t>Seven categories of defaults</a:t>
+              <a:t>Eight categories of defaults</a:t>
             </a:r>
             <a:endParaRPr lang="en-US" sz="3400" dirty="0"/>
           </a:p>
@@ -30034,14 +30240,68 @@
       </p:sp>
       <p:sp>
         <p:nvSpPr>
-          <p:cNvPr id="38" name="Text 36"/>
-          <p:cNvSpPr/>
-          <p:nvPr/>
-        </p:nvSpPr>
-        <p:spPr>
-          <a:xfrm>
-            <a:off x="502920" y="6428232"/>
-            <a:ext cx="7315200" cy="274320"/>
+          <p:cNvPr id="38" name="Shape 36"/>
+          <p:cNvSpPr/>
+          <p:nvPr/>
+        </p:nvSpPr>
+        <p:spPr>
+          <a:xfrm>
+            <a:off x="9162288" y="3977640"/>
+            <a:ext cx="2487168" cy="1965960"/>
+          </a:xfrm>
+          <a:prstGeom prst="roundRect">
+            <a:avLst>
+              <a:gd name="adj" fmla="val 4651"/>
+            </a:avLst>
+          </a:prstGeom>
+          <a:solidFill>
+            <a:srgbClr val="FFFFFF"/>
+          </a:solidFill>
+          <a:ln w="12700">
+            <a:solidFill>
+              <a:srgbClr val="DCE6EB"/>
+            </a:solidFill>
+            <a:prstDash val="solid"/>
+          </a:ln>
+          <a:effectLst>
+            <a:outerShdw sx="100000" sy="100000" kx="0" ky="0" algn="bl" rotWithShape="0" blurRad="63500" dist="25400" dir="5400000">
+              <a:srgbClr val="C7D4DB">
+                <a:alpha val="50000"/>
+              </a:srgbClr>
+            </a:outerShdw>
+          </a:effectLst>
+        </p:spPr>
+      </p:sp>
+      <p:sp>
+        <p:nvSpPr>
+          <p:cNvPr id="39" name="Shape 37"/>
+          <p:cNvSpPr/>
+          <p:nvPr/>
+        </p:nvSpPr>
+        <p:spPr>
+          <a:xfrm>
+            <a:off x="9482328" y="4297680"/>
+            <a:ext cx="640080" cy="640080"/>
+          </a:xfrm>
+          <a:prstGeom prst="ellipse">
+            <a:avLst/>
+          </a:prstGeom>
+          <a:solidFill>
+            <a:srgbClr val="E0A94B"/>
+          </a:solidFill>
+          <a:ln/>
+        </p:spPr>
+      </p:sp>
+      <p:sp>
+        <p:nvSpPr>
+          <p:cNvPr id="40" name="Text 38"/>
+          <p:cNvSpPr/>
+          <p:nvPr/>
+        </p:nvSpPr>
+        <p:spPr>
+          <a:xfrm>
+            <a:off x="9482328" y="4297680"/>
+            <a:ext cx="640080" cy="640080"/>
           </a:xfrm>
           <a:prstGeom prst="rect">
             <a:avLst/>
@@ -30053,32 +30313,149 @@
           <a:bodyPr wrap="square" lIns="0" tIns="0" rIns="0" bIns="0" rtlCol="0" anchor="ctr"/>
           <a:lstStyle/>
           <a:p>
-            <a:pPr algn="l" indent="0" marL="0">
-              <a:buNone/>
-            </a:pPr>
-            <a:r>
-              <a:rPr lang="en-US" sz="900" b="1" dirty="0">
-                <a:solidFill>
-                  <a:srgbClr val="C88F33"/>
+            <a:pPr algn="ctr" indent="0" marL="0">
+              <a:buNone/>
+            </a:pPr>
+            <a:r>
+              <a:rPr lang="en-US" sz="1820" b="1" dirty="0">
+                <a:solidFill>
+                  <a:srgbClr val="0F2733"/>
+                </a:solidFill>
+                <a:latin typeface="Cambria" pitchFamily="34" charset="0"/>
+                <a:ea typeface="Cambria" pitchFamily="34" charset="-122"/>
+                <a:cs typeface="Cambria" pitchFamily="34" charset="-120"/>
+              </a:rPr>
+              <a:t>8</a:t>
+            </a:r>
+            <a:endParaRPr lang="en-US" sz="1820" dirty="0"/>
+          </a:p>
+        </p:txBody>
+      </p:sp>
+      <p:sp>
+        <p:nvSpPr>
+          <p:cNvPr id="41" name="Text 39"/>
+          <p:cNvSpPr/>
+          <p:nvPr/>
+        </p:nvSpPr>
+        <p:spPr>
+          <a:xfrm>
+            <a:off x="9482328" y="4983480"/>
+            <a:ext cx="1984248" cy="411480"/>
+          </a:xfrm>
+          <a:prstGeom prst="rect">
+            <a:avLst/>
+          </a:prstGeom>
+          <a:noFill/>
+          <a:ln/>
+        </p:spPr>
+        <p:txBody>
+          <a:bodyPr wrap="square" lIns="0" tIns="0" rIns="0" bIns="0" rtlCol="0" anchor="ctr"/>
+          <a:lstStyle/>
+          <a:p>
+            <a:pPr indent="0" marL="0">
+              <a:buNone/>
+            </a:pPr>
+            <a:r>
+              <a:rPr lang="en-US" sz="1900" b="1" dirty="0">
+                <a:solidFill>
+                  <a:srgbClr val="0F2733"/>
+                </a:solidFill>
+                <a:latin typeface="Cambria" pitchFamily="34" charset="0"/>
+                <a:ea typeface="Cambria" pitchFamily="34" charset="-122"/>
+                <a:cs typeface="Cambria" pitchFamily="34" charset="-120"/>
+              </a:rPr>
+              <a:t>Email</a:t>
+            </a:r>
+            <a:endParaRPr lang="en-US" sz="1900" dirty="0"/>
+          </a:p>
+        </p:txBody>
+      </p:sp>
+      <p:sp>
+        <p:nvSpPr>
+          <p:cNvPr id="42" name="Text 40"/>
+          <p:cNvSpPr/>
+          <p:nvPr/>
+        </p:nvSpPr>
+        <p:spPr>
+          <a:xfrm>
+            <a:off x="9482328" y="5367528"/>
+            <a:ext cx="1984248" cy="548640"/>
+          </a:xfrm>
+          <a:prstGeom prst="rect">
+            <a:avLst/>
+          </a:prstGeom>
+          <a:noFill/>
+          <a:ln/>
+        </p:spPr>
+        <p:txBody>
+          <a:bodyPr wrap="square" lIns="0" tIns="0" rIns="0" bIns="0" rtlCol="0" anchor="t"/>
+          <a:lstStyle/>
+          <a:p>
+            <a:pPr indent="0" marL="0">
+              <a:buNone/>
+            </a:pPr>
+            <a:r>
+              <a:rPr lang="en-US" sz="1250" dirty="0">
+                <a:solidFill>
+                  <a:srgbClr val="4A5A63"/>
                 </a:solidFill>
                 <a:latin typeface="Calibri" pitchFamily="34" charset="0"/>
                 <a:ea typeface="Calibri" pitchFamily="34" charset="-122"/>
                 <a:cs typeface="Calibri" pitchFamily="34" charset="-120"/>
               </a:rPr>
-              <a:t>WPYEG</a:t>
-            </a:r>
+              <a:t>Say so when the site cannot send mail</a:t>
+            </a:r>
+            <a:endParaRPr lang="en-US" sz="1250" dirty="0"/>
+          </a:p>
+        </p:txBody>
+      </p:sp>
+      <p:sp>
+        <p:nvSpPr>
+          <p:cNvPr id="43" name="Text 41"/>
+          <p:cNvSpPr/>
+          <p:nvPr/>
+        </p:nvSpPr>
+        <p:spPr>
+          <a:xfrm>
+            <a:off x="502920" y="6428232"/>
+            <a:ext cx="7315200" cy="274320"/>
+          </a:xfrm>
+          <a:prstGeom prst="rect">
+            <a:avLst/>
+          </a:prstGeom>
+          <a:noFill/>
+          <a:ln/>
+        </p:spPr>
+        <p:txBody>
+          <a:bodyPr wrap="square" lIns="0" tIns="0" rIns="0" bIns="0" rtlCol="0" anchor="ctr"/>
+          <a:lstStyle/>
+          <a:p>
             <a:pPr algn="l" indent="0" marL="0">
               <a:buNone/>
             </a:pPr>
             <a:r>
-              <a:rPr lang="en-US" sz="900" dirty="0">
-                <a:solidFill>
-                  <a:srgbClr val="8A9AA3"/>
+              <a:rPr lang="en-US" sz="900" b="1" dirty="0">
+                <a:solidFill>
+                  <a:srgbClr val="C88F33"/>
                 </a:solidFill>
                 <a:latin typeface="Calibri" pitchFamily="34" charset="0"/>
                 <a:ea typeface="Calibri" pitchFamily="34" charset="-122"/>
                 <a:cs typeface="Calibri" pitchFamily="34" charset="-120"/>
               </a:rPr>
+              <a:t>WPYEG</a:t>
+            </a:r>
+            <a:pPr algn="l" indent="0" marL="0">
+              <a:buNone/>
+            </a:pPr>
+            <a:r>
+              <a:rPr lang="en-US" sz="900" dirty="0">
+                <a:solidFill>
+                  <a:srgbClr val="8A9AA3"/>
+                </a:solidFill>
+                <a:latin typeface="Calibri" pitchFamily="34" charset="0"/>
+                <a:ea typeface="Calibri" pitchFamily="34" charset="-122"/>
+                <a:cs typeface="Calibri" pitchFamily="34" charset="-120"/>
+              </a:rPr>
               <a:t>  ·  Better by Default</a:t>
             </a:r>
             <a:endParaRPr lang="en-US" sz="900" dirty="0"/>
@@ -30087,7 +30464,7 @@
       </p:sp>
       <p:sp>
         <p:nvSpPr>
-          <p:cNvPr id="39" name="Text 37"/>
+          <p:cNvPr id="44" name="Text 42"/>
           <p:cNvSpPr/>
           <p:nvPr/>
         </p:nvSpPr>

--- a/workshop/Better-by-Default.pptx
+++ b/workshop/Better-by-Default.pptx
@@ -1793,7 +1793,7 @@
           <a:p>
             <a:r>
               <a:rPr lang="en-US" dirty="0"/>
-              <a:t>A normal login lasts 2 days; ticking "Remember Me" extends it to 14. Both lengths are in days, and the remembered one can never be shorter than the regular one. Shorten either, or hide the "Remember Me" checkbox entirely so every login uses the regular length. (Good idea for shared machines.) One filter covers all of it. WordPress ships handy time constants like DAY_IN_SECONDS, so you never need to do the math.</a:t>
+              <a:t>A normal login lasts 2 days; ticking "Remember Me" extends it to 14. Both lengths are in days, and the remembered one can never be shorter than the regular one. Shorten either, or hide the "Remember Me" checkbox entirely so every login uses the regular length. (Good idea for shared machines.) DAY_IN_SECONDS is one of core's time constants, so you never do the math. — Now the two lines that are not about session length, because they are the most portable thing in this deck. This callback ignores the $exp it was handed and returns its own number. A filter that ADDS TO its input composes: several plugins can each contribute a header to wp_headers and all of them survive. A filter that REPLACES its input does not. WordPress runs all of them and keeps whichever answered last, the others do nothing at all, and every losing plugin's settings screen goes on displaying a number the site is not using. No error, nothing logged, nothing on Site Health. Nothing in the API tells you which kind you are writing — both are add_filter(). The difference is entirely in what your callback does with the argument it was given, and it decides whether your plugin can coexist with another one or silently fights it. You cannot make a number filter additive. What you can do is decline the fights you have no stake in: our defaults ARE WordPress's own 2 and 14, so on a site that has not changed them we would be registering only to assert the answer core already gives. Hence the if. And the callback has a name rather than being anonymous, because $wp_filter can only report a callback that has one — an anonymous one shows up as 'closure' in exactly the diagnostic you would run to find out who won. The question to ask of any filter callback you write: if a second plugin did exactly this, would both still work? If not, you are setting policy, and only one plugin on the site can win.</a:t>
             </a:r>
             <a:endParaRPr lang="en-US" dirty="0"/>
           </a:p>
@@ -12274,7 +12274,7 @@
                 <a:ea typeface="Calibri" pitchFamily="34" charset="-122"/>
                 <a:cs typeface="Calibri" pitchFamily="34" charset="-120"/>
               </a:rPr>
-              <a:t>A normal login lasts 2 days; “Remember Me” extends it to 14. Both are in days, and the remembered one can never be shorter than the regular one. Shorten either, or hide the checkbox entirely. One filter covers all of it.</a:t>
+              <a:t>A normal login lasts 2 days; “Remember Me” extends it to 14. Both are in days, and the remembered one can never be shorter. Now look at the registration: this callback throws away the value it was handed, so two plugins setting it cannot both win — and at core's own 2 / 14 we have nothing to say, so we stay out of it.</a:t>
             </a:r>
             <a:endParaRPr lang="en-US" sz="1600" dirty="0"/>
           </a:p>
@@ -12482,7 +12482,7 @@
                 <a:ea typeface="Courier New" pitchFamily="34" charset="-122"/>
                 <a:cs typeface="Courier New" pitchFamily="34" charset="-120"/>
               </a:rPr>
-              <a:t>add_filter( 'auth_cookie_expiration',</a:t>
+              <a:t>function session_length( $exp, $uid, $remember ) {</a:t>
             </a:r>
             <a:endParaRPr lang="en-US" sz="1150" dirty="0"/>
           </a:p>
@@ -12502,7 +12502,7 @@
                 <a:ea typeface="Courier New" pitchFamily="34" charset="-122"/>
                 <a:cs typeface="Courier New" pitchFamily="34" charset="-120"/>
               </a:rPr>
-              <a:t>  function ( $exp, $uid, $remember ) {</a:t>
+              <a:t>  return $remember</a:t>
             </a:r>
             <a:endParaRPr lang="en-US" sz="1150" dirty="0"/>
           </a:p>
@@ -12516,13 +12516,13 @@
             <a:r>
               <a:rPr lang="en-US" sz="1150" dirty="0">
                 <a:solidFill>
-                  <a:srgbClr val="DCEAF1"/>
+                  <a:srgbClr val="E7C070"/>
                 </a:solidFill>
                 <a:latin typeface="Courier New" pitchFamily="34" charset="0"/>
                 <a:ea typeface="Courier New" pitchFamily="34" charset="-122"/>
                 <a:cs typeface="Courier New" pitchFamily="34" charset="-120"/>
               </a:rPr>
-              <a:t>    $regular = 2 * DAY_IN_SECONDS;</a:t>
+              <a:t>    ? 14 * DAY_IN_SECONDS</a:t>
             </a:r>
             <a:endParaRPr lang="en-US" sz="1150" dirty="0"/>
           </a:p>
@@ -12536,13 +12536,13 @@
             <a:r>
               <a:rPr lang="en-US" sz="1150" dirty="0">
                 <a:solidFill>
-                  <a:srgbClr val="DCEAF1"/>
+                  <a:srgbClr val="E7C070"/>
                 </a:solidFill>
                 <a:latin typeface="Courier New" pitchFamily="34" charset="0"/>
                 <a:ea typeface="Courier New" pitchFamily="34" charset="-122"/>
                 <a:cs typeface="Courier New" pitchFamily="34" charset="-120"/>
               </a:rPr>
-              <a:t>    return $remember</a:t>
+              <a:t>    : 2 * DAY_IN_SECONDS;</a:t>
             </a:r>
             <a:endParaRPr lang="en-US" sz="1150" dirty="0"/>
           </a:p>
@@ -12556,13 +12556,13 @@
             <a:r>
               <a:rPr lang="en-US" sz="1150" dirty="0">
                 <a:solidFill>
-                  <a:srgbClr val="E7C070"/>
+                  <a:srgbClr val="DCEAF1"/>
                 </a:solidFill>
                 <a:latin typeface="Courier New" pitchFamily="34" charset="0"/>
                 <a:ea typeface="Courier New" pitchFamily="34" charset="-122"/>
                 <a:cs typeface="Courier New" pitchFamily="34" charset="-120"/>
               </a:rPr>
-              <a:t>      ? 14 * DAY_IN_SECONDS</a:t>
+              <a:t>}</a:t>
             </a:r>
             <a:endParaRPr lang="en-US" sz="1150" dirty="0"/>
           </a:p>
@@ -12576,13 +12576,13 @@
             <a:r>
               <a:rPr lang="en-US" sz="1150" dirty="0">
                 <a:solidFill>
-                  <a:srgbClr val="E7C070"/>
+                  <a:srgbClr val="DCEAF1"/>
                 </a:solidFill>
                 <a:latin typeface="Courier New" pitchFamily="34" charset="0"/>
                 <a:ea typeface="Courier New" pitchFamily="34" charset="-122"/>
                 <a:cs typeface="Courier New" pitchFamily="34" charset="-120"/>
               </a:rPr>
-              <a:t>      : $regular;</a:t>
+              <a:t> </a:t>
             </a:r>
             <a:endParaRPr lang="en-US" sz="1150" dirty="0"/>
           </a:p>
@@ -12596,13 +12596,13 @@
             <a:r>
               <a:rPr lang="en-US" sz="1150" dirty="0">
                 <a:solidFill>
-                  <a:srgbClr val="DCEAF1"/>
+                  <a:srgbClr val="8FBF9F"/>
                 </a:solidFill>
                 <a:latin typeface="Courier New" pitchFamily="34" charset="0"/>
                 <a:ea typeface="Courier New" pitchFamily="34" charset="-122"/>
                 <a:cs typeface="Courier New" pitchFamily="34" charset="-120"/>
               </a:rPr>
-              <a:t>  }, 10, 3 );</a:t>
+              <a:t>// only when we differ from core's 2 / 14</a:t>
             </a:r>
             <a:endParaRPr lang="en-US" sz="1150" dirty="0"/>
           </a:p>
@@ -12616,13 +12616,13 @@
             <a:r>
               <a:rPr lang="en-US" sz="1150" dirty="0">
                 <a:solidFill>
-                  <a:srgbClr val="DCEAF1"/>
+                  <a:srgbClr val="E7C070"/>
                 </a:solidFill>
                 <a:latin typeface="Courier New" pitchFamily="34" charset="0"/>
                 <a:ea typeface="Courier New" pitchFamily="34" charset="-122"/>
                 <a:cs typeface="Courier New" pitchFamily="34" charset="-120"/>
               </a:rPr>
-              <a:t> </a:t>
+              <a:t>if ( policy_is_custom() )</a:t>
             </a:r>
             <a:endParaRPr lang="en-US" sz="1150" dirty="0"/>
           </a:p>
@@ -12636,13 +12636,33 @@
             <a:r>
               <a:rPr lang="en-US" sz="1150" dirty="0">
                 <a:solidFill>
-                  <a:srgbClr val="8FBF9F"/>
+                  <a:srgbClr val="DCEAF1"/>
                 </a:solidFill>
                 <a:latin typeface="Courier New" pitchFamily="34" charset="0"/>
                 <a:ea typeface="Courier New" pitchFamily="34" charset="-122"/>
                 <a:cs typeface="Courier New" pitchFamily="34" charset="-120"/>
               </a:rPr>
-              <a:t>// DAY_IN_SECONDS: core time constant</a:t>
+              <a:t>  add_filter( 'auth_cookie_expiration',</a:t>
+            </a:r>
+            <a:endParaRPr lang="en-US" sz="1150" dirty="0"/>
+          </a:p>
+          <a:p>
+            <a:pPr algn="l" indent="0" marL="0">
+              <a:lnSpc>
+                <a:spcPct val="108000"/>
+              </a:lnSpc>
+              <a:buNone/>
+            </a:pPr>
+            <a:r>
+              <a:rPr lang="en-US" sz="1150" dirty="0">
+                <a:solidFill>
+                  <a:srgbClr val="DCEAF1"/>
+                </a:solidFill>
+                <a:latin typeface="Courier New" pitchFamily="34" charset="0"/>
+                <a:ea typeface="Courier New" pitchFamily="34" charset="-122"/>
+                <a:cs typeface="Courier New" pitchFamily="34" charset="-120"/>
+              </a:rPr>
+              <a:t>    'session_length', 10, 3 );</a:t>
             </a:r>
             <a:endParaRPr lang="en-US" sz="1150" dirty="0"/>
           </a:p>

--- a/workshop/Better-by-Default.pptx
+++ b/workshop/Better-by-Default.pptx
@@ -13951,7 +13951,7 @@
                 <a:ea typeface="Courier New" pitchFamily="34" charset="-122"/>
                 <a:cs typeface="Courier New" pitchFamily="34" charset="-120"/>
               </a:rPr>
-              <a:t>add_filter( 'heartbeat_settings', fn( $s ) =&gt; {</a:t>
+              <a:t>add_filter( 'heartbeat_settings', function ( $s ) {</a:t>
             </a:r>
             <a:endParaRPr lang="en-US" sz="1150" dirty="0"/>
           </a:p>
@@ -13971,7 +13971,27 @@
                 <a:ea typeface="Courier New" pitchFamily="34" charset="-122"/>
                 <a:cs typeface="Courier New" pitchFamily="34" charset="-120"/>
               </a:rPr>
-              <a:t>  $s['interval'] = 60; return $s;</a:t>
+              <a:t>  $s['interval'] = 60;</a:t>
+            </a:r>
+            <a:endParaRPr lang="en-US" sz="1150" dirty="0"/>
+          </a:p>
+          <a:p>
+            <a:pPr algn="l" indent="0" marL="0">
+              <a:lnSpc>
+                <a:spcPct val="108000"/>
+              </a:lnSpc>
+              <a:buNone/>
+            </a:pPr>
+            <a:r>
+              <a:rPr lang="en-US" sz="1150" dirty="0">
+                <a:solidFill>
+                  <a:srgbClr val="DCEAF1"/>
+                </a:solidFill>
+                <a:latin typeface="Courier New" pitchFamily="34" charset="0"/>
+                <a:ea typeface="Courier New" pitchFamily="34" charset="-122"/>
+                <a:cs typeface="Courier New" pitchFamily="34" charset="-120"/>
+              </a:rPr>
+              <a:t>  return $s;</a:t>
             </a:r>
             <a:endParaRPr lang="en-US" sz="1150" dirty="0"/>
           </a:p>
@@ -27688,7 +27708,7 @@
                 <a:ea typeface="Courier New" pitchFamily="34" charset="-122"/>
                 <a:cs typeface="Courier New" pitchFamily="34" charset="-120"/>
               </a:rPr>
-              <a:t>add_action( 'init', fn );</a:t>
+              <a:t>add_action( 'init', 'my_callback' );</a:t>
             </a:r>
             <a:endParaRPr lang="en-US" sz="1050" dirty="0"/>
           </a:p>

--- a/workshop/Better-by-Default.pptx
+++ b/workshop/Better-by-Default.pptx
@@ -1793,7 +1793,7 @@
           <a:p>
             <a:r>
               <a:rPr lang="en-US" dirty="0"/>
-              <a:t>A normal login lasts 2 days; ticking "Remember Me" extends it to 14. Both lengths are in days, and the remembered one can never be shorter than the regular one. Shorten either, or hide the "Remember Me" checkbox entirely so every login uses the regular length. (Good idea for shared machines.) DAY_IN_SECONDS is one of core's time constants, so you never do the math. — Now the two lines that are not about session length, because they are the most portable thing in this deck. This callback ignores the $exp it was handed and returns its own number. A filter that ADDS TO its input composes: several plugins can each contribute a header to wp_headers and all of them survive. A filter that REPLACES its input does not. WordPress runs all of them and keeps whichever answered last, the others do nothing at all, and every losing plugin's settings screen goes on displaying a number the site is not using. No error, nothing logged, nothing on Site Health. Nothing in the API tells you which kind you are writing — both are add_filter(). The difference is entirely in what your callback does with the argument it was given, and it decides whether your plugin can coexist with another one or silently fights it. You cannot make a number filter additive. What you can do is decline the fights you have no stake in: our defaults ARE WordPress's own 2 and 14, so on a site that has not changed them we would be registering only to assert the answer core already gives. Hence the if. And the callback has a name rather than being anonymous, because $wp_filter can only report a callback that has one — an anonymous one shows up as 'closure' in exactly the diagnostic you would run to find out who won. The question to ask of any filter callback you write: if a second plugin did exactly this, would both still work? If not, you are setting policy, and only one plugin on the site can win.</a:t>
+              <a:t>A normal login lasts 2 days; ticking "Remember Me" extends it to 14. Both lengths are in days, and the remembered one can never be shorter than the regular one. Shorten either, or hide the "Remember Me" checkbox entirely so every login uses the regular length. (Good idea for shared machines.) DAY_IN_SECONDS is one of core's time constants, so you never do the math. — Now the two lines that are not about session length, because they are the most portable thing in this deck. This callback ignores the $exp it was handed and returns its own number. A filter that ADDS TO its input composes: several plugins can each contribute a header to wp_headers and all of them survive. A filter that REPLACES its input does not. WordPress runs all of them and keeps whichever answered last, the others do nothing at all, and every losing plugin's settings screen goes on displaying a number the site is not using. No error, nothing logged, nothing on Site Health. Nothing in the API tells you which kind you are writing — both are add_filter(). The difference is entirely in what your callback does with the argument it was given, and it decides whether your plugin can coexist with another one or silently fights it. You cannot make a number filter additive. What you can do is decline the fights you have no stake in: our defaults ARE WordPress's own 2 and 14, so on a site that has not changed them we would be registering only to assert the answer core already gives. Hence the if. And the callback has a name rather than being anonymous, because $wp_filter can only report a callback that has one — an anonymous one shows up as 'closure' in exactly the diagnostic you would run to find out who won. Then there is the 50, which is the half everyone forgets. Declining a fight worth nothing only helps if you win the one worth something, and on a replacing filter the LAST callback to run is the one that counts. Register at the default 10 and you are not being polite, you are queueing up behind every plugin that never thought about priority at all — so a session length somebody set on purpose gets decided by load order. This plugin shipped at 10 for its first four releases and lost to both its siblings on any site running two of them. Fifty is late enough to be the last word and low enough that a site wanting the final say can still take it deliberately. The question to ask of any filter callback you write: if a second plugin did exactly this, would both still work? If not, you are setting policy, and only one plugin on the site can win — so decide both whether to enter and when.</a:t>
             </a:r>
             <a:endParaRPr lang="en-US" dirty="0"/>
           </a:p>
@@ -12602,7 +12602,7 @@
                 <a:ea typeface="Courier New" pitchFamily="34" charset="-122"/>
                 <a:cs typeface="Courier New" pitchFamily="34" charset="-120"/>
               </a:rPr>
-              <a:t>// only when we differ from core's 2 / 14</a:t>
+              <a:t>// only when we differ from core's 2 / 14,</a:t>
             </a:r>
             <a:endParaRPr lang="en-US" sz="1150" dirty="0"/>
           </a:p>
@@ -12616,13 +12616,13 @@
             <a:r>
               <a:rPr lang="en-US" sz="1150" dirty="0">
                 <a:solidFill>
-                  <a:srgbClr val="E7C070"/>
+                  <a:srgbClr val="8FBF9F"/>
                 </a:solidFill>
                 <a:latin typeface="Courier New" pitchFamily="34" charset="0"/>
                 <a:ea typeface="Courier New" pitchFamily="34" charset="-122"/>
                 <a:cs typeface="Courier New" pitchFamily="34" charset="-120"/>
               </a:rPr>
-              <a:t>if ( policy_is_custom() )</a:t>
+              <a:t>// and late enough to be the last word</a:t>
             </a:r>
             <a:endParaRPr lang="en-US" sz="1150" dirty="0"/>
           </a:p>
@@ -12636,13 +12636,13 @@
             <a:r>
               <a:rPr lang="en-US" sz="1150" dirty="0">
                 <a:solidFill>
-                  <a:srgbClr val="DCEAF1"/>
+                  <a:srgbClr val="E7C070"/>
                 </a:solidFill>
                 <a:latin typeface="Courier New" pitchFamily="34" charset="0"/>
                 <a:ea typeface="Courier New" pitchFamily="34" charset="-122"/>
                 <a:cs typeface="Courier New" pitchFamily="34" charset="-120"/>
               </a:rPr>
-              <a:t>  add_filter( 'auth_cookie_expiration',</a:t>
+              <a:t>if ( policy_is_custom() )</a:t>
             </a:r>
             <a:endParaRPr lang="en-US" sz="1150" dirty="0"/>
           </a:p>
@@ -12662,7 +12662,27 @@
                 <a:ea typeface="Courier New" pitchFamily="34" charset="-122"/>
                 <a:cs typeface="Courier New" pitchFamily="34" charset="-120"/>
               </a:rPr>
-              <a:t>    'session_length', 10, 3 );</a:t>
+              <a:t>  add_filter( 'auth_cookie_expiration',</a:t>
+            </a:r>
+            <a:endParaRPr lang="en-US" sz="1150" dirty="0"/>
+          </a:p>
+          <a:p>
+            <a:pPr algn="l" indent="0" marL="0">
+              <a:lnSpc>
+                <a:spcPct val="108000"/>
+              </a:lnSpc>
+              <a:buNone/>
+            </a:pPr>
+            <a:r>
+              <a:rPr lang="en-US" sz="1150" dirty="0">
+                <a:solidFill>
+                  <a:srgbClr val="E7C070"/>
+                </a:solidFill>
+                <a:latin typeface="Courier New" pitchFamily="34" charset="0"/>
+                <a:ea typeface="Courier New" pitchFamily="34" charset="-122"/>
+                <a:cs typeface="Courier New" pitchFamily="34" charset="-120"/>
+              </a:rPr>
+              <a:t>    'session_length', 50, 3 );</a:t>
             </a:r>
             <a:endParaRPr lang="en-US" sz="1150" dirty="0"/>
           </a:p>

--- a/workshop/Better-by-Default.pptx
+++ b/workshop/Better-by-Default.pptx
@@ -3467,7 +3467,11 @@
           <a:p>
             <a:r>
               <a:rPr lang="en-US" dirty="0"/>
-              <a:t>This is the sledgehammer version of the slide before. Requiring auth for ALL REST calls stops anonymous scraping cold. It does *not* break the block editor, though — you're logged in there, and the editor authenticates with your cookie plus a REST nonce, so it sails through this filter. What it breaks is ANONYMOUS REST: front-end blocks that fetch data for logged-out visitors, embeds, search, and outside integrations. That's why it ships off. Not every default should default to on; some are opt-in because they trade functionality for safety. Usually it's a better tradeoff to restrict a few REST routes — like the users endpoint we just closed — than to lock ALL of them.</a:t>
+              <a:t>This is the sledgehammer version of the slide before. Requiring auth for ALL REST calls stops anonymous scraping cold. It does *not* break the block editor — you're logged in there, and the editor authenticates with your cookie plus a REST nonce, so it sails through. That's why it ships off: not every default should default to on.
+Two details on this slide are the whole lesson, and both are things the obvious implementation gets wrong.
+First: only a WP_Error may short-circuit. The tempting line is `if ( ! empty( $result ) ) return $result;` — and core hands this filter `true` from rest_cookie_check_errors() AFTER calling wp_set_current_user( 0 ), when a cookie arrives with no X-WP-Nonce. Treat that `true` as "already authenticated" and you have written a gate that waves through the exact request it exists to stop, dispatching as user 0. This deck taught the `! empty()` version until we tested it.
+Second: oEmbed. It is served over REST, so closing REST closes it too — and the damage lands somewhere you never look. Every site that has embedded one of your posts silently degrades to a bare link, with nothing on your site to show it happened. We measured four popular plugins that close REST outright; not one of them allowlists oembed/1.0. So we allowlist it, filterable with wpyeg_public_rest_routes.
+And the carve-out is only safe because of what sits behind it: oEmbed returns author_name and an author_url carrying the account nicename, so opening that route would hand an anonymous caller the usernames the users-endpoint removal just refused them. Closing REST therefore strips those fields too. A hole you open on purpose still has to be closed on the other side.</a:t>
             </a:r>
             <a:endParaRPr lang="en-US" dirty="0"/>
           </a:p>
@@ -31806,13 +31810,13 @@
             <a:r>
               <a:rPr lang="en-US" sz="1150" dirty="0">
                 <a:solidFill>
-                  <a:srgbClr val="DCEAF1"/>
+                  <a:srgbClr val="8FBF9F"/>
                 </a:solidFill>
                 <a:latin typeface="Courier New" pitchFamily="34" charset="0"/>
                 <a:ea typeface="Courier New" pitchFamily="34" charset="-122"/>
                 <a:cs typeface="Courier New" pitchFamily="34" charset="-120"/>
               </a:rPr>
-              <a:t>    if ( ! empty( $result ) ) return $result;</a:t>
+              <a:t>    // Only an ERROR short-circuits. A cookie with no</a:t>
             </a:r>
             <a:endParaRPr lang="en-US" sz="1150" dirty="0"/>
           </a:p>
@@ -31826,13 +31830,13 @@
             <a:r>
               <a:rPr lang="en-US" sz="1150" dirty="0">
                 <a:solidFill>
-                  <a:srgbClr val="DCEAF1"/>
+                  <a:srgbClr val="8FBF9F"/>
                 </a:solidFill>
                 <a:latin typeface="Courier New" pitchFamily="34" charset="0"/>
                 <a:ea typeface="Courier New" pitchFamily="34" charset="-122"/>
                 <a:cs typeface="Courier New" pitchFamily="34" charset="-120"/>
               </a:rPr>
-              <a:t>    if ( ! is_user_logged_in() ) {</a:t>
+              <a:t>    // nonce resolves to user 0 and returns true.</a:t>
             </a:r>
             <a:endParaRPr lang="en-US" sz="1150" dirty="0"/>
           </a:p>
@@ -31852,7 +31856,7 @@
                 <a:ea typeface="Courier New" pitchFamily="34" charset="-122"/>
                 <a:cs typeface="Courier New" pitchFamily="34" charset="-120"/>
               </a:rPr>
-              <a:t>      return new WP_Error(</a:t>
+              <a:t>    if ( is_wp_error( $result ) ) return $result;</a:t>
             </a:r>
             <a:endParaRPr lang="en-US" sz="1150" dirty="0"/>
           </a:p>
@@ -31866,13 +31870,13 @@
             <a:r>
               <a:rPr lang="en-US" sz="1150" dirty="0">
                 <a:solidFill>
-                  <a:srgbClr val="E7C070"/>
+                  <a:srgbClr val="8FBF9F"/>
                 </a:solidFill>
                 <a:latin typeface="Courier New" pitchFamily="34" charset="0"/>
                 <a:ea typeface="Courier New" pitchFamily="34" charset="-122"/>
                 <a:cs typeface="Courier New" pitchFamily="34" charset="-120"/>
               </a:rPr>
-              <a:t>        'rest_not_logged_in', 'Auth required.',</a:t>
+              <a:t>    // Leave oEmbed open, or every site embedding</a:t>
             </a:r>
             <a:endParaRPr lang="en-US" sz="1150" dirty="0"/>
           </a:p>
@@ -31886,7 +31890,107 @@
             <a:r>
               <a:rPr lang="en-US" sz="1150" dirty="0">
                 <a:solidFill>
+                  <a:srgbClr val="8FBF9F"/>
+                </a:solidFill>
+                <a:latin typeface="Courier New" pitchFamily="34" charset="0"/>
+                <a:ea typeface="Courier New" pitchFamily="34" charset="-122"/>
+                <a:cs typeface="Courier New" pitchFamily="34" charset="-120"/>
+              </a:rPr>
+              <a:t>    // yours silently degrades to a bare link.</a:t>
+            </a:r>
+            <a:endParaRPr lang="en-US" sz="1150" dirty="0"/>
+          </a:p>
+          <a:p>
+            <a:pPr algn="l" indent="0" marL="0">
+              <a:lnSpc>
+                <a:spcPct val="108000"/>
+              </a:lnSpc>
+              <a:buNone/>
+            </a:pPr>
+            <a:r>
+              <a:rPr lang="en-US" sz="1150" dirty="0">
+                <a:solidFill>
                   <a:srgbClr val="E7C070"/>
+                </a:solidFill>
+                <a:latin typeface="Courier New" pitchFamily="34" charset="0"/>
+                <a:ea typeface="Courier New" pitchFamily="34" charset="-122"/>
+                <a:cs typeface="Courier New" pitchFamily="34" charset="-120"/>
+              </a:rPr>
+              <a:t>    if ( route_is_public() ) return $result;</a:t>
+            </a:r>
+            <a:endParaRPr lang="en-US" sz="1150" dirty="0"/>
+          </a:p>
+          <a:p>
+            <a:pPr algn="l" indent="0" marL="0">
+              <a:lnSpc>
+                <a:spcPct val="108000"/>
+              </a:lnSpc>
+              <a:buNone/>
+            </a:pPr>
+            <a:r>
+              <a:rPr lang="en-US" sz="1150" dirty="0">
+                <a:solidFill>
+                  <a:srgbClr val="DCEAF1"/>
+                </a:solidFill>
+                <a:latin typeface="Courier New" pitchFamily="34" charset="0"/>
+                <a:ea typeface="Courier New" pitchFamily="34" charset="-122"/>
+                <a:cs typeface="Courier New" pitchFamily="34" charset="-120"/>
+              </a:rPr>
+              <a:t>    if ( ! is_user_logged_in() ) {</a:t>
+            </a:r>
+            <a:endParaRPr lang="en-US" sz="1150" dirty="0"/>
+          </a:p>
+          <a:p>
+            <a:pPr algn="l" indent="0" marL="0">
+              <a:lnSpc>
+                <a:spcPct val="108000"/>
+              </a:lnSpc>
+              <a:buNone/>
+            </a:pPr>
+            <a:r>
+              <a:rPr lang="en-US" sz="1150" dirty="0">
+                <a:solidFill>
+                  <a:srgbClr val="DCEAF1"/>
+                </a:solidFill>
+                <a:latin typeface="Courier New" pitchFamily="34" charset="0"/>
+                <a:ea typeface="Courier New" pitchFamily="34" charset="-122"/>
+                <a:cs typeface="Courier New" pitchFamily="34" charset="-120"/>
+              </a:rPr>
+              <a:t>      return new WP_Error(</a:t>
+            </a:r>
+            <a:endParaRPr lang="en-US" sz="1150" dirty="0"/>
+          </a:p>
+          <a:p>
+            <a:pPr algn="l" indent="0" marL="0">
+              <a:lnSpc>
+                <a:spcPct val="108000"/>
+              </a:lnSpc>
+              <a:buNone/>
+            </a:pPr>
+            <a:r>
+              <a:rPr lang="en-US" sz="1150" dirty="0">
+                <a:solidFill>
+                  <a:srgbClr val="DCEAF1"/>
+                </a:solidFill>
+                <a:latin typeface="Courier New" pitchFamily="34" charset="0"/>
+                <a:ea typeface="Courier New" pitchFamily="34" charset="-122"/>
+                <a:cs typeface="Courier New" pitchFamily="34" charset="-120"/>
+              </a:rPr>
+              <a:t>        'rest_not_logged_in', 'Auth required.',</a:t>
+            </a:r>
+            <a:endParaRPr lang="en-US" sz="1150" dirty="0"/>
+          </a:p>
+          <a:p>
+            <a:pPr algn="l" indent="0" marL="0">
+              <a:lnSpc>
+                <a:spcPct val="108000"/>
+              </a:lnSpc>
+              <a:buNone/>
+            </a:pPr>
+            <a:r>
+              <a:rPr lang="en-US" sz="1150" dirty="0">
+                <a:solidFill>
+                  <a:srgbClr val="DCEAF1"/>
                 </a:solidFill>
                 <a:latin typeface="Courier New" pitchFamily="34" charset="0"/>
                 <a:ea typeface="Courier New" pitchFamily="34" charset="-122"/>

--- a/workshop/Better-by-Default.pptx
+++ b/workshop/Better-by-Default.pptx
@@ -900,7 +900,7 @@
               <a:t>One default and one deliberate non-default — and the difference is the lesson. Hiding the version is obscurity, not hardening: it does not make an out-of-date site any safer, and it does not even hide much, since the version still leaks from asset query strings and feeds. What it genuinely buys is quieter logs. That is worth opting into, not worth shipping on and calling security — so it defaults to off. The headers are the opposite: real, low-risk defaults most sites can adopt without breaking anything:
 - X-Content-Type-Options: nosniff — the browser must trust the declared Content-Type instead of guessing; kills "a .txt the browser decides to run as JavaScript" tricks.
 - Referrer-Policy: strict-origin-when-cross-origin — sends the full URL within your own site, only the bare domain to other sites, and nothing on an HTTPS→HTTP downgrade; keeps tokens and private paths from leaking in the Referer.
-X-Frame-Options is deliberately a SEPARATE setting (wpyeg_frame_options, default SAMEORIGIN), and that split is the point worth teaching. It is the only one of the three that can break a working site: blocking cross-origin framing also blocks legitimate embedding — a client intranet, a partner site, a preview tool — and it fails as a silent blank frame, which is miserable to debug. Bundled with the other two, a site that needs to be embeddable would have to give up nosniff as well.
+X-Frame-Options is deliberately a SEPARATE setting (frame_options, default SAMEORIGIN), and that split is the point worth teaching. It is the only one of the three that can break a working site: blocking cross-origin framing also blocks legitimate embedding — a client intranet, a partner site, a preview tool — and it fails as a silent blank frame, which is miserable to debug. Bundled with the other two, a site that needs to be embeddable would have to give up nosniff as well.
 Note HOW they are applied, too, because this changed in 1.1.1. The original rule was "set only if unset", which sounds polite and is wrong: whatever arrived first won, so a host's permissive X-Frame-Options silently beat a deliberately configured DENY. The values are compared now, and the configured one replaces what is there only when it is strictly stronger — an unrecognised value, a deprecated ALLOW-FROM say, is left alone rather than guessed at. X-Content-Type-Options has exactly one effective value, so an existing header saying anything else is not a policy to respect, it is a header doing nothing; it gets corrected in place. And names are matched case-insensitively, because HTTP says header names are and PHP array keys say they are not — that mismatch used to make another plugin's x-content-type-options invisible here and add a second, conflicting line. Referrer-Policy still defers to whatever is already set: its tokens have no single strictness axis, so there is nothing to compare.
 Be honest about the limit though — PHP only sees headers set in PHP, so one added by nginx or a CDN is invisible here. Check the response, not just the code. A full Content-Security-Policy is a bigger conversation for another time!</a:t>
             </a:r>
@@ -1793,7 +1793,7 @@
           <a:p>
             <a:r>
               <a:rPr lang="en-US" dirty="0"/>
-              <a:t>A normal login lasts 2 days; ticking "Remember Me" extends it to 14. Both lengths are in days, and the remembered one can never be shorter than the regular one. Shorten either, or hide the "Remember Me" checkbox entirely so every login uses the regular length. (Good idea for shared machines.) DAY_IN_SECONDS is one of core's time constants, so you never do the math. — Now the two lines that are not about session length, because they are the most portable thing in this deck. This callback ignores the $exp it was handed and returns its own number. A filter that ADDS TO its input composes: several plugins can each contribute a header to wp_headers and all of them survive. A filter that REPLACES its input does not. WordPress runs all of them and keeps whichever answered last, the others do nothing at all, and every losing plugin's settings screen goes on displaying a number the site is not using. No error, nothing logged, nothing on Site Health. Nothing in the API tells you which kind you are writing — both are add_filter(). The difference is entirely in what your callback does with the argument it was given, and it decides whether your plugin can coexist with another one or silently fights it. You cannot make a number filter additive. What you can do is decline the fights you have no stake in: our defaults ARE WordPress's own 2 and 14, so on a site that has not changed them we would be registering only to assert the answer core already gives. Hence the if. And the callback has a name rather than being anonymous, because $wp_filter can only report a callback that has one — an anonymous one shows up as 'closure' in exactly the diagnostic you would run to find out who won. Then there is the 50, which is the half everyone forgets. Declining a fight worth nothing only helps if you win the one worth something, and on a replacing filter the LAST callback to run is the one that counts. Register at the default 10 and you are not being polite, you are queueing up behind every plugin that never thought about priority at all — so a session length somebody set on purpose gets decided by load order. This plugin shipped at 10 for its first four releases and lost to both its siblings on any site running two of them. Fifty is late enough to be the last word and low enough that a site wanting the final say can still take it deliberately. The question to ask of any filter callback you write: if a second plugin did exactly this, would both still work? If not, you are setting policy, and only one plugin on the site can win — so decide both whether to enter and when.</a:t>
+              <a:t>A normal login lasts 2 days; ticking "Remember Me" extends it to 14. Both lengths are in days, and the remembered one can never be shorter than the regular one. Shorten either, or hide the "Remember Me" checkbox entirely so every login uses the regular length. (Good idea for shared machines.) DAY_IN_SECONDS is one of core's time constants, so you never do the math. — Now the two lines that are not about session length, because they are the most portable thing in this deck. This callback ignores the $exp it was handed and returns its own number. A filter that ADDS TO its input composes: several plugins can each contribute a header to wp_headers and all of them survive. A filter that REPLACES its input does not. WordPress runs all of them and keeps whichever answered last, the others do nothing at all, and every losing plugin's settings screen goes on displaying a number the site is not using. No error, nothing logged, nothing on Site Health. Nothing in the API tells you which kind you are writing — both are add_filter(). The difference is entirely in what your callback does with the argument it was given, and it decides whether your plugin can coexist with another one or silently fights it. You cannot make a number filter additive. What you can do is decline the fights you have no stake in: our defaults ARE WordPress's own 2 and 14, so on a site that has not changed them we would be registering only to assert the answer core already gives. Hence the if. And the callback has a name rather than being anonymous, because $wp_filter can only report a callback that has one — an anonymous one shows up as 'closure' in exactly the diagnostic you would run to find out who won. Then there is the 50, which is the half everyone forgets. Declining a fight worth nothing only helps if you win the one worth something, and on a replacing filter the LAST callback to run is the one that counts. Register at the default 10 and you are not being polite, you are queueing up behind every plugin that never thought about priority at all — so a session length somebody set on purpose gets decided by load order. This plugin shipped at 10 in every release before 1.2.2 and lost to both its siblings on any site running two of them. Fifty is late enough to be the last word and low enough that a site wanting the final say can still take it deliberately. The question to ask of any filter callback you write: if a second plugin did exactly this, would both still work? If not, you are setting policy, and only one plugin on the site can win — so decide both whether to enter and when.</a:t>
             </a:r>
             <a:endParaRPr lang="en-US" dirty="0"/>
           </a:p>
@@ -2851,7 +2851,7 @@
           <a:p>
             <a:r>
               <a:rPr lang="en-US" dirty="0"/>
-              <a:t>The visible names on earlier slides are schema keys, not separate WordPress options. Remembered sessions are capped at five days by default; regular sessions inherit core because zero means unchanged. The login logo and Heartbeat remain opt-in, and the three configuration constants stay above the plugin layer.</a:t>
+              <a:t>The visible names on earlier slides are schema keys, not separate WordPress options. A regular login lasts 2 days and a remembered one 14 - WordPress's own values, prefilled rather than sentinels, with a one-day floor on each and the remembered length clamped so it can never be shorter than the regular one. The login logo and Heartbeat remain opt-in, and the three configuration constants stay above the plugin layer.</a:t>
             </a:r>
             <a:endParaRPr lang="en-US" dirty="0"/>
           </a:p>

--- a/workshop/Better-by-Default.pptx
+++ b/workshop/Better-by-Default.pptx
@@ -626,7 +626,7 @@
             <a:r>
               <a:rPr lang="en-US" dirty="0"/>
               <a:t>XML-RPC is a legitimate but aging API. (Mad love to Dave Winer!) It's not a backdoor or an emergency. It is an old switchboard where every method is a phone line. Rather than rip out a connection that Jetpack or a publishing client may need, we unplug unused lines by category. Four switches, all off by default:
-1. Pingbacks — drop pingback.ping, the clearest live nuisance and reflection-DDoS surface. A valid call performs database work, waits a second, and fetches the claimed source URL. Keep it if you're a crusty punk who loves the IndieWeb and everything before Facebook turned everything to shit, ca. 2005.
+1. Pingbacks — drop pingback.ping *and* pingback.extensions.getPingbacks, the clearest live nuisance and reflection-DDoS surface. A valid call performs database work, waits a second (core really does sleep( 1 ), to let the pinging post finish publishing), and then fetches the claimed source URL — which is the whole trick: a request that costs the attacker nothing costs you a database write, a pause and an outbound fetch to a URL they chose. BBD also strips the X-Pingback response header, because a site that has removed the method while still advertising where to send one is still telling every scanner it accepts pingbacks.
 2. Remote publishing — drop the credential-authenticated blogging methods (wp.*, metaWeblog.*, mt.*, blogger.*), another password-guessing entrance when legacy clients are not needed. This also flips xmlrpc_enabled off and removes the RSD discovery link.
 3. system.multicall — refuse a general batching wrapper with little established modern use. WordPress 4.4 prevented it from being used as a password-guessing multiplier, so the old 'thousands of guesses' story is obsolete. (To this day, people say XML-RPC is some kind of open, free credential verification oracle — NOT TRUE.) Multicall can still batch other work, including pingbacks, but it does not enable pingback abuse.
 4. Block the endpoint — the blunt hammer: xmlrpc.php returns 403 for everything. Prefer doing this at the CDN, WAF, or web server so the request never consumes PHP.
@@ -4696,7 +4696,27 @@
                 <a:ea typeface="Courier New" pitchFamily="34" charset="-122"/>
                 <a:cs typeface="Courier New" pitchFamily="34" charset="-120"/>
               </a:rPr>
-              <a:t>    unset( $m['pingback.ping'] );</a:t>
+              <a:t>    unset( $m['pingback.ping'],</a:t>
+            </a:r>
+            <a:endParaRPr lang="en-US" sz="1100" dirty="0"/>
+          </a:p>
+          <a:p>
+            <a:pPr algn="l" indent="0" marL="0">
+              <a:lnSpc>
+                <a:spcPct val="108000"/>
+              </a:lnSpc>
+              <a:buNone/>
+            </a:pPr>
+            <a:r>
+              <a:rPr lang="en-US" sz="1100" dirty="0">
+                <a:solidFill>
+                  <a:srgbClr val="E7C070"/>
+                </a:solidFill>
+                <a:latin typeface="Courier New" pitchFamily="34" charset="0"/>
+                <a:ea typeface="Courier New" pitchFamily="34" charset="-122"/>
+                <a:cs typeface="Courier New" pitchFamily="34" charset="-120"/>
+              </a:rPr>
+              <a:t>           $m['pingback.extensions.getPingbacks'] );</a:t>
             </a:r>
             <a:endParaRPr lang="en-US" sz="1100" dirty="0"/>
           </a:p>

--- a/workshop/Better-by-Default.pptx
+++ b/workshop/Better-by-Default.pptx
@@ -902,7 +902,7 @@
               <a:t>One default and one deliberate non-default — and the difference is the lesson. Hiding the version is obscurity, not hardening: it does not make an out-of-date site any safer, and it does not even hide much, since the version still leaks from asset query strings and feeds. What it genuinely buys is quieter logs. That is worth opting into, not worth shipping on and calling security — so it defaults to off. The headers are the opposite: real, low-risk defaults most sites can adopt without breaking anything:
 - X-Content-Type-Options: nosniff — the browser must trust the declared Content-Type instead of guessing; kills "a .txt the browser decides to run as JavaScript" tricks.
 - Referrer-Policy: strict-origin-when-cross-origin — sends the full URL within your own site, only the bare domain to other sites, and nothing on an HTTPS→HTTP downgrade; keeps tokens and private paths from leaking in the Referer.
-X-Frame-Options is deliberately a SEPARATE setting (frame_options, default SAMEORIGIN), and that split is the point worth teaching. It is the only one of the three that can break a working site: blocking cross-origin framing also blocks legitimate embedding — a client intranet, a partner site, a preview tool — and it fails as a silent blank frame, which is miserable to debug. Bundled with the other two, a site that needs to be embeddable would have to give up nosniff as well.
+X-Frame-Options is deliberately a SEPARATE setting (frame_options, default SAMEORIGIN), and that split is the point worth teaching. It is the only one of the three that can break a working site: blocking cross-origin framing also blocks legitimate embedding — an intranet dashboard, a screenshot or visual-review service, a kiosk or signage screen — and it fails as a silent blank frame, which is miserable to debug. Bundled with the other two, a site that needs to be embeddable would have to give up nosniff as well.
 Note HOW they are applied, too, because this changed in 1.1.1. The original rule was "set only if unset", which sounds polite and is wrong: whatever arrived first won, so a host's permissive X-Frame-Options silently beat a deliberately configured DENY. The values are compared now, and the configured one replaces what is there only when it is strictly stronger — an unrecognised value, a deprecated ALLOW-FROM say, is left alone rather than guessed at. X-Content-Type-Options has exactly one effective value, so an existing header saying anything else is not a policy to respect, it is a header doing nothing; it gets corrected in place. And names are matched case-insensitively, because HTTP says header names are and PHP array keys say they are not — that mismatch used to make another plugin's x-content-type-options invisible here and add a second, conflicting line. Referrer-Policy still defers to whatever is already set: its tokens have no single strictness axis, so there is nothing to compare.
 Be honest about the limit though — PHP only sees headers set in PHP, so one added by nginx or a CDN is invisible here. Check the response, not just the code. A full Content-Security-Policy is a bigger conversation for another time!</a:t>
             </a:r>

--- a/workshop/Better-by-Default.pptx
+++ b/workshop/Better-by-Default.pptx
@@ -41,9 +41,14 @@
     <p:sldId id="289" r:id="rId35"/>
     <p:sldId id="290" r:id="rId36"/>
     <p:sldId id="291" r:id="rId37"/>
+    <p:sldId id="292" r:id="rId38"/>
+    <p:sldId id="293" r:id="rId39"/>
+    <p:sldId id="294" r:id="rId40"/>
+    <p:sldId id="295" r:id="rId41"/>
+    <p:sldId id="296" r:id="rId42"/>
   </p:sldIdLst>
   <p:notesMasterIdLst>
-    <p:notesMasterId r:id="rId38"/>
+    <p:notesMasterId r:id="rId43"/>
   </p:notesMasterIdLst>
   <p:sldSz cx="12192000" cy="6858000"/>
   <p:notesSz cx="6858000" cy="12192000"/>
@@ -3124,7 +3129,8 @@
           <a:p>
             <a:r>
               <a:rPr lang="en-US" dirty="0"/>
-              <a:t>Hand out the zip and the reference doc. Invite everyone to add their own favourite default to the schema and share it back with the group.</a:t>
+              <a:t>This is the part nobody warns you about. Install two defaults plugins and WordPress does not complain — it runs both and keeps whichever answered last. The loser's settings screen goes on showing a session length the site is not using.
+On the install where this was first measured, all three plugins happened to agree on the same value, so everything looked fine. THAT is the dangerous case. It stays invisible until somebody changes a setting and nothing happens.</a:t>
             </a:r>
             <a:endParaRPr lang="en-US" dirty="0"/>
           </a:p>
@@ -3148,6 +3154,274 @@
             <a:fld id="{F7021451-1387-4CA6-816F-3879F97B5CBC}" type="slidenum">
               <a:rPr lang="en-US"/>
               <a:t>36</a:t>
+            </a:fld>
+            <a:endParaRPr lang="en-US"/>
+          </a:p>
+        </p:txBody>
+      </p:sp>
+    </p:spTree>
+    <p:extLst>
+      <p:ext uri="{BB962C8B-B14F-4D97-AF65-F5344CB8AC3E}">
+        <p14:creationId xmlns:p14="http://schemas.microsoft.com/office/powerpoint/2010/main" val="1024086991"/>
+      </p:ext>
+    </p:extLst>
+  </p:cSld>
+  <p:clrMapOvr>
+    <a:masterClrMapping/>
+  </p:clrMapOvr>
+</p:notes>
+</file>
+
+<file path=ppt/notesSlides/notesSlide37.xml><?xml version="1.0" encoding="utf-8"?>
+<p:notes xmlns:a="http://schemas.openxmlformats.org/drawingml/2006/main" xmlns:r="http://schemas.openxmlformats.org/officeDocument/2006/relationships" xmlns:p="http://schemas.openxmlformats.org/presentationml/2006/main">
+  <p:cSld>
+    <p:spTree>
+      <p:nvGrpSpPr>
+        <p:cNvPr id="1" name=""/>
+        <p:cNvGrpSpPr/>
+        <p:nvPr/>
+      </p:nvGrpSpPr>
+      <p:grpSpPr>
+        <a:xfrm>
+          <a:off x="0" y="0"/>
+          <a:ext cx="0" cy="0"/>
+          <a:chOff x="0" y="0"/>
+          <a:chExt cx="0" cy="0"/>
+        </a:xfrm>
+      </p:grpSpPr>
+      <p:sp>
+        <p:nvSpPr>
+          <p:cNvPr id="2" name="Slide Image Placeholder 1"/>
+          <p:cNvSpPr>
+            <a:spLocks noGrp="1" noRot="1" noChangeAspect="1"/>
+          </p:cNvSpPr>
+          <p:nvPr>
+            <p:ph type="sldImg"/>
+          </p:nvPr>
+        </p:nvSpPr>
+        <p:spPr/>
+      </p:sp>
+      <p:sp>
+        <p:nvSpPr>
+          <p:cNvPr id="3" name="Notes Placeholder 2"/>
+          <p:cNvSpPr>
+            <a:spLocks noGrp="1"/>
+          </p:cNvSpPr>
+          <p:nvPr>
+            <p:ph type="body" idx="1"/>
+          </p:nvPr>
+        </p:nvSpPr>
+        <p:spPr/>
+        <p:txBody>
+          <a:bodyPr/>
+          <a:lstStyle/>
+          <a:p>
+            <a:r>
+              <a:rPr lang="en-US" dirty="0"/>
+              <a:t>Here is the whole rule, and it is worth more than any tool. When your code is handed something and ADDS to it, a second plugin doing the same thing is fine — three plugins set security headers on that test install and all three landed correctly. When your code is handed something and returns its OWN answer instead, only one plugin can win.
+So when you write a filter callback, ask: if a second plugin did exactly this, would both still work? If the answer is no, you are setting policy, and only one plugin on the site can hold it.</a:t>
+            </a:r>
+            <a:endParaRPr lang="en-US" dirty="0"/>
+          </a:p>
+        </p:txBody>
+      </p:sp>
+      <p:sp>
+        <p:nvSpPr>
+          <p:cNvPr id="4" name="Slide Number Placeholder 3"/>
+          <p:cNvSpPr>
+            <a:spLocks noGrp="1"/>
+          </p:cNvSpPr>
+          <p:nvPr>
+            <p:ph type="sldNum" sz="quarter" idx="10"/>
+          </p:nvPr>
+        </p:nvSpPr>
+        <p:spPr/>
+        <p:txBody>
+          <a:bodyPr/>
+          <a:lstStyle/>
+          <a:p>
+            <a:fld id="{F7021451-1387-4CA6-816F-3879F97B5CBC}" type="slidenum">
+              <a:rPr lang="en-US"/>
+              <a:t>37</a:t>
+            </a:fld>
+            <a:endParaRPr lang="en-US"/>
+          </a:p>
+        </p:txBody>
+      </p:sp>
+    </p:spTree>
+    <p:extLst>
+      <p:ext uri="{BB962C8B-B14F-4D97-AF65-F5344CB8AC3E}">
+        <p14:creationId xmlns:p14="http://schemas.microsoft.com/office/powerpoint/2010/main" val="1024086991"/>
+      </p:ext>
+    </p:extLst>
+  </p:cSld>
+  <p:clrMapOvr>
+    <a:masterClrMapping/>
+  </p:clrMapOvr>
+</p:notes>
+</file>
+
+<file path=ppt/notesSlides/notesSlide38.xml><?xml version="1.0" encoding="utf-8"?>
+<p:notes xmlns:a="http://schemas.openxmlformats.org/drawingml/2006/main" xmlns:r="http://schemas.openxmlformats.org/officeDocument/2006/relationships" xmlns:p="http://schemas.openxmlformats.org/presentationml/2006/main">
+  <p:cSld>
+    <p:spTree>
+      <p:nvGrpSpPr>
+        <p:cNvPr id="1" name=""/>
+        <p:cNvGrpSpPr/>
+        <p:nvPr/>
+      </p:nvGrpSpPr>
+      <p:grpSpPr>
+        <a:xfrm>
+          <a:off x="0" y="0"/>
+          <a:ext cx="0" cy="0"/>
+          <a:chOff x="0" y="0"/>
+          <a:chExt cx="0" cy="0"/>
+        </a:xfrm>
+      </p:grpSpPr>
+      <p:sp>
+        <p:nvSpPr>
+          <p:cNvPr id="2" name="Slide Image Placeholder 1"/>
+          <p:cNvSpPr>
+            <a:spLocks noGrp="1" noRot="1" noChangeAspect="1"/>
+          </p:cNvSpPr>
+          <p:nvPr>
+            <p:ph type="sldImg"/>
+          </p:nvPr>
+        </p:nvSpPr>
+        <p:spPr/>
+      </p:sp>
+      <p:sp>
+        <p:nvSpPr>
+          <p:cNvPr id="3" name="Notes Placeholder 2"/>
+          <p:cNvSpPr>
+            <a:spLocks noGrp="1"/>
+          </p:cNvSpPr>
+          <p:nvPr>
+            <p:ph type="body" idx="1"/>
+          </p:nvPr>
+        </p:nvSpPr>
+        <p:spPr/>
+        <p:txBody>
+          <a:bodyPr/>
+          <a:lstStyle/>
+          <a:p>
+            <a:r>
+              <a:rPr lang="en-US" dirty="0"/>
+              <a:t>You do not need a plugin for this, and that is exactly why we are not shipping one. Run this against auth_cookie_expiration on a real site. If more than one line comes back, one of those plugins is not doing what its settings screen claims.
+The same snippet works on any hook, including hooks nobody has thought to write a checker for. That is the advantage of understanding the rule over installing a tool.</a:t>
+            </a:r>
+            <a:endParaRPr lang="en-US" dirty="0"/>
+          </a:p>
+        </p:txBody>
+      </p:sp>
+      <p:sp>
+        <p:nvSpPr>
+          <p:cNvPr id="4" name="Slide Number Placeholder 3"/>
+          <p:cNvSpPr>
+            <a:spLocks noGrp="1"/>
+          </p:cNvSpPr>
+          <p:nvPr>
+            <p:ph type="sldNum" sz="quarter" idx="10"/>
+          </p:nvPr>
+        </p:nvSpPr>
+        <p:spPr/>
+        <p:txBody>
+          <a:bodyPr/>
+          <a:lstStyle/>
+          <a:p>
+            <a:fld id="{F7021451-1387-4CA6-816F-3879F97B5CBC}" type="slidenum">
+              <a:rPr lang="en-US"/>
+              <a:t>38</a:t>
+            </a:fld>
+            <a:endParaRPr lang="en-US"/>
+          </a:p>
+        </p:txBody>
+      </p:sp>
+    </p:spTree>
+    <p:extLst>
+      <p:ext uri="{BB962C8B-B14F-4D97-AF65-F5344CB8AC3E}">
+        <p14:creationId xmlns:p14="http://schemas.microsoft.com/office/powerpoint/2010/main" val="1024086991"/>
+      </p:ext>
+    </p:extLst>
+  </p:cSld>
+  <p:clrMapOvr>
+    <a:masterClrMapping/>
+  </p:clrMapOvr>
+</p:notes>
+</file>
+
+<file path=ppt/notesSlides/notesSlide39.xml><?xml version="1.0" encoding="utf-8"?>
+<p:notes xmlns:a="http://schemas.openxmlformats.org/drawingml/2006/main" xmlns:r="http://schemas.openxmlformats.org/officeDocument/2006/relationships" xmlns:p="http://schemas.openxmlformats.org/presentationml/2006/main">
+  <p:cSld>
+    <p:spTree>
+      <p:nvGrpSpPr>
+        <p:cNvPr id="1" name=""/>
+        <p:cNvGrpSpPr/>
+        <p:nvPr/>
+      </p:nvGrpSpPr>
+      <p:grpSpPr>
+        <a:xfrm>
+          <a:off x="0" y="0"/>
+          <a:ext cx="0" cy="0"/>
+          <a:chOff x="0" y="0"/>
+          <a:chExt cx="0" cy="0"/>
+        </a:xfrm>
+      </p:grpSpPr>
+      <p:sp>
+        <p:nvSpPr>
+          <p:cNvPr id="2" name="Slide Image Placeholder 1"/>
+          <p:cNvSpPr>
+            <a:spLocks noGrp="1" noRot="1" noChangeAspect="1"/>
+          </p:cNvSpPr>
+          <p:nvPr>
+            <p:ph type="sldImg"/>
+          </p:nvPr>
+        </p:nvSpPr>
+        <p:spPr/>
+      </p:sp>
+      <p:sp>
+        <p:nvSpPr>
+          <p:cNvPr id="3" name="Notes Placeholder 2"/>
+          <p:cNvSpPr>
+            <a:spLocks noGrp="1"/>
+          </p:cNvSpPr>
+          <p:nvPr>
+            <p:ph type="body" idx="1"/>
+          </p:nvPr>
+        </p:nvSpPr>
+        <p:spPr/>
+        <p:txBody>
+          <a:bodyPr/>
+          <a:lstStyle/>
+          <a:p>
+            <a:r>
+              <a:rPr lang="en-US" dirty="0"/>
+              <a:t>The first guessed from source code and accused plugins that were not touching the setting. The second measured the real outcome by actually running the filter — precise, and it meant executing arbitrary third-party code as a side effect of a diagnostic. A tool that reports collisions must not cause them.
+Underneath, both failed the same way: they were trying to recover something WordPress never wrote down. Nothing records which plugin asked for what, and everything built on top of that gap is a guess or a gamble.
+What ended up working was reporting only what could be proven, and saying plainly on the screen that a clean result means nothing traceable was found — not that nothing is wrong.</a:t>
+            </a:r>
+            <a:endParaRPr lang="en-US" dirty="0"/>
+          </a:p>
+        </p:txBody>
+      </p:sp>
+      <p:sp>
+        <p:nvSpPr>
+          <p:cNvPr id="4" name="Slide Number Placeholder 3"/>
+          <p:cNvSpPr>
+            <a:spLocks noGrp="1"/>
+          </p:cNvSpPr>
+          <p:nvPr>
+            <p:ph type="sldNum" sz="quarter" idx="10"/>
+          </p:nvPr>
+        </p:nvSpPr>
+        <p:spPr/>
+        <p:txBody>
+          <a:bodyPr/>
+          <a:lstStyle/>
+          <a:p>
+            <a:fld id="{F7021451-1387-4CA6-816F-3879F97B5CBC}" type="slidenum">
+              <a:rPr lang="en-US"/>
+              <a:t>39</a:t>
             </a:fld>
             <a:endParaRPr lang="en-US"/>
           </a:p>
@@ -3236,6 +3510,183 @@
             <a:fld id="{F7021451-1387-4CA6-816F-3879F97B5CBC}" type="slidenum">
               <a:rPr lang="en-US"/>
               <a:t>4</a:t>
+            </a:fld>
+            <a:endParaRPr lang="en-US"/>
+          </a:p>
+        </p:txBody>
+      </p:sp>
+    </p:spTree>
+    <p:extLst>
+      <p:ext uri="{BB962C8B-B14F-4D97-AF65-F5344CB8AC3E}">
+        <p14:creationId xmlns:p14="http://schemas.microsoft.com/office/powerpoint/2010/main" val="1024086991"/>
+      </p:ext>
+    </p:extLst>
+  </p:cSld>
+  <p:clrMapOvr>
+    <a:masterClrMapping/>
+  </p:clrMapOvr>
+</p:notes>
+</file>
+
+<file path=ppt/notesSlides/notesSlide40.xml><?xml version="1.0" encoding="utf-8"?>
+<p:notes xmlns:a="http://schemas.openxmlformats.org/drawingml/2006/main" xmlns:r="http://schemas.openxmlformats.org/officeDocument/2006/relationships" xmlns:p="http://schemas.openxmlformats.org/presentationml/2006/main">
+  <p:cSld>
+    <p:spTree>
+      <p:nvGrpSpPr>
+        <p:cNvPr id="1" name=""/>
+        <p:cNvGrpSpPr/>
+        <p:nvPr/>
+      </p:nvGrpSpPr>
+      <p:grpSpPr>
+        <a:xfrm>
+          <a:off x="0" y="0"/>
+          <a:ext cx="0" cy="0"/>
+          <a:chOff x="0" y="0"/>
+          <a:chExt cx="0" cy="0"/>
+        </a:xfrm>
+      </p:grpSpPr>
+      <p:sp>
+        <p:nvSpPr>
+          <p:cNvPr id="2" name="Slide Image Placeholder 1"/>
+          <p:cNvSpPr>
+            <a:spLocks noGrp="1" noRot="1" noChangeAspect="1"/>
+          </p:cNvSpPr>
+          <p:nvPr>
+            <p:ph type="sldImg"/>
+          </p:nvPr>
+        </p:nvSpPr>
+        <p:spPr/>
+      </p:sp>
+      <p:sp>
+        <p:nvSpPr>
+          <p:cNvPr id="3" name="Notes Placeholder 2"/>
+          <p:cNvSpPr>
+            <a:spLocks noGrp="1"/>
+          </p:cNvSpPr>
+          <p:nvPr>
+            <p:ph type="body" idx="1"/>
+          </p:nvPr>
+        </p:nvSpPr>
+        <p:spPr/>
+        <p:txBody>
+          <a:bodyPr/>
+          <a:lstStyle/>
+          <a:p>
+            <a:r>
+              <a:rPr lang="en-US" dirty="0"/>
+              <a:t>If two plugins are competing to set the same defaults, the answer is not to make them cooperate. It is to run one of them.
+This is also the honest pitch for the plugin we just built. Not that it does more than the others — it does less. But you can read all of it in an afternoon and know exactly what it decided on your behalf.</a:t>
+            </a:r>
+            <a:endParaRPr lang="en-US" dirty="0"/>
+          </a:p>
+        </p:txBody>
+      </p:sp>
+      <p:sp>
+        <p:nvSpPr>
+          <p:cNvPr id="4" name="Slide Number Placeholder 3"/>
+          <p:cNvSpPr>
+            <a:spLocks noGrp="1"/>
+          </p:cNvSpPr>
+          <p:nvPr>
+            <p:ph type="sldNum" sz="quarter" idx="10"/>
+          </p:nvPr>
+        </p:nvSpPr>
+        <p:spPr/>
+        <p:txBody>
+          <a:bodyPr/>
+          <a:lstStyle/>
+          <a:p>
+            <a:fld id="{F7021451-1387-4CA6-816F-3879F97B5CBC}" type="slidenum">
+              <a:rPr lang="en-US"/>
+              <a:t>40</a:t>
+            </a:fld>
+            <a:endParaRPr lang="en-US"/>
+          </a:p>
+        </p:txBody>
+      </p:sp>
+    </p:spTree>
+    <p:extLst>
+      <p:ext uri="{BB962C8B-B14F-4D97-AF65-F5344CB8AC3E}">
+        <p14:creationId xmlns:p14="http://schemas.microsoft.com/office/powerpoint/2010/main" val="1024086991"/>
+      </p:ext>
+    </p:extLst>
+  </p:cSld>
+  <p:clrMapOvr>
+    <a:masterClrMapping/>
+  </p:clrMapOvr>
+</p:notes>
+</file>
+
+<file path=ppt/notesSlides/notesSlide41.xml><?xml version="1.0" encoding="utf-8"?>
+<p:notes xmlns:a="http://schemas.openxmlformats.org/drawingml/2006/main" xmlns:r="http://schemas.openxmlformats.org/officeDocument/2006/relationships" xmlns:p="http://schemas.openxmlformats.org/presentationml/2006/main">
+  <p:cSld>
+    <p:spTree>
+      <p:nvGrpSpPr>
+        <p:cNvPr id="1" name=""/>
+        <p:cNvGrpSpPr/>
+        <p:nvPr/>
+      </p:nvGrpSpPr>
+      <p:grpSpPr>
+        <a:xfrm>
+          <a:off x="0" y="0"/>
+          <a:ext cx="0" cy="0"/>
+          <a:chOff x="0" y="0"/>
+          <a:chExt cx="0" cy="0"/>
+        </a:xfrm>
+      </p:grpSpPr>
+      <p:sp>
+        <p:nvSpPr>
+          <p:cNvPr id="2" name="Slide Image Placeholder 1"/>
+          <p:cNvSpPr>
+            <a:spLocks noGrp="1" noRot="1" noChangeAspect="1"/>
+          </p:cNvSpPr>
+          <p:nvPr>
+            <p:ph type="sldImg"/>
+          </p:nvPr>
+        </p:nvSpPr>
+        <p:spPr/>
+      </p:sp>
+      <p:sp>
+        <p:nvSpPr>
+          <p:cNvPr id="3" name="Notes Placeholder 2"/>
+          <p:cNvSpPr>
+            <a:spLocks noGrp="1"/>
+          </p:cNvSpPr>
+          <p:nvPr>
+            <p:ph type="body" idx="1"/>
+          </p:nvPr>
+        </p:nvSpPr>
+        <p:spPr/>
+        <p:txBody>
+          <a:bodyPr/>
+          <a:lstStyle/>
+          <a:p>
+            <a:r>
+              <a:rPr lang="en-US" dirty="0"/>
+              <a:t>Hand out the zip and the reference doc. Invite everyone to add their own favourite default to the schema and share it back with the group.</a:t>
+            </a:r>
+            <a:endParaRPr lang="en-US" dirty="0"/>
+          </a:p>
+        </p:txBody>
+      </p:sp>
+      <p:sp>
+        <p:nvSpPr>
+          <p:cNvPr id="4" name="Slide Number Placeholder 3"/>
+          <p:cNvSpPr>
+            <a:spLocks noGrp="1"/>
+          </p:cNvSpPr>
+          <p:nvPr>
+            <p:ph type="sldNum" sz="quarter" idx="10"/>
+          </p:nvPr>
+        </p:nvSpPr>
+        <p:spPr/>
+        <p:txBody>
+          <a:bodyPr/>
+          <a:lstStyle/>
+          <a:p>
+            <a:fld id="{F7021451-1387-4CA6-816F-3879F97B5CBC}" type="slidenum">
+              <a:rPr lang="en-US"/>
+              <a:t>41</a:t>
             </a:fld>
             <a:endParaRPr lang="en-US"/>
           </a:p>
@@ -28557,7 +29008,7 @@
     <p:bg>
       <p:bgPr>
         <a:solidFill>
-          <a:srgbClr val="0F2733"/>
+          <a:srgbClr val="F5F8FA"/>
         </a:solidFill>
       </p:bgPr>
     </p:bg>
@@ -28577,58 +29028,18 @@
       </p:grpSpPr>
       <p:sp>
         <p:nvSpPr>
-          <p:cNvPr id="2" name="Shape 0"/>
-          <p:cNvSpPr/>
-          <p:nvPr/>
-        </p:nvSpPr>
-        <p:spPr>
-          <a:xfrm>
-            <a:off x="0" y="5212080"/>
-            <a:ext cx="12188952" cy="1645920"/>
+          <p:cNvPr id="2" name="Text 0"/>
+          <p:cNvSpPr/>
+          <p:nvPr/>
+        </p:nvSpPr>
+        <p:spPr>
+          <a:xfrm>
+            <a:off x="548640" y="502920"/>
+            <a:ext cx="11064240" cy="822960"/>
           </a:xfrm>
           <a:prstGeom prst="rect">
             <a:avLst/>
           </a:prstGeom>
-          <a:solidFill>
-            <a:srgbClr val="16323F"/>
-          </a:solidFill>
-          <a:ln/>
-        </p:spPr>
-      </p:sp>
-      <p:sp>
-        <p:nvSpPr>
-          <p:cNvPr id="3" name="Shape 1"/>
-          <p:cNvSpPr/>
-          <p:nvPr/>
-        </p:nvSpPr>
-        <p:spPr>
-          <a:xfrm>
-            <a:off x="777240" y="777240"/>
-            <a:ext cx="640080" cy="640080"/>
-          </a:xfrm>
-          <a:prstGeom prst="ellipse">
-            <a:avLst/>
-          </a:prstGeom>
-          <a:solidFill>
-            <a:srgbClr val="E0A94B"/>
-          </a:solidFill>
-          <a:ln/>
-        </p:spPr>
-      </p:sp>
-      <p:sp>
-        <p:nvSpPr>
-          <p:cNvPr id="4" name="Text 2"/>
-          <p:cNvSpPr/>
-          <p:nvPr/>
-        </p:nvSpPr>
-        <p:spPr>
-          <a:xfrm>
-            <a:off x="777240" y="777240"/>
-            <a:ext cx="640080" cy="640080"/>
-          </a:xfrm>
-          <a:prstGeom prst="rect">
-            <a:avLst/>
-          </a:prstGeom>
           <a:noFill/>
           <a:ln/>
         </p:spPr>
@@ -28636,11 +29047,11 @@
           <a:bodyPr wrap="square" lIns="0" tIns="0" rIns="0" bIns="0" rtlCol="0" anchor="ctr"/>
           <a:lstStyle/>
           <a:p>
-            <a:pPr algn="ctr" indent="0" marL="0">
-              <a:buNone/>
-            </a:pPr>
-            <a:r>
-              <a:rPr lang="en-US" sz="1820" b="1" dirty="0">
+            <a:pPr indent="0" marL="0">
+              <a:buNone/>
+            </a:pPr>
+            <a:r>
+              <a:rPr lang="en-US" sz="3200" b="1" dirty="0">
                 <a:solidFill>
                   <a:srgbClr val="0F2733"/>
                 </a:solidFill>
@@ -28648,22 +29059,22 @@
                 <a:ea typeface="Cambria" pitchFamily="34" charset="-122"/>
                 <a:cs typeface="Cambria" pitchFamily="34" charset="-120"/>
               </a:rPr>
-              <a:t>{ }</a:t>
-            </a:r>
-            <a:endParaRPr lang="en-US" sz="1820" dirty="0"/>
-          </a:p>
-        </p:txBody>
-      </p:sp>
-      <p:sp>
-        <p:nvSpPr>
-          <p:cNvPr id="5" name="Text 3"/>
-          <p:cNvSpPr/>
-          <p:nvPr/>
-        </p:nvSpPr>
-        <p:spPr>
-          <a:xfrm>
-            <a:off x="777240" y="1737360"/>
-            <a:ext cx="10607040" cy="1097280"/>
+              <a:t>Somebody will install two of these</a:t>
+            </a:r>
+            <a:endParaRPr lang="en-US" sz="3200" dirty="0"/>
+          </a:p>
+        </p:txBody>
+      </p:sp>
+      <p:sp>
+        <p:nvSpPr>
+          <p:cNvPr id="3" name="Text 1"/>
+          <p:cNvSpPr/>
+          <p:nvPr/>
+        </p:nvSpPr>
+        <p:spPr>
+          <a:xfrm>
+            <a:off x="548640" y="1371600"/>
+            <a:ext cx="10881360" cy="731520"/>
           </a:xfrm>
           <a:prstGeom prst="rect">
             <a:avLst/>
@@ -28679,7 +29090,100 @@
               <a:buNone/>
             </a:pPr>
             <a:r>
-              <a:rPr lang="en-US" sz="5000" b="1" dirty="0">
+              <a:rPr lang="en-US" sz="1600" dirty="0">
+                <a:solidFill>
+                  <a:srgbClr val="4A5A63"/>
+                </a:solidFill>
+                <a:latin typeface="Calibri" pitchFamily="34" charset="0"/>
+                <a:ea typeface="Calibri" pitchFamily="34" charset="-122"/>
+                <a:cs typeface="Calibri" pitchFamily="34" charset="-120"/>
+              </a:rPr>
+              <a:t>Two defaults plugins on one site — or this one plus a security suite doing half the same job.</a:t>
+            </a:r>
+            <a:endParaRPr lang="en-US" sz="1600" dirty="0"/>
+          </a:p>
+        </p:txBody>
+      </p:sp>
+      <p:sp>
+        <p:nvSpPr>
+          <p:cNvPr id="4" name="Shape 2"/>
+          <p:cNvSpPr/>
+          <p:nvPr/>
+        </p:nvSpPr>
+        <p:spPr>
+          <a:xfrm>
+            <a:off x="548640" y="2377440"/>
+            <a:ext cx="11064240" cy="1051560"/>
+          </a:xfrm>
+          <a:prstGeom prst="roundRect">
+            <a:avLst>
+              <a:gd name="adj" fmla="val 7826"/>
+            </a:avLst>
+          </a:prstGeom>
+          <a:solidFill>
+            <a:srgbClr val="FFFFFF"/>
+          </a:solidFill>
+          <a:ln w="12700">
+            <a:solidFill>
+              <a:srgbClr val="DCE6EB"/>
+            </a:solidFill>
+            <a:prstDash val="solid"/>
+          </a:ln>
+          <a:effectLst>
+            <a:outerShdw sx="100000" sy="100000" kx="0" ky="0" algn="bl" rotWithShape="0" blurRad="63500" dist="25400" dir="5400000">
+              <a:srgbClr val="C7D4DB">
+                <a:alpha val="50000"/>
+              </a:srgbClr>
+            </a:outerShdw>
+          </a:effectLst>
+        </p:spPr>
+      </p:sp>
+      <p:sp>
+        <p:nvSpPr>
+          <p:cNvPr id="5" name="Shape 3"/>
+          <p:cNvSpPr/>
+          <p:nvPr/>
+        </p:nvSpPr>
+        <p:spPr>
+          <a:xfrm>
+            <a:off x="868680" y="2670048"/>
+            <a:ext cx="457200" cy="457200"/>
+          </a:xfrm>
+          <a:prstGeom prst="ellipse">
+            <a:avLst/>
+          </a:prstGeom>
+          <a:solidFill>
+            <a:srgbClr val="27607A"/>
+          </a:solidFill>
+          <a:ln/>
+        </p:spPr>
+      </p:sp>
+      <p:sp>
+        <p:nvSpPr>
+          <p:cNvPr id="6" name="Text 4"/>
+          <p:cNvSpPr/>
+          <p:nvPr/>
+        </p:nvSpPr>
+        <p:spPr>
+          <a:xfrm>
+            <a:off x="868680" y="2670048"/>
+            <a:ext cx="457200" cy="457200"/>
+          </a:xfrm>
+          <a:prstGeom prst="rect">
+            <a:avLst/>
+          </a:prstGeom>
+          <a:noFill/>
+          <a:ln/>
+        </p:spPr>
+        <p:txBody>
+          <a:bodyPr wrap="square" lIns="0" tIns="0" rIns="0" bIns="0" rtlCol="0" anchor="ctr"/>
+          <a:lstStyle/>
+          <a:p>
+            <a:pPr algn="ctr" indent="0" marL="0">
+              <a:buNone/>
+            </a:pPr>
+            <a:r>
+              <a:rPr lang="en-US" sz="1300" b="1" dirty="0">
                 <a:solidFill>
                   <a:srgbClr val="FFFFFF"/>
                 </a:solidFill>
@@ -28687,22 +29191,22 @@
                 <a:ea typeface="Cambria" pitchFamily="34" charset="-122"/>
                 <a:cs typeface="Cambria" pitchFamily="34" charset="-120"/>
               </a:rPr>
-              <a:t>Thanks, WPYEG!</a:t>
-            </a:r>
-            <a:endParaRPr lang="en-US" sz="5000" dirty="0"/>
-          </a:p>
-        </p:txBody>
-      </p:sp>
-      <p:sp>
-        <p:nvSpPr>
-          <p:cNvPr id="6" name="Text 4"/>
-          <p:cNvSpPr/>
-          <p:nvPr/>
-        </p:nvSpPr>
-        <p:spPr>
-          <a:xfrm>
-            <a:off x="822960" y="2926080"/>
-            <a:ext cx="10058400" cy="822960"/>
+              <a:t>1</a:t>
+            </a:r>
+            <a:endParaRPr lang="en-US" sz="1300" dirty="0"/>
+          </a:p>
+        </p:txBody>
+      </p:sp>
+      <p:sp>
+        <p:nvSpPr>
+          <p:cNvPr id="7" name="Text 5"/>
+          <p:cNvSpPr/>
+          <p:nvPr/>
+        </p:nvSpPr>
+        <p:spPr>
+          <a:xfrm>
+            <a:off x="1508760" y="2542032"/>
+            <a:ext cx="9875520" cy="731520"/>
           </a:xfrm>
           <a:prstGeom prst="rect">
             <a:avLst/>
@@ -28711,24 +29215,625 @@
           <a:ln/>
         </p:spPr>
         <p:txBody>
-          <a:bodyPr wrap="square" lIns="0" tIns="0" rIns="0" bIns="0" rtlCol="0" anchor="t"/>
+          <a:bodyPr wrap="square" lIns="0" tIns="0" rIns="0" bIns="0" rtlCol="0" anchor="ctr"/>
           <a:lstStyle/>
           <a:p>
             <a:pPr indent="0" marL="0">
               <a:buNone/>
             </a:pPr>
             <a:r>
-              <a:rPr lang="en-US" sz="1900" i="1" dirty="0">
-                <a:solidFill>
-                  <a:srgbClr val="D7E5EC"/>
+              <a:rPr lang="en-US" sz="1500" b="1" dirty="0">
+                <a:solidFill>
+                  <a:srgbClr val="0F2733"/>
                 </a:solidFill>
                 <a:latin typeface="Calibri" pitchFamily="34" charset="0"/>
                 <a:ea typeface="Calibri" pitchFamily="34" charset="-122"/>
                 <a:cs typeface="Calibri" pitchFamily="34" charset="-120"/>
               </a:rPr>
-              <a:t>Set your defaults wisely.</a:t>
-            </a:r>
-            <a:endParaRPr lang="en-US" sz="1900" dirty="0"/>
+              <a:t>Nothing errors.  </a:t>
+            </a:r>
+            <a:pPr indent="0" marL="0">
+              <a:buNone/>
+            </a:pPr>
+            <a:r>
+              <a:rPr lang="en-US" sz="1500" dirty="0">
+                <a:solidFill>
+                  <a:srgbClr val="4A5A63"/>
+                </a:solidFill>
+                <a:latin typeface="Calibri" pitchFamily="34" charset="0"/>
+                <a:ea typeface="Calibri" pitchFamily="34" charset="-122"/>
+                <a:cs typeface="Calibri" pitchFamily="34" charset="-120"/>
+              </a:rPr>
+              <a:t>No crash, no warning, no line in a log.</a:t>
+            </a:r>
+            <a:endParaRPr lang="en-US" sz="1500" dirty="0"/>
+          </a:p>
+        </p:txBody>
+      </p:sp>
+      <p:sp>
+        <p:nvSpPr>
+          <p:cNvPr id="8" name="Shape 6"/>
+          <p:cNvSpPr/>
+          <p:nvPr/>
+        </p:nvSpPr>
+        <p:spPr>
+          <a:xfrm>
+            <a:off x="548640" y="3611880"/>
+            <a:ext cx="11064240" cy="1051560"/>
+          </a:xfrm>
+          <a:prstGeom prst="roundRect">
+            <a:avLst>
+              <a:gd name="adj" fmla="val 7826"/>
+            </a:avLst>
+          </a:prstGeom>
+          <a:solidFill>
+            <a:srgbClr val="FFFFFF"/>
+          </a:solidFill>
+          <a:ln w="12700">
+            <a:solidFill>
+              <a:srgbClr val="DCE6EB"/>
+            </a:solidFill>
+            <a:prstDash val="solid"/>
+          </a:ln>
+          <a:effectLst>
+            <a:outerShdw sx="100000" sy="100000" kx="0" ky="0" algn="bl" rotWithShape="0" blurRad="63500" dist="25400" dir="5400000">
+              <a:srgbClr val="C7D4DB">
+                <a:alpha val="50000"/>
+              </a:srgbClr>
+            </a:outerShdw>
+          </a:effectLst>
+        </p:spPr>
+      </p:sp>
+      <p:sp>
+        <p:nvSpPr>
+          <p:cNvPr id="9" name="Shape 7"/>
+          <p:cNvSpPr/>
+          <p:nvPr/>
+        </p:nvSpPr>
+        <p:spPr>
+          <a:xfrm>
+            <a:off x="868680" y="3904488"/>
+            <a:ext cx="457200" cy="457200"/>
+          </a:xfrm>
+          <a:prstGeom prst="ellipse">
+            <a:avLst/>
+          </a:prstGeom>
+          <a:solidFill>
+            <a:srgbClr val="27607A"/>
+          </a:solidFill>
+          <a:ln/>
+        </p:spPr>
+      </p:sp>
+      <p:sp>
+        <p:nvSpPr>
+          <p:cNvPr id="10" name="Text 8"/>
+          <p:cNvSpPr/>
+          <p:nvPr/>
+        </p:nvSpPr>
+        <p:spPr>
+          <a:xfrm>
+            <a:off x="868680" y="3904488"/>
+            <a:ext cx="457200" cy="457200"/>
+          </a:xfrm>
+          <a:prstGeom prst="rect">
+            <a:avLst/>
+          </a:prstGeom>
+          <a:noFill/>
+          <a:ln/>
+        </p:spPr>
+        <p:txBody>
+          <a:bodyPr wrap="square" lIns="0" tIns="0" rIns="0" bIns="0" rtlCol="0" anchor="ctr"/>
+          <a:lstStyle/>
+          <a:p>
+            <a:pPr algn="ctr" indent="0" marL="0">
+              <a:buNone/>
+            </a:pPr>
+            <a:r>
+              <a:rPr lang="en-US" sz="1300" b="1" dirty="0">
+                <a:solidFill>
+                  <a:srgbClr val="FFFFFF"/>
+                </a:solidFill>
+                <a:latin typeface="Cambria" pitchFamily="34" charset="0"/>
+                <a:ea typeface="Cambria" pitchFamily="34" charset="-122"/>
+                <a:cs typeface="Cambria" pitchFamily="34" charset="-120"/>
+              </a:rPr>
+              <a:t>2</a:t>
+            </a:r>
+            <a:endParaRPr lang="en-US" sz="1300" dirty="0"/>
+          </a:p>
+        </p:txBody>
+      </p:sp>
+      <p:sp>
+        <p:nvSpPr>
+          <p:cNvPr id="11" name="Text 9"/>
+          <p:cNvSpPr/>
+          <p:nvPr/>
+        </p:nvSpPr>
+        <p:spPr>
+          <a:xfrm>
+            <a:off x="1508760" y="3776472"/>
+            <a:ext cx="9875520" cy="731520"/>
+          </a:xfrm>
+          <a:prstGeom prst="rect">
+            <a:avLst/>
+          </a:prstGeom>
+          <a:noFill/>
+          <a:ln/>
+        </p:spPr>
+        <p:txBody>
+          <a:bodyPr wrap="square" lIns="0" tIns="0" rIns="0" bIns="0" rtlCol="0" anchor="ctr"/>
+          <a:lstStyle/>
+          <a:p>
+            <a:pPr indent="0" marL="0">
+              <a:buNone/>
+            </a:pPr>
+            <a:r>
+              <a:rPr lang="en-US" sz="1500" b="1" dirty="0">
+                <a:solidFill>
+                  <a:srgbClr val="0F2733"/>
+                </a:solidFill>
+                <a:latin typeface="Calibri" pitchFamily="34" charset="0"/>
+                <a:ea typeface="Calibri" pitchFamily="34" charset="-122"/>
+                <a:cs typeface="Calibri" pitchFamily="34" charset="-120"/>
+              </a:rPr>
+              <a:t>Nothing is clobbered.  </a:t>
+            </a:r>
+            <a:pPr indent="0" marL="0">
+              <a:buNone/>
+            </a:pPr>
+            <a:r>
+              <a:rPr lang="en-US" sz="1500" dirty="0">
+                <a:solidFill>
+                  <a:srgbClr val="4A5A63"/>
+                </a:solidFill>
+                <a:latin typeface="Calibri" pitchFamily="34" charset="0"/>
+                <a:ea typeface="Calibri" pitchFamily="34" charset="-122"/>
+                <a:cs typeface="Calibri" pitchFamily="34" charset="-120"/>
+              </a:rPr>
+              <a:t>Each plugin keeps its own settings safely.</a:t>
+            </a:r>
+            <a:endParaRPr lang="en-US" sz="1500" dirty="0"/>
+          </a:p>
+        </p:txBody>
+      </p:sp>
+      <p:sp>
+        <p:nvSpPr>
+          <p:cNvPr id="12" name="Shape 10"/>
+          <p:cNvSpPr/>
+          <p:nvPr/>
+        </p:nvSpPr>
+        <p:spPr>
+          <a:xfrm>
+            <a:off x="548640" y="4846320"/>
+            <a:ext cx="11064240" cy="1051560"/>
+          </a:xfrm>
+          <a:prstGeom prst="roundRect">
+            <a:avLst>
+              <a:gd name="adj" fmla="val 7826"/>
+            </a:avLst>
+          </a:prstGeom>
+          <a:solidFill>
+            <a:srgbClr val="FFFFFF"/>
+          </a:solidFill>
+          <a:ln w="12700">
+            <a:solidFill>
+              <a:srgbClr val="DCE6EB"/>
+            </a:solidFill>
+            <a:prstDash val="solid"/>
+          </a:ln>
+          <a:effectLst>
+            <a:outerShdw sx="100000" sy="100000" kx="0" ky="0" algn="bl" rotWithShape="0" blurRad="63500" dist="25400" dir="5400000">
+              <a:srgbClr val="C7D4DB">
+                <a:alpha val="50000"/>
+              </a:srgbClr>
+            </a:outerShdw>
+          </a:effectLst>
+        </p:spPr>
+      </p:sp>
+      <p:sp>
+        <p:nvSpPr>
+          <p:cNvPr id="13" name="Shape 11"/>
+          <p:cNvSpPr/>
+          <p:nvPr/>
+        </p:nvSpPr>
+        <p:spPr>
+          <a:xfrm>
+            <a:off x="868680" y="5138928"/>
+            <a:ext cx="457200" cy="457200"/>
+          </a:xfrm>
+          <a:prstGeom prst="ellipse">
+            <a:avLst/>
+          </a:prstGeom>
+          <a:solidFill>
+            <a:srgbClr val="27607A"/>
+          </a:solidFill>
+          <a:ln/>
+        </p:spPr>
+      </p:sp>
+      <p:sp>
+        <p:nvSpPr>
+          <p:cNvPr id="14" name="Text 12"/>
+          <p:cNvSpPr/>
+          <p:nvPr/>
+        </p:nvSpPr>
+        <p:spPr>
+          <a:xfrm>
+            <a:off x="868680" y="5138928"/>
+            <a:ext cx="457200" cy="457200"/>
+          </a:xfrm>
+          <a:prstGeom prst="rect">
+            <a:avLst/>
+          </a:prstGeom>
+          <a:noFill/>
+          <a:ln/>
+        </p:spPr>
+        <p:txBody>
+          <a:bodyPr wrap="square" lIns="0" tIns="0" rIns="0" bIns="0" rtlCol="0" anchor="ctr"/>
+          <a:lstStyle/>
+          <a:p>
+            <a:pPr algn="ctr" indent="0" marL="0">
+              <a:buNone/>
+            </a:pPr>
+            <a:r>
+              <a:rPr lang="en-US" sz="1300" b="1" dirty="0">
+                <a:solidFill>
+                  <a:srgbClr val="FFFFFF"/>
+                </a:solidFill>
+                <a:latin typeface="Cambria" pitchFamily="34" charset="0"/>
+                <a:ea typeface="Cambria" pitchFamily="34" charset="-122"/>
+                <a:cs typeface="Cambria" pitchFamily="34" charset="-120"/>
+              </a:rPr>
+              <a:t>3</a:t>
+            </a:r>
+            <a:endParaRPr lang="en-US" sz="1300" dirty="0"/>
+          </a:p>
+        </p:txBody>
+      </p:sp>
+      <p:sp>
+        <p:nvSpPr>
+          <p:cNvPr id="15" name="Text 13"/>
+          <p:cNvSpPr/>
+          <p:nvPr/>
+        </p:nvSpPr>
+        <p:spPr>
+          <a:xfrm>
+            <a:off x="1508760" y="5010912"/>
+            <a:ext cx="9875520" cy="731520"/>
+          </a:xfrm>
+          <a:prstGeom prst="rect">
+            <a:avLst/>
+          </a:prstGeom>
+          <a:noFill/>
+          <a:ln/>
+        </p:spPr>
+        <p:txBody>
+          <a:bodyPr wrap="square" lIns="0" tIns="0" rIns="0" bIns="0" rtlCol="0" anchor="ctr"/>
+          <a:lstStyle/>
+          <a:p>
+            <a:pPr indent="0" marL="0">
+              <a:buNone/>
+            </a:pPr>
+            <a:r>
+              <a:rPr lang="en-US" sz="1500" b="1" dirty="0">
+                <a:solidFill>
+                  <a:srgbClr val="0F2733"/>
+                </a:solidFill>
+                <a:latin typeface="Calibri" pitchFamily="34" charset="0"/>
+                <a:ea typeface="Calibri" pitchFamily="34" charset="-122"/>
+                <a:cs typeface="Calibri" pitchFamily="34" charset="-120"/>
+              </a:rPr>
+              <a:t>One of them silently stops working.  </a:t>
+            </a:r>
+            <a:pPr indent="0" marL="0">
+              <a:buNone/>
+            </a:pPr>
+            <a:r>
+              <a:rPr lang="en-US" sz="1500" dirty="0">
+                <a:solidFill>
+                  <a:srgbClr val="4A5A63"/>
+                </a:solidFill>
+                <a:latin typeface="Calibri" pitchFamily="34" charset="0"/>
+                <a:ea typeface="Calibri" pitchFamily="34" charset="-122"/>
+                <a:cs typeface="Calibri" pitchFamily="34" charset="-120"/>
+              </a:rPr>
+              <a:t>And its settings screen goes on saying otherwise.</a:t>
+            </a:r>
+            <a:endParaRPr lang="en-US" sz="1500" dirty="0"/>
+          </a:p>
+        </p:txBody>
+      </p:sp>
+      <p:sp>
+        <p:nvSpPr>
+          <p:cNvPr id="16" name="Text 14"/>
+          <p:cNvSpPr/>
+          <p:nvPr/>
+        </p:nvSpPr>
+        <p:spPr>
+          <a:xfrm>
+            <a:off x="502920" y="6428232"/>
+            <a:ext cx="7315200" cy="274320"/>
+          </a:xfrm>
+          <a:prstGeom prst="rect">
+            <a:avLst/>
+          </a:prstGeom>
+          <a:noFill/>
+          <a:ln/>
+        </p:spPr>
+        <p:txBody>
+          <a:bodyPr wrap="square" lIns="0" tIns="0" rIns="0" bIns="0" rtlCol="0" anchor="ctr"/>
+          <a:lstStyle/>
+          <a:p>
+            <a:pPr algn="l" indent="0" marL="0">
+              <a:buNone/>
+            </a:pPr>
+            <a:r>
+              <a:rPr lang="en-US" sz="900" b="1" dirty="0">
+                <a:solidFill>
+                  <a:srgbClr val="C88F33"/>
+                </a:solidFill>
+                <a:latin typeface="Calibri" pitchFamily="34" charset="0"/>
+                <a:ea typeface="Calibri" pitchFamily="34" charset="-122"/>
+                <a:cs typeface="Calibri" pitchFamily="34" charset="-120"/>
+              </a:rPr>
+              <a:t>WPYEG</a:t>
+            </a:r>
+            <a:pPr algn="l" indent="0" marL="0">
+              <a:buNone/>
+            </a:pPr>
+            <a:r>
+              <a:rPr lang="en-US" sz="900" dirty="0">
+                <a:solidFill>
+                  <a:srgbClr val="8A9AA3"/>
+                </a:solidFill>
+                <a:latin typeface="Calibri" pitchFamily="34" charset="0"/>
+                <a:ea typeface="Calibri" pitchFamily="34" charset="-122"/>
+                <a:cs typeface="Calibri" pitchFamily="34" charset="-120"/>
+              </a:rPr>
+              <a:t>  ·  Better by Default</a:t>
+            </a:r>
+            <a:endParaRPr lang="en-US" sz="900" dirty="0"/>
+          </a:p>
+        </p:txBody>
+      </p:sp>
+      <p:sp>
+        <p:nvSpPr>
+          <p:cNvPr id="17" name="Text 15"/>
+          <p:cNvSpPr/>
+          <p:nvPr/>
+        </p:nvSpPr>
+        <p:spPr>
+          <a:xfrm>
+            <a:off x="11155680" y="6428232"/>
+            <a:ext cx="548640" cy="274320"/>
+          </a:xfrm>
+          <a:prstGeom prst="rect">
+            <a:avLst/>
+          </a:prstGeom>
+          <a:noFill/>
+          <a:ln/>
+        </p:spPr>
+        <p:txBody>
+          <a:bodyPr wrap="square" lIns="0" tIns="0" rIns="0" bIns="0" rtlCol="0" anchor="ctr"/>
+          <a:lstStyle/>
+          <a:p>
+            <a:pPr algn="r" indent="0" marL="0">
+              <a:buNone/>
+            </a:pPr>
+            <a:r>
+              <a:rPr lang="en-US" sz="900" dirty="0">
+                <a:solidFill>
+                  <a:srgbClr val="8A9AA3"/>
+                </a:solidFill>
+                <a:latin typeface="Calibri" pitchFamily="34" charset="0"/>
+                <a:ea typeface="Calibri" pitchFamily="34" charset="-122"/>
+                <a:cs typeface="Calibri" pitchFamily="34" charset="-120"/>
+              </a:rPr>
+              <a:t>33</a:t>
+            </a:r>
+            <a:endParaRPr lang="en-US" sz="900" dirty="0"/>
+          </a:p>
+        </p:txBody>
+      </p:sp>
+    </p:spTree>
+  </p:cSld>
+  <p:clrMapOvr>
+    <a:masterClrMapping/>
+  </p:clrMapOvr>
+</p:sld>
+</file>
+
+<file path=ppt/slides/slide37.xml><?xml version="1.0" encoding="utf-8"?>
+<p:sld xmlns:a="http://schemas.openxmlformats.org/drawingml/2006/main" xmlns:r="http://schemas.openxmlformats.org/officeDocument/2006/relationships" xmlns:p="http://schemas.openxmlformats.org/presentationml/2006/main">
+  <p:cSld name="Slide 37">
+    <p:bg>
+      <p:bgPr>
+        <a:solidFill>
+          <a:srgbClr val="F5F8FA"/>
+        </a:solidFill>
+      </p:bgPr>
+    </p:bg>
+    <p:spTree>
+      <p:nvGrpSpPr>
+        <p:cNvPr id="1" name=""/>
+        <p:cNvGrpSpPr/>
+        <p:nvPr/>
+      </p:nvGrpSpPr>
+      <p:grpSpPr>
+        <a:xfrm>
+          <a:off x="0" y="0"/>
+          <a:ext cx="0" cy="0"/>
+          <a:chOff x="0" y="0"/>
+          <a:chExt cx="0" cy="0"/>
+        </a:xfrm>
+      </p:grpSpPr>
+      <p:sp>
+        <p:nvSpPr>
+          <p:cNvPr id="2" name="Text 0"/>
+          <p:cNvSpPr/>
+          <p:nvPr/>
+        </p:nvSpPr>
+        <p:spPr>
+          <a:xfrm>
+            <a:off x="548640" y="502920"/>
+            <a:ext cx="11064240" cy="822960"/>
+          </a:xfrm>
+          <a:prstGeom prst="rect">
+            <a:avLst/>
+          </a:prstGeom>
+          <a:noFill/>
+          <a:ln/>
+        </p:spPr>
+        <p:txBody>
+          <a:bodyPr wrap="square" lIns="0" tIns="0" rIns="0" bIns="0" rtlCol="0" anchor="ctr"/>
+          <a:lstStyle/>
+          <a:p>
+            <a:pPr indent="0" marL="0">
+              <a:buNone/>
+            </a:pPr>
+            <a:r>
+              <a:rPr lang="en-US" sz="3200" b="1" dirty="0">
+                <a:solidFill>
+                  <a:srgbClr val="0F2733"/>
+                </a:solidFill>
+                <a:latin typeface="Cambria" pitchFamily="34" charset="0"/>
+                <a:ea typeface="Cambria" pitchFamily="34" charset="-122"/>
+                <a:cs typeface="Cambria" pitchFamily="34" charset="-120"/>
+              </a:rPr>
+              <a:t>Some settings share. Some fight.</a:t>
+            </a:r>
+            <a:endParaRPr lang="en-US" sz="3200" dirty="0"/>
+          </a:p>
+        </p:txBody>
+      </p:sp>
+      <p:sp>
+        <p:nvSpPr>
+          <p:cNvPr id="3" name="Text 1"/>
+          <p:cNvSpPr/>
+          <p:nvPr/>
+        </p:nvSpPr>
+        <p:spPr>
+          <a:xfrm>
+            <a:off x="548640" y="1371600"/>
+            <a:ext cx="10881360" cy="731520"/>
+          </a:xfrm>
+          <a:prstGeom prst="rect">
+            <a:avLst/>
+          </a:prstGeom>
+          <a:noFill/>
+          <a:ln/>
+        </p:spPr>
+        <p:txBody>
+          <a:bodyPr wrap="square" lIns="0" tIns="0" rIns="0" bIns="0" rtlCol="0" anchor="ctr"/>
+          <a:lstStyle/>
+          <a:p>
+            <a:pPr indent="0" marL="0">
+              <a:buNone/>
+            </a:pPr>
+            <a:r>
+              <a:rPr lang="en-US" sz="1600" dirty="0">
+                <a:solidFill>
+                  <a:srgbClr val="4A5A63"/>
+                </a:solidFill>
+                <a:latin typeface="Calibri" pitchFamily="34" charset="0"/>
+                <a:ea typeface="Calibri" pitchFamily="34" charset="-122"/>
+                <a:cs typeface="Calibri" pitchFamily="34" charset="-120"/>
+              </a:rPr>
+              <a:t>The difference is entirely in what your callback does with the argument it is handed.</a:t>
+            </a:r>
+            <a:endParaRPr lang="en-US" sz="1600" dirty="0"/>
+          </a:p>
+        </p:txBody>
+      </p:sp>
+      <p:sp>
+        <p:nvSpPr>
+          <p:cNvPr id="4" name="Shape 2"/>
+          <p:cNvSpPr/>
+          <p:nvPr/>
+        </p:nvSpPr>
+        <p:spPr>
+          <a:xfrm>
+            <a:off x="548640" y="2377440"/>
+            <a:ext cx="11064240" cy="1051560"/>
+          </a:xfrm>
+          <a:prstGeom prst="roundRect">
+            <a:avLst>
+              <a:gd name="adj" fmla="val 7826"/>
+            </a:avLst>
+          </a:prstGeom>
+          <a:solidFill>
+            <a:srgbClr val="FFFFFF"/>
+          </a:solidFill>
+          <a:ln w="12700">
+            <a:solidFill>
+              <a:srgbClr val="DCE6EB"/>
+            </a:solidFill>
+            <a:prstDash val="solid"/>
+          </a:ln>
+          <a:effectLst>
+            <a:outerShdw sx="100000" sy="100000" kx="0" ky="0" algn="bl" rotWithShape="0" blurRad="63500" dist="25400" dir="5400000">
+              <a:srgbClr val="C7D4DB">
+                <a:alpha val="50000"/>
+              </a:srgbClr>
+            </a:outerShdw>
+          </a:effectLst>
+        </p:spPr>
+      </p:sp>
+      <p:sp>
+        <p:nvSpPr>
+          <p:cNvPr id="5" name="Shape 3"/>
+          <p:cNvSpPr/>
+          <p:nvPr/>
+        </p:nvSpPr>
+        <p:spPr>
+          <a:xfrm>
+            <a:off x="868680" y="2670048"/>
+            <a:ext cx="457200" cy="457200"/>
+          </a:xfrm>
+          <a:prstGeom prst="ellipse">
+            <a:avLst/>
+          </a:prstGeom>
+          <a:solidFill>
+            <a:srgbClr val="27607A"/>
+          </a:solidFill>
+          <a:ln/>
+        </p:spPr>
+      </p:sp>
+      <p:sp>
+        <p:nvSpPr>
+          <p:cNvPr id="6" name="Text 4"/>
+          <p:cNvSpPr/>
+          <p:nvPr/>
+        </p:nvSpPr>
+        <p:spPr>
+          <a:xfrm>
+            <a:off x="868680" y="2670048"/>
+            <a:ext cx="457200" cy="457200"/>
+          </a:xfrm>
+          <a:prstGeom prst="rect">
+            <a:avLst/>
+          </a:prstGeom>
+          <a:noFill/>
+          <a:ln/>
+        </p:spPr>
+        <p:txBody>
+          <a:bodyPr wrap="square" lIns="0" tIns="0" rIns="0" bIns="0" rtlCol="0" anchor="ctr"/>
+          <a:lstStyle/>
+          <a:p>
+            <a:pPr algn="ctr" indent="0" marL="0">
+              <a:buNone/>
+            </a:pPr>
+            <a:r>
+              <a:rPr lang="en-US" sz="1300" b="1" dirty="0">
+                <a:solidFill>
+                  <a:srgbClr val="FFFFFF"/>
+                </a:solidFill>
+                <a:latin typeface="Cambria" pitchFamily="34" charset="0"/>
+                <a:ea typeface="Cambria" pitchFamily="34" charset="-122"/>
+                <a:cs typeface="Cambria" pitchFamily="34" charset="-120"/>
+              </a:rPr>
+              <a:t>1</a:t>
+            </a:r>
+            <a:endParaRPr lang="en-US" sz="1300" dirty="0"/>
           </a:p>
         </p:txBody>
       </p:sp>
@@ -28740,8 +29845,8 @@
         </p:nvSpPr>
         <p:spPr>
           <a:xfrm>
-            <a:off x="822960" y="4023360"/>
-            <a:ext cx="10515600" cy="457200"/>
+            <a:off x="1508760" y="2542032"/>
+            <a:ext cx="9875520" cy="731520"/>
           </a:xfrm>
           <a:prstGeom prst="rect">
             <a:avLst/>
@@ -28757,72 +29862,734 @@
               <a:buNone/>
             </a:pPr>
             <a:r>
-              <a:rPr lang="en-US" sz="1400" b="1" dirty="0">
-                <a:solidFill>
-                  <a:srgbClr val="E0A94B"/>
+              <a:rPr lang="en-US" sz="1500" b="1" dirty="0">
+                <a:solidFill>
+                  <a:srgbClr val="0F2733"/>
+                </a:solidFill>
+                <a:latin typeface="Calibri" pitchFamily="34" charset="0"/>
+                <a:ea typeface="Calibri" pitchFamily="34" charset="-122"/>
+                <a:cs typeface="Calibri" pitchFamily="34" charset="-120"/>
+              </a:rPr>
+              <a:t>Adding to a list.  </a:t>
+            </a:r>
+            <a:pPr indent="0" marL="0">
+              <a:buNone/>
+            </a:pPr>
+            <a:r>
+              <a:rPr lang="en-US" sz="1500" dirty="0">
+                <a:solidFill>
+                  <a:srgbClr val="4A5A63"/>
+                </a:solidFill>
+                <a:latin typeface="Calibri" pitchFamily="34" charset="0"/>
+                <a:ea typeface="Calibri" pitchFamily="34" charset="-122"/>
+                <a:cs typeface="Calibri" pitchFamily="34" charset="-120"/>
+              </a:rPr>
+              <a:t>Everybody's contribution survives. Security headers work this way.</a:t>
+            </a:r>
+            <a:endParaRPr lang="en-US" sz="1500" dirty="0"/>
+          </a:p>
+        </p:txBody>
+      </p:sp>
+      <p:sp>
+        <p:nvSpPr>
+          <p:cNvPr id="8" name="Shape 6"/>
+          <p:cNvSpPr/>
+          <p:nvPr/>
+        </p:nvSpPr>
+        <p:spPr>
+          <a:xfrm>
+            <a:off x="548640" y="3611880"/>
+            <a:ext cx="11064240" cy="1051560"/>
+          </a:xfrm>
+          <a:prstGeom prst="roundRect">
+            <a:avLst>
+              <a:gd name="adj" fmla="val 7826"/>
+            </a:avLst>
+          </a:prstGeom>
+          <a:solidFill>
+            <a:srgbClr val="FFFFFF"/>
+          </a:solidFill>
+          <a:ln w="12700">
+            <a:solidFill>
+              <a:srgbClr val="DCE6EB"/>
+            </a:solidFill>
+            <a:prstDash val="solid"/>
+          </a:ln>
+          <a:effectLst>
+            <a:outerShdw sx="100000" sy="100000" kx="0" ky="0" algn="bl" rotWithShape="0" blurRad="63500" dist="25400" dir="5400000">
+              <a:srgbClr val="C7D4DB">
+                <a:alpha val="50000"/>
+              </a:srgbClr>
+            </a:outerShdw>
+          </a:effectLst>
+        </p:spPr>
+      </p:sp>
+      <p:sp>
+        <p:nvSpPr>
+          <p:cNvPr id="9" name="Shape 7"/>
+          <p:cNvSpPr/>
+          <p:nvPr/>
+        </p:nvSpPr>
+        <p:spPr>
+          <a:xfrm>
+            <a:off x="868680" y="3904488"/>
+            <a:ext cx="457200" cy="457200"/>
+          </a:xfrm>
+          <a:prstGeom prst="ellipse">
+            <a:avLst/>
+          </a:prstGeom>
+          <a:solidFill>
+            <a:srgbClr val="27607A"/>
+          </a:solidFill>
+          <a:ln/>
+        </p:spPr>
+      </p:sp>
+      <p:sp>
+        <p:nvSpPr>
+          <p:cNvPr id="10" name="Text 8"/>
+          <p:cNvSpPr/>
+          <p:nvPr/>
+        </p:nvSpPr>
+        <p:spPr>
+          <a:xfrm>
+            <a:off x="868680" y="3904488"/>
+            <a:ext cx="457200" cy="457200"/>
+          </a:xfrm>
+          <a:prstGeom prst="rect">
+            <a:avLst/>
+          </a:prstGeom>
+          <a:noFill/>
+          <a:ln/>
+        </p:spPr>
+        <p:txBody>
+          <a:bodyPr wrap="square" lIns="0" tIns="0" rIns="0" bIns="0" rtlCol="0" anchor="ctr"/>
+          <a:lstStyle/>
+          <a:p>
+            <a:pPr algn="ctr" indent="0" marL="0">
+              <a:buNone/>
+            </a:pPr>
+            <a:r>
+              <a:rPr lang="en-US" sz="1300" b="1" dirty="0">
+                <a:solidFill>
+                  <a:srgbClr val="FFFFFF"/>
+                </a:solidFill>
+                <a:latin typeface="Cambria" pitchFamily="34" charset="0"/>
+                <a:ea typeface="Cambria" pitchFamily="34" charset="-122"/>
+                <a:cs typeface="Cambria" pitchFamily="34" charset="-120"/>
+              </a:rPr>
+              <a:t>2</a:t>
+            </a:r>
+            <a:endParaRPr lang="en-US" sz="1300" dirty="0"/>
+          </a:p>
+        </p:txBody>
+      </p:sp>
+      <p:sp>
+        <p:nvSpPr>
+          <p:cNvPr id="11" name="Text 9"/>
+          <p:cNvSpPr/>
+          <p:nvPr/>
+        </p:nvSpPr>
+        <p:spPr>
+          <a:xfrm>
+            <a:off x="1508760" y="3776472"/>
+            <a:ext cx="9875520" cy="731520"/>
+          </a:xfrm>
+          <a:prstGeom prst="rect">
+            <a:avLst/>
+          </a:prstGeom>
+          <a:noFill/>
+          <a:ln/>
+        </p:spPr>
+        <p:txBody>
+          <a:bodyPr wrap="square" lIns="0" tIns="0" rIns="0" bIns="0" rtlCol="0" anchor="ctr"/>
+          <a:lstStyle/>
+          <a:p>
+            <a:pPr indent="0" marL="0">
+              <a:buNone/>
+            </a:pPr>
+            <a:r>
+              <a:rPr lang="en-US" sz="1500" b="1" dirty="0">
+                <a:solidFill>
+                  <a:srgbClr val="0F2733"/>
+                </a:solidFill>
+                <a:latin typeface="Calibri" pitchFamily="34" charset="0"/>
+                <a:ea typeface="Calibri" pitchFamily="34" charset="-122"/>
+                <a:cs typeface="Calibri" pitchFamily="34" charset="-120"/>
+              </a:rPr>
+              <a:t>Replacing a value.  </a:t>
+            </a:r>
+            <a:pPr indent="0" marL="0">
+              <a:buNone/>
+            </a:pPr>
+            <a:r>
+              <a:rPr lang="en-US" sz="1500" dirty="0">
+                <a:solidFill>
+                  <a:srgbClr val="4A5A63"/>
+                </a:solidFill>
+                <a:latin typeface="Calibri" pitchFamily="34" charset="0"/>
+                <a:ea typeface="Calibri" pitchFamily="34" charset="-122"/>
+                <a:cs typeface="Calibri" pitchFamily="34" charset="-120"/>
+              </a:rPr>
+              <a:t>Last one wins, the rest are discarded. Session length works this way.</a:t>
+            </a:r>
+            <a:endParaRPr lang="en-US" sz="1500" dirty="0"/>
+          </a:p>
+        </p:txBody>
+      </p:sp>
+      <p:sp>
+        <p:nvSpPr>
+          <p:cNvPr id="12" name="Shape 10"/>
+          <p:cNvSpPr/>
+          <p:nvPr/>
+        </p:nvSpPr>
+        <p:spPr>
+          <a:xfrm>
+            <a:off x="548640" y="4846320"/>
+            <a:ext cx="11064240" cy="1051560"/>
+          </a:xfrm>
+          <a:prstGeom prst="roundRect">
+            <a:avLst>
+              <a:gd name="adj" fmla="val 7826"/>
+            </a:avLst>
+          </a:prstGeom>
+          <a:solidFill>
+            <a:srgbClr val="FFFFFF"/>
+          </a:solidFill>
+          <a:ln w="12700">
+            <a:solidFill>
+              <a:srgbClr val="DCE6EB"/>
+            </a:solidFill>
+            <a:prstDash val="solid"/>
+          </a:ln>
+          <a:effectLst>
+            <a:outerShdw sx="100000" sy="100000" kx="0" ky="0" algn="bl" rotWithShape="0" blurRad="63500" dist="25400" dir="5400000">
+              <a:srgbClr val="C7D4DB">
+                <a:alpha val="50000"/>
+              </a:srgbClr>
+            </a:outerShdw>
+          </a:effectLst>
+        </p:spPr>
+      </p:sp>
+      <p:sp>
+        <p:nvSpPr>
+          <p:cNvPr id="13" name="Shape 11"/>
+          <p:cNvSpPr/>
+          <p:nvPr/>
+        </p:nvSpPr>
+        <p:spPr>
+          <a:xfrm>
+            <a:off x="868680" y="5138928"/>
+            <a:ext cx="457200" cy="457200"/>
+          </a:xfrm>
+          <a:prstGeom prst="ellipse">
+            <a:avLst/>
+          </a:prstGeom>
+          <a:solidFill>
+            <a:srgbClr val="27607A"/>
+          </a:solidFill>
+          <a:ln/>
+        </p:spPr>
+      </p:sp>
+      <p:sp>
+        <p:nvSpPr>
+          <p:cNvPr id="14" name="Text 12"/>
+          <p:cNvSpPr/>
+          <p:nvPr/>
+        </p:nvSpPr>
+        <p:spPr>
+          <a:xfrm>
+            <a:off x="868680" y="5138928"/>
+            <a:ext cx="457200" cy="457200"/>
+          </a:xfrm>
+          <a:prstGeom prst="rect">
+            <a:avLst/>
+          </a:prstGeom>
+          <a:noFill/>
+          <a:ln/>
+        </p:spPr>
+        <p:txBody>
+          <a:bodyPr wrap="square" lIns="0" tIns="0" rIns="0" bIns="0" rtlCol="0" anchor="ctr"/>
+          <a:lstStyle/>
+          <a:p>
+            <a:pPr algn="ctr" indent="0" marL="0">
+              <a:buNone/>
+            </a:pPr>
+            <a:r>
+              <a:rPr lang="en-US" sz="1300" b="1" dirty="0">
+                <a:solidFill>
+                  <a:srgbClr val="FFFFFF"/>
+                </a:solidFill>
+                <a:latin typeface="Cambria" pitchFamily="34" charset="0"/>
+                <a:ea typeface="Cambria" pitchFamily="34" charset="-122"/>
+                <a:cs typeface="Cambria" pitchFamily="34" charset="-120"/>
+              </a:rPr>
+              <a:t>3</a:t>
+            </a:r>
+            <a:endParaRPr lang="en-US" sz="1300" dirty="0"/>
+          </a:p>
+        </p:txBody>
+      </p:sp>
+      <p:sp>
+        <p:nvSpPr>
+          <p:cNvPr id="15" name="Text 13"/>
+          <p:cNvSpPr/>
+          <p:nvPr/>
+        </p:nvSpPr>
+        <p:spPr>
+          <a:xfrm>
+            <a:off x="1508760" y="5010912"/>
+            <a:ext cx="9875520" cy="731520"/>
+          </a:xfrm>
+          <a:prstGeom prst="rect">
+            <a:avLst/>
+          </a:prstGeom>
+          <a:noFill/>
+          <a:ln/>
+        </p:spPr>
+        <p:txBody>
+          <a:bodyPr wrap="square" lIns="0" tIns="0" rIns="0" bIns="0" rtlCol="0" anchor="ctr"/>
+          <a:lstStyle/>
+          <a:p>
+            <a:pPr indent="0" marL="0">
+              <a:buNone/>
+            </a:pPr>
+            <a:r>
+              <a:rPr lang="en-US" sz="1500" b="1" dirty="0">
+                <a:solidFill>
+                  <a:srgbClr val="0F2733"/>
+                </a:solidFill>
+                <a:latin typeface="Calibri" pitchFamily="34" charset="0"/>
+                <a:ea typeface="Calibri" pitchFamily="34" charset="-122"/>
+                <a:cs typeface="Calibri" pitchFamily="34" charset="-120"/>
+              </a:rPr>
+              <a:t>Nothing tells you which you wrote.  </a:t>
+            </a:r>
+            <a:pPr indent="0" marL="0">
+              <a:buNone/>
+            </a:pPr>
+            <a:r>
+              <a:rPr lang="en-US" sz="1500" dirty="0">
+                <a:solidFill>
+                  <a:srgbClr val="4A5A63"/>
+                </a:solidFill>
+                <a:latin typeface="Calibri" pitchFamily="34" charset="0"/>
+                <a:ea typeface="Calibri" pitchFamily="34" charset="-122"/>
+                <a:cs typeface="Calibri" pitchFamily="34" charset="-120"/>
+              </a:rPr>
+              <a:t>Both are add_filter(). Both look identical at the call site.</a:t>
+            </a:r>
+            <a:endParaRPr lang="en-US" sz="1500" dirty="0"/>
+          </a:p>
+        </p:txBody>
+      </p:sp>
+      <p:sp>
+        <p:nvSpPr>
+          <p:cNvPr id="16" name="Text 14"/>
+          <p:cNvSpPr/>
+          <p:nvPr/>
+        </p:nvSpPr>
+        <p:spPr>
+          <a:xfrm>
+            <a:off x="502920" y="6428232"/>
+            <a:ext cx="7315200" cy="274320"/>
+          </a:xfrm>
+          <a:prstGeom prst="rect">
+            <a:avLst/>
+          </a:prstGeom>
+          <a:noFill/>
+          <a:ln/>
+        </p:spPr>
+        <p:txBody>
+          <a:bodyPr wrap="square" lIns="0" tIns="0" rIns="0" bIns="0" rtlCol="0" anchor="ctr"/>
+          <a:lstStyle/>
+          <a:p>
+            <a:pPr algn="l" indent="0" marL="0">
+              <a:buNone/>
+            </a:pPr>
+            <a:r>
+              <a:rPr lang="en-US" sz="900" b="1" dirty="0">
+                <a:solidFill>
+                  <a:srgbClr val="C88F33"/>
+                </a:solidFill>
+                <a:latin typeface="Calibri" pitchFamily="34" charset="0"/>
+                <a:ea typeface="Calibri" pitchFamily="34" charset="-122"/>
+                <a:cs typeface="Calibri" pitchFamily="34" charset="-120"/>
+              </a:rPr>
+              <a:t>WPYEG</a:t>
+            </a:r>
+            <a:pPr algn="l" indent="0" marL="0">
+              <a:buNone/>
+            </a:pPr>
+            <a:r>
+              <a:rPr lang="en-US" sz="900" dirty="0">
+                <a:solidFill>
+                  <a:srgbClr val="8A9AA3"/>
+                </a:solidFill>
+                <a:latin typeface="Calibri" pitchFamily="34" charset="0"/>
+                <a:ea typeface="Calibri" pitchFamily="34" charset="-122"/>
+                <a:cs typeface="Calibri" pitchFamily="34" charset="-120"/>
+              </a:rPr>
+              <a:t>  ·  Better by Default</a:t>
+            </a:r>
+            <a:endParaRPr lang="en-US" sz="900" dirty="0"/>
+          </a:p>
+        </p:txBody>
+      </p:sp>
+      <p:sp>
+        <p:nvSpPr>
+          <p:cNvPr id="17" name="Text 15"/>
+          <p:cNvSpPr/>
+          <p:nvPr/>
+        </p:nvSpPr>
+        <p:spPr>
+          <a:xfrm>
+            <a:off x="11155680" y="6428232"/>
+            <a:ext cx="548640" cy="274320"/>
+          </a:xfrm>
+          <a:prstGeom prst="rect">
+            <a:avLst/>
+          </a:prstGeom>
+          <a:noFill/>
+          <a:ln/>
+        </p:spPr>
+        <p:txBody>
+          <a:bodyPr wrap="square" lIns="0" tIns="0" rIns="0" bIns="0" rtlCol="0" anchor="ctr"/>
+          <a:lstStyle/>
+          <a:p>
+            <a:pPr algn="r" indent="0" marL="0">
+              <a:buNone/>
+            </a:pPr>
+            <a:r>
+              <a:rPr lang="en-US" sz="900" dirty="0">
+                <a:solidFill>
+                  <a:srgbClr val="8A9AA3"/>
+                </a:solidFill>
+                <a:latin typeface="Calibri" pitchFamily="34" charset="0"/>
+                <a:ea typeface="Calibri" pitchFamily="34" charset="-122"/>
+                <a:cs typeface="Calibri" pitchFamily="34" charset="-120"/>
+              </a:rPr>
+              <a:t>34</a:t>
+            </a:r>
+            <a:endParaRPr lang="en-US" sz="900" dirty="0"/>
+          </a:p>
+        </p:txBody>
+      </p:sp>
+    </p:spTree>
+  </p:cSld>
+  <p:clrMapOvr>
+    <a:masterClrMapping/>
+  </p:clrMapOvr>
+</p:sld>
+</file>
+
+<file path=ppt/slides/slide38.xml><?xml version="1.0" encoding="utf-8"?>
+<p:sld xmlns:a="http://schemas.openxmlformats.org/drawingml/2006/main" xmlns:r="http://schemas.openxmlformats.org/officeDocument/2006/relationships" xmlns:p="http://schemas.openxmlformats.org/presentationml/2006/main">
+  <p:cSld name="Slide 38">
+    <p:bg>
+      <p:bgPr>
+        <a:solidFill>
+          <a:srgbClr val="F5F8FA"/>
+        </a:solidFill>
+      </p:bgPr>
+    </p:bg>
+    <p:spTree>
+      <p:nvGrpSpPr>
+        <p:cNvPr id="1" name=""/>
+        <p:cNvGrpSpPr/>
+        <p:nvPr/>
+      </p:nvGrpSpPr>
+      <p:grpSpPr>
+        <a:xfrm>
+          <a:off x="0" y="0"/>
+          <a:ext cx="0" cy="0"/>
+          <a:chOff x="0" y="0"/>
+          <a:chExt cx="0" cy="0"/>
+        </a:xfrm>
+      </p:grpSpPr>
+      <p:sp>
+        <p:nvSpPr>
+          <p:cNvPr id="2" name="Text 0"/>
+          <p:cNvSpPr/>
+          <p:nvPr/>
+        </p:nvSpPr>
+        <p:spPr>
+          <a:xfrm>
+            <a:off x="548640" y="502920"/>
+            <a:ext cx="11064240" cy="822960"/>
+          </a:xfrm>
+          <a:prstGeom prst="rect">
+            <a:avLst/>
+          </a:prstGeom>
+          <a:noFill/>
+          <a:ln/>
+        </p:spPr>
+        <p:txBody>
+          <a:bodyPr wrap="square" lIns="0" tIns="0" rIns="0" bIns="0" rtlCol="0" anchor="ctr"/>
+          <a:lstStyle/>
+          <a:p>
+            <a:pPr indent="0" marL="0">
+              <a:buNone/>
+            </a:pPr>
+            <a:r>
+              <a:rPr lang="en-US" sz="3200" b="1" dirty="0">
+                <a:solidFill>
+                  <a:srgbClr val="0F2733"/>
+                </a:solidFill>
+                <a:latin typeface="Cambria" pitchFamily="34" charset="0"/>
+                <a:ea typeface="Cambria" pitchFamily="34" charset="-122"/>
+                <a:cs typeface="Cambria" pitchFamily="34" charset="-120"/>
+              </a:rPr>
+              <a:t>Check any site in about a minute</a:t>
+            </a:r>
+            <a:endParaRPr lang="en-US" sz="3200" dirty="0"/>
+          </a:p>
+        </p:txBody>
+      </p:sp>
+      <p:sp>
+        <p:nvSpPr>
+          <p:cNvPr id="3" name="Text 1"/>
+          <p:cNvSpPr/>
+          <p:nvPr/>
+        </p:nvSpPr>
+        <p:spPr>
+          <a:xfrm>
+            <a:off x="548640" y="1325880"/>
+            <a:ext cx="10881360" cy="640080"/>
+          </a:xfrm>
+          <a:prstGeom prst="rect">
+            <a:avLst/>
+          </a:prstGeom>
+          <a:noFill/>
+          <a:ln/>
+        </p:spPr>
+        <p:txBody>
+          <a:bodyPr wrap="square" lIns="0" tIns="0" rIns="0" bIns="0" rtlCol="0" anchor="ctr"/>
+          <a:lstStyle/>
+          <a:p>
+            <a:pPr indent="0" marL="0">
+              <a:buNone/>
+            </a:pPr>
+            <a:r>
+              <a:rPr lang="en-US" sz="1600" dirty="0">
+                <a:solidFill>
+                  <a:srgbClr val="4A5A63"/>
+                </a:solidFill>
+                <a:latin typeface="Calibri" pitchFamily="34" charset="0"/>
+                <a:ea typeface="Calibri" pitchFamily="34" charset="-122"/>
+                <a:cs typeface="Calibri" pitchFamily="34" charset="-120"/>
+              </a:rPr>
+              <a:t>WordPress keeps every registered callback in one global. Ask it who is on the hook you care about.</a:t>
+            </a:r>
+            <a:endParaRPr lang="en-US" sz="1600" dirty="0"/>
+          </a:p>
+        </p:txBody>
+      </p:sp>
+      <p:sp>
+        <p:nvSpPr>
+          <p:cNvPr id="4" name="Shape 2"/>
+          <p:cNvSpPr/>
+          <p:nvPr/>
+        </p:nvSpPr>
+        <p:spPr>
+          <a:xfrm>
+            <a:off x="548640" y="2103120"/>
+            <a:ext cx="11064240" cy="2286000"/>
+          </a:xfrm>
+          <a:prstGeom prst="roundRect">
+            <a:avLst>
+              <a:gd name="adj" fmla="val 3200"/>
+            </a:avLst>
+          </a:prstGeom>
+          <a:solidFill>
+            <a:srgbClr val="0E2836"/>
+          </a:solidFill>
+          <a:ln w="12700">
+            <a:solidFill>
+              <a:srgbClr val="27607A"/>
+            </a:solidFill>
+            <a:prstDash val="solid"/>
+          </a:ln>
+          <a:effectLst>
+            <a:outerShdw sx="100000" sy="100000" kx="0" ky="0" algn="bl" rotWithShape="0" blurRad="76200" dist="38100" dir="5400000">
+              <a:srgbClr val="0A1A22">
+                <a:alpha val="40000"/>
+              </a:srgbClr>
+            </a:outerShdw>
+          </a:effectLst>
+        </p:spPr>
+      </p:sp>
+      <p:sp>
+        <p:nvSpPr>
+          <p:cNvPr id="5" name="Text 3"/>
+          <p:cNvSpPr/>
+          <p:nvPr/>
+        </p:nvSpPr>
+        <p:spPr>
+          <a:xfrm>
+            <a:off x="749808" y="2267712"/>
+            <a:ext cx="10661904" cy="1956816"/>
+          </a:xfrm>
+          <a:prstGeom prst="rect">
+            <a:avLst/>
+          </a:prstGeom>
+          <a:noFill/>
+          <a:ln/>
+        </p:spPr>
+        <p:txBody>
+          <a:bodyPr wrap="square" lIns="0" tIns="0" rIns="0" bIns="0" rtlCol="0" anchor="t"/>
+          <a:lstStyle/>
+          <a:p>
+            <a:pPr algn="l" indent="0" marL="0">
+              <a:lnSpc>
+                <a:spcPct val="108000"/>
+              </a:lnSpc>
+              <a:buNone/>
+            </a:pPr>
+            <a:r>
+              <a:rPr lang="en-US" sz="1250" dirty="0">
+                <a:solidFill>
+                  <a:srgbClr val="8FBF9F"/>
                 </a:solidFill>
                 <a:latin typeface="Courier New" pitchFamily="34" charset="0"/>
                 <a:ea typeface="Courier New" pitchFamily="34" charset="-122"/>
                 <a:cs typeface="Courier New" pitchFamily="34" charset="-120"/>
               </a:rPr>
-              <a:t>Files:  </a:t>
-            </a:r>
-            <a:pPr indent="0" marL="0">
-              <a:buNone/>
-            </a:pPr>
-            <a:r>
-              <a:rPr lang="en-US" sz="1400" dirty="0">
-                <a:solidFill>
-                  <a:srgbClr val="D7E5EC"/>
+              <a:t>// run this inside: wp eval '...'</a:t>
+            </a:r>
+            <a:endParaRPr lang="en-US" sz="1250" dirty="0"/>
+          </a:p>
+          <a:p>
+            <a:pPr algn="l" indent="0" marL="0">
+              <a:lnSpc>
+                <a:spcPct val="108000"/>
+              </a:lnSpc>
+              <a:buNone/>
+            </a:pPr>
+            <a:r>
+              <a:rPr lang="en-US" sz="1250" dirty="0">
+                <a:solidFill>
+                  <a:srgbClr val="DCEAF1"/>
                 </a:solidFill>
                 <a:latin typeface="Courier New" pitchFamily="34" charset="0"/>
                 <a:ea typeface="Courier New" pitchFamily="34" charset="-122"/>
                 <a:cs typeface="Courier New" pitchFamily="34" charset="-120"/>
               </a:rPr>
-              <a:t>sane-defaults.zip</a:t>
-            </a:r>
-            <a:pPr indent="0" marL="0">
-              <a:buNone/>
-            </a:pPr>
-            <a:r>
-              <a:rPr lang="en-US" sz="1400" dirty="0">
-                <a:solidFill>
-                  <a:srgbClr val="8A9AA3"/>
+              <a:t>global $wp_filter;</a:t>
+            </a:r>
+            <a:endParaRPr lang="en-US" sz="1250" dirty="0"/>
+          </a:p>
+          <a:p>
+            <a:pPr algn="l" indent="0" marL="0">
+              <a:lnSpc>
+                <a:spcPct val="108000"/>
+              </a:lnSpc>
+              <a:buNone/>
+            </a:pPr>
+            <a:r>
+              <a:rPr lang="en-US" sz="1250" dirty="0">
+                <a:solidFill>
+                  <a:srgbClr val="E7C070"/>
                 </a:solidFill>
                 <a:latin typeface="Courier New" pitchFamily="34" charset="0"/>
                 <a:ea typeface="Courier New" pitchFamily="34" charset="-122"/>
                 <a:cs typeface="Courier New" pitchFamily="34" charset="-120"/>
               </a:rPr>
-              <a:t>   ·   </a:t>
-            </a:r>
-            <a:pPr indent="0" marL="0">
-              <a:buNone/>
-            </a:pPr>
-            <a:r>
-              <a:rPr lang="en-US" sz="1400" dirty="0">
-                <a:solidFill>
-                  <a:srgbClr val="D7E5EC"/>
+              <a:t>foreach ( $wp_filter['auth_cookie_expiration']-&gt;callbacks as $prio =&gt; $cbs ) {</a:t>
+            </a:r>
+            <a:endParaRPr lang="en-US" sz="1250" dirty="0"/>
+          </a:p>
+          <a:p>
+            <a:pPr algn="l" indent="0" marL="0">
+              <a:lnSpc>
+                <a:spcPct val="108000"/>
+              </a:lnSpc>
+              <a:buNone/>
+            </a:pPr>
+            <a:r>
+              <a:rPr lang="en-US" sz="1250" dirty="0">
+                <a:solidFill>
+                  <a:srgbClr val="DCEAF1"/>
                 </a:solidFill>
                 <a:latin typeface="Courier New" pitchFamily="34" charset="0"/>
                 <a:ea typeface="Courier New" pitchFamily="34" charset="-122"/>
                 <a:cs typeface="Courier New" pitchFamily="34" charset="-120"/>
               </a:rPr>
-              <a:t>wordpress-default-settings.md</a:t>
-            </a:r>
-            <a:endParaRPr lang="en-US" sz="1400" dirty="0"/>
-          </a:p>
-        </p:txBody>
-      </p:sp>
-      <p:sp>
-        <p:nvSpPr>
-          <p:cNvPr id="8" name="Text 6"/>
-          <p:cNvSpPr/>
-          <p:nvPr/>
-        </p:nvSpPr>
-        <p:spPr>
-          <a:xfrm>
-            <a:off x="822960" y="5623560"/>
-            <a:ext cx="10515600" cy="548640"/>
+              <a:t>    foreach ( $cbs as $cb ) {</a:t>
+            </a:r>
+            <a:endParaRPr lang="en-US" sz="1250" dirty="0"/>
+          </a:p>
+          <a:p>
+            <a:pPr algn="l" indent="0" marL="0">
+              <a:lnSpc>
+                <a:spcPct val="108000"/>
+              </a:lnSpc>
+              <a:buNone/>
+            </a:pPr>
+            <a:r>
+              <a:rPr lang="en-US" sz="1250" dirty="0">
+                <a:solidFill>
+                  <a:srgbClr val="DCEAF1"/>
+                </a:solidFill>
+                <a:latin typeface="Courier New" pitchFamily="34" charset="0"/>
+                <a:ea typeface="Courier New" pitchFamily="34" charset="-122"/>
+                <a:cs typeface="Courier New" pitchFamily="34" charset="-120"/>
+              </a:rPr>
+              <a:t>        printf( "%-6s %s\n", $prio, print_r( $cb['function'], true ) );</a:t>
+            </a:r>
+            <a:endParaRPr lang="en-US" sz="1250" dirty="0"/>
+          </a:p>
+          <a:p>
+            <a:pPr algn="l" indent="0" marL="0">
+              <a:lnSpc>
+                <a:spcPct val="108000"/>
+              </a:lnSpc>
+              <a:buNone/>
+            </a:pPr>
+            <a:r>
+              <a:rPr lang="en-US" sz="1250" dirty="0">
+                <a:solidFill>
+                  <a:srgbClr val="DCEAF1"/>
+                </a:solidFill>
+                <a:latin typeface="Courier New" pitchFamily="34" charset="0"/>
+                <a:ea typeface="Courier New" pitchFamily="34" charset="-122"/>
+                <a:cs typeface="Courier New" pitchFamily="34" charset="-120"/>
+              </a:rPr>
+              <a:t>    }</a:t>
+            </a:r>
+            <a:endParaRPr lang="en-US" sz="1250" dirty="0"/>
+          </a:p>
+          <a:p>
+            <a:pPr algn="l" indent="0" marL="0">
+              <a:lnSpc>
+                <a:spcPct val="108000"/>
+              </a:lnSpc>
+              <a:buNone/>
+            </a:pPr>
+            <a:r>
+              <a:rPr lang="en-US" sz="1250" dirty="0">
+                <a:solidFill>
+                  <a:srgbClr val="8FBF9F"/>
+                </a:solidFill>
+                <a:latin typeface="Courier New" pitchFamily="34" charset="0"/>
+                <a:ea typeface="Courier New" pitchFamily="34" charset="-122"/>
+                <a:cs typeface="Courier New" pitchFamily="34" charset="-120"/>
+              </a:rPr>
+              <a:t>}   // more than one line on a replacing filter means somebody is losing</a:t>
+            </a:r>
+            <a:endParaRPr lang="en-US" sz="1250" dirty="0"/>
+          </a:p>
+        </p:txBody>
+      </p:sp>
+      <p:sp>
+        <p:nvSpPr>
+          <p:cNvPr id="6" name="Text 4"/>
+          <p:cNvSpPr/>
+          <p:nvPr/>
+        </p:nvSpPr>
+        <p:spPr>
+          <a:xfrm>
+            <a:off x="548640" y="4617720"/>
+            <a:ext cx="10881360" cy="548640"/>
           </a:xfrm>
           <a:prstGeom prst="rect">
             <a:avLst/>
@@ -28838,31 +30605,749 @@
               <a:buNone/>
             </a:pPr>
             <a:r>
-              <a:rPr lang="en-US" sz="1600" b="1" dirty="0">
-                <a:solidFill>
-                  <a:srgbClr val="FFFFFF"/>
+              <a:rPr lang="en-US" sz="1500" i="1" dirty="0">
+                <a:solidFill>
+                  <a:srgbClr val="4A5A63"/>
                 </a:solidFill>
                 <a:latin typeface="Calibri" pitchFamily="34" charset="0"/>
                 <a:ea typeface="Calibri" pitchFamily="34" charset="-122"/>
                 <a:cs typeface="Calibri" pitchFamily="34" charset="-120"/>
               </a:rPr>
-              <a:t>Questions?  </a:t>
-            </a:r>
-            <a:pPr indent="0" marL="0">
-              <a:buNone/>
-            </a:pPr>
-            <a:r>
-              <a:rPr lang="en-US" sz="1600" dirty="0">
-                <a:solidFill>
-                  <a:srgbClr val="D7E5EC"/>
+              <a:t>Try it on wp_headers too, for contrast — several entries there are perfectly healthy.</a:t>
+            </a:r>
+            <a:endParaRPr lang="en-US" sz="1500" dirty="0"/>
+          </a:p>
+        </p:txBody>
+      </p:sp>
+      <p:sp>
+        <p:nvSpPr>
+          <p:cNvPr id="7" name="Text 5"/>
+          <p:cNvSpPr/>
+          <p:nvPr/>
+        </p:nvSpPr>
+        <p:spPr>
+          <a:xfrm>
+            <a:off x="502920" y="6428232"/>
+            <a:ext cx="7315200" cy="274320"/>
+          </a:xfrm>
+          <a:prstGeom prst="rect">
+            <a:avLst/>
+          </a:prstGeom>
+          <a:noFill/>
+          <a:ln/>
+        </p:spPr>
+        <p:txBody>
+          <a:bodyPr wrap="square" lIns="0" tIns="0" rIns="0" bIns="0" rtlCol="0" anchor="ctr"/>
+          <a:lstStyle/>
+          <a:p>
+            <a:pPr algn="l" indent="0" marL="0">
+              <a:buNone/>
+            </a:pPr>
+            <a:r>
+              <a:rPr lang="en-US" sz="900" b="1" dirty="0">
+                <a:solidFill>
+                  <a:srgbClr val="C88F33"/>
                 </a:solidFill>
                 <a:latin typeface="Calibri" pitchFamily="34" charset="0"/>
                 <a:ea typeface="Calibri" pitchFamily="34" charset="-122"/>
                 <a:cs typeface="Calibri" pitchFamily="34" charset="-120"/>
               </a:rPr>
-              <a:t>License GPL-3.0-or-later</a:t>
+              <a:t>WPYEG</a:t>
+            </a:r>
+            <a:pPr algn="l" indent="0" marL="0">
+              <a:buNone/>
+            </a:pPr>
+            <a:r>
+              <a:rPr lang="en-US" sz="900" dirty="0">
+                <a:solidFill>
+                  <a:srgbClr val="8A9AA3"/>
+                </a:solidFill>
+                <a:latin typeface="Calibri" pitchFamily="34" charset="0"/>
+                <a:ea typeface="Calibri" pitchFamily="34" charset="-122"/>
+                <a:cs typeface="Calibri" pitchFamily="34" charset="-120"/>
+              </a:rPr>
+              <a:t>  ·  Better by Default</a:t>
+            </a:r>
+            <a:endParaRPr lang="en-US" sz="900" dirty="0"/>
+          </a:p>
+        </p:txBody>
+      </p:sp>
+      <p:sp>
+        <p:nvSpPr>
+          <p:cNvPr id="8" name="Text 6"/>
+          <p:cNvSpPr/>
+          <p:nvPr/>
+        </p:nvSpPr>
+        <p:spPr>
+          <a:xfrm>
+            <a:off x="11155680" y="6428232"/>
+            <a:ext cx="548640" cy="274320"/>
+          </a:xfrm>
+          <a:prstGeom prst="rect">
+            <a:avLst/>
+          </a:prstGeom>
+          <a:noFill/>
+          <a:ln/>
+        </p:spPr>
+        <p:txBody>
+          <a:bodyPr wrap="square" lIns="0" tIns="0" rIns="0" bIns="0" rtlCol="0" anchor="ctr"/>
+          <a:lstStyle/>
+          <a:p>
+            <a:pPr algn="r" indent="0" marL="0">
+              <a:buNone/>
+            </a:pPr>
+            <a:r>
+              <a:rPr lang="en-US" sz="900" dirty="0">
+                <a:solidFill>
+                  <a:srgbClr val="8A9AA3"/>
+                </a:solidFill>
+                <a:latin typeface="Calibri" pitchFamily="34" charset="0"/>
+                <a:ea typeface="Calibri" pitchFamily="34" charset="-122"/>
+                <a:cs typeface="Calibri" pitchFamily="34" charset="-120"/>
+              </a:rPr>
+              <a:t>35</a:t>
+            </a:r>
+            <a:endParaRPr lang="en-US" sz="900" dirty="0"/>
+          </a:p>
+        </p:txBody>
+      </p:sp>
+    </p:spTree>
+  </p:cSld>
+  <p:clrMapOvr>
+    <a:masterClrMapping/>
+  </p:clrMapOvr>
+</p:sld>
+</file>
+
+<file path=ppt/slides/slide39.xml><?xml version="1.0" encoding="utf-8"?>
+<p:sld xmlns:a="http://schemas.openxmlformats.org/drawingml/2006/main" xmlns:r="http://schemas.openxmlformats.org/officeDocument/2006/relationships" xmlns:p="http://schemas.openxmlformats.org/presentationml/2006/main">
+  <p:cSld name="Slide 39">
+    <p:bg>
+      <p:bgPr>
+        <a:solidFill>
+          <a:srgbClr val="F5F8FA"/>
+        </a:solidFill>
+      </p:bgPr>
+    </p:bg>
+    <p:spTree>
+      <p:nvGrpSpPr>
+        <p:cNvPr id="1" name=""/>
+        <p:cNvGrpSpPr/>
+        <p:nvPr/>
+      </p:nvGrpSpPr>
+      <p:grpSpPr>
+        <a:xfrm>
+          <a:off x="0" y="0"/>
+          <a:ext cx="0" cy="0"/>
+          <a:chOff x="0" y="0"/>
+          <a:chExt cx="0" cy="0"/>
+        </a:xfrm>
+      </p:grpSpPr>
+      <p:sp>
+        <p:nvSpPr>
+          <p:cNvPr id="2" name="Text 0"/>
+          <p:cNvSpPr/>
+          <p:nvPr/>
+        </p:nvSpPr>
+        <p:spPr>
+          <a:xfrm>
+            <a:off x="548640" y="502920"/>
+            <a:ext cx="11064240" cy="822960"/>
+          </a:xfrm>
+          <a:prstGeom prst="rect">
+            <a:avLst/>
+          </a:prstGeom>
+          <a:noFill/>
+          <a:ln/>
+        </p:spPr>
+        <p:txBody>
+          <a:bodyPr wrap="square" lIns="0" tIns="0" rIns="0" bIns="0" rtlCol="0" anchor="ctr"/>
+          <a:lstStyle/>
+          <a:p>
+            <a:pPr indent="0" marL="0">
+              <a:buNone/>
+            </a:pPr>
+            <a:r>
+              <a:rPr lang="en-US" sz="3200" b="1" dirty="0">
+                <a:solidFill>
+                  <a:srgbClr val="0F2733"/>
+                </a:solidFill>
+                <a:latin typeface="Cambria" pitchFamily="34" charset="0"/>
+                <a:ea typeface="Cambria" pitchFamily="34" charset="-122"/>
+                <a:cs typeface="Cambria" pitchFamily="34" charset="-120"/>
+              </a:rPr>
+              <a:t>We tried to automate it twice. Both were wrong.</a:t>
+            </a:r>
+            <a:endParaRPr lang="en-US" sz="3200" dirty="0"/>
+          </a:p>
+        </p:txBody>
+      </p:sp>
+      <p:sp>
+        <p:nvSpPr>
+          <p:cNvPr id="3" name="Text 1"/>
+          <p:cNvSpPr/>
+          <p:nvPr/>
+        </p:nvSpPr>
+        <p:spPr>
+          <a:xfrm>
+            <a:off x="548640" y="1371600"/>
+            <a:ext cx="10881360" cy="731520"/>
+          </a:xfrm>
+          <a:prstGeom prst="rect">
+            <a:avLst/>
+          </a:prstGeom>
+          <a:noFill/>
+          <a:ln/>
+        </p:spPr>
+        <p:txBody>
+          <a:bodyPr wrap="square" lIns="0" tIns="0" rIns="0" bIns="0" rtlCol="0" anchor="ctr"/>
+          <a:lstStyle/>
+          <a:p>
+            <a:pPr indent="0" marL="0">
+              <a:buNone/>
+            </a:pPr>
+            <a:r>
+              <a:rPr lang="en-US" sz="1600" dirty="0">
+                <a:solidFill>
+                  <a:srgbClr val="4A5A63"/>
+                </a:solidFill>
+                <a:latin typeface="Calibri" pitchFamily="34" charset="0"/>
+                <a:ea typeface="Calibri" pitchFamily="34" charset="-122"/>
+                <a:cs typeface="Calibri" pitchFamily="34" charset="-120"/>
+              </a:rPr>
+              <a:t>Two sibling plugins built the checker. Both attempts shipped, and both were withdrawn.</a:t>
             </a:r>
             <a:endParaRPr lang="en-US" sz="1600" dirty="0"/>
+          </a:p>
+        </p:txBody>
+      </p:sp>
+      <p:sp>
+        <p:nvSpPr>
+          <p:cNvPr id="4" name="Shape 2"/>
+          <p:cNvSpPr/>
+          <p:nvPr/>
+        </p:nvSpPr>
+        <p:spPr>
+          <a:xfrm>
+            <a:off x="548640" y="2377440"/>
+            <a:ext cx="11064240" cy="1051560"/>
+          </a:xfrm>
+          <a:prstGeom prst="roundRect">
+            <a:avLst>
+              <a:gd name="adj" fmla="val 7826"/>
+            </a:avLst>
+          </a:prstGeom>
+          <a:solidFill>
+            <a:srgbClr val="FFFFFF"/>
+          </a:solidFill>
+          <a:ln w="12700">
+            <a:solidFill>
+              <a:srgbClr val="DCE6EB"/>
+            </a:solidFill>
+            <a:prstDash val="solid"/>
+          </a:ln>
+          <a:effectLst>
+            <a:outerShdw sx="100000" sy="100000" kx="0" ky="0" algn="bl" rotWithShape="0" blurRad="63500" dist="25400" dir="5400000">
+              <a:srgbClr val="C7D4DB">
+                <a:alpha val="50000"/>
+              </a:srgbClr>
+            </a:outerShdw>
+          </a:effectLst>
+        </p:spPr>
+      </p:sp>
+      <p:sp>
+        <p:nvSpPr>
+          <p:cNvPr id="5" name="Shape 3"/>
+          <p:cNvSpPr/>
+          <p:nvPr/>
+        </p:nvSpPr>
+        <p:spPr>
+          <a:xfrm>
+            <a:off x="868680" y="2670048"/>
+            <a:ext cx="457200" cy="457200"/>
+          </a:xfrm>
+          <a:prstGeom prst="ellipse">
+            <a:avLst/>
+          </a:prstGeom>
+          <a:solidFill>
+            <a:srgbClr val="27607A"/>
+          </a:solidFill>
+          <a:ln/>
+        </p:spPr>
+      </p:sp>
+      <p:sp>
+        <p:nvSpPr>
+          <p:cNvPr id="6" name="Text 4"/>
+          <p:cNvSpPr/>
+          <p:nvPr/>
+        </p:nvSpPr>
+        <p:spPr>
+          <a:xfrm>
+            <a:off x="868680" y="2670048"/>
+            <a:ext cx="457200" cy="457200"/>
+          </a:xfrm>
+          <a:prstGeom prst="rect">
+            <a:avLst/>
+          </a:prstGeom>
+          <a:noFill/>
+          <a:ln/>
+        </p:spPr>
+        <p:txBody>
+          <a:bodyPr wrap="square" lIns="0" tIns="0" rIns="0" bIns="0" rtlCol="0" anchor="ctr"/>
+          <a:lstStyle/>
+          <a:p>
+            <a:pPr algn="ctr" indent="0" marL="0">
+              <a:buNone/>
+            </a:pPr>
+            <a:r>
+              <a:rPr lang="en-US" sz="1300" b="1" dirty="0">
+                <a:solidFill>
+                  <a:srgbClr val="FFFFFF"/>
+                </a:solidFill>
+                <a:latin typeface="Cambria" pitchFamily="34" charset="0"/>
+                <a:ea typeface="Cambria" pitchFamily="34" charset="-122"/>
+                <a:cs typeface="Cambria" pitchFamily="34" charset="-120"/>
+              </a:rPr>
+              <a:t>1</a:t>
+            </a:r>
+            <a:endParaRPr lang="en-US" sz="1300" dirty="0"/>
+          </a:p>
+        </p:txBody>
+      </p:sp>
+      <p:sp>
+        <p:nvSpPr>
+          <p:cNvPr id="7" name="Text 5"/>
+          <p:cNvSpPr/>
+          <p:nvPr/>
+        </p:nvSpPr>
+        <p:spPr>
+          <a:xfrm>
+            <a:off x="1508760" y="2542032"/>
+            <a:ext cx="9875520" cy="731520"/>
+          </a:xfrm>
+          <a:prstGeom prst="rect">
+            <a:avLst/>
+          </a:prstGeom>
+          <a:noFill/>
+          <a:ln/>
+        </p:spPr>
+        <p:txBody>
+          <a:bodyPr wrap="square" lIns="0" tIns="0" rIns="0" bIns="0" rtlCol="0" anchor="ctr"/>
+          <a:lstStyle/>
+          <a:p>
+            <a:pPr indent="0" marL="0">
+              <a:buNone/>
+            </a:pPr>
+            <a:r>
+              <a:rPr lang="en-US" sz="1500" b="1" dirty="0">
+                <a:solidFill>
+                  <a:srgbClr val="0F2733"/>
+                </a:solidFill>
+                <a:latin typeface="Calibri" pitchFamily="34" charset="0"/>
+                <a:ea typeface="Calibri" pitchFamily="34" charset="-122"/>
+                <a:cs typeface="Calibri" pitchFamily="34" charset="-120"/>
+              </a:rPr>
+              <a:t>Read the plugin's code for clues.  </a:t>
+            </a:r>
+            <a:pPr indent="0" marL="0">
+              <a:buNone/>
+            </a:pPr>
+            <a:r>
+              <a:rPr lang="en-US" sz="1500" dirty="0">
+                <a:solidFill>
+                  <a:srgbClr val="4A5A63"/>
+                </a:solidFill>
+                <a:latin typeface="Calibri" pitchFamily="34" charset="0"/>
+                <a:ea typeface="Calibri" pitchFamily="34" charset="-122"/>
+                <a:cs typeface="Calibri" pitchFamily="34" charset="-120"/>
+              </a:rPr>
+              <a:t>Named plugins that were doing nothing at all.</a:t>
+            </a:r>
+            <a:endParaRPr lang="en-US" sz="1500" dirty="0"/>
+          </a:p>
+        </p:txBody>
+      </p:sp>
+      <p:sp>
+        <p:nvSpPr>
+          <p:cNvPr id="8" name="Shape 6"/>
+          <p:cNvSpPr/>
+          <p:nvPr/>
+        </p:nvSpPr>
+        <p:spPr>
+          <a:xfrm>
+            <a:off x="548640" y="3611880"/>
+            <a:ext cx="11064240" cy="1051560"/>
+          </a:xfrm>
+          <a:prstGeom prst="roundRect">
+            <a:avLst>
+              <a:gd name="adj" fmla="val 7826"/>
+            </a:avLst>
+          </a:prstGeom>
+          <a:solidFill>
+            <a:srgbClr val="FFFFFF"/>
+          </a:solidFill>
+          <a:ln w="12700">
+            <a:solidFill>
+              <a:srgbClr val="DCE6EB"/>
+            </a:solidFill>
+            <a:prstDash val="solid"/>
+          </a:ln>
+          <a:effectLst>
+            <a:outerShdw sx="100000" sy="100000" kx="0" ky="0" algn="bl" rotWithShape="0" blurRad="63500" dist="25400" dir="5400000">
+              <a:srgbClr val="C7D4DB">
+                <a:alpha val="50000"/>
+              </a:srgbClr>
+            </a:outerShdw>
+          </a:effectLst>
+        </p:spPr>
+      </p:sp>
+      <p:sp>
+        <p:nvSpPr>
+          <p:cNvPr id="9" name="Shape 7"/>
+          <p:cNvSpPr/>
+          <p:nvPr/>
+        </p:nvSpPr>
+        <p:spPr>
+          <a:xfrm>
+            <a:off x="868680" y="3904488"/>
+            <a:ext cx="457200" cy="457200"/>
+          </a:xfrm>
+          <a:prstGeom prst="ellipse">
+            <a:avLst/>
+          </a:prstGeom>
+          <a:solidFill>
+            <a:srgbClr val="27607A"/>
+          </a:solidFill>
+          <a:ln/>
+        </p:spPr>
+      </p:sp>
+      <p:sp>
+        <p:nvSpPr>
+          <p:cNvPr id="10" name="Text 8"/>
+          <p:cNvSpPr/>
+          <p:nvPr/>
+        </p:nvSpPr>
+        <p:spPr>
+          <a:xfrm>
+            <a:off x="868680" y="3904488"/>
+            <a:ext cx="457200" cy="457200"/>
+          </a:xfrm>
+          <a:prstGeom prst="rect">
+            <a:avLst/>
+          </a:prstGeom>
+          <a:noFill/>
+          <a:ln/>
+        </p:spPr>
+        <p:txBody>
+          <a:bodyPr wrap="square" lIns="0" tIns="0" rIns="0" bIns="0" rtlCol="0" anchor="ctr"/>
+          <a:lstStyle/>
+          <a:p>
+            <a:pPr algn="ctr" indent="0" marL="0">
+              <a:buNone/>
+            </a:pPr>
+            <a:r>
+              <a:rPr lang="en-US" sz="1300" b="1" dirty="0">
+                <a:solidFill>
+                  <a:srgbClr val="FFFFFF"/>
+                </a:solidFill>
+                <a:latin typeface="Cambria" pitchFamily="34" charset="0"/>
+                <a:ea typeface="Cambria" pitchFamily="34" charset="-122"/>
+                <a:cs typeface="Cambria" pitchFamily="34" charset="-120"/>
+              </a:rPr>
+              <a:t>2</a:t>
+            </a:r>
+            <a:endParaRPr lang="en-US" sz="1300" dirty="0"/>
+          </a:p>
+        </p:txBody>
+      </p:sp>
+      <p:sp>
+        <p:nvSpPr>
+          <p:cNvPr id="11" name="Text 9"/>
+          <p:cNvSpPr/>
+          <p:nvPr/>
+        </p:nvSpPr>
+        <p:spPr>
+          <a:xfrm>
+            <a:off x="1508760" y="3776472"/>
+            <a:ext cx="9875520" cy="731520"/>
+          </a:xfrm>
+          <a:prstGeom prst="rect">
+            <a:avLst/>
+          </a:prstGeom>
+          <a:noFill/>
+          <a:ln/>
+        </p:spPr>
+        <p:txBody>
+          <a:bodyPr wrap="square" lIns="0" tIns="0" rIns="0" bIns="0" rtlCol="0" anchor="ctr"/>
+          <a:lstStyle/>
+          <a:p>
+            <a:pPr indent="0" marL="0">
+              <a:buNone/>
+            </a:pPr>
+            <a:r>
+              <a:rPr lang="en-US" sz="1500" b="1" dirty="0">
+                <a:solidFill>
+                  <a:srgbClr val="0F2733"/>
+                </a:solidFill>
+                <a:latin typeface="Calibri" pitchFamily="34" charset="0"/>
+                <a:ea typeface="Calibri" pitchFamily="34" charset="-122"/>
+                <a:cs typeface="Calibri" pitchFamily="34" charset="-120"/>
+              </a:rPr>
+              <a:t>Run the setting, see what comes out.  </a:t>
+            </a:r>
+            <a:pPr indent="0" marL="0">
+              <a:buNone/>
+            </a:pPr>
+            <a:r>
+              <a:rPr lang="en-US" sz="1500" dirty="0">
+                <a:solidFill>
+                  <a:srgbClr val="4A5A63"/>
+                </a:solidFill>
+                <a:latin typeface="Calibri" pitchFamily="34" charset="0"/>
+                <a:ea typeface="Calibri" pitchFamily="34" charset="-122"/>
+                <a:cs typeface="Calibri" pitchFamily="34" charset="-120"/>
+              </a:rPr>
+              <a:t>Meant running other people's code to check on them.</a:t>
+            </a:r>
+            <a:endParaRPr lang="en-US" sz="1500" dirty="0"/>
+          </a:p>
+        </p:txBody>
+      </p:sp>
+      <p:sp>
+        <p:nvSpPr>
+          <p:cNvPr id="12" name="Shape 10"/>
+          <p:cNvSpPr/>
+          <p:nvPr/>
+        </p:nvSpPr>
+        <p:spPr>
+          <a:xfrm>
+            <a:off x="548640" y="4846320"/>
+            <a:ext cx="11064240" cy="1051560"/>
+          </a:xfrm>
+          <a:prstGeom prst="roundRect">
+            <a:avLst>
+              <a:gd name="adj" fmla="val 7826"/>
+            </a:avLst>
+          </a:prstGeom>
+          <a:solidFill>
+            <a:srgbClr val="FFFFFF"/>
+          </a:solidFill>
+          <a:ln w="12700">
+            <a:solidFill>
+              <a:srgbClr val="DCE6EB"/>
+            </a:solidFill>
+            <a:prstDash val="solid"/>
+          </a:ln>
+          <a:effectLst>
+            <a:outerShdw sx="100000" sy="100000" kx="0" ky="0" algn="bl" rotWithShape="0" blurRad="63500" dist="25400" dir="5400000">
+              <a:srgbClr val="C7D4DB">
+                <a:alpha val="50000"/>
+              </a:srgbClr>
+            </a:outerShdw>
+          </a:effectLst>
+        </p:spPr>
+      </p:sp>
+      <p:sp>
+        <p:nvSpPr>
+          <p:cNvPr id="13" name="Shape 11"/>
+          <p:cNvSpPr/>
+          <p:nvPr/>
+        </p:nvSpPr>
+        <p:spPr>
+          <a:xfrm>
+            <a:off x="868680" y="5138928"/>
+            <a:ext cx="457200" cy="457200"/>
+          </a:xfrm>
+          <a:prstGeom prst="ellipse">
+            <a:avLst/>
+          </a:prstGeom>
+          <a:solidFill>
+            <a:srgbClr val="27607A"/>
+          </a:solidFill>
+          <a:ln/>
+        </p:spPr>
+      </p:sp>
+      <p:sp>
+        <p:nvSpPr>
+          <p:cNvPr id="14" name="Text 12"/>
+          <p:cNvSpPr/>
+          <p:nvPr/>
+        </p:nvSpPr>
+        <p:spPr>
+          <a:xfrm>
+            <a:off x="868680" y="5138928"/>
+            <a:ext cx="457200" cy="457200"/>
+          </a:xfrm>
+          <a:prstGeom prst="rect">
+            <a:avLst/>
+          </a:prstGeom>
+          <a:noFill/>
+          <a:ln/>
+        </p:spPr>
+        <p:txBody>
+          <a:bodyPr wrap="square" lIns="0" tIns="0" rIns="0" bIns="0" rtlCol="0" anchor="ctr"/>
+          <a:lstStyle/>
+          <a:p>
+            <a:pPr algn="ctr" indent="0" marL="0">
+              <a:buNone/>
+            </a:pPr>
+            <a:r>
+              <a:rPr lang="en-US" sz="1300" b="1" dirty="0">
+                <a:solidFill>
+                  <a:srgbClr val="FFFFFF"/>
+                </a:solidFill>
+                <a:latin typeface="Cambria" pitchFamily="34" charset="0"/>
+                <a:ea typeface="Cambria" pitchFamily="34" charset="-122"/>
+                <a:cs typeface="Cambria" pitchFamily="34" charset="-120"/>
+              </a:rPr>
+              <a:t>3</a:t>
+            </a:r>
+            <a:endParaRPr lang="en-US" sz="1300" dirty="0"/>
+          </a:p>
+        </p:txBody>
+      </p:sp>
+      <p:sp>
+        <p:nvSpPr>
+          <p:cNvPr id="15" name="Text 13"/>
+          <p:cNvSpPr/>
+          <p:nvPr/>
+        </p:nvSpPr>
+        <p:spPr>
+          <a:xfrm>
+            <a:off x="1508760" y="5010912"/>
+            <a:ext cx="9875520" cy="731520"/>
+          </a:xfrm>
+          <a:prstGeom prst="rect">
+            <a:avLst/>
+          </a:prstGeom>
+          <a:noFill/>
+          <a:ln/>
+        </p:spPr>
+        <p:txBody>
+          <a:bodyPr wrap="square" lIns="0" tIns="0" rIns="0" bIns="0" rtlCol="0" anchor="ctr"/>
+          <a:lstStyle/>
+          <a:p>
+            <a:pPr indent="0" marL="0">
+              <a:buNone/>
+            </a:pPr>
+            <a:r>
+              <a:rPr lang="en-US" sz="1500" b="1" dirty="0">
+                <a:solidFill>
+                  <a:srgbClr val="0F2733"/>
+                </a:solidFill>
+                <a:latin typeface="Calibri" pitchFamily="34" charset="0"/>
+                <a:ea typeface="Calibri" pitchFamily="34" charset="-122"/>
+                <a:cs typeface="Calibri" pitchFamily="34" charset="-120"/>
+              </a:rPr>
+              <a:t>What worked: say less.  </a:t>
+            </a:r>
+            <a:pPr indent="0" marL="0">
+              <a:buNone/>
+            </a:pPr>
+            <a:r>
+              <a:rPr lang="en-US" sz="1500" dirty="0">
+                <a:solidFill>
+                  <a:srgbClr val="4A5A63"/>
+                </a:solidFill>
+                <a:latin typeface="Calibri" pitchFamily="34" charset="0"/>
+                <a:ea typeface="Calibri" pitchFamily="34" charset="-122"/>
+                <a:cs typeface="Calibri" pitchFamily="34" charset="-120"/>
+              </a:rPr>
+              <a:t>Report what you can prove, and admit what you cannot see.</a:t>
+            </a:r>
+            <a:endParaRPr lang="en-US" sz="1500" dirty="0"/>
+          </a:p>
+        </p:txBody>
+      </p:sp>
+      <p:sp>
+        <p:nvSpPr>
+          <p:cNvPr id="16" name="Text 14"/>
+          <p:cNvSpPr/>
+          <p:nvPr/>
+        </p:nvSpPr>
+        <p:spPr>
+          <a:xfrm>
+            <a:off x="502920" y="6428232"/>
+            <a:ext cx="7315200" cy="274320"/>
+          </a:xfrm>
+          <a:prstGeom prst="rect">
+            <a:avLst/>
+          </a:prstGeom>
+          <a:noFill/>
+          <a:ln/>
+        </p:spPr>
+        <p:txBody>
+          <a:bodyPr wrap="square" lIns="0" tIns="0" rIns="0" bIns="0" rtlCol="0" anchor="ctr"/>
+          <a:lstStyle/>
+          <a:p>
+            <a:pPr algn="l" indent="0" marL="0">
+              <a:buNone/>
+            </a:pPr>
+            <a:r>
+              <a:rPr lang="en-US" sz="900" b="1" dirty="0">
+                <a:solidFill>
+                  <a:srgbClr val="C88F33"/>
+                </a:solidFill>
+                <a:latin typeface="Calibri" pitchFamily="34" charset="0"/>
+                <a:ea typeface="Calibri" pitchFamily="34" charset="-122"/>
+                <a:cs typeface="Calibri" pitchFamily="34" charset="-120"/>
+              </a:rPr>
+              <a:t>WPYEG</a:t>
+            </a:r>
+            <a:pPr algn="l" indent="0" marL="0">
+              <a:buNone/>
+            </a:pPr>
+            <a:r>
+              <a:rPr lang="en-US" sz="900" dirty="0">
+                <a:solidFill>
+                  <a:srgbClr val="8A9AA3"/>
+                </a:solidFill>
+                <a:latin typeface="Calibri" pitchFamily="34" charset="0"/>
+                <a:ea typeface="Calibri" pitchFamily="34" charset="-122"/>
+                <a:cs typeface="Calibri" pitchFamily="34" charset="-120"/>
+              </a:rPr>
+              <a:t>  ·  Better by Default</a:t>
+            </a:r>
+            <a:endParaRPr lang="en-US" sz="900" dirty="0"/>
+          </a:p>
+        </p:txBody>
+      </p:sp>
+      <p:sp>
+        <p:nvSpPr>
+          <p:cNvPr id="17" name="Text 15"/>
+          <p:cNvSpPr/>
+          <p:nvPr/>
+        </p:nvSpPr>
+        <p:spPr>
+          <a:xfrm>
+            <a:off x="11155680" y="6428232"/>
+            <a:ext cx="548640" cy="274320"/>
+          </a:xfrm>
+          <a:prstGeom prst="rect">
+            <a:avLst/>
+          </a:prstGeom>
+          <a:noFill/>
+          <a:ln/>
+        </p:spPr>
+        <p:txBody>
+          <a:bodyPr wrap="square" lIns="0" tIns="0" rIns="0" bIns="0" rtlCol="0" anchor="ctr"/>
+          <a:lstStyle/>
+          <a:p>
+            <a:pPr algn="r" indent="0" marL="0">
+              <a:buNone/>
+            </a:pPr>
+            <a:r>
+              <a:rPr lang="en-US" sz="900" dirty="0">
+                <a:solidFill>
+                  <a:srgbClr val="8A9AA3"/>
+                </a:solidFill>
+                <a:latin typeface="Calibri" pitchFamily="34" charset="0"/>
+                <a:ea typeface="Calibri" pitchFamily="34" charset="-122"/>
+                <a:cs typeface="Calibri" pitchFamily="34" charset="-120"/>
+              </a:rPr>
+              <a:t>36</a:t>
+            </a:r>
+            <a:endParaRPr lang="en-US" sz="900" dirty="0"/>
           </a:p>
         </p:txBody>
       </p:sp>
@@ -29529,6 +32014,593 @@
               <a:t>4</a:t>
             </a:r>
             <a:endParaRPr lang="en-US" sz="900" dirty="0"/>
+          </a:p>
+        </p:txBody>
+      </p:sp>
+    </p:spTree>
+  </p:cSld>
+  <p:clrMapOvr>
+    <a:masterClrMapping/>
+  </p:clrMapOvr>
+</p:sld>
+</file>
+
+<file path=ppt/slides/slide40.xml><?xml version="1.0" encoding="utf-8"?>
+<p:sld xmlns:a="http://schemas.openxmlformats.org/drawingml/2006/main" xmlns:r="http://schemas.openxmlformats.org/officeDocument/2006/relationships" xmlns:p="http://schemas.openxmlformats.org/presentationml/2006/main">
+  <p:cSld name="Slide 40">
+    <p:bg>
+      <p:bgPr>
+        <a:solidFill>
+          <a:srgbClr val="27607A"/>
+        </a:solidFill>
+      </p:bgPr>
+    </p:bg>
+    <p:spTree>
+      <p:nvGrpSpPr>
+        <p:cNvPr id="1" name=""/>
+        <p:cNvGrpSpPr/>
+        <p:nvPr/>
+      </p:nvGrpSpPr>
+      <p:grpSpPr>
+        <a:xfrm>
+          <a:off x="0" y="0"/>
+          <a:ext cx="0" cy="0"/>
+          <a:chOff x="0" y="0"/>
+          <a:chExt cx="0" cy="0"/>
+        </a:xfrm>
+      </p:grpSpPr>
+      <p:sp>
+        <p:nvSpPr>
+          <p:cNvPr id="2" name="Text 0"/>
+          <p:cNvSpPr/>
+          <p:nvPr/>
+        </p:nvSpPr>
+        <p:spPr>
+          <a:xfrm>
+            <a:off x="731520" y="1371600"/>
+            <a:ext cx="10698480" cy="2011680"/>
+          </a:xfrm>
+          <a:prstGeom prst="rect">
+            <a:avLst/>
+          </a:prstGeom>
+          <a:noFill/>
+          <a:ln/>
+        </p:spPr>
+        <p:txBody>
+          <a:bodyPr wrap="square" lIns="0" tIns="0" rIns="0" bIns="0" rtlCol="0" anchor="ctr"/>
+          <a:lstStyle/>
+          <a:p>
+            <a:pPr indent="0" marL="0">
+              <a:lnSpc>
+                <a:spcPct val="105000"/>
+              </a:lnSpc>
+              <a:buNone/>
+            </a:pPr>
+            <a:r>
+              <a:rPr lang="en-US" sz="4000" b="1" dirty="0">
+                <a:solidFill>
+                  <a:srgbClr val="FFFFFF"/>
+                </a:solidFill>
+                <a:latin typeface="Cambria" pitchFamily="34" charset="0"/>
+                <a:ea typeface="Cambria" pitchFamily="34" charset="-122"/>
+                <a:cs typeface="Cambria" pitchFamily="34" charset="-120"/>
+              </a:rPr>
+              <a:t>Defaults plugins are alternatives,</a:t>
+            </a:r>
+            <a:endParaRPr lang="en-US" sz="4000" dirty="0"/>
+          </a:p>
+          <a:p>
+            <a:pPr indent="0" marL="0">
+              <a:lnSpc>
+                <a:spcPct val="105000"/>
+              </a:lnSpc>
+              <a:buNone/>
+            </a:pPr>
+            <a:r>
+              <a:rPr lang="en-US" sz="4000" b="1" dirty="0">
+                <a:solidFill>
+                  <a:srgbClr val="FFFFFF"/>
+                </a:solidFill>
+                <a:latin typeface="Cambria" pitchFamily="34" charset="0"/>
+                <a:ea typeface="Cambria" pitchFamily="34" charset="-122"/>
+                <a:cs typeface="Cambria" pitchFamily="34" charset="-120"/>
+              </a:rPr>
+              <a:t>not complements.</a:t>
+            </a:r>
+            <a:endParaRPr lang="en-US" sz="4000" dirty="0"/>
+          </a:p>
+        </p:txBody>
+      </p:sp>
+      <p:sp>
+        <p:nvSpPr>
+          <p:cNvPr id="3" name="Text 1"/>
+          <p:cNvSpPr/>
+          <p:nvPr/>
+        </p:nvSpPr>
+        <p:spPr>
+          <a:xfrm>
+            <a:off x="731520" y="3566160"/>
+            <a:ext cx="10515600" cy="914400"/>
+          </a:xfrm>
+          <a:prstGeom prst="rect">
+            <a:avLst/>
+          </a:prstGeom>
+          <a:noFill/>
+          <a:ln/>
+        </p:spPr>
+        <p:txBody>
+          <a:bodyPr wrap="square" lIns="0" tIns="0" rIns="0" bIns="0" rtlCol="0" anchor="t"/>
+          <a:lstStyle/>
+          <a:p>
+            <a:pPr indent="0" marL="0">
+              <a:buNone/>
+            </a:pPr>
+            <a:r>
+              <a:rPr lang="en-US" sz="1900" i="1" dirty="0">
+                <a:solidFill>
+                  <a:srgbClr val="D7E5EC"/>
+                </a:solidFill>
+                <a:latin typeface="Calibri" pitchFamily="34" charset="0"/>
+                <a:ea typeface="Calibri" pitchFamily="34" charset="-122"/>
+                <a:cs typeface="Calibri" pitchFamily="34" charset="-120"/>
+              </a:rPr>
+              <a:t>Two installed together give you one plugin's behaviour, and two settings screens — only one of which is telling the truth.</a:t>
+            </a:r>
+            <a:endParaRPr lang="en-US" sz="1900" dirty="0"/>
+          </a:p>
+        </p:txBody>
+      </p:sp>
+      <p:sp>
+        <p:nvSpPr>
+          <p:cNvPr id="4" name="Text 2"/>
+          <p:cNvSpPr/>
+          <p:nvPr/>
+        </p:nvSpPr>
+        <p:spPr>
+          <a:xfrm>
+            <a:off x="731520" y="4572000"/>
+            <a:ext cx="10515600" cy="731520"/>
+          </a:xfrm>
+          <a:prstGeom prst="rect">
+            <a:avLst/>
+          </a:prstGeom>
+          <a:noFill/>
+          <a:ln/>
+        </p:spPr>
+        <p:txBody>
+          <a:bodyPr wrap="square" lIns="0" tIns="0" rIns="0" bIns="0" rtlCol="0" anchor="ctr"/>
+          <a:lstStyle/>
+          <a:p>
+            <a:pPr indent="0" marL="0">
+              <a:buNone/>
+            </a:pPr>
+            <a:r>
+              <a:rPr lang="en-US" sz="1800" b="1" dirty="0">
+                <a:solidFill>
+                  <a:srgbClr val="E0A94B"/>
+                </a:solidFill>
+                <a:latin typeface="Calibri" pitchFamily="34" charset="0"/>
+                <a:ea typeface="Calibri" pitchFamily="34" charset="-122"/>
+                <a:cs typeface="Calibri" pitchFamily="34" charset="-120"/>
+              </a:rPr>
+              <a:t>Pick the one whose choices you agree with. Turn the other off.</a:t>
+            </a:r>
+            <a:endParaRPr lang="en-US" sz="1800" dirty="0"/>
+          </a:p>
+        </p:txBody>
+      </p:sp>
+      <p:sp>
+        <p:nvSpPr>
+          <p:cNvPr id="5" name="Text 3"/>
+          <p:cNvSpPr/>
+          <p:nvPr/>
+        </p:nvSpPr>
+        <p:spPr>
+          <a:xfrm>
+            <a:off x="502920" y="6428232"/>
+            <a:ext cx="7315200" cy="274320"/>
+          </a:xfrm>
+          <a:prstGeom prst="rect">
+            <a:avLst/>
+          </a:prstGeom>
+          <a:noFill/>
+          <a:ln/>
+        </p:spPr>
+        <p:txBody>
+          <a:bodyPr wrap="square" lIns="0" tIns="0" rIns="0" bIns="0" rtlCol="0" anchor="ctr"/>
+          <a:lstStyle/>
+          <a:p>
+            <a:pPr algn="l" indent="0" marL="0">
+              <a:buNone/>
+            </a:pPr>
+            <a:r>
+              <a:rPr lang="en-US" sz="900" b="1" dirty="0">
+                <a:solidFill>
+                  <a:srgbClr val="C88F33"/>
+                </a:solidFill>
+                <a:latin typeface="Calibri" pitchFamily="34" charset="0"/>
+                <a:ea typeface="Calibri" pitchFamily="34" charset="-122"/>
+                <a:cs typeface="Calibri" pitchFamily="34" charset="-120"/>
+              </a:rPr>
+              <a:t>WPYEG</a:t>
+            </a:r>
+            <a:pPr algn="l" indent="0" marL="0">
+              <a:buNone/>
+            </a:pPr>
+            <a:r>
+              <a:rPr lang="en-US" sz="900" dirty="0">
+                <a:solidFill>
+                  <a:srgbClr val="8A9AA3"/>
+                </a:solidFill>
+                <a:latin typeface="Calibri" pitchFamily="34" charset="0"/>
+                <a:ea typeface="Calibri" pitchFamily="34" charset="-122"/>
+                <a:cs typeface="Calibri" pitchFamily="34" charset="-120"/>
+              </a:rPr>
+              <a:t>  ·  Better by Default</a:t>
+            </a:r>
+            <a:endParaRPr lang="en-US" sz="900" dirty="0"/>
+          </a:p>
+        </p:txBody>
+      </p:sp>
+      <p:sp>
+        <p:nvSpPr>
+          <p:cNvPr id="6" name="Text 4"/>
+          <p:cNvSpPr/>
+          <p:nvPr/>
+        </p:nvSpPr>
+        <p:spPr>
+          <a:xfrm>
+            <a:off x="11155680" y="6428232"/>
+            <a:ext cx="548640" cy="274320"/>
+          </a:xfrm>
+          <a:prstGeom prst="rect">
+            <a:avLst/>
+          </a:prstGeom>
+          <a:noFill/>
+          <a:ln/>
+        </p:spPr>
+        <p:txBody>
+          <a:bodyPr wrap="square" lIns="0" tIns="0" rIns="0" bIns="0" rtlCol="0" anchor="ctr"/>
+          <a:lstStyle/>
+          <a:p>
+            <a:pPr algn="r" indent="0" marL="0">
+              <a:buNone/>
+            </a:pPr>
+            <a:r>
+              <a:rPr lang="en-US" sz="900" dirty="0">
+                <a:solidFill>
+                  <a:srgbClr val="8A9AA3"/>
+                </a:solidFill>
+                <a:latin typeface="Calibri" pitchFamily="34" charset="0"/>
+                <a:ea typeface="Calibri" pitchFamily="34" charset="-122"/>
+                <a:cs typeface="Calibri" pitchFamily="34" charset="-120"/>
+              </a:rPr>
+              <a:t>37</a:t>
+            </a:r>
+            <a:endParaRPr lang="en-US" sz="900" dirty="0"/>
+          </a:p>
+        </p:txBody>
+      </p:sp>
+    </p:spTree>
+  </p:cSld>
+  <p:clrMapOvr>
+    <a:masterClrMapping/>
+  </p:clrMapOvr>
+</p:sld>
+</file>
+
+<file path=ppt/slides/slide41.xml><?xml version="1.0" encoding="utf-8"?>
+<p:sld xmlns:a="http://schemas.openxmlformats.org/drawingml/2006/main" xmlns:r="http://schemas.openxmlformats.org/officeDocument/2006/relationships" xmlns:p="http://schemas.openxmlformats.org/presentationml/2006/main">
+  <p:cSld name="Slide 41">
+    <p:bg>
+      <p:bgPr>
+        <a:solidFill>
+          <a:srgbClr val="0F2733"/>
+        </a:solidFill>
+      </p:bgPr>
+    </p:bg>
+    <p:spTree>
+      <p:nvGrpSpPr>
+        <p:cNvPr id="1" name=""/>
+        <p:cNvGrpSpPr/>
+        <p:nvPr/>
+      </p:nvGrpSpPr>
+      <p:grpSpPr>
+        <a:xfrm>
+          <a:off x="0" y="0"/>
+          <a:ext cx="0" cy="0"/>
+          <a:chOff x="0" y="0"/>
+          <a:chExt cx="0" cy="0"/>
+        </a:xfrm>
+      </p:grpSpPr>
+      <p:sp>
+        <p:nvSpPr>
+          <p:cNvPr id="2" name="Shape 0"/>
+          <p:cNvSpPr/>
+          <p:nvPr/>
+        </p:nvSpPr>
+        <p:spPr>
+          <a:xfrm>
+            <a:off x="0" y="5212080"/>
+            <a:ext cx="12188952" cy="1645920"/>
+          </a:xfrm>
+          <a:prstGeom prst="rect">
+            <a:avLst/>
+          </a:prstGeom>
+          <a:solidFill>
+            <a:srgbClr val="16323F"/>
+          </a:solidFill>
+          <a:ln/>
+        </p:spPr>
+      </p:sp>
+      <p:sp>
+        <p:nvSpPr>
+          <p:cNvPr id="3" name="Shape 1"/>
+          <p:cNvSpPr/>
+          <p:nvPr/>
+        </p:nvSpPr>
+        <p:spPr>
+          <a:xfrm>
+            <a:off x="777240" y="777240"/>
+            <a:ext cx="640080" cy="640080"/>
+          </a:xfrm>
+          <a:prstGeom prst="ellipse">
+            <a:avLst/>
+          </a:prstGeom>
+          <a:solidFill>
+            <a:srgbClr val="E0A94B"/>
+          </a:solidFill>
+          <a:ln/>
+        </p:spPr>
+      </p:sp>
+      <p:sp>
+        <p:nvSpPr>
+          <p:cNvPr id="4" name="Text 2"/>
+          <p:cNvSpPr/>
+          <p:nvPr/>
+        </p:nvSpPr>
+        <p:spPr>
+          <a:xfrm>
+            <a:off x="777240" y="777240"/>
+            <a:ext cx="640080" cy="640080"/>
+          </a:xfrm>
+          <a:prstGeom prst="rect">
+            <a:avLst/>
+          </a:prstGeom>
+          <a:noFill/>
+          <a:ln/>
+        </p:spPr>
+        <p:txBody>
+          <a:bodyPr wrap="square" lIns="0" tIns="0" rIns="0" bIns="0" rtlCol="0" anchor="ctr"/>
+          <a:lstStyle/>
+          <a:p>
+            <a:pPr algn="ctr" indent="0" marL="0">
+              <a:buNone/>
+            </a:pPr>
+            <a:r>
+              <a:rPr lang="en-US" sz="1820" b="1" dirty="0">
+                <a:solidFill>
+                  <a:srgbClr val="0F2733"/>
+                </a:solidFill>
+                <a:latin typeface="Cambria" pitchFamily="34" charset="0"/>
+                <a:ea typeface="Cambria" pitchFamily="34" charset="-122"/>
+                <a:cs typeface="Cambria" pitchFamily="34" charset="-120"/>
+              </a:rPr>
+              <a:t>{ }</a:t>
+            </a:r>
+            <a:endParaRPr lang="en-US" sz="1820" dirty="0"/>
+          </a:p>
+        </p:txBody>
+      </p:sp>
+      <p:sp>
+        <p:nvSpPr>
+          <p:cNvPr id="5" name="Text 3"/>
+          <p:cNvSpPr/>
+          <p:nvPr/>
+        </p:nvSpPr>
+        <p:spPr>
+          <a:xfrm>
+            <a:off x="777240" y="1737360"/>
+            <a:ext cx="10607040" cy="1097280"/>
+          </a:xfrm>
+          <a:prstGeom prst="rect">
+            <a:avLst/>
+          </a:prstGeom>
+          <a:noFill/>
+          <a:ln/>
+        </p:spPr>
+        <p:txBody>
+          <a:bodyPr wrap="square" lIns="0" tIns="0" rIns="0" bIns="0" rtlCol="0" anchor="ctr"/>
+          <a:lstStyle/>
+          <a:p>
+            <a:pPr indent="0" marL="0">
+              <a:buNone/>
+            </a:pPr>
+            <a:r>
+              <a:rPr lang="en-US" sz="5000" b="1" dirty="0">
+                <a:solidFill>
+                  <a:srgbClr val="FFFFFF"/>
+                </a:solidFill>
+                <a:latin typeface="Cambria" pitchFamily="34" charset="0"/>
+                <a:ea typeface="Cambria" pitchFamily="34" charset="-122"/>
+                <a:cs typeface="Cambria" pitchFamily="34" charset="-120"/>
+              </a:rPr>
+              <a:t>Thanks, WPYEG!</a:t>
+            </a:r>
+            <a:endParaRPr lang="en-US" sz="5000" dirty="0"/>
+          </a:p>
+        </p:txBody>
+      </p:sp>
+      <p:sp>
+        <p:nvSpPr>
+          <p:cNvPr id="6" name="Text 4"/>
+          <p:cNvSpPr/>
+          <p:nvPr/>
+        </p:nvSpPr>
+        <p:spPr>
+          <a:xfrm>
+            <a:off x="822960" y="2926080"/>
+            <a:ext cx="10058400" cy="822960"/>
+          </a:xfrm>
+          <a:prstGeom prst="rect">
+            <a:avLst/>
+          </a:prstGeom>
+          <a:noFill/>
+          <a:ln/>
+        </p:spPr>
+        <p:txBody>
+          <a:bodyPr wrap="square" lIns="0" tIns="0" rIns="0" bIns="0" rtlCol="0" anchor="t"/>
+          <a:lstStyle/>
+          <a:p>
+            <a:pPr indent="0" marL="0">
+              <a:buNone/>
+            </a:pPr>
+            <a:r>
+              <a:rPr lang="en-US" sz="1900" i="1" dirty="0">
+                <a:solidFill>
+                  <a:srgbClr val="D7E5EC"/>
+                </a:solidFill>
+                <a:latin typeface="Calibri" pitchFamily="34" charset="0"/>
+                <a:ea typeface="Calibri" pitchFamily="34" charset="-122"/>
+                <a:cs typeface="Calibri" pitchFamily="34" charset="-120"/>
+              </a:rPr>
+              <a:t>Set your defaults wisely.</a:t>
+            </a:r>
+            <a:endParaRPr lang="en-US" sz="1900" dirty="0"/>
+          </a:p>
+        </p:txBody>
+      </p:sp>
+      <p:sp>
+        <p:nvSpPr>
+          <p:cNvPr id="7" name="Text 5"/>
+          <p:cNvSpPr/>
+          <p:nvPr/>
+        </p:nvSpPr>
+        <p:spPr>
+          <a:xfrm>
+            <a:off x="822960" y="4023360"/>
+            <a:ext cx="10515600" cy="457200"/>
+          </a:xfrm>
+          <a:prstGeom prst="rect">
+            <a:avLst/>
+          </a:prstGeom>
+          <a:noFill/>
+          <a:ln/>
+        </p:spPr>
+        <p:txBody>
+          <a:bodyPr wrap="square" lIns="0" tIns="0" rIns="0" bIns="0" rtlCol="0" anchor="ctr"/>
+          <a:lstStyle/>
+          <a:p>
+            <a:pPr indent="0" marL="0">
+              <a:buNone/>
+            </a:pPr>
+            <a:r>
+              <a:rPr lang="en-US" sz="1400" b="1" dirty="0">
+                <a:solidFill>
+                  <a:srgbClr val="E0A94B"/>
+                </a:solidFill>
+                <a:latin typeface="Courier New" pitchFamily="34" charset="0"/>
+                <a:ea typeface="Courier New" pitchFamily="34" charset="-122"/>
+                <a:cs typeface="Courier New" pitchFamily="34" charset="-120"/>
+              </a:rPr>
+              <a:t>Files:  </a:t>
+            </a:r>
+            <a:pPr indent="0" marL="0">
+              <a:buNone/>
+            </a:pPr>
+            <a:r>
+              <a:rPr lang="en-US" sz="1400" dirty="0">
+                <a:solidFill>
+                  <a:srgbClr val="D7E5EC"/>
+                </a:solidFill>
+                <a:latin typeface="Courier New" pitchFamily="34" charset="0"/>
+                <a:ea typeface="Courier New" pitchFamily="34" charset="-122"/>
+                <a:cs typeface="Courier New" pitchFamily="34" charset="-120"/>
+              </a:rPr>
+              <a:t>sane-defaults.zip</a:t>
+            </a:r>
+            <a:pPr indent="0" marL="0">
+              <a:buNone/>
+            </a:pPr>
+            <a:r>
+              <a:rPr lang="en-US" sz="1400" dirty="0">
+                <a:solidFill>
+                  <a:srgbClr val="8A9AA3"/>
+                </a:solidFill>
+                <a:latin typeface="Courier New" pitchFamily="34" charset="0"/>
+                <a:ea typeface="Courier New" pitchFamily="34" charset="-122"/>
+                <a:cs typeface="Courier New" pitchFamily="34" charset="-120"/>
+              </a:rPr>
+              <a:t>   ·   </a:t>
+            </a:r>
+            <a:pPr indent="0" marL="0">
+              <a:buNone/>
+            </a:pPr>
+            <a:r>
+              <a:rPr lang="en-US" sz="1400" dirty="0">
+                <a:solidFill>
+                  <a:srgbClr val="D7E5EC"/>
+                </a:solidFill>
+                <a:latin typeface="Courier New" pitchFamily="34" charset="0"/>
+                <a:ea typeface="Courier New" pitchFamily="34" charset="-122"/>
+                <a:cs typeface="Courier New" pitchFamily="34" charset="-120"/>
+              </a:rPr>
+              <a:t>wordpress-default-settings.md</a:t>
+            </a:r>
+            <a:endParaRPr lang="en-US" sz="1400" dirty="0"/>
+          </a:p>
+        </p:txBody>
+      </p:sp>
+      <p:sp>
+        <p:nvSpPr>
+          <p:cNvPr id="8" name="Text 6"/>
+          <p:cNvSpPr/>
+          <p:nvPr/>
+        </p:nvSpPr>
+        <p:spPr>
+          <a:xfrm>
+            <a:off x="822960" y="5623560"/>
+            <a:ext cx="10515600" cy="548640"/>
+          </a:xfrm>
+          <a:prstGeom prst="rect">
+            <a:avLst/>
+          </a:prstGeom>
+          <a:noFill/>
+          <a:ln/>
+        </p:spPr>
+        <p:txBody>
+          <a:bodyPr wrap="square" lIns="0" tIns="0" rIns="0" bIns="0" rtlCol="0" anchor="ctr"/>
+          <a:lstStyle/>
+          <a:p>
+            <a:pPr indent="0" marL="0">
+              <a:buNone/>
+            </a:pPr>
+            <a:r>
+              <a:rPr lang="en-US" sz="1600" b="1" dirty="0">
+                <a:solidFill>
+                  <a:srgbClr val="FFFFFF"/>
+                </a:solidFill>
+                <a:latin typeface="Calibri" pitchFamily="34" charset="0"/>
+                <a:ea typeface="Calibri" pitchFamily="34" charset="-122"/>
+                <a:cs typeface="Calibri" pitchFamily="34" charset="-120"/>
+              </a:rPr>
+              <a:t>Questions?  </a:t>
+            </a:r>
+            <a:pPr indent="0" marL="0">
+              <a:buNone/>
+            </a:pPr>
+            <a:r>
+              <a:rPr lang="en-US" sz="1600" dirty="0">
+                <a:solidFill>
+                  <a:srgbClr val="D7E5EC"/>
+                </a:solidFill>
+                <a:latin typeface="Calibri" pitchFamily="34" charset="0"/>
+                <a:ea typeface="Calibri" pitchFamily="34" charset="-122"/>
+                <a:cs typeface="Calibri" pitchFamily="34" charset="-120"/>
+              </a:rPr>
+              <a:t>License GPL-3.0-or-later</a:t>
+            </a:r>
+            <a:endParaRPr lang="en-US" sz="1600" dirty="0"/>
           </a:p>
         </p:txBody>
       </p:sp>

--- a/workshop/Better-by-Default.pptx
+++ b/workshop/Better-by-Default.pptx
@@ -3307,8 +3307,9 @@
           <a:p>
             <a:r>
               <a:rPr lang="en-US" dirty="0"/>
-              <a:t>You do not need a plugin for this, and that is exactly why we are not shipping one. Run this against auth_cookie_expiration on a real site. If more than one line comes back, one of those plugins is not doing what its settings screen claims.
-The same snippet works on any hook, including hooks nobody has thought to write a checker for. That is the advantage of understanding the rule over installing a tool.</a:t>
+              <a:t>You do not need a plugin for this, and that is exactly why we are not shipping one. The same snippet works on any hook, including ones nobody has thought to write a checker for.
+Two things to say out loud, because the obvious reading of the output is wrong. First, an EMPTY result is the normal case on a clean install — this plugin does not register that filter at all while the lengths are still WordPress's own, which is the fix we made earlier in the deck. Guard for the hook being absent or the example errors on the very plugin it is demonstrating.
+Second, several entries means the hook is SHARED, not that somebody is losing. A callback can pass its input through, or act only under a condition that is not met today. The count tells you where to look; the callbacks tell you what is happening. Printing the callback id rather than print_r() keeps it one line each, which makes the count honest.</a:t>
             </a:r>
             <a:endParaRPr lang="en-US" dirty="0"/>
           </a:p>
@@ -3574,8 +3575,9 @@
           <a:p>
             <a:r>
               <a:rPr lang="en-US" dirty="0"/>
-              <a:t>If two plugins are competing to set the same defaults, the answer is not to make them cooperate. It is to run one of them.
-This is also the honest pitch for the plugin we just built. Not that it does more than the others — it does less. But you can read all of it in an afternoon and know exactly what it decided on your behalf.</a:t>
+              <a:t>Say the qualifier out loud, because the slide before this one contradicts the unqualified version. Two defaults plugins are only alternatives WHERE THEY CONTEST THE SAME REPLACING FILTER. Additive hooks compose — three plugins set security headers on that test install and all three landed. Two plugins with settings that do not overlap at all are simply two plugins. Telling somebody to deactivate one before you have confirmed a contested setting is advice that costs them something for nothing.
+Where there IS a contest, the answer is not to make them cooperate. It is to run one of them.
+And that is the honest pitch for the plugin we just built. Not that it does more than the others — it does less. But you can read all of it in an afternoon and know exactly what it decided on your behalf.</a:t>
             </a:r>
             <a:endParaRPr lang="en-US" dirty="0"/>
           </a:p>
@@ -30474,7 +30476,7 @@
                 <a:ea typeface="Courier New" pitchFamily="34" charset="-122"/>
                 <a:cs typeface="Courier New" pitchFamily="34" charset="-120"/>
               </a:rPr>
-              <a:t>global $wp_filter;</a:t>
+              <a:t>global $wp_filter; $hook = 'auth_cookie_expiration';</a:t>
             </a:r>
             <a:endParaRPr lang="en-US" sz="1250" dirty="0"/>
           </a:p>
@@ -30494,7 +30496,7 @@
                 <a:ea typeface="Courier New" pitchFamily="34" charset="-122"/>
                 <a:cs typeface="Courier New" pitchFamily="34" charset="-120"/>
               </a:rPr>
-              <a:t>foreach ( $wp_filter['auth_cookie_expiration']-&gt;callbacks as $prio =&gt; $cbs ) {</a:t>
+              <a:t>if ( empty( $wp_filter[ $hook ] ) ) { echo "nobody is filtering it\n"; return; }</a:t>
             </a:r>
             <a:endParaRPr lang="en-US" sz="1250" dirty="0"/>
           </a:p>
@@ -30514,7 +30516,7 @@
                 <a:ea typeface="Courier New" pitchFamily="34" charset="-122"/>
                 <a:cs typeface="Courier New" pitchFamily="34" charset="-120"/>
               </a:rPr>
-              <a:t>    foreach ( $cbs as $cb ) {</a:t>
+              <a:t>foreach ( $wp_filter[ $hook ]-&gt;callbacks as $prio =&gt; $cbs ) {</a:t>
             </a:r>
             <a:endParaRPr lang="en-US" sz="1250" dirty="0"/>
           </a:p>
@@ -30534,7 +30536,7 @@
                 <a:ea typeface="Courier New" pitchFamily="34" charset="-122"/>
                 <a:cs typeface="Courier New" pitchFamily="34" charset="-120"/>
               </a:rPr>
-              <a:t>        printf( "%-6s %s\n", $prio, print_r( $cb['function'], true ) );</a:t>
+              <a:t>    foreach ( $cbs as $id =&gt; $cb ) { printf( "%-6s %s\n", $prio, $id ); }</a:t>
             </a:r>
             <a:endParaRPr lang="en-US" sz="1250" dirty="0"/>
           </a:p>
@@ -30548,33 +30550,13 @@
             <a:r>
               <a:rPr lang="en-US" sz="1250" dirty="0">
                 <a:solidFill>
-                  <a:srgbClr val="DCEAF1"/>
+                  <a:srgbClr val="8FBF9F"/>
                 </a:solidFill>
                 <a:latin typeface="Courier New" pitchFamily="34" charset="0"/>
                 <a:ea typeface="Courier New" pitchFamily="34" charset="-122"/>
                 <a:cs typeface="Courier New" pitchFamily="34" charset="-120"/>
               </a:rPr>
-              <a:t>    }</a:t>
-            </a:r>
-            <a:endParaRPr lang="en-US" sz="1250" dirty="0"/>
-          </a:p>
-          <a:p>
-            <a:pPr algn="l" indent="0" marL="0">
-              <a:lnSpc>
-                <a:spcPct val="108000"/>
-              </a:lnSpc>
-              <a:buNone/>
-            </a:pPr>
-            <a:r>
-              <a:rPr lang="en-US" sz="1250" dirty="0">
-                <a:solidFill>
-                  <a:srgbClr val="8FBF9F"/>
-                </a:solidFill>
-                <a:latin typeface="Courier New" pitchFamily="34" charset="0"/>
-                <a:ea typeface="Courier New" pitchFamily="34" charset="-122"/>
-                <a:cs typeface="Courier New" pitchFamily="34" charset="-120"/>
-              </a:rPr>
-              <a:t>}   // more than one line on a replacing filter means somebody is losing</a:t>
+              <a:t>}   // each line is one callback; several means shared, not settled</a:t>
             </a:r>
             <a:endParaRPr lang="en-US" sz="1250" dirty="0"/>
           </a:p>
@@ -30613,7 +30595,7 @@
                 <a:ea typeface="Calibri" pitchFamily="34" charset="-122"/>
                 <a:cs typeface="Calibri" pitchFamily="34" charset="-120"/>
               </a:rPr>
-              <a:t>Try it on wp_headers too, for contrast — several entries there are perfectly healthy.</a:t>
+              <a:t>Several entries means they share the hook. Whether anyone is losing depends on what the callbacks do — go and read them.</a:t>
             </a:r>
             <a:endParaRPr lang="en-US" sz="1500" dirty="0"/>
           </a:p>
@@ -32077,7 +32059,7 @@
               <a:buNone/>
             </a:pPr>
             <a:r>
-              <a:rPr lang="en-US" sz="4000" b="1" dirty="0">
+              <a:rPr lang="en-US" sz="3800" b="1" dirty="0">
                 <a:solidFill>
                   <a:srgbClr val="FFFFFF"/>
                 </a:solidFill>
@@ -32085,9 +32067,9 @@
                 <a:ea typeface="Cambria" pitchFamily="34" charset="-122"/>
                 <a:cs typeface="Cambria" pitchFamily="34" charset="-120"/>
               </a:rPr>
-              <a:t>Defaults plugins are alternatives,</a:t>
-            </a:r>
-            <a:endParaRPr lang="en-US" sz="4000" dirty="0"/>
+              <a:t>Where they contest a setting,</a:t>
+            </a:r>
+            <a:endParaRPr lang="en-US" sz="3800" dirty="0"/>
           </a:p>
           <a:p>
             <a:pPr indent="0" marL="0">
@@ -32097,7 +32079,7 @@
               <a:buNone/>
             </a:pPr>
             <a:r>
-              <a:rPr lang="en-US" sz="4000" b="1" dirty="0">
+              <a:rPr lang="en-US" sz="3800" b="1" dirty="0">
                 <a:solidFill>
                   <a:srgbClr val="FFFFFF"/>
                 </a:solidFill>
@@ -32105,9 +32087,9 @@
                 <a:ea typeface="Cambria" pitchFamily="34" charset="-122"/>
                 <a:cs typeface="Cambria" pitchFamily="34" charset="-120"/>
               </a:rPr>
-              <a:t>not complements.</a:t>
-            </a:r>
-            <a:endParaRPr lang="en-US" sz="4000" dirty="0"/>
+              <a:t>defaults plugins are alternatives.</a:t>
+            </a:r>
+            <a:endParaRPr lang="en-US" sz="3800" dirty="0"/>
           </a:p>
         </p:txBody>
       </p:sp>
@@ -32119,8 +32101,8 @@
         </p:nvSpPr>
         <p:spPr>
           <a:xfrm>
-            <a:off x="731520" y="3566160"/>
-            <a:ext cx="10515600" cy="914400"/>
+            <a:off x="731520" y="3520440"/>
+            <a:ext cx="10515600" cy="1005840"/>
           </a:xfrm>
           <a:prstGeom prst="rect">
             <a:avLst/>
@@ -32144,7 +32126,7 @@
                 <a:ea typeface="Calibri" pitchFamily="34" charset="-122"/>
                 <a:cs typeface="Calibri" pitchFamily="34" charset="-120"/>
               </a:rPr>
-              <a:t>Two installed together give you one plugin's behaviour, and two settings screens — only one of which is telling the truth.</a:t>
+              <a:t>Two plugins replacing the same value give you one plugin's behaviour and two settings screens — only one of which is telling the truth.</a:t>
             </a:r>
             <a:endParaRPr lang="en-US" sz="1900" dirty="0"/>
           </a:p>
@@ -32158,7 +32140,7 @@
         </p:nvSpPr>
         <p:spPr>
           <a:xfrm>
-            <a:off x="731520" y="4572000"/>
+            <a:off x="731520" y="4617720"/>
             <a:ext cx="10515600" cy="731520"/>
           </a:xfrm>
           <a:prstGeom prst="rect">
@@ -32183,7 +32165,7 @@
                 <a:ea typeface="Calibri" pitchFamily="34" charset="-122"/>
                 <a:cs typeface="Calibri" pitchFamily="34" charset="-120"/>
               </a:rPr>
-              <a:t>Pick the one whose choices you agree with. Turn the other off.</a:t>
+              <a:t>Confirm the overlap first. Then pick the one whose choices you agree with.</a:t>
             </a:r>
             <a:endParaRPr lang="en-US" sz="1800" dirty="0"/>
           </a:p>

--- a/workshop/Better-by-Default.pptx
+++ b/workshop/Better-by-Default.pptx
@@ -46,9 +46,10 @@
     <p:sldId id="294" r:id="rId40"/>
     <p:sldId id="295" r:id="rId41"/>
     <p:sldId id="296" r:id="rId42"/>
+    <p:sldId id="297" r:id="rId43"/>
   </p:sldIdLst>
   <p:notesMasterIdLst>
-    <p:notesMasterId r:id="rId43"/>
+    <p:notesMasterId r:id="rId44"/>
   </p:notesMasterIdLst>
   <p:sldSz cx="12192000" cy="6858000"/>
   <p:notesSz cx="6858000" cy="12192000"/>
@@ -2953,7 +2954,7 @@
           <a:p>
             <a:r>
               <a:rPr lang="en-US" dirty="0"/>
-              <a:t>The three comment and pingback settings are separate because a site may keep comments while closing new-post pings and suppressing self-pingbacks. Title-only search and front-end admin-bar changes remain opt-in.</a:t>
+              <a:t>The three comment and pingback settings are separate because a site may keep comments while closing new-post pings and suppressing self-pingbacks. Author and attachment redirects remove thin public pages, while the editor policies remain opt-in where they can disrupt an established workflow.</a:t>
             </a:r>
             <a:endParaRPr lang="en-US" dirty="0"/>
           </a:p>
@@ -3041,7 +3042,7 @@
           <a:p>
             <a:r>
               <a:rPr lang="en-US" dirty="0"/>
-              <a:t>The visible names on earlier slides are schema keys, not separate WordPress options. A regular login lasts 2 days and a remembered one 14 - WordPress's own values, prefilled rather than sentinels, with a one-day floor on each and the remembered length clamped so it can never be shorter than the regular one. The login logo and Heartbeat remain opt-in, and the three configuration constants stay above the plugin layer.</a:t>
+              <a:t>Lowercasing applies only to new uploads, and the media panel only reports files WordPress already generated. Title-only search and front-end admin-bar changes remain opt-in because both alter familiar administration workflows.</a:t>
             </a:r>
             <a:endParaRPr lang="en-US" dirty="0"/>
           </a:p>
@@ -3129,8 +3130,7 @@
           <a:p>
             <a:r>
               <a:rPr lang="en-US" dirty="0"/>
-              <a:t>This is the part nobody warns you about. Install two defaults plugins and WordPress does not complain — it runs both and keeps whichever answered last. The loser's settings screen goes on showing a session length the site is not using.
-On the install where this was first measured, all three plugins happened to agree on the same value, so everything looked fine. THAT is the dangerous case. It stays invisible until somebody changes a setting and nothing happens.</a:t>
+              <a:t>The visible names on earlier slides are schema keys, not separate WordPress options. A regular login lasts 2 days and a remembered one 14 - WordPress's own values, prefilled rather than sentinels, with a one-day floor on each and the remembered length clamped so it can never be shorter than the regular one. The login logo and Heartbeat remain opt-in, and the three configuration constants stay above the plugin layer.</a:t>
             </a:r>
             <a:endParaRPr lang="en-US" dirty="0"/>
           </a:p>
@@ -3218,8 +3218,8 @@
           <a:p>
             <a:r>
               <a:rPr lang="en-US" dirty="0"/>
-              <a:t>Here is the whole rule, and it is worth more than any tool. When your code is handed something and ADDS to it, a second plugin doing the same thing is fine — three plugins set security headers on that test install and all three landed correctly. When your code is handed something and returns its OWN answer instead, only one plugin can win.
-So when you write a filter callback, ask: if a second plugin did exactly this, would both still work? If the answer is no, you are setting policy, and only one plugin on the site can hold it.</a:t>
+              <a:t>This is the part nobody warns you about. Install two defaults plugins and WordPress does not complain — it runs both and keeps whichever answered last. The loser's settings screen goes on showing a session length the site is not using.
+On the install where this was first measured, all three plugins happened to agree on the same value, so everything looked fine. THAT is the dangerous case. It stays invisible until somebody changes a setting and nothing happens.</a:t>
             </a:r>
             <a:endParaRPr lang="en-US" dirty="0"/>
           </a:p>
@@ -3307,9 +3307,8 @@
           <a:p>
             <a:r>
               <a:rPr lang="en-US" dirty="0"/>
-              <a:t>You do not need a plugin for this, and that is exactly why we are not shipping one. The same snippet works on any hook, including ones nobody has thought to write a checker for.
-Two things to say out loud, because the obvious reading of the output is wrong. First, an EMPTY result is the normal case on a clean install — this plugin does not register that filter at all while the lengths are still WordPress's own, which is the fix we made earlier in the deck. Guard for the hook being absent or the example errors on the very plugin it is demonstrating.
-Second, several entries means the hook is SHARED, not that somebody is losing. A callback can pass its input through, or act only under a condition that is not met today. The count tells you where to look; the callbacks tell you what is happening. Printing the callback id rather than print_r() keeps it one line each, which makes the count honest.</a:t>
+              <a:t>Here is the whole rule, and it is worth more than any tool. When your code is handed something and ADDS to it, a second plugin doing the same thing is fine — three plugins set security headers on that test install and all three landed correctly. When your code is handed something and returns its OWN answer instead, only one plugin can win.
+So when you write a filter callback, ask: if a second plugin did exactly this, would both still work? If the answer is no, you are setting policy, and only one plugin on the site can hold it.</a:t>
             </a:r>
             <a:endParaRPr lang="en-US" dirty="0"/>
           </a:p>
@@ -3397,9 +3396,9 @@
           <a:p>
             <a:r>
               <a:rPr lang="en-US" dirty="0"/>
-              <a:t>The first guessed from source code and accused plugins that were not touching the setting. The second measured the real outcome by actually running the filter — precise, and it meant executing arbitrary third-party code as a side effect of a diagnostic. A tool that reports collisions must not cause them.
-Underneath, both failed the same way: they were trying to recover something WordPress never wrote down. Nothing records which plugin asked for what, and everything built on top of that gap is a guess or a gamble.
-What ended up working was reporting only what could be proven, and saying plainly on the screen that a clean result means nothing traceable was found — not that nothing is wrong.</a:t>
+              <a:t>You do not need a plugin for this, and that is exactly why we are not shipping one. The same snippet works on any hook, including ones nobody has thought to write a checker for.
+Two things to say out loud, because the obvious reading of the output is wrong. First, an EMPTY result is the normal case on a clean install — this plugin does not register that filter at all while the lengths are still WordPress's own, which is the fix we made earlier in the deck. Guard for the hook being absent or the example errors on the very plugin it is demonstrating.
+Second, several entries means the hook is SHARED, not that somebody is losing. A callback can pass its input through, or act only under a condition that is not met today. The count tells you where to look; the callbacks tell you what is happening. Printing the callback id rather than print_r() keeps it one line each, which makes the count honest.</a:t>
             </a:r>
             <a:endParaRPr lang="en-US" dirty="0"/>
           </a:p>
@@ -3575,9 +3574,9 @@
           <a:p>
             <a:r>
               <a:rPr lang="en-US" dirty="0"/>
-              <a:t>Say the qualifier out loud, because the slide before this one contradicts the unqualified version. Two defaults plugins are only alternatives WHERE THEY CONTEST THE SAME REPLACING FILTER. Additive hooks compose — three plugins set security headers on that test install and all three landed. Two plugins with settings that do not overlap at all are simply two plugins. Telling somebody to deactivate one before you have confirmed a contested setting is advice that costs them something for nothing.
-Where there IS a contest, the answer is not to make them cooperate. It is to run one of them.
-And that is the honest pitch for the plugin we just built. Not that it does more than the others — it does less. But you can read all of it in an afternoon and know exactly what it decided on your behalf.</a:t>
+              <a:t>The first guessed from source code and accused plugins that were not touching the setting. The second measured the outcome by actually running the filter — precise, and it meant executing arbitrary third-party code as a diagnostic side effect. A tool that reports collisions must not cause them.
+The third stopped trying to recover attribution WordPress never recorded. It observes a filter when WordPress already runs it, compares the value at the observer's turn with the configured value, and records a divergence without naming anyone. No synthetic arguments and no extra callback executions.
+Say the limit out loud: PHP_INT_MAX is the latest priority, not a guarantee of being the last callback. WordPress preserves registration order within a priority, so a callback added there later can still change the result. A divergence the observer sees is evidence; a clean observation is not proof that nothing later diverged.</a:t>
             </a:r>
             <a:endParaRPr lang="en-US" dirty="0"/>
           </a:p>
@@ -3665,7 +3664,9 @@
           <a:p>
             <a:r>
               <a:rPr lang="en-US" dirty="0"/>
-              <a:t>Hand out the zip and the reference doc. Invite everyone to add their own favourite default to the schema and share it back with the group.</a:t>
+              <a:t>Say the qualifier out loud, because the slide before this one contradicts the unqualified version. Two defaults plugins are only alternatives WHERE THEY CONTEST THE SAME REPLACING FILTER. Additive hooks compose — three plugins set security headers on that test install and all three landed. Two plugins with settings that do not overlap at all are simply two plugins. Telling somebody to deactivate one before you have confirmed a contested setting is advice that costs them something for nothing.
+Where there IS a contest, the answer is not to make them cooperate. It is to run one of them.
+And that is the honest pitch for the plugin we just built. Not that it does more than the others — it does less. But you can read all of it in an afternoon and know exactly what it decided on your behalf.</a:t>
             </a:r>
             <a:endParaRPr lang="en-US" dirty="0"/>
           </a:p>
@@ -3689,6 +3690,94 @@
             <a:fld id="{F7021451-1387-4CA6-816F-3879F97B5CBC}" type="slidenum">
               <a:rPr lang="en-US"/>
               <a:t>41</a:t>
+            </a:fld>
+            <a:endParaRPr lang="en-US"/>
+          </a:p>
+        </p:txBody>
+      </p:sp>
+    </p:spTree>
+    <p:extLst>
+      <p:ext uri="{BB962C8B-B14F-4D97-AF65-F5344CB8AC3E}">
+        <p14:creationId xmlns:p14="http://schemas.microsoft.com/office/powerpoint/2010/main" val="1024086991"/>
+      </p:ext>
+    </p:extLst>
+  </p:cSld>
+  <p:clrMapOvr>
+    <a:masterClrMapping/>
+  </p:clrMapOvr>
+</p:notes>
+</file>
+
+<file path=ppt/notesSlides/notesSlide42.xml><?xml version="1.0" encoding="utf-8"?>
+<p:notes xmlns:a="http://schemas.openxmlformats.org/drawingml/2006/main" xmlns:r="http://schemas.openxmlformats.org/officeDocument/2006/relationships" xmlns:p="http://schemas.openxmlformats.org/presentationml/2006/main">
+  <p:cSld>
+    <p:spTree>
+      <p:nvGrpSpPr>
+        <p:cNvPr id="1" name=""/>
+        <p:cNvGrpSpPr/>
+        <p:nvPr/>
+      </p:nvGrpSpPr>
+      <p:grpSpPr>
+        <a:xfrm>
+          <a:off x="0" y="0"/>
+          <a:ext cx="0" cy="0"/>
+          <a:chOff x="0" y="0"/>
+          <a:chExt cx="0" cy="0"/>
+        </a:xfrm>
+      </p:grpSpPr>
+      <p:sp>
+        <p:nvSpPr>
+          <p:cNvPr id="2" name="Slide Image Placeholder 1"/>
+          <p:cNvSpPr>
+            <a:spLocks noGrp="1" noRot="1" noChangeAspect="1"/>
+          </p:cNvSpPr>
+          <p:nvPr>
+            <p:ph type="sldImg"/>
+          </p:nvPr>
+        </p:nvSpPr>
+        <p:spPr/>
+      </p:sp>
+      <p:sp>
+        <p:nvSpPr>
+          <p:cNvPr id="3" name="Notes Placeholder 2"/>
+          <p:cNvSpPr>
+            <a:spLocks noGrp="1"/>
+          </p:cNvSpPr>
+          <p:nvPr>
+            <p:ph type="body" idx="1"/>
+          </p:nvPr>
+        </p:nvSpPr>
+        <p:spPr/>
+        <p:txBody>
+          <a:bodyPr/>
+          <a:lstStyle/>
+          <a:p>
+            <a:r>
+              <a:rPr lang="en-US" dirty="0"/>
+              <a:t>Hand out the zip and the reference doc. Invite everyone to add their own favourite default to the schema and share it back with the group.</a:t>
+            </a:r>
+            <a:endParaRPr lang="en-US" dirty="0"/>
+          </a:p>
+        </p:txBody>
+      </p:sp>
+      <p:sp>
+        <p:nvSpPr>
+          <p:cNvPr id="4" name="Slide Number Placeholder 3"/>
+          <p:cNvSpPr>
+            <a:spLocks noGrp="1"/>
+          </p:cNvSpPr>
+          <p:nvPr>
+            <p:ph type="sldNum" sz="quarter" idx="10"/>
+          </p:nvPr>
+        </p:nvSpPr>
+        <p:spPr/>
+        <p:txBody>
+          <a:bodyPr/>
+          <a:lstStyle/>
+          <a:p>
+            <a:fld id="{F7021451-1387-4CA6-816F-3879F97B5CBC}" type="slidenum">
+              <a:rPr lang="en-US"/>
+              <a:t>42</a:t>
             </a:fld>
             <a:endParaRPr lang="en-US"/>
           </a:p>
@@ -23651,7 +23740,7 @@
                 <a:ea typeface="Cambria" pitchFamily="34" charset="-122"/>
                 <a:cs typeface="Cambria" pitchFamily="34" charset="-120"/>
               </a:rPr>
-              <a:t>Schema map — content and everyday UX</a:t>
+              <a:t>Schema map — content policies</a:t>
             </a:r>
             <a:endParaRPr lang="en-US" sz="3000" dirty="0"/>
           </a:p>
@@ -25783,830 +25872,6 @@
                   </a:tcPr>
                 </a:tc>
               </a:tr>
-              <a:tr h="402336">
-                <a:tc>
-                  <a:txBody>
-                    <a:bodyPr/>
-                    <a:lstStyle/>
-                    <a:p>
-                      <a:pPr algn="l" indent="0" marL="0">
-                        <a:buNone/>
-                      </a:pPr>
-                      <a:r>
-                        <a:rPr lang="en-US" sz="1250" dirty="0">
-                          <a:solidFill>
-                            <a:srgbClr val="0F2733"/>
-                          </a:solidFill>
-                          <a:latin typeface="Calibri" pitchFamily="34" charset="0"/>
-                          <a:ea typeface="Calibri" pitchFamily="34" charset="-122"/>
-                          <a:cs typeface="Calibri" pitchFamily="34" charset="-120"/>
-                        </a:rPr>
-                        <a:t>lowercase_upload_filenames</a:t>
-                      </a:r>
-                      <a:endParaRPr lang="en-US" sz="1250" dirty="0">
-                        <a:latin typeface="Calibri" charset="0"/>
-                        <a:ea typeface="Calibri" charset="0"/>
-                        <a:cs typeface="Calibri" charset="0"/>
-                      </a:endParaRPr>
-                    </a:p>
-                  </a:txBody>
-                  <a:tcPr marL="50800" marR="50800" marT="50800" marB="50800" anchor="ctr">
-                    <a:lnL w="12700" cap="flat" cmpd="sng" algn="ctr">
-                      <a:solidFill>
-                        <a:srgbClr val="DCE6EB"/>
-                      </a:solidFill>
-                      <a:prstDash val="solid"/>
-                      <a:round/>
-                      <a:headEnd type="none" w="med" len="med"/>
-                      <a:tailEnd type="none" w="med" len="med"/>
-                    </a:lnL>
-                    <a:lnR w="12700" cap="flat" cmpd="sng" algn="ctr">
-                      <a:solidFill>
-                        <a:srgbClr val="DCE6EB"/>
-                      </a:solidFill>
-                      <a:prstDash val="solid"/>
-                      <a:round/>
-                      <a:headEnd type="none" w="med" len="med"/>
-                      <a:tailEnd type="none" w="med" len="med"/>
-                    </a:lnR>
-                    <a:lnT w="12700" cap="flat" cmpd="sng" algn="ctr">
-                      <a:solidFill>
-                        <a:srgbClr val="DCE6EB"/>
-                      </a:solidFill>
-                      <a:prstDash val="solid"/>
-                      <a:round/>
-                      <a:headEnd type="none" w="med" len="med"/>
-                      <a:tailEnd type="none" w="med" len="med"/>
-                    </a:lnT>
-                    <a:lnB w="12700" cap="flat" cmpd="sng" algn="ctr">
-                      <a:solidFill>
-                        <a:srgbClr val="DCE6EB"/>
-                      </a:solidFill>
-                      <a:prstDash val="solid"/>
-                      <a:round/>
-                      <a:headEnd type="none" w="med" len="med"/>
-                      <a:tailEnd type="none" w="med" len="med"/>
-                    </a:lnB>
-                    <a:solidFill>
-                      <a:srgbClr val="EAF1F5"/>
-                    </a:solidFill>
-                  </a:tcPr>
-                </a:tc>
-                <a:tc>
-                  <a:txBody>
-                    <a:bodyPr/>
-                    <a:lstStyle/>
-                    <a:p>
-                      <a:pPr algn="l" indent="0" marL="0">
-                        <a:buNone/>
-                      </a:pPr>
-                      <a:r>
-                        <a:rPr lang="en-US" sz="1100" dirty="0">
-                          <a:solidFill>
-                            <a:srgbClr val="27607A"/>
-                          </a:solidFill>
-                          <a:latin typeface="Courier New" pitchFamily="34" charset="0"/>
-                          <a:ea typeface="Courier New" pitchFamily="34" charset="-122"/>
-                          <a:cs typeface="Courier New" pitchFamily="34" charset="-120"/>
-                        </a:rPr>
-                        <a:t>yes</a:t>
-                      </a:r>
-                      <a:endParaRPr lang="en-US" sz="1100" dirty="0">
-                        <a:latin typeface="Courier New" charset="0"/>
-                        <a:ea typeface="Courier New" charset="0"/>
-                        <a:cs typeface="Courier New" charset="0"/>
-                      </a:endParaRPr>
-                    </a:p>
-                  </a:txBody>
-                  <a:tcPr marL="50800" marR="50800" marT="50800" marB="50800" anchor="ctr">
-                    <a:lnL w="12700" cap="flat" cmpd="sng" algn="ctr">
-                      <a:solidFill>
-                        <a:srgbClr val="DCE6EB"/>
-                      </a:solidFill>
-                      <a:prstDash val="solid"/>
-                      <a:round/>
-                      <a:headEnd type="none" w="med" len="med"/>
-                      <a:tailEnd type="none" w="med" len="med"/>
-                    </a:lnL>
-                    <a:lnR w="12700" cap="flat" cmpd="sng" algn="ctr">
-                      <a:solidFill>
-                        <a:srgbClr val="DCE6EB"/>
-                      </a:solidFill>
-                      <a:prstDash val="solid"/>
-                      <a:round/>
-                      <a:headEnd type="none" w="med" len="med"/>
-                      <a:tailEnd type="none" w="med" len="med"/>
-                    </a:lnR>
-                    <a:lnT w="12700" cap="flat" cmpd="sng" algn="ctr">
-                      <a:solidFill>
-                        <a:srgbClr val="DCE6EB"/>
-                      </a:solidFill>
-                      <a:prstDash val="solid"/>
-                      <a:round/>
-                      <a:headEnd type="none" w="med" len="med"/>
-                      <a:tailEnd type="none" w="med" len="med"/>
-                    </a:lnT>
-                    <a:lnB w="12700" cap="flat" cmpd="sng" algn="ctr">
-                      <a:solidFill>
-                        <a:srgbClr val="DCE6EB"/>
-                      </a:solidFill>
-                      <a:prstDash val="solid"/>
-                      <a:round/>
-                      <a:headEnd type="none" w="med" len="med"/>
-                      <a:tailEnd type="none" w="med" len="med"/>
-                    </a:lnB>
-                    <a:solidFill>
-                      <a:srgbClr val="EAF1F5"/>
-                    </a:solidFill>
-                  </a:tcPr>
-                </a:tc>
-                <a:tc>
-                  <a:txBody>
-                    <a:bodyPr/>
-                    <a:lstStyle/>
-                    <a:p>
-                      <a:pPr algn="l" indent="0" marL="0">
-                        <a:buNone/>
-                      </a:pPr>
-                      <a:r>
-                        <a:rPr lang="en-US" sz="1200" dirty="0">
-                          <a:solidFill>
-                            <a:srgbClr val="4A5A63"/>
-                          </a:solidFill>
-                          <a:latin typeface="Calibri" pitchFamily="34" charset="0"/>
-                          <a:ea typeface="Calibri" pitchFamily="34" charset="-122"/>
-                          <a:cs typeface="Calibri" pitchFamily="34" charset="-120"/>
-                        </a:rPr>
-                        <a:t>sanitize_file_name at priority 20</a:t>
-                      </a:r>
-                      <a:endParaRPr lang="en-US" sz="1200" dirty="0">
-                        <a:latin typeface="Calibri" charset="0"/>
-                        <a:ea typeface="Calibri" charset="0"/>
-                        <a:cs typeface="Calibri" charset="0"/>
-                      </a:endParaRPr>
-                    </a:p>
-                  </a:txBody>
-                  <a:tcPr marL="50800" marR="50800" marT="50800" marB="50800" anchor="ctr">
-                    <a:lnL w="12700" cap="flat" cmpd="sng" algn="ctr">
-                      <a:solidFill>
-                        <a:srgbClr val="DCE6EB"/>
-                      </a:solidFill>
-                      <a:prstDash val="solid"/>
-                      <a:round/>
-                      <a:headEnd type="none" w="med" len="med"/>
-                      <a:tailEnd type="none" w="med" len="med"/>
-                    </a:lnL>
-                    <a:lnR w="12700" cap="flat" cmpd="sng" algn="ctr">
-                      <a:solidFill>
-                        <a:srgbClr val="DCE6EB"/>
-                      </a:solidFill>
-                      <a:prstDash val="solid"/>
-                      <a:round/>
-                      <a:headEnd type="none" w="med" len="med"/>
-                      <a:tailEnd type="none" w="med" len="med"/>
-                    </a:lnR>
-                    <a:lnT w="12700" cap="flat" cmpd="sng" algn="ctr">
-                      <a:solidFill>
-                        <a:srgbClr val="DCE6EB"/>
-                      </a:solidFill>
-                      <a:prstDash val="solid"/>
-                      <a:round/>
-                      <a:headEnd type="none" w="med" len="med"/>
-                      <a:tailEnd type="none" w="med" len="med"/>
-                    </a:lnT>
-                    <a:lnB w="12700" cap="flat" cmpd="sng" algn="ctr">
-                      <a:solidFill>
-                        <a:srgbClr val="DCE6EB"/>
-                      </a:solidFill>
-                      <a:prstDash val="solid"/>
-                      <a:round/>
-                      <a:headEnd type="none" w="med" len="med"/>
-                      <a:tailEnd type="none" w="med" len="med"/>
-                    </a:lnB>
-                    <a:solidFill>
-                      <a:srgbClr val="EAF1F5"/>
-                    </a:solidFill>
-                  </a:tcPr>
-                </a:tc>
-              </a:tr>
-              <a:tr h="402336">
-                <a:tc>
-                  <a:txBody>
-                    <a:bodyPr/>
-                    <a:lstStyle/>
-                    <a:p>
-                      <a:pPr algn="l" indent="0" marL="0">
-                        <a:buNone/>
-                      </a:pPr>
-                      <a:r>
-                        <a:rPr lang="en-US" sz="1250" dirty="0">
-                          <a:solidFill>
-                            <a:srgbClr val="0F2733"/>
-                          </a:solidFill>
-                          <a:latin typeface="Calibri" pitchFamily="34" charset="0"/>
-                          <a:ea typeface="Calibri" pitchFamily="34" charset="-122"/>
-                          <a:cs typeface="Calibri" pitchFamily="34" charset="-120"/>
-                        </a:rPr>
-                        <a:t>media_sizes_panel</a:t>
-                      </a:r>
-                      <a:endParaRPr lang="en-US" sz="1250" dirty="0">
-                        <a:latin typeface="Calibri" charset="0"/>
-                        <a:ea typeface="Calibri" charset="0"/>
-                        <a:cs typeface="Calibri" charset="0"/>
-                      </a:endParaRPr>
-                    </a:p>
-                  </a:txBody>
-                  <a:tcPr marL="50800" marR="50800" marT="50800" marB="50800" anchor="ctr">
-                    <a:lnL w="12700" cap="flat" cmpd="sng" algn="ctr">
-                      <a:solidFill>
-                        <a:srgbClr val="DCE6EB"/>
-                      </a:solidFill>
-                      <a:prstDash val="solid"/>
-                      <a:round/>
-                      <a:headEnd type="none" w="med" len="med"/>
-                      <a:tailEnd type="none" w="med" len="med"/>
-                    </a:lnL>
-                    <a:lnR w="12700" cap="flat" cmpd="sng" algn="ctr">
-                      <a:solidFill>
-                        <a:srgbClr val="DCE6EB"/>
-                      </a:solidFill>
-                      <a:prstDash val="solid"/>
-                      <a:round/>
-                      <a:headEnd type="none" w="med" len="med"/>
-                      <a:tailEnd type="none" w="med" len="med"/>
-                    </a:lnR>
-                    <a:lnT w="12700" cap="flat" cmpd="sng" algn="ctr">
-                      <a:solidFill>
-                        <a:srgbClr val="DCE6EB"/>
-                      </a:solidFill>
-                      <a:prstDash val="solid"/>
-                      <a:round/>
-                      <a:headEnd type="none" w="med" len="med"/>
-                      <a:tailEnd type="none" w="med" len="med"/>
-                    </a:lnT>
-                    <a:lnB w="12700" cap="flat" cmpd="sng" algn="ctr">
-                      <a:solidFill>
-                        <a:srgbClr val="DCE6EB"/>
-                      </a:solidFill>
-                      <a:prstDash val="solid"/>
-                      <a:round/>
-                      <a:headEnd type="none" w="med" len="med"/>
-                      <a:tailEnd type="none" w="med" len="med"/>
-                    </a:lnB>
-                    <a:solidFill>
-                      <a:srgbClr val="FFFFFF"/>
-                    </a:solidFill>
-                  </a:tcPr>
-                </a:tc>
-                <a:tc>
-                  <a:txBody>
-                    <a:bodyPr/>
-                    <a:lstStyle/>
-                    <a:p>
-                      <a:pPr algn="l" indent="0" marL="0">
-                        <a:buNone/>
-                      </a:pPr>
-                      <a:r>
-                        <a:rPr lang="en-US" sz="1100" dirty="0">
-                          <a:solidFill>
-                            <a:srgbClr val="27607A"/>
-                          </a:solidFill>
-                          <a:latin typeface="Courier New" pitchFamily="34" charset="0"/>
-                          <a:ea typeface="Courier New" pitchFamily="34" charset="-122"/>
-                          <a:cs typeface="Courier New" pitchFamily="34" charset="-120"/>
-                        </a:rPr>
-                        <a:t>yes</a:t>
-                      </a:r>
-                      <a:endParaRPr lang="en-US" sz="1100" dirty="0">
-                        <a:latin typeface="Courier New" charset="0"/>
-                        <a:ea typeface="Courier New" charset="0"/>
-                        <a:cs typeface="Courier New" charset="0"/>
-                      </a:endParaRPr>
-                    </a:p>
-                  </a:txBody>
-                  <a:tcPr marL="50800" marR="50800" marT="50800" marB="50800" anchor="ctr">
-                    <a:lnL w="12700" cap="flat" cmpd="sng" algn="ctr">
-                      <a:solidFill>
-                        <a:srgbClr val="DCE6EB"/>
-                      </a:solidFill>
-                      <a:prstDash val="solid"/>
-                      <a:round/>
-                      <a:headEnd type="none" w="med" len="med"/>
-                      <a:tailEnd type="none" w="med" len="med"/>
-                    </a:lnL>
-                    <a:lnR w="12700" cap="flat" cmpd="sng" algn="ctr">
-                      <a:solidFill>
-                        <a:srgbClr val="DCE6EB"/>
-                      </a:solidFill>
-                      <a:prstDash val="solid"/>
-                      <a:round/>
-                      <a:headEnd type="none" w="med" len="med"/>
-                      <a:tailEnd type="none" w="med" len="med"/>
-                    </a:lnR>
-                    <a:lnT w="12700" cap="flat" cmpd="sng" algn="ctr">
-                      <a:solidFill>
-                        <a:srgbClr val="DCE6EB"/>
-                      </a:solidFill>
-                      <a:prstDash val="solid"/>
-                      <a:round/>
-                      <a:headEnd type="none" w="med" len="med"/>
-                      <a:tailEnd type="none" w="med" len="med"/>
-                    </a:lnT>
-                    <a:lnB w="12700" cap="flat" cmpd="sng" algn="ctr">
-                      <a:solidFill>
-                        <a:srgbClr val="DCE6EB"/>
-                      </a:solidFill>
-                      <a:prstDash val="solid"/>
-                      <a:round/>
-                      <a:headEnd type="none" w="med" len="med"/>
-                      <a:tailEnd type="none" w="med" len="med"/>
-                    </a:lnB>
-                    <a:solidFill>
-                      <a:srgbClr val="FFFFFF"/>
-                    </a:solidFill>
-                  </a:tcPr>
-                </a:tc>
-                <a:tc>
-                  <a:txBody>
-                    <a:bodyPr/>
-                    <a:lstStyle/>
-                    <a:p>
-                      <a:pPr algn="l" indent="0" marL="0">
-                        <a:buNone/>
-                      </a:pPr>
-                      <a:r>
-                        <a:rPr lang="en-US" sz="1200" dirty="0">
-                          <a:solidFill>
-                            <a:srgbClr val="4A5A63"/>
-                          </a:solidFill>
-                          <a:latin typeface="Calibri" pitchFamily="34" charset="0"/>
-                          <a:ea typeface="Calibri" pitchFamily="34" charset="-122"/>
-                          <a:cs typeface="Calibri" pitchFamily="34" charset="-120"/>
-                        </a:rPr>
-                        <a:t>read-only meta box on attachments</a:t>
-                      </a:r>
-                      <a:endParaRPr lang="en-US" sz="1200" dirty="0">
-                        <a:latin typeface="Calibri" charset="0"/>
-                        <a:ea typeface="Calibri" charset="0"/>
-                        <a:cs typeface="Calibri" charset="0"/>
-                      </a:endParaRPr>
-                    </a:p>
-                  </a:txBody>
-                  <a:tcPr marL="50800" marR="50800" marT="50800" marB="50800" anchor="ctr">
-                    <a:lnL w="12700" cap="flat" cmpd="sng" algn="ctr">
-                      <a:solidFill>
-                        <a:srgbClr val="DCE6EB"/>
-                      </a:solidFill>
-                      <a:prstDash val="solid"/>
-                      <a:round/>
-                      <a:headEnd type="none" w="med" len="med"/>
-                      <a:tailEnd type="none" w="med" len="med"/>
-                    </a:lnL>
-                    <a:lnR w="12700" cap="flat" cmpd="sng" algn="ctr">
-                      <a:solidFill>
-                        <a:srgbClr val="DCE6EB"/>
-                      </a:solidFill>
-                      <a:prstDash val="solid"/>
-                      <a:round/>
-                      <a:headEnd type="none" w="med" len="med"/>
-                      <a:tailEnd type="none" w="med" len="med"/>
-                    </a:lnR>
-                    <a:lnT w="12700" cap="flat" cmpd="sng" algn="ctr">
-                      <a:solidFill>
-                        <a:srgbClr val="DCE6EB"/>
-                      </a:solidFill>
-                      <a:prstDash val="solid"/>
-                      <a:round/>
-                      <a:headEnd type="none" w="med" len="med"/>
-                      <a:tailEnd type="none" w="med" len="med"/>
-                    </a:lnT>
-                    <a:lnB w="12700" cap="flat" cmpd="sng" algn="ctr">
-                      <a:solidFill>
-                        <a:srgbClr val="DCE6EB"/>
-                      </a:solidFill>
-                      <a:prstDash val="solid"/>
-                      <a:round/>
-                      <a:headEnd type="none" w="med" len="med"/>
-                      <a:tailEnd type="none" w="med" len="med"/>
-                    </a:lnB>
-                    <a:solidFill>
-                      <a:srgbClr val="FFFFFF"/>
-                    </a:solidFill>
-                  </a:tcPr>
-                </a:tc>
-              </a:tr>
-              <a:tr h="402336">
-                <a:tc>
-                  <a:txBody>
-                    <a:bodyPr/>
-                    <a:lstStyle/>
-                    <a:p>
-                      <a:pPr algn="l" indent="0" marL="0">
-                        <a:buNone/>
-                      </a:pPr>
-                      <a:r>
-                        <a:rPr lang="en-US" sz="1250" dirty="0">
-                          <a:solidFill>
-                            <a:srgbClr val="0F2733"/>
-                          </a:solidFill>
-                          <a:latin typeface="Calibri" pitchFamily="34" charset="0"/>
-                          <a:ea typeface="Calibri" pitchFamily="34" charset="-122"/>
-                          <a:cs typeface="Calibri" pitchFamily="34" charset="-120"/>
-                        </a:rPr>
-                        <a:t>title_only_admin_search</a:t>
-                      </a:r>
-                      <a:endParaRPr lang="en-US" sz="1250" dirty="0">
-                        <a:latin typeface="Calibri" charset="0"/>
-                        <a:ea typeface="Calibri" charset="0"/>
-                        <a:cs typeface="Calibri" charset="0"/>
-                      </a:endParaRPr>
-                    </a:p>
-                  </a:txBody>
-                  <a:tcPr marL="50800" marR="50800" marT="50800" marB="50800" anchor="ctr">
-                    <a:lnL w="12700" cap="flat" cmpd="sng" algn="ctr">
-                      <a:solidFill>
-                        <a:srgbClr val="DCE6EB"/>
-                      </a:solidFill>
-                      <a:prstDash val="solid"/>
-                      <a:round/>
-                      <a:headEnd type="none" w="med" len="med"/>
-                      <a:tailEnd type="none" w="med" len="med"/>
-                    </a:lnL>
-                    <a:lnR w="12700" cap="flat" cmpd="sng" algn="ctr">
-                      <a:solidFill>
-                        <a:srgbClr val="DCE6EB"/>
-                      </a:solidFill>
-                      <a:prstDash val="solid"/>
-                      <a:round/>
-                      <a:headEnd type="none" w="med" len="med"/>
-                      <a:tailEnd type="none" w="med" len="med"/>
-                    </a:lnR>
-                    <a:lnT w="12700" cap="flat" cmpd="sng" algn="ctr">
-                      <a:solidFill>
-                        <a:srgbClr val="DCE6EB"/>
-                      </a:solidFill>
-                      <a:prstDash val="solid"/>
-                      <a:round/>
-                      <a:headEnd type="none" w="med" len="med"/>
-                      <a:tailEnd type="none" w="med" len="med"/>
-                    </a:lnT>
-                    <a:lnB w="12700" cap="flat" cmpd="sng" algn="ctr">
-                      <a:solidFill>
-                        <a:srgbClr val="DCE6EB"/>
-                      </a:solidFill>
-                      <a:prstDash val="solid"/>
-                      <a:round/>
-                      <a:headEnd type="none" w="med" len="med"/>
-                      <a:tailEnd type="none" w="med" len="med"/>
-                    </a:lnB>
-                    <a:solidFill>
-                      <a:srgbClr val="EAF1F5"/>
-                    </a:solidFill>
-                  </a:tcPr>
-                </a:tc>
-                <a:tc>
-                  <a:txBody>
-                    <a:bodyPr/>
-                    <a:lstStyle/>
-                    <a:p>
-                      <a:pPr algn="l" indent="0" marL="0">
-                        <a:buNone/>
-                      </a:pPr>
-                      <a:r>
-                        <a:rPr lang="en-US" sz="1100" dirty="0">
-                          <a:solidFill>
-                            <a:srgbClr val="27607A"/>
-                          </a:solidFill>
-                          <a:latin typeface="Courier New" pitchFamily="34" charset="0"/>
-                          <a:ea typeface="Courier New" pitchFamily="34" charset="-122"/>
-                          <a:cs typeface="Courier New" pitchFamily="34" charset="-120"/>
-                        </a:rPr>
-                        <a:t>no</a:t>
-                      </a:r>
-                      <a:endParaRPr lang="en-US" sz="1100" dirty="0">
-                        <a:latin typeface="Courier New" charset="0"/>
-                        <a:ea typeface="Courier New" charset="0"/>
-                        <a:cs typeface="Courier New" charset="0"/>
-                      </a:endParaRPr>
-                    </a:p>
-                  </a:txBody>
-                  <a:tcPr marL="50800" marR="50800" marT="50800" marB="50800" anchor="ctr">
-                    <a:lnL w="12700" cap="flat" cmpd="sng" algn="ctr">
-                      <a:solidFill>
-                        <a:srgbClr val="DCE6EB"/>
-                      </a:solidFill>
-                      <a:prstDash val="solid"/>
-                      <a:round/>
-                      <a:headEnd type="none" w="med" len="med"/>
-                      <a:tailEnd type="none" w="med" len="med"/>
-                    </a:lnL>
-                    <a:lnR w="12700" cap="flat" cmpd="sng" algn="ctr">
-                      <a:solidFill>
-                        <a:srgbClr val="DCE6EB"/>
-                      </a:solidFill>
-                      <a:prstDash val="solid"/>
-                      <a:round/>
-                      <a:headEnd type="none" w="med" len="med"/>
-                      <a:tailEnd type="none" w="med" len="med"/>
-                    </a:lnR>
-                    <a:lnT w="12700" cap="flat" cmpd="sng" algn="ctr">
-                      <a:solidFill>
-                        <a:srgbClr val="DCE6EB"/>
-                      </a:solidFill>
-                      <a:prstDash val="solid"/>
-                      <a:round/>
-                      <a:headEnd type="none" w="med" len="med"/>
-                      <a:tailEnd type="none" w="med" len="med"/>
-                    </a:lnT>
-                    <a:lnB w="12700" cap="flat" cmpd="sng" algn="ctr">
-                      <a:solidFill>
-                        <a:srgbClr val="DCE6EB"/>
-                      </a:solidFill>
-                      <a:prstDash val="solid"/>
-                      <a:round/>
-                      <a:headEnd type="none" w="med" len="med"/>
-                      <a:tailEnd type="none" w="med" len="med"/>
-                    </a:lnB>
-                    <a:solidFill>
-                      <a:srgbClr val="EAF1F5"/>
-                    </a:solidFill>
-                  </a:tcPr>
-                </a:tc>
-                <a:tc>
-                  <a:txBody>
-                    <a:bodyPr/>
-                    <a:lstStyle/>
-                    <a:p>
-                      <a:pPr algn="l" indent="0" marL="0">
-                        <a:buNone/>
-                      </a:pPr>
-                      <a:r>
-                        <a:rPr lang="en-US" sz="1200" dirty="0">
-                          <a:solidFill>
-                            <a:srgbClr val="4A5A63"/>
-                          </a:solidFill>
-                          <a:latin typeface="Calibri" pitchFamily="34" charset="0"/>
-                          <a:ea typeface="Calibri" pitchFamily="34" charset="-122"/>
-                          <a:cs typeface="Calibri" pitchFamily="34" charset="-120"/>
-                        </a:rPr>
-                        <a:t>post_search_columns</a:t>
-                      </a:r>
-                      <a:endParaRPr lang="en-US" sz="1200" dirty="0">
-                        <a:latin typeface="Calibri" charset="0"/>
-                        <a:ea typeface="Calibri" charset="0"/>
-                        <a:cs typeface="Calibri" charset="0"/>
-                      </a:endParaRPr>
-                    </a:p>
-                  </a:txBody>
-                  <a:tcPr marL="50800" marR="50800" marT="50800" marB="50800" anchor="ctr">
-                    <a:lnL w="12700" cap="flat" cmpd="sng" algn="ctr">
-                      <a:solidFill>
-                        <a:srgbClr val="DCE6EB"/>
-                      </a:solidFill>
-                      <a:prstDash val="solid"/>
-                      <a:round/>
-                      <a:headEnd type="none" w="med" len="med"/>
-                      <a:tailEnd type="none" w="med" len="med"/>
-                    </a:lnL>
-                    <a:lnR w="12700" cap="flat" cmpd="sng" algn="ctr">
-                      <a:solidFill>
-                        <a:srgbClr val="DCE6EB"/>
-                      </a:solidFill>
-                      <a:prstDash val="solid"/>
-                      <a:round/>
-                      <a:headEnd type="none" w="med" len="med"/>
-                      <a:tailEnd type="none" w="med" len="med"/>
-                    </a:lnR>
-                    <a:lnT w="12700" cap="flat" cmpd="sng" algn="ctr">
-                      <a:solidFill>
-                        <a:srgbClr val="DCE6EB"/>
-                      </a:solidFill>
-                      <a:prstDash val="solid"/>
-                      <a:round/>
-                      <a:headEnd type="none" w="med" len="med"/>
-                      <a:tailEnd type="none" w="med" len="med"/>
-                    </a:lnT>
-                    <a:lnB w="12700" cap="flat" cmpd="sng" algn="ctr">
-                      <a:solidFill>
-                        <a:srgbClr val="DCE6EB"/>
-                      </a:solidFill>
-                      <a:prstDash val="solid"/>
-                      <a:round/>
-                      <a:headEnd type="none" w="med" len="med"/>
-                      <a:tailEnd type="none" w="med" len="med"/>
-                    </a:lnB>
-                    <a:solidFill>
-                      <a:srgbClr val="EAF1F5"/>
-                    </a:solidFill>
-                  </a:tcPr>
-                </a:tc>
-              </a:tr>
-              <a:tr h="402336">
-                <a:tc>
-                  <a:txBody>
-                    <a:bodyPr/>
-                    <a:lstStyle/>
-                    <a:p>
-                      <a:pPr algn="l" indent="0" marL="0">
-                        <a:buNone/>
-                      </a:pPr>
-                      <a:r>
-                        <a:rPr lang="en-US" sz="1250" dirty="0">
-                          <a:solidFill>
-                            <a:srgbClr val="0F2733"/>
-                          </a:solidFill>
-                          <a:latin typeface="Calibri" pitchFamily="34" charset="0"/>
-                          <a:ea typeface="Calibri" pitchFamily="34" charset="-122"/>
-                          <a:cs typeface="Calibri" pitchFamily="34" charset="-120"/>
-                        </a:rPr>
-                        <a:t>frontend_admin_bar_behavior</a:t>
-                      </a:r>
-                      <a:endParaRPr lang="en-US" sz="1250" dirty="0">
-                        <a:latin typeface="Calibri" charset="0"/>
-                        <a:ea typeface="Calibri" charset="0"/>
-                        <a:cs typeface="Calibri" charset="0"/>
-                      </a:endParaRPr>
-                    </a:p>
-                  </a:txBody>
-                  <a:tcPr marL="50800" marR="50800" marT="50800" marB="50800" anchor="ctr">
-                    <a:lnL w="12700" cap="flat" cmpd="sng" algn="ctr">
-                      <a:solidFill>
-                        <a:srgbClr val="DCE6EB"/>
-                      </a:solidFill>
-                      <a:prstDash val="solid"/>
-                      <a:round/>
-                      <a:headEnd type="none" w="med" len="med"/>
-                      <a:tailEnd type="none" w="med" len="med"/>
-                    </a:lnL>
-                    <a:lnR w="12700" cap="flat" cmpd="sng" algn="ctr">
-                      <a:solidFill>
-                        <a:srgbClr val="DCE6EB"/>
-                      </a:solidFill>
-                      <a:prstDash val="solid"/>
-                      <a:round/>
-                      <a:headEnd type="none" w="med" len="med"/>
-                      <a:tailEnd type="none" w="med" len="med"/>
-                    </a:lnR>
-                    <a:lnT w="12700" cap="flat" cmpd="sng" algn="ctr">
-                      <a:solidFill>
-                        <a:srgbClr val="DCE6EB"/>
-                      </a:solidFill>
-                      <a:prstDash val="solid"/>
-                      <a:round/>
-                      <a:headEnd type="none" w="med" len="med"/>
-                      <a:tailEnd type="none" w="med" len="med"/>
-                    </a:lnT>
-                    <a:lnB w="12700" cap="flat" cmpd="sng" algn="ctr">
-                      <a:solidFill>
-                        <a:srgbClr val="DCE6EB"/>
-                      </a:solidFill>
-                      <a:prstDash val="solid"/>
-                      <a:round/>
-                      <a:headEnd type="none" w="med" len="med"/>
-                      <a:tailEnd type="none" w="med" len="med"/>
-                    </a:lnB>
-                    <a:solidFill>
-                      <a:srgbClr val="FFFFFF"/>
-                    </a:solidFill>
-                  </a:tcPr>
-                </a:tc>
-                <a:tc>
-                  <a:txBody>
-                    <a:bodyPr/>
-                    <a:lstStyle/>
-                    <a:p>
-                      <a:pPr algn="l" indent="0" marL="0">
-                        <a:buNone/>
-                      </a:pPr>
-                      <a:r>
-                        <a:rPr lang="en-US" sz="1100" dirty="0">
-                          <a:solidFill>
-                            <a:srgbClr val="27607A"/>
-                          </a:solidFill>
-                          <a:latin typeface="Courier New" pitchFamily="34" charset="0"/>
-                          <a:ea typeface="Courier New" pitchFamily="34" charset="-122"/>
-                          <a:cs typeface="Courier New" pitchFamily="34" charset="-120"/>
-                        </a:rPr>
-                        <a:t>''</a:t>
-                      </a:r>
-                      <a:endParaRPr lang="en-US" sz="1100" dirty="0">
-                        <a:latin typeface="Courier New" charset="0"/>
-                        <a:ea typeface="Courier New" charset="0"/>
-                        <a:cs typeface="Courier New" charset="0"/>
-                      </a:endParaRPr>
-                    </a:p>
-                  </a:txBody>
-                  <a:tcPr marL="50800" marR="50800" marT="50800" marB="50800" anchor="ctr">
-                    <a:lnL w="12700" cap="flat" cmpd="sng" algn="ctr">
-                      <a:solidFill>
-                        <a:srgbClr val="DCE6EB"/>
-                      </a:solidFill>
-                      <a:prstDash val="solid"/>
-                      <a:round/>
-                      <a:headEnd type="none" w="med" len="med"/>
-                      <a:tailEnd type="none" w="med" len="med"/>
-                    </a:lnL>
-                    <a:lnR w="12700" cap="flat" cmpd="sng" algn="ctr">
-                      <a:solidFill>
-                        <a:srgbClr val="DCE6EB"/>
-                      </a:solidFill>
-                      <a:prstDash val="solid"/>
-                      <a:round/>
-                      <a:headEnd type="none" w="med" len="med"/>
-                      <a:tailEnd type="none" w="med" len="med"/>
-                    </a:lnR>
-                    <a:lnT w="12700" cap="flat" cmpd="sng" algn="ctr">
-                      <a:solidFill>
-                        <a:srgbClr val="DCE6EB"/>
-                      </a:solidFill>
-                      <a:prstDash val="solid"/>
-                      <a:round/>
-                      <a:headEnd type="none" w="med" len="med"/>
-                      <a:tailEnd type="none" w="med" len="med"/>
-                    </a:lnT>
-                    <a:lnB w="12700" cap="flat" cmpd="sng" algn="ctr">
-                      <a:solidFill>
-                        <a:srgbClr val="DCE6EB"/>
-                      </a:solidFill>
-                      <a:prstDash val="solid"/>
-                      <a:round/>
-                      <a:headEnd type="none" w="med" len="med"/>
-                      <a:tailEnd type="none" w="med" len="med"/>
-                    </a:lnB>
-                    <a:solidFill>
-                      <a:srgbClr val="FFFFFF"/>
-                    </a:solidFill>
-                  </a:tcPr>
-                </a:tc>
-                <a:tc>
-                  <a:txBody>
-                    <a:bodyPr/>
-                    <a:lstStyle/>
-                    <a:p>
-                      <a:pPr algn="l" indent="0" marL="0">
-                        <a:buNone/>
-                      </a:pPr>
-                      <a:r>
-                        <a:rPr lang="en-US" sz="1200" dirty="0">
-                          <a:solidFill>
-                            <a:srgbClr val="4A5A63"/>
-                          </a:solidFill>
-                          <a:latin typeface="Calibri" pitchFamily="34" charset="0"/>
-                          <a:ea typeface="Calibri" pitchFamily="34" charset="-122"/>
-                          <a:cs typeface="Calibri" pitchFamily="34" charset="-120"/>
-                        </a:rPr>
-                        <a:t>show_admin_bar</a:t>
-                      </a:r>
-                      <a:endParaRPr lang="en-US" sz="1200" dirty="0">
-                        <a:latin typeface="Calibri" charset="0"/>
-                        <a:ea typeface="Calibri" charset="0"/>
-                        <a:cs typeface="Calibri" charset="0"/>
-                      </a:endParaRPr>
-                    </a:p>
-                  </a:txBody>
-                  <a:tcPr marL="50800" marR="50800" marT="50800" marB="50800" anchor="ctr">
-                    <a:lnL w="12700" cap="flat" cmpd="sng" algn="ctr">
-                      <a:solidFill>
-                        <a:srgbClr val="DCE6EB"/>
-                      </a:solidFill>
-                      <a:prstDash val="solid"/>
-                      <a:round/>
-                      <a:headEnd type="none" w="med" len="med"/>
-                      <a:tailEnd type="none" w="med" len="med"/>
-                    </a:lnL>
-                    <a:lnR w="12700" cap="flat" cmpd="sng" algn="ctr">
-                      <a:solidFill>
-                        <a:srgbClr val="DCE6EB"/>
-                      </a:solidFill>
-                      <a:prstDash val="solid"/>
-                      <a:round/>
-                      <a:headEnd type="none" w="med" len="med"/>
-                      <a:tailEnd type="none" w="med" len="med"/>
-                    </a:lnR>
-                    <a:lnT w="12700" cap="flat" cmpd="sng" algn="ctr">
-                      <a:solidFill>
-                        <a:srgbClr val="DCE6EB"/>
-                      </a:solidFill>
-                      <a:prstDash val="solid"/>
-                      <a:round/>
-                      <a:headEnd type="none" w="med" len="med"/>
-                      <a:tailEnd type="none" w="med" len="med"/>
-                    </a:lnT>
-                    <a:lnB w="12700" cap="flat" cmpd="sng" algn="ctr">
-                      <a:solidFill>
-                        <a:srgbClr val="DCE6EB"/>
-                      </a:solidFill>
-                      <a:prstDash val="solid"/>
-                      <a:round/>
-                      <a:headEnd type="none" w="med" len="med"/>
-                      <a:tailEnd type="none" w="med" len="med"/>
-                    </a:lnB>
-                    <a:solidFill>
-                      <a:srgbClr val="FFFFFF"/>
-                    </a:solidFill>
-                  </a:tcPr>
-                </a:tc>
-              </a:tr>
             </a:tbl>
           </a:graphicData>
         </a:graphic>
@@ -26768,7 +26033,7 @@
                 <a:ea typeface="Cambria" pitchFamily="34" charset="-122"/>
                 <a:cs typeface="Cambria" pitchFamily="34" charset="-120"/>
               </a:rPr>
-              <a:t>Schema map — login, branding, and performance</a:t>
+              <a:t>Schema map — everyday UX and media</a:t>
             </a:r>
             <a:endParaRPr lang="en-US" sz="3000" dirty="0"/>
           </a:p>
@@ -26807,7 +26072,7 @@
                 <a:ea typeface="Calibri" pitchFamily="34" charset="-122"/>
                 <a:cs typeface="Calibri" pitchFamily="34" charset="-120"/>
               </a:rPr>
-              <a:t>Schema keys live in one option array; constants remain above plugins.</a:t>
+              <a:t>Small workflow defaults stay independent from content policy.</a:t>
             </a:r>
             <a:endParaRPr lang="en-US" sz="1400" dirty="0"/>
           </a:p>
@@ -27064,6 +26329,1269 @@
                           <a:ea typeface="Calibri" pitchFamily="34" charset="-122"/>
                           <a:cs typeface="Calibri" pitchFamily="34" charset="-120"/>
                         </a:rPr>
+                        <a:t>lowercase_upload_filenames</a:t>
+                      </a:r>
+                      <a:endParaRPr lang="en-US" sz="1250" dirty="0">
+                        <a:latin typeface="Calibri" charset="0"/>
+                        <a:ea typeface="Calibri" charset="0"/>
+                        <a:cs typeface="Calibri" charset="0"/>
+                      </a:endParaRPr>
+                    </a:p>
+                  </a:txBody>
+                  <a:tcPr marL="50800" marR="50800" marT="50800" marB="50800" anchor="ctr">
+                    <a:lnL w="12700" cap="flat" cmpd="sng" algn="ctr">
+                      <a:solidFill>
+                        <a:srgbClr val="DCE6EB"/>
+                      </a:solidFill>
+                      <a:prstDash val="solid"/>
+                      <a:round/>
+                      <a:headEnd type="none" w="med" len="med"/>
+                      <a:tailEnd type="none" w="med" len="med"/>
+                    </a:lnL>
+                    <a:lnR w="12700" cap="flat" cmpd="sng" algn="ctr">
+                      <a:solidFill>
+                        <a:srgbClr val="DCE6EB"/>
+                      </a:solidFill>
+                      <a:prstDash val="solid"/>
+                      <a:round/>
+                      <a:headEnd type="none" w="med" len="med"/>
+                      <a:tailEnd type="none" w="med" len="med"/>
+                    </a:lnR>
+                    <a:lnT w="12700" cap="flat" cmpd="sng" algn="ctr">
+                      <a:solidFill>
+                        <a:srgbClr val="DCE6EB"/>
+                      </a:solidFill>
+                      <a:prstDash val="solid"/>
+                      <a:round/>
+                      <a:headEnd type="none" w="med" len="med"/>
+                      <a:tailEnd type="none" w="med" len="med"/>
+                    </a:lnT>
+                    <a:lnB w="12700" cap="flat" cmpd="sng" algn="ctr">
+                      <a:solidFill>
+                        <a:srgbClr val="DCE6EB"/>
+                      </a:solidFill>
+                      <a:prstDash val="solid"/>
+                      <a:round/>
+                      <a:headEnd type="none" w="med" len="med"/>
+                      <a:tailEnd type="none" w="med" len="med"/>
+                    </a:lnB>
+                    <a:solidFill>
+                      <a:srgbClr val="FFFFFF"/>
+                    </a:solidFill>
+                  </a:tcPr>
+                </a:tc>
+                <a:tc>
+                  <a:txBody>
+                    <a:bodyPr/>
+                    <a:lstStyle/>
+                    <a:p>
+                      <a:pPr algn="l" indent="0" marL="0">
+                        <a:buNone/>
+                      </a:pPr>
+                      <a:r>
+                        <a:rPr lang="en-US" sz="1100" dirty="0">
+                          <a:solidFill>
+                            <a:srgbClr val="27607A"/>
+                          </a:solidFill>
+                          <a:latin typeface="Courier New" pitchFamily="34" charset="0"/>
+                          <a:ea typeface="Courier New" pitchFamily="34" charset="-122"/>
+                          <a:cs typeface="Courier New" pitchFamily="34" charset="-120"/>
+                        </a:rPr>
+                        <a:t>yes</a:t>
+                      </a:r>
+                      <a:endParaRPr lang="en-US" sz="1100" dirty="0">
+                        <a:latin typeface="Courier New" charset="0"/>
+                        <a:ea typeface="Courier New" charset="0"/>
+                        <a:cs typeface="Courier New" charset="0"/>
+                      </a:endParaRPr>
+                    </a:p>
+                  </a:txBody>
+                  <a:tcPr marL="50800" marR="50800" marT="50800" marB="50800" anchor="ctr">
+                    <a:lnL w="12700" cap="flat" cmpd="sng" algn="ctr">
+                      <a:solidFill>
+                        <a:srgbClr val="DCE6EB"/>
+                      </a:solidFill>
+                      <a:prstDash val="solid"/>
+                      <a:round/>
+                      <a:headEnd type="none" w="med" len="med"/>
+                      <a:tailEnd type="none" w="med" len="med"/>
+                    </a:lnL>
+                    <a:lnR w="12700" cap="flat" cmpd="sng" algn="ctr">
+                      <a:solidFill>
+                        <a:srgbClr val="DCE6EB"/>
+                      </a:solidFill>
+                      <a:prstDash val="solid"/>
+                      <a:round/>
+                      <a:headEnd type="none" w="med" len="med"/>
+                      <a:tailEnd type="none" w="med" len="med"/>
+                    </a:lnR>
+                    <a:lnT w="12700" cap="flat" cmpd="sng" algn="ctr">
+                      <a:solidFill>
+                        <a:srgbClr val="DCE6EB"/>
+                      </a:solidFill>
+                      <a:prstDash val="solid"/>
+                      <a:round/>
+                      <a:headEnd type="none" w="med" len="med"/>
+                      <a:tailEnd type="none" w="med" len="med"/>
+                    </a:lnT>
+                    <a:lnB w="12700" cap="flat" cmpd="sng" algn="ctr">
+                      <a:solidFill>
+                        <a:srgbClr val="DCE6EB"/>
+                      </a:solidFill>
+                      <a:prstDash val="solid"/>
+                      <a:round/>
+                      <a:headEnd type="none" w="med" len="med"/>
+                      <a:tailEnd type="none" w="med" len="med"/>
+                    </a:lnB>
+                    <a:solidFill>
+                      <a:srgbClr val="FFFFFF"/>
+                    </a:solidFill>
+                  </a:tcPr>
+                </a:tc>
+                <a:tc>
+                  <a:txBody>
+                    <a:bodyPr/>
+                    <a:lstStyle/>
+                    <a:p>
+                      <a:pPr algn="l" indent="0" marL="0">
+                        <a:buNone/>
+                      </a:pPr>
+                      <a:r>
+                        <a:rPr lang="en-US" sz="1200" dirty="0">
+                          <a:solidFill>
+                            <a:srgbClr val="4A5A63"/>
+                          </a:solidFill>
+                          <a:latin typeface="Calibri" pitchFamily="34" charset="0"/>
+                          <a:ea typeface="Calibri" pitchFamily="34" charset="-122"/>
+                          <a:cs typeface="Calibri" pitchFamily="34" charset="-120"/>
+                        </a:rPr>
+                        <a:t>sanitize_file_name at priority 20</a:t>
+                      </a:r>
+                      <a:endParaRPr lang="en-US" sz="1200" dirty="0">
+                        <a:latin typeface="Calibri" charset="0"/>
+                        <a:ea typeface="Calibri" charset="0"/>
+                        <a:cs typeface="Calibri" charset="0"/>
+                      </a:endParaRPr>
+                    </a:p>
+                  </a:txBody>
+                  <a:tcPr marL="50800" marR="50800" marT="50800" marB="50800" anchor="ctr">
+                    <a:lnL w="12700" cap="flat" cmpd="sng" algn="ctr">
+                      <a:solidFill>
+                        <a:srgbClr val="DCE6EB"/>
+                      </a:solidFill>
+                      <a:prstDash val="solid"/>
+                      <a:round/>
+                      <a:headEnd type="none" w="med" len="med"/>
+                      <a:tailEnd type="none" w="med" len="med"/>
+                    </a:lnL>
+                    <a:lnR w="12700" cap="flat" cmpd="sng" algn="ctr">
+                      <a:solidFill>
+                        <a:srgbClr val="DCE6EB"/>
+                      </a:solidFill>
+                      <a:prstDash val="solid"/>
+                      <a:round/>
+                      <a:headEnd type="none" w="med" len="med"/>
+                      <a:tailEnd type="none" w="med" len="med"/>
+                    </a:lnR>
+                    <a:lnT w="12700" cap="flat" cmpd="sng" algn="ctr">
+                      <a:solidFill>
+                        <a:srgbClr val="DCE6EB"/>
+                      </a:solidFill>
+                      <a:prstDash val="solid"/>
+                      <a:round/>
+                      <a:headEnd type="none" w="med" len="med"/>
+                      <a:tailEnd type="none" w="med" len="med"/>
+                    </a:lnT>
+                    <a:lnB w="12700" cap="flat" cmpd="sng" algn="ctr">
+                      <a:solidFill>
+                        <a:srgbClr val="DCE6EB"/>
+                      </a:solidFill>
+                      <a:prstDash val="solid"/>
+                      <a:round/>
+                      <a:headEnd type="none" w="med" len="med"/>
+                      <a:tailEnd type="none" w="med" len="med"/>
+                    </a:lnB>
+                    <a:solidFill>
+                      <a:srgbClr val="FFFFFF"/>
+                    </a:solidFill>
+                  </a:tcPr>
+                </a:tc>
+              </a:tr>
+              <a:tr h="402336">
+                <a:tc>
+                  <a:txBody>
+                    <a:bodyPr/>
+                    <a:lstStyle/>
+                    <a:p>
+                      <a:pPr algn="l" indent="0" marL="0">
+                        <a:buNone/>
+                      </a:pPr>
+                      <a:r>
+                        <a:rPr lang="en-US" sz="1250" dirty="0">
+                          <a:solidFill>
+                            <a:srgbClr val="0F2733"/>
+                          </a:solidFill>
+                          <a:latin typeface="Calibri" pitchFamily="34" charset="0"/>
+                          <a:ea typeface="Calibri" pitchFamily="34" charset="-122"/>
+                          <a:cs typeface="Calibri" pitchFamily="34" charset="-120"/>
+                        </a:rPr>
+                        <a:t>media_sizes_panel</a:t>
+                      </a:r>
+                      <a:endParaRPr lang="en-US" sz="1250" dirty="0">
+                        <a:latin typeface="Calibri" charset="0"/>
+                        <a:ea typeface="Calibri" charset="0"/>
+                        <a:cs typeface="Calibri" charset="0"/>
+                      </a:endParaRPr>
+                    </a:p>
+                  </a:txBody>
+                  <a:tcPr marL="50800" marR="50800" marT="50800" marB="50800" anchor="ctr">
+                    <a:lnL w="12700" cap="flat" cmpd="sng" algn="ctr">
+                      <a:solidFill>
+                        <a:srgbClr val="DCE6EB"/>
+                      </a:solidFill>
+                      <a:prstDash val="solid"/>
+                      <a:round/>
+                      <a:headEnd type="none" w="med" len="med"/>
+                      <a:tailEnd type="none" w="med" len="med"/>
+                    </a:lnL>
+                    <a:lnR w="12700" cap="flat" cmpd="sng" algn="ctr">
+                      <a:solidFill>
+                        <a:srgbClr val="DCE6EB"/>
+                      </a:solidFill>
+                      <a:prstDash val="solid"/>
+                      <a:round/>
+                      <a:headEnd type="none" w="med" len="med"/>
+                      <a:tailEnd type="none" w="med" len="med"/>
+                    </a:lnR>
+                    <a:lnT w="12700" cap="flat" cmpd="sng" algn="ctr">
+                      <a:solidFill>
+                        <a:srgbClr val="DCE6EB"/>
+                      </a:solidFill>
+                      <a:prstDash val="solid"/>
+                      <a:round/>
+                      <a:headEnd type="none" w="med" len="med"/>
+                      <a:tailEnd type="none" w="med" len="med"/>
+                    </a:lnT>
+                    <a:lnB w="12700" cap="flat" cmpd="sng" algn="ctr">
+                      <a:solidFill>
+                        <a:srgbClr val="DCE6EB"/>
+                      </a:solidFill>
+                      <a:prstDash val="solid"/>
+                      <a:round/>
+                      <a:headEnd type="none" w="med" len="med"/>
+                      <a:tailEnd type="none" w="med" len="med"/>
+                    </a:lnB>
+                    <a:solidFill>
+                      <a:srgbClr val="EAF1F5"/>
+                    </a:solidFill>
+                  </a:tcPr>
+                </a:tc>
+                <a:tc>
+                  <a:txBody>
+                    <a:bodyPr/>
+                    <a:lstStyle/>
+                    <a:p>
+                      <a:pPr algn="l" indent="0" marL="0">
+                        <a:buNone/>
+                      </a:pPr>
+                      <a:r>
+                        <a:rPr lang="en-US" sz="1100" dirty="0">
+                          <a:solidFill>
+                            <a:srgbClr val="27607A"/>
+                          </a:solidFill>
+                          <a:latin typeface="Courier New" pitchFamily="34" charset="0"/>
+                          <a:ea typeface="Courier New" pitchFamily="34" charset="-122"/>
+                          <a:cs typeface="Courier New" pitchFamily="34" charset="-120"/>
+                        </a:rPr>
+                        <a:t>yes</a:t>
+                      </a:r>
+                      <a:endParaRPr lang="en-US" sz="1100" dirty="0">
+                        <a:latin typeface="Courier New" charset="0"/>
+                        <a:ea typeface="Courier New" charset="0"/>
+                        <a:cs typeface="Courier New" charset="0"/>
+                      </a:endParaRPr>
+                    </a:p>
+                  </a:txBody>
+                  <a:tcPr marL="50800" marR="50800" marT="50800" marB="50800" anchor="ctr">
+                    <a:lnL w="12700" cap="flat" cmpd="sng" algn="ctr">
+                      <a:solidFill>
+                        <a:srgbClr val="DCE6EB"/>
+                      </a:solidFill>
+                      <a:prstDash val="solid"/>
+                      <a:round/>
+                      <a:headEnd type="none" w="med" len="med"/>
+                      <a:tailEnd type="none" w="med" len="med"/>
+                    </a:lnL>
+                    <a:lnR w="12700" cap="flat" cmpd="sng" algn="ctr">
+                      <a:solidFill>
+                        <a:srgbClr val="DCE6EB"/>
+                      </a:solidFill>
+                      <a:prstDash val="solid"/>
+                      <a:round/>
+                      <a:headEnd type="none" w="med" len="med"/>
+                      <a:tailEnd type="none" w="med" len="med"/>
+                    </a:lnR>
+                    <a:lnT w="12700" cap="flat" cmpd="sng" algn="ctr">
+                      <a:solidFill>
+                        <a:srgbClr val="DCE6EB"/>
+                      </a:solidFill>
+                      <a:prstDash val="solid"/>
+                      <a:round/>
+                      <a:headEnd type="none" w="med" len="med"/>
+                      <a:tailEnd type="none" w="med" len="med"/>
+                    </a:lnT>
+                    <a:lnB w="12700" cap="flat" cmpd="sng" algn="ctr">
+                      <a:solidFill>
+                        <a:srgbClr val="DCE6EB"/>
+                      </a:solidFill>
+                      <a:prstDash val="solid"/>
+                      <a:round/>
+                      <a:headEnd type="none" w="med" len="med"/>
+                      <a:tailEnd type="none" w="med" len="med"/>
+                    </a:lnB>
+                    <a:solidFill>
+                      <a:srgbClr val="EAF1F5"/>
+                    </a:solidFill>
+                  </a:tcPr>
+                </a:tc>
+                <a:tc>
+                  <a:txBody>
+                    <a:bodyPr/>
+                    <a:lstStyle/>
+                    <a:p>
+                      <a:pPr algn="l" indent="0" marL="0">
+                        <a:buNone/>
+                      </a:pPr>
+                      <a:r>
+                        <a:rPr lang="en-US" sz="1200" dirty="0">
+                          <a:solidFill>
+                            <a:srgbClr val="4A5A63"/>
+                          </a:solidFill>
+                          <a:latin typeface="Calibri" pitchFamily="34" charset="0"/>
+                          <a:ea typeface="Calibri" pitchFamily="34" charset="-122"/>
+                          <a:cs typeface="Calibri" pitchFamily="34" charset="-120"/>
+                        </a:rPr>
+                        <a:t>read-only meta box on attachments</a:t>
+                      </a:r>
+                      <a:endParaRPr lang="en-US" sz="1200" dirty="0">
+                        <a:latin typeface="Calibri" charset="0"/>
+                        <a:ea typeface="Calibri" charset="0"/>
+                        <a:cs typeface="Calibri" charset="0"/>
+                      </a:endParaRPr>
+                    </a:p>
+                  </a:txBody>
+                  <a:tcPr marL="50800" marR="50800" marT="50800" marB="50800" anchor="ctr">
+                    <a:lnL w="12700" cap="flat" cmpd="sng" algn="ctr">
+                      <a:solidFill>
+                        <a:srgbClr val="DCE6EB"/>
+                      </a:solidFill>
+                      <a:prstDash val="solid"/>
+                      <a:round/>
+                      <a:headEnd type="none" w="med" len="med"/>
+                      <a:tailEnd type="none" w="med" len="med"/>
+                    </a:lnL>
+                    <a:lnR w="12700" cap="flat" cmpd="sng" algn="ctr">
+                      <a:solidFill>
+                        <a:srgbClr val="DCE6EB"/>
+                      </a:solidFill>
+                      <a:prstDash val="solid"/>
+                      <a:round/>
+                      <a:headEnd type="none" w="med" len="med"/>
+                      <a:tailEnd type="none" w="med" len="med"/>
+                    </a:lnR>
+                    <a:lnT w="12700" cap="flat" cmpd="sng" algn="ctr">
+                      <a:solidFill>
+                        <a:srgbClr val="DCE6EB"/>
+                      </a:solidFill>
+                      <a:prstDash val="solid"/>
+                      <a:round/>
+                      <a:headEnd type="none" w="med" len="med"/>
+                      <a:tailEnd type="none" w="med" len="med"/>
+                    </a:lnT>
+                    <a:lnB w="12700" cap="flat" cmpd="sng" algn="ctr">
+                      <a:solidFill>
+                        <a:srgbClr val="DCE6EB"/>
+                      </a:solidFill>
+                      <a:prstDash val="solid"/>
+                      <a:round/>
+                      <a:headEnd type="none" w="med" len="med"/>
+                      <a:tailEnd type="none" w="med" len="med"/>
+                    </a:lnB>
+                    <a:solidFill>
+                      <a:srgbClr val="EAF1F5"/>
+                    </a:solidFill>
+                  </a:tcPr>
+                </a:tc>
+              </a:tr>
+              <a:tr h="402336">
+                <a:tc>
+                  <a:txBody>
+                    <a:bodyPr/>
+                    <a:lstStyle/>
+                    <a:p>
+                      <a:pPr algn="l" indent="0" marL="0">
+                        <a:buNone/>
+                      </a:pPr>
+                      <a:r>
+                        <a:rPr lang="en-US" sz="1250" dirty="0">
+                          <a:solidFill>
+                            <a:srgbClr val="0F2733"/>
+                          </a:solidFill>
+                          <a:latin typeface="Calibri" pitchFamily="34" charset="0"/>
+                          <a:ea typeface="Calibri" pitchFamily="34" charset="-122"/>
+                          <a:cs typeface="Calibri" pitchFamily="34" charset="-120"/>
+                        </a:rPr>
+                        <a:t>title_only_admin_search</a:t>
+                      </a:r>
+                      <a:endParaRPr lang="en-US" sz="1250" dirty="0">
+                        <a:latin typeface="Calibri" charset="0"/>
+                        <a:ea typeface="Calibri" charset="0"/>
+                        <a:cs typeface="Calibri" charset="0"/>
+                      </a:endParaRPr>
+                    </a:p>
+                  </a:txBody>
+                  <a:tcPr marL="50800" marR="50800" marT="50800" marB="50800" anchor="ctr">
+                    <a:lnL w="12700" cap="flat" cmpd="sng" algn="ctr">
+                      <a:solidFill>
+                        <a:srgbClr val="DCE6EB"/>
+                      </a:solidFill>
+                      <a:prstDash val="solid"/>
+                      <a:round/>
+                      <a:headEnd type="none" w="med" len="med"/>
+                      <a:tailEnd type="none" w="med" len="med"/>
+                    </a:lnL>
+                    <a:lnR w="12700" cap="flat" cmpd="sng" algn="ctr">
+                      <a:solidFill>
+                        <a:srgbClr val="DCE6EB"/>
+                      </a:solidFill>
+                      <a:prstDash val="solid"/>
+                      <a:round/>
+                      <a:headEnd type="none" w="med" len="med"/>
+                      <a:tailEnd type="none" w="med" len="med"/>
+                    </a:lnR>
+                    <a:lnT w="12700" cap="flat" cmpd="sng" algn="ctr">
+                      <a:solidFill>
+                        <a:srgbClr val="DCE6EB"/>
+                      </a:solidFill>
+                      <a:prstDash val="solid"/>
+                      <a:round/>
+                      <a:headEnd type="none" w="med" len="med"/>
+                      <a:tailEnd type="none" w="med" len="med"/>
+                    </a:lnT>
+                    <a:lnB w="12700" cap="flat" cmpd="sng" algn="ctr">
+                      <a:solidFill>
+                        <a:srgbClr val="DCE6EB"/>
+                      </a:solidFill>
+                      <a:prstDash val="solid"/>
+                      <a:round/>
+                      <a:headEnd type="none" w="med" len="med"/>
+                      <a:tailEnd type="none" w="med" len="med"/>
+                    </a:lnB>
+                    <a:solidFill>
+                      <a:srgbClr val="FFFFFF"/>
+                    </a:solidFill>
+                  </a:tcPr>
+                </a:tc>
+                <a:tc>
+                  <a:txBody>
+                    <a:bodyPr/>
+                    <a:lstStyle/>
+                    <a:p>
+                      <a:pPr algn="l" indent="0" marL="0">
+                        <a:buNone/>
+                      </a:pPr>
+                      <a:r>
+                        <a:rPr lang="en-US" sz="1100" dirty="0">
+                          <a:solidFill>
+                            <a:srgbClr val="27607A"/>
+                          </a:solidFill>
+                          <a:latin typeface="Courier New" pitchFamily="34" charset="0"/>
+                          <a:ea typeface="Courier New" pitchFamily="34" charset="-122"/>
+                          <a:cs typeface="Courier New" pitchFamily="34" charset="-120"/>
+                        </a:rPr>
+                        <a:t>no</a:t>
+                      </a:r>
+                      <a:endParaRPr lang="en-US" sz="1100" dirty="0">
+                        <a:latin typeface="Courier New" charset="0"/>
+                        <a:ea typeface="Courier New" charset="0"/>
+                        <a:cs typeface="Courier New" charset="0"/>
+                      </a:endParaRPr>
+                    </a:p>
+                  </a:txBody>
+                  <a:tcPr marL="50800" marR="50800" marT="50800" marB="50800" anchor="ctr">
+                    <a:lnL w="12700" cap="flat" cmpd="sng" algn="ctr">
+                      <a:solidFill>
+                        <a:srgbClr val="DCE6EB"/>
+                      </a:solidFill>
+                      <a:prstDash val="solid"/>
+                      <a:round/>
+                      <a:headEnd type="none" w="med" len="med"/>
+                      <a:tailEnd type="none" w="med" len="med"/>
+                    </a:lnL>
+                    <a:lnR w="12700" cap="flat" cmpd="sng" algn="ctr">
+                      <a:solidFill>
+                        <a:srgbClr val="DCE6EB"/>
+                      </a:solidFill>
+                      <a:prstDash val="solid"/>
+                      <a:round/>
+                      <a:headEnd type="none" w="med" len="med"/>
+                      <a:tailEnd type="none" w="med" len="med"/>
+                    </a:lnR>
+                    <a:lnT w="12700" cap="flat" cmpd="sng" algn="ctr">
+                      <a:solidFill>
+                        <a:srgbClr val="DCE6EB"/>
+                      </a:solidFill>
+                      <a:prstDash val="solid"/>
+                      <a:round/>
+                      <a:headEnd type="none" w="med" len="med"/>
+                      <a:tailEnd type="none" w="med" len="med"/>
+                    </a:lnT>
+                    <a:lnB w="12700" cap="flat" cmpd="sng" algn="ctr">
+                      <a:solidFill>
+                        <a:srgbClr val="DCE6EB"/>
+                      </a:solidFill>
+                      <a:prstDash val="solid"/>
+                      <a:round/>
+                      <a:headEnd type="none" w="med" len="med"/>
+                      <a:tailEnd type="none" w="med" len="med"/>
+                    </a:lnB>
+                    <a:solidFill>
+                      <a:srgbClr val="FFFFFF"/>
+                    </a:solidFill>
+                  </a:tcPr>
+                </a:tc>
+                <a:tc>
+                  <a:txBody>
+                    <a:bodyPr/>
+                    <a:lstStyle/>
+                    <a:p>
+                      <a:pPr algn="l" indent="0" marL="0">
+                        <a:buNone/>
+                      </a:pPr>
+                      <a:r>
+                        <a:rPr lang="en-US" sz="1200" dirty="0">
+                          <a:solidFill>
+                            <a:srgbClr val="4A5A63"/>
+                          </a:solidFill>
+                          <a:latin typeface="Calibri" pitchFamily="34" charset="0"/>
+                          <a:ea typeface="Calibri" pitchFamily="34" charset="-122"/>
+                          <a:cs typeface="Calibri" pitchFamily="34" charset="-120"/>
+                        </a:rPr>
+                        <a:t>post_search_columns</a:t>
+                      </a:r>
+                      <a:endParaRPr lang="en-US" sz="1200" dirty="0">
+                        <a:latin typeface="Calibri" charset="0"/>
+                        <a:ea typeface="Calibri" charset="0"/>
+                        <a:cs typeface="Calibri" charset="0"/>
+                      </a:endParaRPr>
+                    </a:p>
+                  </a:txBody>
+                  <a:tcPr marL="50800" marR="50800" marT="50800" marB="50800" anchor="ctr">
+                    <a:lnL w="12700" cap="flat" cmpd="sng" algn="ctr">
+                      <a:solidFill>
+                        <a:srgbClr val="DCE6EB"/>
+                      </a:solidFill>
+                      <a:prstDash val="solid"/>
+                      <a:round/>
+                      <a:headEnd type="none" w="med" len="med"/>
+                      <a:tailEnd type="none" w="med" len="med"/>
+                    </a:lnL>
+                    <a:lnR w="12700" cap="flat" cmpd="sng" algn="ctr">
+                      <a:solidFill>
+                        <a:srgbClr val="DCE6EB"/>
+                      </a:solidFill>
+                      <a:prstDash val="solid"/>
+                      <a:round/>
+                      <a:headEnd type="none" w="med" len="med"/>
+                      <a:tailEnd type="none" w="med" len="med"/>
+                    </a:lnR>
+                    <a:lnT w="12700" cap="flat" cmpd="sng" algn="ctr">
+                      <a:solidFill>
+                        <a:srgbClr val="DCE6EB"/>
+                      </a:solidFill>
+                      <a:prstDash val="solid"/>
+                      <a:round/>
+                      <a:headEnd type="none" w="med" len="med"/>
+                      <a:tailEnd type="none" w="med" len="med"/>
+                    </a:lnT>
+                    <a:lnB w="12700" cap="flat" cmpd="sng" algn="ctr">
+                      <a:solidFill>
+                        <a:srgbClr val="DCE6EB"/>
+                      </a:solidFill>
+                      <a:prstDash val="solid"/>
+                      <a:round/>
+                      <a:headEnd type="none" w="med" len="med"/>
+                      <a:tailEnd type="none" w="med" len="med"/>
+                    </a:lnB>
+                    <a:solidFill>
+                      <a:srgbClr val="FFFFFF"/>
+                    </a:solidFill>
+                  </a:tcPr>
+                </a:tc>
+              </a:tr>
+              <a:tr h="402336">
+                <a:tc>
+                  <a:txBody>
+                    <a:bodyPr/>
+                    <a:lstStyle/>
+                    <a:p>
+                      <a:pPr algn="l" indent="0" marL="0">
+                        <a:buNone/>
+                      </a:pPr>
+                      <a:r>
+                        <a:rPr lang="en-US" sz="1250" dirty="0">
+                          <a:solidFill>
+                            <a:srgbClr val="0F2733"/>
+                          </a:solidFill>
+                          <a:latin typeface="Calibri" pitchFamily="34" charset="0"/>
+                          <a:ea typeface="Calibri" pitchFamily="34" charset="-122"/>
+                          <a:cs typeface="Calibri" pitchFamily="34" charset="-120"/>
+                        </a:rPr>
+                        <a:t>frontend_admin_bar_behavior</a:t>
+                      </a:r>
+                      <a:endParaRPr lang="en-US" sz="1250" dirty="0">
+                        <a:latin typeface="Calibri" charset="0"/>
+                        <a:ea typeface="Calibri" charset="0"/>
+                        <a:cs typeface="Calibri" charset="0"/>
+                      </a:endParaRPr>
+                    </a:p>
+                  </a:txBody>
+                  <a:tcPr marL="50800" marR="50800" marT="50800" marB="50800" anchor="ctr">
+                    <a:lnL w="12700" cap="flat" cmpd="sng" algn="ctr">
+                      <a:solidFill>
+                        <a:srgbClr val="DCE6EB"/>
+                      </a:solidFill>
+                      <a:prstDash val="solid"/>
+                      <a:round/>
+                      <a:headEnd type="none" w="med" len="med"/>
+                      <a:tailEnd type="none" w="med" len="med"/>
+                    </a:lnL>
+                    <a:lnR w="12700" cap="flat" cmpd="sng" algn="ctr">
+                      <a:solidFill>
+                        <a:srgbClr val="DCE6EB"/>
+                      </a:solidFill>
+                      <a:prstDash val="solid"/>
+                      <a:round/>
+                      <a:headEnd type="none" w="med" len="med"/>
+                      <a:tailEnd type="none" w="med" len="med"/>
+                    </a:lnR>
+                    <a:lnT w="12700" cap="flat" cmpd="sng" algn="ctr">
+                      <a:solidFill>
+                        <a:srgbClr val="DCE6EB"/>
+                      </a:solidFill>
+                      <a:prstDash val="solid"/>
+                      <a:round/>
+                      <a:headEnd type="none" w="med" len="med"/>
+                      <a:tailEnd type="none" w="med" len="med"/>
+                    </a:lnT>
+                    <a:lnB w="12700" cap="flat" cmpd="sng" algn="ctr">
+                      <a:solidFill>
+                        <a:srgbClr val="DCE6EB"/>
+                      </a:solidFill>
+                      <a:prstDash val="solid"/>
+                      <a:round/>
+                      <a:headEnd type="none" w="med" len="med"/>
+                      <a:tailEnd type="none" w="med" len="med"/>
+                    </a:lnB>
+                    <a:solidFill>
+                      <a:srgbClr val="EAF1F5"/>
+                    </a:solidFill>
+                  </a:tcPr>
+                </a:tc>
+                <a:tc>
+                  <a:txBody>
+                    <a:bodyPr/>
+                    <a:lstStyle/>
+                    <a:p>
+                      <a:pPr algn="l" indent="0" marL="0">
+                        <a:buNone/>
+                      </a:pPr>
+                      <a:r>
+                        <a:rPr lang="en-US" sz="1100" dirty="0">
+                          <a:solidFill>
+                            <a:srgbClr val="27607A"/>
+                          </a:solidFill>
+                          <a:latin typeface="Courier New" pitchFamily="34" charset="0"/>
+                          <a:ea typeface="Courier New" pitchFamily="34" charset="-122"/>
+                          <a:cs typeface="Courier New" pitchFamily="34" charset="-120"/>
+                        </a:rPr>
+                        <a:t>''</a:t>
+                      </a:r>
+                      <a:endParaRPr lang="en-US" sz="1100" dirty="0">
+                        <a:latin typeface="Courier New" charset="0"/>
+                        <a:ea typeface="Courier New" charset="0"/>
+                        <a:cs typeface="Courier New" charset="0"/>
+                      </a:endParaRPr>
+                    </a:p>
+                  </a:txBody>
+                  <a:tcPr marL="50800" marR="50800" marT="50800" marB="50800" anchor="ctr">
+                    <a:lnL w="12700" cap="flat" cmpd="sng" algn="ctr">
+                      <a:solidFill>
+                        <a:srgbClr val="DCE6EB"/>
+                      </a:solidFill>
+                      <a:prstDash val="solid"/>
+                      <a:round/>
+                      <a:headEnd type="none" w="med" len="med"/>
+                      <a:tailEnd type="none" w="med" len="med"/>
+                    </a:lnL>
+                    <a:lnR w="12700" cap="flat" cmpd="sng" algn="ctr">
+                      <a:solidFill>
+                        <a:srgbClr val="DCE6EB"/>
+                      </a:solidFill>
+                      <a:prstDash val="solid"/>
+                      <a:round/>
+                      <a:headEnd type="none" w="med" len="med"/>
+                      <a:tailEnd type="none" w="med" len="med"/>
+                    </a:lnR>
+                    <a:lnT w="12700" cap="flat" cmpd="sng" algn="ctr">
+                      <a:solidFill>
+                        <a:srgbClr val="DCE6EB"/>
+                      </a:solidFill>
+                      <a:prstDash val="solid"/>
+                      <a:round/>
+                      <a:headEnd type="none" w="med" len="med"/>
+                      <a:tailEnd type="none" w="med" len="med"/>
+                    </a:lnT>
+                    <a:lnB w="12700" cap="flat" cmpd="sng" algn="ctr">
+                      <a:solidFill>
+                        <a:srgbClr val="DCE6EB"/>
+                      </a:solidFill>
+                      <a:prstDash val="solid"/>
+                      <a:round/>
+                      <a:headEnd type="none" w="med" len="med"/>
+                      <a:tailEnd type="none" w="med" len="med"/>
+                    </a:lnB>
+                    <a:solidFill>
+                      <a:srgbClr val="EAF1F5"/>
+                    </a:solidFill>
+                  </a:tcPr>
+                </a:tc>
+                <a:tc>
+                  <a:txBody>
+                    <a:bodyPr/>
+                    <a:lstStyle/>
+                    <a:p>
+                      <a:pPr algn="l" indent="0" marL="0">
+                        <a:buNone/>
+                      </a:pPr>
+                      <a:r>
+                        <a:rPr lang="en-US" sz="1200" dirty="0">
+                          <a:solidFill>
+                            <a:srgbClr val="4A5A63"/>
+                          </a:solidFill>
+                          <a:latin typeface="Calibri" pitchFamily="34" charset="0"/>
+                          <a:ea typeface="Calibri" pitchFamily="34" charset="-122"/>
+                          <a:cs typeface="Calibri" pitchFamily="34" charset="-120"/>
+                        </a:rPr>
+                        <a:t>show_admin_bar</a:t>
+                      </a:r>
+                      <a:endParaRPr lang="en-US" sz="1200" dirty="0">
+                        <a:latin typeface="Calibri" charset="0"/>
+                        <a:ea typeface="Calibri" charset="0"/>
+                        <a:cs typeface="Calibri" charset="0"/>
+                      </a:endParaRPr>
+                    </a:p>
+                  </a:txBody>
+                  <a:tcPr marL="50800" marR="50800" marT="50800" marB="50800" anchor="ctr">
+                    <a:lnL w="12700" cap="flat" cmpd="sng" algn="ctr">
+                      <a:solidFill>
+                        <a:srgbClr val="DCE6EB"/>
+                      </a:solidFill>
+                      <a:prstDash val="solid"/>
+                      <a:round/>
+                      <a:headEnd type="none" w="med" len="med"/>
+                      <a:tailEnd type="none" w="med" len="med"/>
+                    </a:lnL>
+                    <a:lnR w="12700" cap="flat" cmpd="sng" algn="ctr">
+                      <a:solidFill>
+                        <a:srgbClr val="DCE6EB"/>
+                      </a:solidFill>
+                      <a:prstDash val="solid"/>
+                      <a:round/>
+                      <a:headEnd type="none" w="med" len="med"/>
+                      <a:tailEnd type="none" w="med" len="med"/>
+                    </a:lnR>
+                    <a:lnT w="12700" cap="flat" cmpd="sng" algn="ctr">
+                      <a:solidFill>
+                        <a:srgbClr val="DCE6EB"/>
+                      </a:solidFill>
+                      <a:prstDash val="solid"/>
+                      <a:round/>
+                      <a:headEnd type="none" w="med" len="med"/>
+                      <a:tailEnd type="none" w="med" len="med"/>
+                    </a:lnT>
+                    <a:lnB w="12700" cap="flat" cmpd="sng" algn="ctr">
+                      <a:solidFill>
+                        <a:srgbClr val="DCE6EB"/>
+                      </a:solidFill>
+                      <a:prstDash val="solid"/>
+                      <a:round/>
+                      <a:headEnd type="none" w="med" len="med"/>
+                      <a:tailEnd type="none" w="med" len="med"/>
+                    </a:lnB>
+                    <a:solidFill>
+                      <a:srgbClr val="EAF1F5"/>
+                    </a:solidFill>
+                  </a:tcPr>
+                </a:tc>
+              </a:tr>
+            </a:tbl>
+          </a:graphicData>
+        </a:graphic>
+      </p:graphicFrame>
+      <p:sp>
+        <p:nvSpPr>
+          <p:cNvPr id="5" name="Text 2"/>
+          <p:cNvSpPr/>
+          <p:nvPr/>
+        </p:nvSpPr>
+        <p:spPr>
+          <a:xfrm>
+            <a:off x="502920" y="6428232"/>
+            <a:ext cx="7315200" cy="274320"/>
+          </a:xfrm>
+          <a:prstGeom prst="rect">
+            <a:avLst/>
+          </a:prstGeom>
+          <a:noFill/>
+          <a:ln/>
+        </p:spPr>
+        <p:txBody>
+          <a:bodyPr wrap="square" lIns="0" tIns="0" rIns="0" bIns="0" rtlCol="0" anchor="ctr"/>
+          <a:lstStyle/>
+          <a:p>
+            <a:pPr algn="l" indent="0" marL="0">
+              <a:buNone/>
+            </a:pPr>
+            <a:r>
+              <a:rPr lang="en-US" sz="900" b="1" dirty="0">
+                <a:solidFill>
+                  <a:srgbClr val="C88F33"/>
+                </a:solidFill>
+                <a:latin typeface="Calibri" pitchFamily="34" charset="0"/>
+                <a:ea typeface="Calibri" pitchFamily="34" charset="-122"/>
+                <a:cs typeface="Calibri" pitchFamily="34" charset="-120"/>
+              </a:rPr>
+              <a:t>WPYEG</a:t>
+            </a:r>
+            <a:pPr algn="l" indent="0" marL="0">
+              <a:buNone/>
+            </a:pPr>
+            <a:r>
+              <a:rPr lang="en-US" sz="900" dirty="0">
+                <a:solidFill>
+                  <a:srgbClr val="8A9AA3"/>
+                </a:solidFill>
+                <a:latin typeface="Calibri" pitchFamily="34" charset="0"/>
+                <a:ea typeface="Calibri" pitchFamily="34" charset="-122"/>
+                <a:cs typeface="Calibri" pitchFamily="34" charset="-120"/>
+              </a:rPr>
+              <a:t>  ·  Better by Default</a:t>
+            </a:r>
+            <a:endParaRPr lang="en-US" sz="900" dirty="0"/>
+          </a:p>
+        </p:txBody>
+      </p:sp>
+      <p:sp>
+        <p:nvSpPr>
+          <p:cNvPr id="6" name="Text 3"/>
+          <p:cNvSpPr/>
+          <p:nvPr/>
+        </p:nvSpPr>
+        <p:spPr>
+          <a:xfrm>
+            <a:off x="11155680" y="6428232"/>
+            <a:ext cx="548640" cy="274320"/>
+          </a:xfrm>
+          <a:prstGeom prst="rect">
+            <a:avLst/>
+          </a:prstGeom>
+          <a:noFill/>
+          <a:ln/>
+        </p:spPr>
+        <p:txBody>
+          <a:bodyPr wrap="square" lIns="0" tIns="0" rIns="0" bIns="0" rtlCol="0" anchor="ctr"/>
+          <a:lstStyle/>
+          <a:p>
+            <a:pPr algn="r" indent="0" marL="0">
+              <a:buNone/>
+            </a:pPr>
+            <a:r>
+              <a:rPr lang="en-US" sz="900" dirty="0">
+                <a:solidFill>
+                  <a:srgbClr val="8A9AA3"/>
+                </a:solidFill>
+                <a:latin typeface="Calibri" pitchFamily="34" charset="0"/>
+                <a:ea typeface="Calibri" pitchFamily="34" charset="-122"/>
+                <a:cs typeface="Calibri" pitchFamily="34" charset="-120"/>
+              </a:rPr>
+              <a:t>31</a:t>
+            </a:r>
+            <a:endParaRPr lang="en-US" sz="900" dirty="0"/>
+          </a:p>
+        </p:txBody>
+      </p:sp>
+    </p:spTree>
+  </p:cSld>
+  <p:clrMapOvr>
+    <a:masterClrMapping/>
+  </p:clrMapOvr>
+</p:sld>
+</file>
+
+<file path=ppt/slides/slide36.xml><?xml version="1.0" encoding="utf-8"?>
+<p:sld xmlns:a="http://schemas.openxmlformats.org/drawingml/2006/main" xmlns:r="http://schemas.openxmlformats.org/officeDocument/2006/relationships" xmlns:p="http://schemas.openxmlformats.org/presentationml/2006/main">
+  <p:cSld name="Slide 36">
+    <p:bg>
+      <p:bgPr>
+        <a:solidFill>
+          <a:srgbClr val="F5F8FA"/>
+        </a:solidFill>
+      </p:bgPr>
+    </p:bg>
+    <p:spTree>
+      <p:nvGrpSpPr>
+        <p:cNvPr id="1" name=""/>
+        <p:cNvGrpSpPr/>
+        <p:nvPr/>
+      </p:nvGrpSpPr>
+      <p:grpSpPr>
+        <a:xfrm>
+          <a:off x="0" y="0"/>
+          <a:ext cx="0" cy="0"/>
+          <a:chOff x="0" y="0"/>
+          <a:chExt cx="0" cy="0"/>
+        </a:xfrm>
+      </p:grpSpPr>
+      <p:sp>
+        <p:nvSpPr>
+          <p:cNvPr id="2" name="Text 0"/>
+          <p:cNvSpPr/>
+          <p:nvPr/>
+        </p:nvSpPr>
+        <p:spPr>
+          <a:xfrm>
+            <a:off x="548640" y="411480"/>
+            <a:ext cx="10972800" cy="640080"/>
+          </a:xfrm>
+          <a:prstGeom prst="rect">
+            <a:avLst/>
+          </a:prstGeom>
+          <a:noFill/>
+          <a:ln/>
+        </p:spPr>
+        <p:txBody>
+          <a:bodyPr wrap="square" lIns="0" tIns="0" rIns="0" bIns="0" rtlCol="0" anchor="ctr"/>
+          <a:lstStyle/>
+          <a:p>
+            <a:pPr indent="0" marL="0">
+              <a:buNone/>
+            </a:pPr>
+            <a:r>
+              <a:rPr lang="en-US" sz="3000" b="1" dirty="0">
+                <a:solidFill>
+                  <a:srgbClr val="0F2733"/>
+                </a:solidFill>
+                <a:latin typeface="Cambria" pitchFamily="34" charset="0"/>
+                <a:ea typeface="Cambria" pitchFamily="34" charset="-122"/>
+                <a:cs typeface="Cambria" pitchFamily="34" charset="-120"/>
+              </a:rPr>
+              <a:t>Schema map — login, branding, and performance</a:t>
+            </a:r>
+            <a:endParaRPr lang="en-US" sz="3000" dirty="0"/>
+          </a:p>
+        </p:txBody>
+      </p:sp>
+      <p:sp>
+        <p:nvSpPr>
+          <p:cNvPr id="3" name="Text 1"/>
+          <p:cNvSpPr/>
+          <p:nvPr/>
+        </p:nvSpPr>
+        <p:spPr>
+          <a:xfrm>
+            <a:off x="548640" y="1097280"/>
+            <a:ext cx="10972800" cy="365760"/>
+          </a:xfrm>
+          <a:prstGeom prst="rect">
+            <a:avLst/>
+          </a:prstGeom>
+          <a:noFill/>
+          <a:ln/>
+        </p:spPr>
+        <p:txBody>
+          <a:bodyPr wrap="square" lIns="0" tIns="0" rIns="0" bIns="0" rtlCol="0" anchor="ctr"/>
+          <a:lstStyle/>
+          <a:p>
+            <a:pPr indent="0" marL="0">
+              <a:buNone/>
+            </a:pPr>
+            <a:r>
+              <a:rPr lang="en-US" sz="1400" b="1" dirty="0">
+                <a:solidFill>
+                  <a:srgbClr val="3E7E9C"/>
+                </a:solidFill>
+                <a:latin typeface="Calibri" pitchFamily="34" charset="0"/>
+                <a:ea typeface="Calibri" pitchFamily="34" charset="-122"/>
+                <a:cs typeface="Calibri" pitchFamily="34" charset="-120"/>
+              </a:rPr>
+              <a:t>Schema keys live in one option array; constants remain above plugins.</a:t>
+            </a:r>
+            <a:endParaRPr lang="en-US" sz="1400" dirty="0"/>
+          </a:p>
+        </p:txBody>
+      </p:sp>
+      <p:graphicFrame>
+        <p:nvGraphicFramePr>
+          <p:cNvPr id="37" name="Table 0"/>
+          <p:cNvGraphicFramePr>
+            <a:graphicFrameLocks noGrp="1"/>
+          </p:cNvGraphicFramePr>
+          <p:nvPr>
+            <p:extLst>
+              <p:ext uri="{D42A27DB-BD31-4B8C-83A1-F6EECF244321}">
+                <p14:modId xmlns:p14="http://schemas.microsoft.com/office/powerpoint/2010/main" val="1579011935"/>
+              </p:ext>
+            </p:extLst>
+          </p:nvPr>
+        </p:nvGraphicFramePr>
+        <p:xfrm>
+          <a:off x="548640" y="1508760"/>
+          <a:ext cx="11064240" cy="914400"/>
+        </p:xfrm>
+        <a:graphic>
+          <a:graphicData uri="http://schemas.openxmlformats.org/drawingml/2006/table">
+            <a:tbl>
+              <a:tblPr/>
+              <a:tblGrid>
+                <a:gridCol w="4343400"/>
+                <a:gridCol w="1600200"/>
+                <a:gridCol w="5120640"/>
+              </a:tblGrid>
+              <a:tr h="402336">
+                <a:tc>
+                  <a:txBody>
+                    <a:bodyPr/>
+                    <a:lstStyle/>
+                    <a:p>
+                      <a:pPr algn="l" indent="0" marL="0">
+                        <a:buNone/>
+                      </a:pPr>
+                      <a:r>
+                        <a:rPr lang="en-US" sz="1300" b="1" dirty="0">
+                          <a:solidFill>
+                            <a:srgbClr val="FFFFFF"/>
+                          </a:solidFill>
+                          <a:latin typeface="Calibri" pitchFamily="34" charset="0"/>
+                          <a:ea typeface="Calibri" pitchFamily="34" charset="-122"/>
+                          <a:cs typeface="Calibri" pitchFamily="34" charset="-120"/>
+                        </a:rPr>
+                        <a:t>Setting key or owner</a:t>
+                      </a:r>
+                      <a:endParaRPr lang="en-US" sz="1300" dirty="0">
+                        <a:latin typeface="Calibri" charset="0"/>
+                        <a:ea typeface="Calibri" charset="0"/>
+                        <a:cs typeface="Calibri" charset="0"/>
+                      </a:endParaRPr>
+                    </a:p>
+                  </a:txBody>
+                  <a:tcPr marL="50800" marR="50800" marT="50800" marB="50800" anchor="ctr">
+                    <a:lnL w="12700" cap="flat" cmpd="sng" algn="ctr">
+                      <a:solidFill>
+                        <a:srgbClr val="DCE6EB"/>
+                      </a:solidFill>
+                      <a:prstDash val="solid"/>
+                      <a:round/>
+                      <a:headEnd type="none" w="med" len="med"/>
+                      <a:tailEnd type="none" w="med" len="med"/>
+                    </a:lnL>
+                    <a:lnR w="12700" cap="flat" cmpd="sng" algn="ctr">
+                      <a:solidFill>
+                        <a:srgbClr val="DCE6EB"/>
+                      </a:solidFill>
+                      <a:prstDash val="solid"/>
+                      <a:round/>
+                      <a:headEnd type="none" w="med" len="med"/>
+                      <a:tailEnd type="none" w="med" len="med"/>
+                    </a:lnR>
+                    <a:lnT w="12700" cap="flat" cmpd="sng" algn="ctr">
+                      <a:solidFill>
+                        <a:srgbClr val="DCE6EB"/>
+                      </a:solidFill>
+                      <a:prstDash val="solid"/>
+                      <a:round/>
+                      <a:headEnd type="none" w="med" len="med"/>
+                      <a:tailEnd type="none" w="med" len="med"/>
+                    </a:lnT>
+                    <a:lnB w="12700" cap="flat" cmpd="sng" algn="ctr">
+                      <a:solidFill>
+                        <a:srgbClr val="DCE6EB"/>
+                      </a:solidFill>
+                      <a:prstDash val="solid"/>
+                      <a:round/>
+                      <a:headEnd type="none" w="med" len="med"/>
+                      <a:tailEnd type="none" w="med" len="med"/>
+                    </a:lnB>
+                    <a:solidFill>
+                      <a:srgbClr val="27607A"/>
+                    </a:solidFill>
+                  </a:tcPr>
+                </a:tc>
+                <a:tc>
+                  <a:txBody>
+                    <a:bodyPr/>
+                    <a:lstStyle/>
+                    <a:p>
+                      <a:pPr algn="l" indent="0" marL="0">
+                        <a:buNone/>
+                      </a:pPr>
+                      <a:r>
+                        <a:rPr lang="en-US" sz="1200" b="1" dirty="0">
+                          <a:solidFill>
+                            <a:srgbClr val="FFFFFF"/>
+                          </a:solidFill>
+                          <a:latin typeface="Courier New" pitchFamily="34" charset="0"/>
+                          <a:ea typeface="Courier New" pitchFamily="34" charset="-122"/>
+                          <a:cs typeface="Courier New" pitchFamily="34" charset="-120"/>
+                        </a:rPr>
+                        <a:t>Default</a:t>
+                      </a:r>
+                      <a:endParaRPr lang="en-US" sz="1200" dirty="0">
+                        <a:latin typeface="Courier New" charset="0"/>
+                        <a:ea typeface="Courier New" charset="0"/>
+                        <a:cs typeface="Courier New" charset="0"/>
+                      </a:endParaRPr>
+                    </a:p>
+                  </a:txBody>
+                  <a:tcPr marL="50800" marR="50800" marT="50800" marB="50800" anchor="ctr">
+                    <a:lnL w="12700" cap="flat" cmpd="sng" algn="ctr">
+                      <a:solidFill>
+                        <a:srgbClr val="DCE6EB"/>
+                      </a:solidFill>
+                      <a:prstDash val="solid"/>
+                      <a:round/>
+                      <a:headEnd type="none" w="med" len="med"/>
+                      <a:tailEnd type="none" w="med" len="med"/>
+                    </a:lnL>
+                    <a:lnR w="12700" cap="flat" cmpd="sng" algn="ctr">
+                      <a:solidFill>
+                        <a:srgbClr val="DCE6EB"/>
+                      </a:solidFill>
+                      <a:prstDash val="solid"/>
+                      <a:round/>
+                      <a:headEnd type="none" w="med" len="med"/>
+                      <a:tailEnd type="none" w="med" len="med"/>
+                    </a:lnR>
+                    <a:lnT w="12700" cap="flat" cmpd="sng" algn="ctr">
+                      <a:solidFill>
+                        <a:srgbClr val="DCE6EB"/>
+                      </a:solidFill>
+                      <a:prstDash val="solid"/>
+                      <a:round/>
+                      <a:headEnd type="none" w="med" len="med"/>
+                      <a:tailEnd type="none" w="med" len="med"/>
+                    </a:lnT>
+                    <a:lnB w="12700" cap="flat" cmpd="sng" algn="ctr">
+                      <a:solidFill>
+                        <a:srgbClr val="DCE6EB"/>
+                      </a:solidFill>
+                      <a:prstDash val="solid"/>
+                      <a:round/>
+                      <a:headEnd type="none" w="med" len="med"/>
+                      <a:tailEnd type="none" w="med" len="med"/>
+                    </a:lnB>
+                    <a:solidFill>
+                      <a:srgbClr val="27607A"/>
+                    </a:solidFill>
+                  </a:tcPr>
+                </a:tc>
+                <a:tc>
+                  <a:txBody>
+                    <a:bodyPr/>
+                    <a:lstStyle/>
+                    <a:p>
+                      <a:pPr algn="l" indent="0" marL="0">
+                        <a:buNone/>
+                      </a:pPr>
+                      <a:r>
+                        <a:rPr lang="en-US" sz="1300" b="1" dirty="0">
+                          <a:solidFill>
+                            <a:srgbClr val="FFFFFF"/>
+                          </a:solidFill>
+                          <a:latin typeface="Calibri" pitchFamily="34" charset="0"/>
+                          <a:ea typeface="Calibri" pitchFamily="34" charset="-122"/>
+                          <a:cs typeface="Calibri" pitchFamily="34" charset="-120"/>
+                        </a:rPr>
+                        <a:t>Core hook / authority</a:t>
+                      </a:r>
+                      <a:endParaRPr lang="en-US" sz="1300" dirty="0">
+                        <a:latin typeface="Calibri" charset="0"/>
+                        <a:ea typeface="Calibri" charset="0"/>
+                        <a:cs typeface="Calibri" charset="0"/>
+                      </a:endParaRPr>
+                    </a:p>
+                  </a:txBody>
+                  <a:tcPr marL="50800" marR="50800" marT="50800" marB="50800" anchor="ctr">
+                    <a:lnL w="12700" cap="flat" cmpd="sng" algn="ctr">
+                      <a:solidFill>
+                        <a:srgbClr val="DCE6EB"/>
+                      </a:solidFill>
+                      <a:prstDash val="solid"/>
+                      <a:round/>
+                      <a:headEnd type="none" w="med" len="med"/>
+                      <a:tailEnd type="none" w="med" len="med"/>
+                    </a:lnL>
+                    <a:lnR w="12700" cap="flat" cmpd="sng" algn="ctr">
+                      <a:solidFill>
+                        <a:srgbClr val="DCE6EB"/>
+                      </a:solidFill>
+                      <a:prstDash val="solid"/>
+                      <a:round/>
+                      <a:headEnd type="none" w="med" len="med"/>
+                      <a:tailEnd type="none" w="med" len="med"/>
+                    </a:lnR>
+                    <a:lnT w="12700" cap="flat" cmpd="sng" algn="ctr">
+                      <a:solidFill>
+                        <a:srgbClr val="DCE6EB"/>
+                      </a:solidFill>
+                      <a:prstDash val="solid"/>
+                      <a:round/>
+                      <a:headEnd type="none" w="med" len="med"/>
+                      <a:tailEnd type="none" w="med" len="med"/>
+                    </a:lnT>
+                    <a:lnB w="12700" cap="flat" cmpd="sng" algn="ctr">
+                      <a:solidFill>
+                        <a:srgbClr val="DCE6EB"/>
+                      </a:solidFill>
+                      <a:prstDash val="solid"/>
+                      <a:round/>
+                      <a:headEnd type="none" w="med" len="med"/>
+                      <a:tailEnd type="none" w="med" len="med"/>
+                    </a:lnB>
+                    <a:solidFill>
+                      <a:srgbClr val="27607A"/>
+                    </a:solidFill>
+                  </a:tcPr>
+                </a:tc>
+              </a:tr>
+              <a:tr h="402336">
+                <a:tc>
+                  <a:txBody>
+                    <a:bodyPr/>
+                    <a:lstStyle/>
+                    <a:p>
+                      <a:pPr algn="l" indent="0" marL="0">
+                        <a:buNone/>
+                      </a:pPr>
+                      <a:r>
+                        <a:rPr lang="en-US" sz="1250" dirty="0">
+                          <a:solidFill>
+                            <a:srgbClr val="0F2733"/>
+                          </a:solidFill>
+                          <a:latin typeface="Calibri" pitchFamily="34" charset="0"/>
+                          <a:ea typeface="Calibri" pitchFamily="34" charset="-122"/>
+                          <a:cs typeface="Calibri" pitchFamily="34" charset="-120"/>
+                        </a:rPr>
                         <a:t>disable_remember_me</a:t>
                       </a:r>
                       <a:endParaRPr lang="en-US" sz="1250" dirty="0">
@@ -28990,647 +29518,7 @@
                 <a:ea typeface="Calibri" pitchFamily="34" charset="-122"/>
                 <a:cs typeface="Calibri" pitchFamily="34" charset="-120"/>
               </a:rPr>
-              <a:t>31</a:t>
-            </a:r>
-            <a:endParaRPr lang="en-US" sz="900" dirty="0"/>
-          </a:p>
-        </p:txBody>
-      </p:sp>
-    </p:spTree>
-  </p:cSld>
-  <p:clrMapOvr>
-    <a:masterClrMapping/>
-  </p:clrMapOvr>
-</p:sld>
-</file>
-
-<file path=ppt/slides/slide36.xml><?xml version="1.0" encoding="utf-8"?>
-<p:sld xmlns:a="http://schemas.openxmlformats.org/drawingml/2006/main" xmlns:r="http://schemas.openxmlformats.org/officeDocument/2006/relationships" xmlns:p="http://schemas.openxmlformats.org/presentationml/2006/main">
-  <p:cSld name="Slide 36">
-    <p:bg>
-      <p:bgPr>
-        <a:solidFill>
-          <a:srgbClr val="F5F8FA"/>
-        </a:solidFill>
-      </p:bgPr>
-    </p:bg>
-    <p:spTree>
-      <p:nvGrpSpPr>
-        <p:cNvPr id="1" name=""/>
-        <p:cNvGrpSpPr/>
-        <p:nvPr/>
-      </p:nvGrpSpPr>
-      <p:grpSpPr>
-        <a:xfrm>
-          <a:off x="0" y="0"/>
-          <a:ext cx="0" cy="0"/>
-          <a:chOff x="0" y="0"/>
-          <a:chExt cx="0" cy="0"/>
-        </a:xfrm>
-      </p:grpSpPr>
-      <p:sp>
-        <p:nvSpPr>
-          <p:cNvPr id="2" name="Text 0"/>
-          <p:cNvSpPr/>
-          <p:nvPr/>
-        </p:nvSpPr>
-        <p:spPr>
-          <a:xfrm>
-            <a:off x="548640" y="502920"/>
-            <a:ext cx="11064240" cy="822960"/>
-          </a:xfrm>
-          <a:prstGeom prst="rect">
-            <a:avLst/>
-          </a:prstGeom>
-          <a:noFill/>
-          <a:ln/>
-        </p:spPr>
-        <p:txBody>
-          <a:bodyPr wrap="square" lIns="0" tIns="0" rIns="0" bIns="0" rtlCol="0" anchor="ctr"/>
-          <a:lstStyle/>
-          <a:p>
-            <a:pPr indent="0" marL="0">
-              <a:buNone/>
-            </a:pPr>
-            <a:r>
-              <a:rPr lang="en-US" sz="3200" b="1" dirty="0">
-                <a:solidFill>
-                  <a:srgbClr val="0F2733"/>
-                </a:solidFill>
-                <a:latin typeface="Cambria" pitchFamily="34" charset="0"/>
-                <a:ea typeface="Cambria" pitchFamily="34" charset="-122"/>
-                <a:cs typeface="Cambria" pitchFamily="34" charset="-120"/>
-              </a:rPr>
-              <a:t>Somebody will install two of these</a:t>
-            </a:r>
-            <a:endParaRPr lang="en-US" sz="3200" dirty="0"/>
-          </a:p>
-        </p:txBody>
-      </p:sp>
-      <p:sp>
-        <p:nvSpPr>
-          <p:cNvPr id="3" name="Text 1"/>
-          <p:cNvSpPr/>
-          <p:nvPr/>
-        </p:nvSpPr>
-        <p:spPr>
-          <a:xfrm>
-            <a:off x="548640" y="1371600"/>
-            <a:ext cx="10881360" cy="731520"/>
-          </a:xfrm>
-          <a:prstGeom prst="rect">
-            <a:avLst/>
-          </a:prstGeom>
-          <a:noFill/>
-          <a:ln/>
-        </p:spPr>
-        <p:txBody>
-          <a:bodyPr wrap="square" lIns="0" tIns="0" rIns="0" bIns="0" rtlCol="0" anchor="ctr"/>
-          <a:lstStyle/>
-          <a:p>
-            <a:pPr indent="0" marL="0">
-              <a:buNone/>
-            </a:pPr>
-            <a:r>
-              <a:rPr lang="en-US" sz="1600" dirty="0">
-                <a:solidFill>
-                  <a:srgbClr val="4A5A63"/>
-                </a:solidFill>
-                <a:latin typeface="Calibri" pitchFamily="34" charset="0"/>
-                <a:ea typeface="Calibri" pitchFamily="34" charset="-122"/>
-                <a:cs typeface="Calibri" pitchFamily="34" charset="-120"/>
-              </a:rPr>
-              <a:t>Two defaults plugins on one site — or this one plus a security suite doing half the same job.</a:t>
-            </a:r>
-            <a:endParaRPr lang="en-US" sz="1600" dirty="0"/>
-          </a:p>
-        </p:txBody>
-      </p:sp>
-      <p:sp>
-        <p:nvSpPr>
-          <p:cNvPr id="4" name="Shape 2"/>
-          <p:cNvSpPr/>
-          <p:nvPr/>
-        </p:nvSpPr>
-        <p:spPr>
-          <a:xfrm>
-            <a:off x="548640" y="2377440"/>
-            <a:ext cx="11064240" cy="1051560"/>
-          </a:xfrm>
-          <a:prstGeom prst="roundRect">
-            <a:avLst>
-              <a:gd name="adj" fmla="val 7826"/>
-            </a:avLst>
-          </a:prstGeom>
-          <a:solidFill>
-            <a:srgbClr val="FFFFFF"/>
-          </a:solidFill>
-          <a:ln w="12700">
-            <a:solidFill>
-              <a:srgbClr val="DCE6EB"/>
-            </a:solidFill>
-            <a:prstDash val="solid"/>
-          </a:ln>
-          <a:effectLst>
-            <a:outerShdw sx="100000" sy="100000" kx="0" ky="0" algn="bl" rotWithShape="0" blurRad="63500" dist="25400" dir="5400000">
-              <a:srgbClr val="C7D4DB">
-                <a:alpha val="50000"/>
-              </a:srgbClr>
-            </a:outerShdw>
-          </a:effectLst>
-        </p:spPr>
-      </p:sp>
-      <p:sp>
-        <p:nvSpPr>
-          <p:cNvPr id="5" name="Shape 3"/>
-          <p:cNvSpPr/>
-          <p:nvPr/>
-        </p:nvSpPr>
-        <p:spPr>
-          <a:xfrm>
-            <a:off x="868680" y="2670048"/>
-            <a:ext cx="457200" cy="457200"/>
-          </a:xfrm>
-          <a:prstGeom prst="ellipse">
-            <a:avLst/>
-          </a:prstGeom>
-          <a:solidFill>
-            <a:srgbClr val="27607A"/>
-          </a:solidFill>
-          <a:ln/>
-        </p:spPr>
-      </p:sp>
-      <p:sp>
-        <p:nvSpPr>
-          <p:cNvPr id="6" name="Text 4"/>
-          <p:cNvSpPr/>
-          <p:nvPr/>
-        </p:nvSpPr>
-        <p:spPr>
-          <a:xfrm>
-            <a:off x="868680" y="2670048"/>
-            <a:ext cx="457200" cy="457200"/>
-          </a:xfrm>
-          <a:prstGeom prst="rect">
-            <a:avLst/>
-          </a:prstGeom>
-          <a:noFill/>
-          <a:ln/>
-        </p:spPr>
-        <p:txBody>
-          <a:bodyPr wrap="square" lIns="0" tIns="0" rIns="0" bIns="0" rtlCol="0" anchor="ctr"/>
-          <a:lstStyle/>
-          <a:p>
-            <a:pPr algn="ctr" indent="0" marL="0">
-              <a:buNone/>
-            </a:pPr>
-            <a:r>
-              <a:rPr lang="en-US" sz="1300" b="1" dirty="0">
-                <a:solidFill>
-                  <a:srgbClr val="FFFFFF"/>
-                </a:solidFill>
-                <a:latin typeface="Cambria" pitchFamily="34" charset="0"/>
-                <a:ea typeface="Cambria" pitchFamily="34" charset="-122"/>
-                <a:cs typeface="Cambria" pitchFamily="34" charset="-120"/>
-              </a:rPr>
-              <a:t>1</a:t>
-            </a:r>
-            <a:endParaRPr lang="en-US" sz="1300" dirty="0"/>
-          </a:p>
-        </p:txBody>
-      </p:sp>
-      <p:sp>
-        <p:nvSpPr>
-          <p:cNvPr id="7" name="Text 5"/>
-          <p:cNvSpPr/>
-          <p:nvPr/>
-        </p:nvSpPr>
-        <p:spPr>
-          <a:xfrm>
-            <a:off x="1508760" y="2542032"/>
-            <a:ext cx="9875520" cy="731520"/>
-          </a:xfrm>
-          <a:prstGeom prst="rect">
-            <a:avLst/>
-          </a:prstGeom>
-          <a:noFill/>
-          <a:ln/>
-        </p:spPr>
-        <p:txBody>
-          <a:bodyPr wrap="square" lIns="0" tIns="0" rIns="0" bIns="0" rtlCol="0" anchor="ctr"/>
-          <a:lstStyle/>
-          <a:p>
-            <a:pPr indent="0" marL="0">
-              <a:buNone/>
-            </a:pPr>
-            <a:r>
-              <a:rPr lang="en-US" sz="1500" b="1" dirty="0">
-                <a:solidFill>
-                  <a:srgbClr val="0F2733"/>
-                </a:solidFill>
-                <a:latin typeface="Calibri" pitchFamily="34" charset="0"/>
-                <a:ea typeface="Calibri" pitchFamily="34" charset="-122"/>
-                <a:cs typeface="Calibri" pitchFamily="34" charset="-120"/>
-              </a:rPr>
-              <a:t>Nothing errors.  </a:t>
-            </a:r>
-            <a:pPr indent="0" marL="0">
-              <a:buNone/>
-            </a:pPr>
-            <a:r>
-              <a:rPr lang="en-US" sz="1500" dirty="0">
-                <a:solidFill>
-                  <a:srgbClr val="4A5A63"/>
-                </a:solidFill>
-                <a:latin typeface="Calibri" pitchFamily="34" charset="0"/>
-                <a:ea typeface="Calibri" pitchFamily="34" charset="-122"/>
-                <a:cs typeface="Calibri" pitchFamily="34" charset="-120"/>
-              </a:rPr>
-              <a:t>No crash, no warning, no line in a log.</a:t>
-            </a:r>
-            <a:endParaRPr lang="en-US" sz="1500" dirty="0"/>
-          </a:p>
-        </p:txBody>
-      </p:sp>
-      <p:sp>
-        <p:nvSpPr>
-          <p:cNvPr id="8" name="Shape 6"/>
-          <p:cNvSpPr/>
-          <p:nvPr/>
-        </p:nvSpPr>
-        <p:spPr>
-          <a:xfrm>
-            <a:off x="548640" y="3611880"/>
-            <a:ext cx="11064240" cy="1051560"/>
-          </a:xfrm>
-          <a:prstGeom prst="roundRect">
-            <a:avLst>
-              <a:gd name="adj" fmla="val 7826"/>
-            </a:avLst>
-          </a:prstGeom>
-          <a:solidFill>
-            <a:srgbClr val="FFFFFF"/>
-          </a:solidFill>
-          <a:ln w="12700">
-            <a:solidFill>
-              <a:srgbClr val="DCE6EB"/>
-            </a:solidFill>
-            <a:prstDash val="solid"/>
-          </a:ln>
-          <a:effectLst>
-            <a:outerShdw sx="100000" sy="100000" kx="0" ky="0" algn="bl" rotWithShape="0" blurRad="63500" dist="25400" dir="5400000">
-              <a:srgbClr val="C7D4DB">
-                <a:alpha val="50000"/>
-              </a:srgbClr>
-            </a:outerShdw>
-          </a:effectLst>
-        </p:spPr>
-      </p:sp>
-      <p:sp>
-        <p:nvSpPr>
-          <p:cNvPr id="9" name="Shape 7"/>
-          <p:cNvSpPr/>
-          <p:nvPr/>
-        </p:nvSpPr>
-        <p:spPr>
-          <a:xfrm>
-            <a:off x="868680" y="3904488"/>
-            <a:ext cx="457200" cy="457200"/>
-          </a:xfrm>
-          <a:prstGeom prst="ellipse">
-            <a:avLst/>
-          </a:prstGeom>
-          <a:solidFill>
-            <a:srgbClr val="27607A"/>
-          </a:solidFill>
-          <a:ln/>
-        </p:spPr>
-      </p:sp>
-      <p:sp>
-        <p:nvSpPr>
-          <p:cNvPr id="10" name="Text 8"/>
-          <p:cNvSpPr/>
-          <p:nvPr/>
-        </p:nvSpPr>
-        <p:spPr>
-          <a:xfrm>
-            <a:off x="868680" y="3904488"/>
-            <a:ext cx="457200" cy="457200"/>
-          </a:xfrm>
-          <a:prstGeom prst="rect">
-            <a:avLst/>
-          </a:prstGeom>
-          <a:noFill/>
-          <a:ln/>
-        </p:spPr>
-        <p:txBody>
-          <a:bodyPr wrap="square" lIns="0" tIns="0" rIns="0" bIns="0" rtlCol="0" anchor="ctr"/>
-          <a:lstStyle/>
-          <a:p>
-            <a:pPr algn="ctr" indent="0" marL="0">
-              <a:buNone/>
-            </a:pPr>
-            <a:r>
-              <a:rPr lang="en-US" sz="1300" b="1" dirty="0">
-                <a:solidFill>
-                  <a:srgbClr val="FFFFFF"/>
-                </a:solidFill>
-                <a:latin typeface="Cambria" pitchFamily="34" charset="0"/>
-                <a:ea typeface="Cambria" pitchFamily="34" charset="-122"/>
-                <a:cs typeface="Cambria" pitchFamily="34" charset="-120"/>
-              </a:rPr>
-              <a:t>2</a:t>
-            </a:r>
-            <a:endParaRPr lang="en-US" sz="1300" dirty="0"/>
-          </a:p>
-        </p:txBody>
-      </p:sp>
-      <p:sp>
-        <p:nvSpPr>
-          <p:cNvPr id="11" name="Text 9"/>
-          <p:cNvSpPr/>
-          <p:nvPr/>
-        </p:nvSpPr>
-        <p:spPr>
-          <a:xfrm>
-            <a:off x="1508760" y="3776472"/>
-            <a:ext cx="9875520" cy="731520"/>
-          </a:xfrm>
-          <a:prstGeom prst="rect">
-            <a:avLst/>
-          </a:prstGeom>
-          <a:noFill/>
-          <a:ln/>
-        </p:spPr>
-        <p:txBody>
-          <a:bodyPr wrap="square" lIns="0" tIns="0" rIns="0" bIns="0" rtlCol="0" anchor="ctr"/>
-          <a:lstStyle/>
-          <a:p>
-            <a:pPr indent="0" marL="0">
-              <a:buNone/>
-            </a:pPr>
-            <a:r>
-              <a:rPr lang="en-US" sz="1500" b="1" dirty="0">
-                <a:solidFill>
-                  <a:srgbClr val="0F2733"/>
-                </a:solidFill>
-                <a:latin typeface="Calibri" pitchFamily="34" charset="0"/>
-                <a:ea typeface="Calibri" pitchFamily="34" charset="-122"/>
-                <a:cs typeface="Calibri" pitchFamily="34" charset="-120"/>
-              </a:rPr>
-              <a:t>Nothing is clobbered.  </a:t>
-            </a:r>
-            <a:pPr indent="0" marL="0">
-              <a:buNone/>
-            </a:pPr>
-            <a:r>
-              <a:rPr lang="en-US" sz="1500" dirty="0">
-                <a:solidFill>
-                  <a:srgbClr val="4A5A63"/>
-                </a:solidFill>
-                <a:latin typeface="Calibri" pitchFamily="34" charset="0"/>
-                <a:ea typeface="Calibri" pitchFamily="34" charset="-122"/>
-                <a:cs typeface="Calibri" pitchFamily="34" charset="-120"/>
-              </a:rPr>
-              <a:t>Each plugin keeps its own settings safely.</a:t>
-            </a:r>
-            <a:endParaRPr lang="en-US" sz="1500" dirty="0"/>
-          </a:p>
-        </p:txBody>
-      </p:sp>
-      <p:sp>
-        <p:nvSpPr>
-          <p:cNvPr id="12" name="Shape 10"/>
-          <p:cNvSpPr/>
-          <p:nvPr/>
-        </p:nvSpPr>
-        <p:spPr>
-          <a:xfrm>
-            <a:off x="548640" y="4846320"/>
-            <a:ext cx="11064240" cy="1051560"/>
-          </a:xfrm>
-          <a:prstGeom prst="roundRect">
-            <a:avLst>
-              <a:gd name="adj" fmla="val 7826"/>
-            </a:avLst>
-          </a:prstGeom>
-          <a:solidFill>
-            <a:srgbClr val="FFFFFF"/>
-          </a:solidFill>
-          <a:ln w="12700">
-            <a:solidFill>
-              <a:srgbClr val="DCE6EB"/>
-            </a:solidFill>
-            <a:prstDash val="solid"/>
-          </a:ln>
-          <a:effectLst>
-            <a:outerShdw sx="100000" sy="100000" kx="0" ky="0" algn="bl" rotWithShape="0" blurRad="63500" dist="25400" dir="5400000">
-              <a:srgbClr val="C7D4DB">
-                <a:alpha val="50000"/>
-              </a:srgbClr>
-            </a:outerShdw>
-          </a:effectLst>
-        </p:spPr>
-      </p:sp>
-      <p:sp>
-        <p:nvSpPr>
-          <p:cNvPr id="13" name="Shape 11"/>
-          <p:cNvSpPr/>
-          <p:nvPr/>
-        </p:nvSpPr>
-        <p:spPr>
-          <a:xfrm>
-            <a:off x="868680" y="5138928"/>
-            <a:ext cx="457200" cy="457200"/>
-          </a:xfrm>
-          <a:prstGeom prst="ellipse">
-            <a:avLst/>
-          </a:prstGeom>
-          <a:solidFill>
-            <a:srgbClr val="27607A"/>
-          </a:solidFill>
-          <a:ln/>
-        </p:spPr>
-      </p:sp>
-      <p:sp>
-        <p:nvSpPr>
-          <p:cNvPr id="14" name="Text 12"/>
-          <p:cNvSpPr/>
-          <p:nvPr/>
-        </p:nvSpPr>
-        <p:spPr>
-          <a:xfrm>
-            <a:off x="868680" y="5138928"/>
-            <a:ext cx="457200" cy="457200"/>
-          </a:xfrm>
-          <a:prstGeom prst="rect">
-            <a:avLst/>
-          </a:prstGeom>
-          <a:noFill/>
-          <a:ln/>
-        </p:spPr>
-        <p:txBody>
-          <a:bodyPr wrap="square" lIns="0" tIns="0" rIns="0" bIns="0" rtlCol="0" anchor="ctr"/>
-          <a:lstStyle/>
-          <a:p>
-            <a:pPr algn="ctr" indent="0" marL="0">
-              <a:buNone/>
-            </a:pPr>
-            <a:r>
-              <a:rPr lang="en-US" sz="1300" b="1" dirty="0">
-                <a:solidFill>
-                  <a:srgbClr val="FFFFFF"/>
-                </a:solidFill>
-                <a:latin typeface="Cambria" pitchFamily="34" charset="0"/>
-                <a:ea typeface="Cambria" pitchFamily="34" charset="-122"/>
-                <a:cs typeface="Cambria" pitchFamily="34" charset="-120"/>
-              </a:rPr>
-              <a:t>3</a:t>
-            </a:r>
-            <a:endParaRPr lang="en-US" sz="1300" dirty="0"/>
-          </a:p>
-        </p:txBody>
-      </p:sp>
-      <p:sp>
-        <p:nvSpPr>
-          <p:cNvPr id="15" name="Text 13"/>
-          <p:cNvSpPr/>
-          <p:nvPr/>
-        </p:nvSpPr>
-        <p:spPr>
-          <a:xfrm>
-            <a:off x="1508760" y="5010912"/>
-            <a:ext cx="9875520" cy="731520"/>
-          </a:xfrm>
-          <a:prstGeom prst="rect">
-            <a:avLst/>
-          </a:prstGeom>
-          <a:noFill/>
-          <a:ln/>
-        </p:spPr>
-        <p:txBody>
-          <a:bodyPr wrap="square" lIns="0" tIns="0" rIns="0" bIns="0" rtlCol="0" anchor="ctr"/>
-          <a:lstStyle/>
-          <a:p>
-            <a:pPr indent="0" marL="0">
-              <a:buNone/>
-            </a:pPr>
-            <a:r>
-              <a:rPr lang="en-US" sz="1500" b="1" dirty="0">
-                <a:solidFill>
-                  <a:srgbClr val="0F2733"/>
-                </a:solidFill>
-                <a:latin typeface="Calibri" pitchFamily="34" charset="0"/>
-                <a:ea typeface="Calibri" pitchFamily="34" charset="-122"/>
-                <a:cs typeface="Calibri" pitchFamily="34" charset="-120"/>
-              </a:rPr>
-              <a:t>One of them silently stops working.  </a:t>
-            </a:r>
-            <a:pPr indent="0" marL="0">
-              <a:buNone/>
-            </a:pPr>
-            <a:r>
-              <a:rPr lang="en-US" sz="1500" dirty="0">
-                <a:solidFill>
-                  <a:srgbClr val="4A5A63"/>
-                </a:solidFill>
-                <a:latin typeface="Calibri" pitchFamily="34" charset="0"/>
-                <a:ea typeface="Calibri" pitchFamily="34" charset="-122"/>
-                <a:cs typeface="Calibri" pitchFamily="34" charset="-120"/>
-              </a:rPr>
-              <a:t>And its settings screen goes on saying otherwise.</a:t>
-            </a:r>
-            <a:endParaRPr lang="en-US" sz="1500" dirty="0"/>
-          </a:p>
-        </p:txBody>
-      </p:sp>
-      <p:sp>
-        <p:nvSpPr>
-          <p:cNvPr id="16" name="Text 14"/>
-          <p:cNvSpPr/>
-          <p:nvPr/>
-        </p:nvSpPr>
-        <p:spPr>
-          <a:xfrm>
-            <a:off x="502920" y="6428232"/>
-            <a:ext cx="7315200" cy="274320"/>
-          </a:xfrm>
-          <a:prstGeom prst="rect">
-            <a:avLst/>
-          </a:prstGeom>
-          <a:noFill/>
-          <a:ln/>
-        </p:spPr>
-        <p:txBody>
-          <a:bodyPr wrap="square" lIns="0" tIns="0" rIns="0" bIns="0" rtlCol="0" anchor="ctr"/>
-          <a:lstStyle/>
-          <a:p>
-            <a:pPr algn="l" indent="0" marL="0">
-              <a:buNone/>
-            </a:pPr>
-            <a:r>
-              <a:rPr lang="en-US" sz="900" b="1" dirty="0">
-                <a:solidFill>
-                  <a:srgbClr val="C88F33"/>
-                </a:solidFill>
-                <a:latin typeface="Calibri" pitchFamily="34" charset="0"/>
-                <a:ea typeface="Calibri" pitchFamily="34" charset="-122"/>
-                <a:cs typeface="Calibri" pitchFamily="34" charset="-120"/>
-              </a:rPr>
-              <a:t>WPYEG</a:t>
-            </a:r>
-            <a:pPr algn="l" indent="0" marL="0">
-              <a:buNone/>
-            </a:pPr>
-            <a:r>
-              <a:rPr lang="en-US" sz="900" dirty="0">
-                <a:solidFill>
-                  <a:srgbClr val="8A9AA3"/>
-                </a:solidFill>
-                <a:latin typeface="Calibri" pitchFamily="34" charset="0"/>
-                <a:ea typeface="Calibri" pitchFamily="34" charset="-122"/>
-                <a:cs typeface="Calibri" pitchFamily="34" charset="-120"/>
-              </a:rPr>
-              <a:t>  ·  Better by Default</a:t>
-            </a:r>
-            <a:endParaRPr lang="en-US" sz="900" dirty="0"/>
-          </a:p>
-        </p:txBody>
-      </p:sp>
-      <p:sp>
-        <p:nvSpPr>
-          <p:cNvPr id="17" name="Text 15"/>
-          <p:cNvSpPr/>
-          <p:nvPr/>
-        </p:nvSpPr>
-        <p:spPr>
-          <a:xfrm>
-            <a:off x="11155680" y="6428232"/>
-            <a:ext cx="548640" cy="274320"/>
-          </a:xfrm>
-          <a:prstGeom prst="rect">
-            <a:avLst/>
-          </a:prstGeom>
-          <a:noFill/>
-          <a:ln/>
-        </p:spPr>
-        <p:txBody>
-          <a:bodyPr wrap="square" lIns="0" tIns="0" rIns="0" bIns="0" rtlCol="0" anchor="ctr"/>
-          <a:lstStyle/>
-          <a:p>
-            <a:pPr algn="r" indent="0" marL="0">
-              <a:buNone/>
-            </a:pPr>
-            <a:r>
-              <a:rPr lang="en-US" sz="900" dirty="0">
-                <a:solidFill>
-                  <a:srgbClr val="8A9AA3"/>
-                </a:solidFill>
-                <a:latin typeface="Calibri" pitchFamily="34" charset="0"/>
-                <a:ea typeface="Calibri" pitchFamily="34" charset="-122"/>
-                <a:cs typeface="Calibri" pitchFamily="34" charset="-120"/>
-              </a:rPr>
-              <a:t>33</a:t>
+              <a:t>32</a:t>
             </a:r>
             <a:endParaRPr lang="en-US" sz="900" dirty="0"/>
           </a:p>
@@ -29701,7 +29589,7 @@
                 <a:ea typeface="Cambria" pitchFamily="34" charset="-122"/>
                 <a:cs typeface="Cambria" pitchFamily="34" charset="-120"/>
               </a:rPr>
-              <a:t>Some settings share. Some fight.</a:t>
+              <a:t>Somebody will install two of these</a:t>
             </a:r>
             <a:endParaRPr lang="en-US" sz="3200" dirty="0"/>
           </a:p>
@@ -29740,7 +29628,7 @@
                 <a:ea typeface="Calibri" pitchFamily="34" charset="-122"/>
                 <a:cs typeface="Calibri" pitchFamily="34" charset="-120"/>
               </a:rPr>
-              <a:t>The difference is entirely in what your callback does with the argument it is handed.</a:t>
+              <a:t>Two defaults plugins on one site — or this one plus a security suite doing half the same job.</a:t>
             </a:r>
             <a:endParaRPr lang="en-US" sz="1600" dirty="0"/>
           </a:p>
@@ -29872,7 +29760,7 @@
                 <a:ea typeface="Calibri" pitchFamily="34" charset="-122"/>
                 <a:cs typeface="Calibri" pitchFamily="34" charset="-120"/>
               </a:rPr>
-              <a:t>Adding to a list.  </a:t>
+              <a:t>Nothing errors.  </a:t>
             </a:r>
             <a:pPr indent="0" marL="0">
               <a:buNone/>
@@ -29886,7 +29774,7 @@
                 <a:ea typeface="Calibri" pitchFamily="34" charset="-122"/>
                 <a:cs typeface="Calibri" pitchFamily="34" charset="-120"/>
               </a:rPr>
-              <a:t>Everybody's contribution survives. Security headers work this way.</a:t>
+              <a:t>No crash, no warning, no line in a log.</a:t>
             </a:r>
             <a:endParaRPr lang="en-US" sz="1500" dirty="0"/>
           </a:p>
@@ -30018,7 +29906,7 @@
                 <a:ea typeface="Calibri" pitchFamily="34" charset="-122"/>
                 <a:cs typeface="Calibri" pitchFamily="34" charset="-120"/>
               </a:rPr>
-              <a:t>Replacing a value.  </a:t>
+              <a:t>Nothing is clobbered.  </a:t>
             </a:r>
             <a:pPr indent="0" marL="0">
               <a:buNone/>
@@ -30032,7 +29920,7 @@
                 <a:ea typeface="Calibri" pitchFamily="34" charset="-122"/>
                 <a:cs typeface="Calibri" pitchFamily="34" charset="-120"/>
               </a:rPr>
-              <a:t>Last one wins, the rest are discarded. Session length works this way.</a:t>
+              <a:t>Each plugin keeps its own settings safely.</a:t>
             </a:r>
             <a:endParaRPr lang="en-US" sz="1500" dirty="0"/>
           </a:p>
@@ -30164,7 +30052,7 @@
                 <a:ea typeface="Calibri" pitchFamily="34" charset="-122"/>
                 <a:cs typeface="Calibri" pitchFamily="34" charset="-120"/>
               </a:rPr>
-              <a:t>Nothing tells you which you wrote.  </a:t>
+              <a:t>One of them silently stops working.  </a:t>
             </a:r>
             <a:pPr indent="0" marL="0">
               <a:buNone/>
@@ -30178,7 +30066,7 @@
                 <a:ea typeface="Calibri" pitchFamily="34" charset="-122"/>
                 <a:cs typeface="Calibri" pitchFamily="34" charset="-120"/>
               </a:rPr>
-              <a:t>Both are add_filter(). Both look identical at the call site.</a:t>
+              <a:t>And its settings screen goes on saying otherwise.</a:t>
             </a:r>
             <a:endParaRPr lang="en-US" sz="1500" dirty="0"/>
           </a:p>
@@ -30341,7 +30229,7 @@
                 <a:ea typeface="Cambria" pitchFamily="34" charset="-122"/>
                 <a:cs typeface="Cambria" pitchFamily="34" charset="-120"/>
               </a:rPr>
-              <a:t>Check any site in about a minute</a:t>
+              <a:t>Some settings share. Some fight.</a:t>
             </a:r>
             <a:endParaRPr lang="en-US" sz="3200" dirty="0"/>
           </a:p>
@@ -30355,8 +30243,8 @@
         </p:nvSpPr>
         <p:spPr>
           <a:xfrm>
-            <a:off x="548640" y="1325880"/>
-            <a:ext cx="10881360" cy="640080"/>
+            <a:off x="548640" y="1371600"/>
+            <a:ext cx="10881360" cy="731520"/>
           </a:xfrm>
           <a:prstGeom prst="rect">
             <a:avLst/>
@@ -30380,7 +30268,7 @@
                 <a:ea typeface="Calibri" pitchFamily="34" charset="-122"/>
                 <a:cs typeface="Calibri" pitchFamily="34" charset="-120"/>
               </a:rPr>
-              <a:t>WordPress keeps every registered callback in one global. Ask it who is on the hook you care about.</a:t>
+              <a:t>The difference is entirely in what your callback does with the argument it is handed.</a:t>
             </a:r>
             <a:endParaRPr lang="en-US" sz="1600" dirty="0"/>
           </a:p>
@@ -30394,27 +30282,27 @@
         </p:nvSpPr>
         <p:spPr>
           <a:xfrm>
-            <a:off x="548640" y="2103120"/>
-            <a:ext cx="11064240" cy="2286000"/>
+            <a:off x="548640" y="2377440"/>
+            <a:ext cx="11064240" cy="1051560"/>
           </a:xfrm>
           <a:prstGeom prst="roundRect">
             <a:avLst>
-              <a:gd name="adj" fmla="val 3200"/>
+              <a:gd name="adj" fmla="val 7826"/>
             </a:avLst>
           </a:prstGeom>
           <a:solidFill>
-            <a:srgbClr val="0E2836"/>
+            <a:srgbClr val="FFFFFF"/>
           </a:solidFill>
           <a:ln w="12700">
             <a:solidFill>
-              <a:srgbClr val="27607A"/>
+              <a:srgbClr val="DCE6EB"/>
             </a:solidFill>
             <a:prstDash val="solid"/>
           </a:ln>
           <a:effectLst>
-            <a:outerShdw sx="100000" sy="100000" kx="0" ky="0" algn="bl" rotWithShape="0" blurRad="76200" dist="38100" dir="5400000">
-              <a:srgbClr val="0A1A22">
-                <a:alpha val="40000"/>
+            <a:outerShdw sx="100000" sy="100000" kx="0" ky="0" algn="bl" rotWithShape="0" blurRad="63500" dist="25400" dir="5400000">
+              <a:srgbClr val="C7D4DB">
+                <a:alpha val="50000"/>
               </a:srgbClr>
             </a:outerShdw>
           </a:effectLst>
@@ -30422,14 +30310,34 @@
       </p:sp>
       <p:sp>
         <p:nvSpPr>
-          <p:cNvPr id="5" name="Text 3"/>
-          <p:cNvSpPr/>
-          <p:nvPr/>
-        </p:nvSpPr>
-        <p:spPr>
-          <a:xfrm>
-            <a:off x="749808" y="2267712"/>
-            <a:ext cx="10661904" cy="1956816"/>
+          <p:cNvPr id="5" name="Shape 3"/>
+          <p:cNvSpPr/>
+          <p:nvPr/>
+        </p:nvSpPr>
+        <p:spPr>
+          <a:xfrm>
+            <a:off x="868680" y="2670048"/>
+            <a:ext cx="457200" cy="457200"/>
+          </a:xfrm>
+          <a:prstGeom prst="ellipse">
+            <a:avLst/>
+          </a:prstGeom>
+          <a:solidFill>
+            <a:srgbClr val="27607A"/>
+          </a:solidFill>
+          <a:ln/>
+        </p:spPr>
+      </p:sp>
+      <p:sp>
+        <p:nvSpPr>
+          <p:cNvPr id="6" name="Text 4"/>
+          <p:cNvSpPr/>
+          <p:nvPr/>
+        </p:nvSpPr>
+        <p:spPr>
+          <a:xfrm>
+            <a:off x="868680" y="2670048"/>
+            <a:ext cx="457200" cy="457200"/>
           </a:xfrm>
           <a:prstGeom prst="rect">
             <a:avLst/>
@@ -30438,140 +30346,37 @@
           <a:ln/>
         </p:spPr>
         <p:txBody>
-          <a:bodyPr wrap="square" lIns="0" tIns="0" rIns="0" bIns="0" rtlCol="0" anchor="t"/>
-          <a:lstStyle/>
-          <a:p>
-            <a:pPr algn="l" indent="0" marL="0">
-              <a:lnSpc>
-                <a:spcPct val="108000"/>
-              </a:lnSpc>
-              <a:buNone/>
-            </a:pPr>
-            <a:r>
-              <a:rPr lang="en-US" sz="1250" dirty="0">
-                <a:solidFill>
-                  <a:srgbClr val="8FBF9F"/>
-                </a:solidFill>
-                <a:latin typeface="Courier New" pitchFamily="34" charset="0"/>
-                <a:ea typeface="Courier New" pitchFamily="34" charset="-122"/>
-                <a:cs typeface="Courier New" pitchFamily="34" charset="-120"/>
-              </a:rPr>
-              <a:t>// run this inside: wp eval '...'</a:t>
-            </a:r>
-            <a:endParaRPr lang="en-US" sz="1250" dirty="0"/>
-          </a:p>
-          <a:p>
-            <a:pPr algn="l" indent="0" marL="0">
-              <a:lnSpc>
-                <a:spcPct val="108000"/>
-              </a:lnSpc>
-              <a:buNone/>
-            </a:pPr>
-            <a:r>
-              <a:rPr lang="en-US" sz="1250" dirty="0">
-                <a:solidFill>
-                  <a:srgbClr val="DCEAF1"/>
-                </a:solidFill>
-                <a:latin typeface="Courier New" pitchFamily="34" charset="0"/>
-                <a:ea typeface="Courier New" pitchFamily="34" charset="-122"/>
-                <a:cs typeface="Courier New" pitchFamily="34" charset="-120"/>
-              </a:rPr>
-              <a:t>global $wp_filter; $hook = 'auth_cookie_expiration';</a:t>
-            </a:r>
-            <a:endParaRPr lang="en-US" sz="1250" dirty="0"/>
-          </a:p>
-          <a:p>
-            <a:pPr algn="l" indent="0" marL="0">
-              <a:lnSpc>
-                <a:spcPct val="108000"/>
-              </a:lnSpc>
-              <a:buNone/>
-            </a:pPr>
-            <a:r>
-              <a:rPr lang="en-US" sz="1250" dirty="0">
-                <a:solidFill>
-                  <a:srgbClr val="E7C070"/>
-                </a:solidFill>
-                <a:latin typeface="Courier New" pitchFamily="34" charset="0"/>
-                <a:ea typeface="Courier New" pitchFamily="34" charset="-122"/>
-                <a:cs typeface="Courier New" pitchFamily="34" charset="-120"/>
-              </a:rPr>
-              <a:t>if ( empty( $wp_filter[ $hook ] ) ) { echo "nobody is filtering it\n"; return; }</a:t>
-            </a:r>
-            <a:endParaRPr lang="en-US" sz="1250" dirty="0"/>
-          </a:p>
-          <a:p>
-            <a:pPr algn="l" indent="0" marL="0">
-              <a:lnSpc>
-                <a:spcPct val="108000"/>
-              </a:lnSpc>
-              <a:buNone/>
-            </a:pPr>
-            <a:r>
-              <a:rPr lang="en-US" sz="1250" dirty="0">
-                <a:solidFill>
-                  <a:srgbClr val="DCEAF1"/>
-                </a:solidFill>
-                <a:latin typeface="Courier New" pitchFamily="34" charset="0"/>
-                <a:ea typeface="Courier New" pitchFamily="34" charset="-122"/>
-                <a:cs typeface="Courier New" pitchFamily="34" charset="-120"/>
-              </a:rPr>
-              <a:t>foreach ( $wp_filter[ $hook ]-&gt;callbacks as $prio =&gt; $cbs ) {</a:t>
-            </a:r>
-            <a:endParaRPr lang="en-US" sz="1250" dirty="0"/>
-          </a:p>
-          <a:p>
-            <a:pPr algn="l" indent="0" marL="0">
-              <a:lnSpc>
-                <a:spcPct val="108000"/>
-              </a:lnSpc>
-              <a:buNone/>
-            </a:pPr>
-            <a:r>
-              <a:rPr lang="en-US" sz="1250" dirty="0">
-                <a:solidFill>
-                  <a:srgbClr val="DCEAF1"/>
-                </a:solidFill>
-                <a:latin typeface="Courier New" pitchFamily="34" charset="0"/>
-                <a:ea typeface="Courier New" pitchFamily="34" charset="-122"/>
-                <a:cs typeface="Courier New" pitchFamily="34" charset="-120"/>
-              </a:rPr>
-              <a:t>    foreach ( $cbs as $id =&gt; $cb ) { printf( "%-6s %s\n", $prio, $id ); }</a:t>
-            </a:r>
-            <a:endParaRPr lang="en-US" sz="1250" dirty="0"/>
-          </a:p>
-          <a:p>
-            <a:pPr algn="l" indent="0" marL="0">
-              <a:lnSpc>
-                <a:spcPct val="108000"/>
-              </a:lnSpc>
-              <a:buNone/>
-            </a:pPr>
-            <a:r>
-              <a:rPr lang="en-US" sz="1250" dirty="0">
-                <a:solidFill>
-                  <a:srgbClr val="8FBF9F"/>
-                </a:solidFill>
-                <a:latin typeface="Courier New" pitchFamily="34" charset="0"/>
-                <a:ea typeface="Courier New" pitchFamily="34" charset="-122"/>
-                <a:cs typeface="Courier New" pitchFamily="34" charset="-120"/>
-              </a:rPr>
-              <a:t>}   // each line is one callback; several means shared, not settled</a:t>
-            </a:r>
-            <a:endParaRPr lang="en-US" sz="1250" dirty="0"/>
-          </a:p>
-        </p:txBody>
-      </p:sp>
-      <p:sp>
-        <p:nvSpPr>
-          <p:cNvPr id="6" name="Text 4"/>
-          <p:cNvSpPr/>
-          <p:nvPr/>
-        </p:nvSpPr>
-        <p:spPr>
-          <a:xfrm>
-            <a:off x="548640" y="4617720"/>
-            <a:ext cx="10881360" cy="548640"/>
+          <a:bodyPr wrap="square" lIns="0" tIns="0" rIns="0" bIns="0" rtlCol="0" anchor="ctr"/>
+          <a:lstStyle/>
+          <a:p>
+            <a:pPr algn="ctr" indent="0" marL="0">
+              <a:buNone/>
+            </a:pPr>
+            <a:r>
+              <a:rPr lang="en-US" sz="1300" b="1" dirty="0">
+                <a:solidFill>
+                  <a:srgbClr val="FFFFFF"/>
+                </a:solidFill>
+                <a:latin typeface="Cambria" pitchFamily="34" charset="0"/>
+                <a:ea typeface="Cambria" pitchFamily="34" charset="-122"/>
+                <a:cs typeface="Cambria" pitchFamily="34" charset="-120"/>
+              </a:rPr>
+              <a:t>1</a:t>
+            </a:r>
+            <a:endParaRPr lang="en-US" sz="1300" dirty="0"/>
+          </a:p>
+        </p:txBody>
+      </p:sp>
+      <p:sp>
+        <p:nvSpPr>
+          <p:cNvPr id="7" name="Text 5"/>
+          <p:cNvSpPr/>
+          <p:nvPr/>
+        </p:nvSpPr>
+        <p:spPr>
+          <a:xfrm>
+            <a:off x="1508760" y="2542032"/>
+            <a:ext cx="9875520" cy="731520"/>
           </a:xfrm>
           <a:prstGeom prst="rect">
             <a:avLst/>
@@ -30587,67 +30392,373 @@
               <a:buNone/>
             </a:pPr>
             <a:r>
-              <a:rPr lang="en-US" sz="1500" i="1" dirty="0">
-                <a:solidFill>
-                  <a:srgbClr val="4A5A63"/>
+              <a:rPr lang="en-US" sz="1500" b="1" dirty="0">
+                <a:solidFill>
+                  <a:srgbClr val="0F2733"/>
                 </a:solidFill>
                 <a:latin typeface="Calibri" pitchFamily="34" charset="0"/>
                 <a:ea typeface="Calibri" pitchFamily="34" charset="-122"/>
                 <a:cs typeface="Calibri" pitchFamily="34" charset="-120"/>
               </a:rPr>
-              <a:t>Several entries means they share the hook. Whether anyone is losing depends on what the callbacks do — go and read them.</a:t>
-            </a:r>
-            <a:endParaRPr lang="en-US" sz="1500" dirty="0"/>
-          </a:p>
-        </p:txBody>
-      </p:sp>
-      <p:sp>
-        <p:nvSpPr>
-          <p:cNvPr id="7" name="Text 5"/>
-          <p:cNvSpPr/>
-          <p:nvPr/>
-        </p:nvSpPr>
-        <p:spPr>
-          <a:xfrm>
-            <a:off x="502920" y="6428232"/>
-            <a:ext cx="7315200" cy="274320"/>
-          </a:xfrm>
-          <a:prstGeom prst="rect">
-            <a:avLst/>
-          </a:prstGeom>
-          <a:noFill/>
-          <a:ln/>
-        </p:spPr>
-        <p:txBody>
-          <a:bodyPr wrap="square" lIns="0" tIns="0" rIns="0" bIns="0" rtlCol="0" anchor="ctr"/>
-          <a:lstStyle/>
-          <a:p>
-            <a:pPr algn="l" indent="0" marL="0">
-              <a:buNone/>
-            </a:pPr>
-            <a:r>
-              <a:rPr lang="en-US" sz="900" b="1" dirty="0">
-                <a:solidFill>
-                  <a:srgbClr val="C88F33"/>
+              <a:t>Adding to a list.  </a:t>
+            </a:r>
+            <a:pPr indent="0" marL="0">
+              <a:buNone/>
+            </a:pPr>
+            <a:r>
+              <a:rPr lang="en-US" sz="1500" dirty="0">
+                <a:solidFill>
+                  <a:srgbClr val="4A5A63"/>
                 </a:solidFill>
                 <a:latin typeface="Calibri" pitchFamily="34" charset="0"/>
                 <a:ea typeface="Calibri" pitchFamily="34" charset="-122"/>
                 <a:cs typeface="Calibri" pitchFamily="34" charset="-120"/>
               </a:rPr>
-              <a:t>WPYEG</a:t>
-            </a:r>
-            <a:pPr algn="l" indent="0" marL="0">
-              <a:buNone/>
-            </a:pPr>
-            <a:r>
-              <a:rPr lang="en-US" sz="900" dirty="0">
-                <a:solidFill>
-                  <a:srgbClr val="8A9AA3"/>
+              <a:t>Everybody's contribution survives. Security headers work this way.</a:t>
+            </a:r>
+            <a:endParaRPr lang="en-US" sz="1500" dirty="0"/>
+          </a:p>
+        </p:txBody>
+      </p:sp>
+      <p:sp>
+        <p:nvSpPr>
+          <p:cNvPr id="8" name="Shape 6"/>
+          <p:cNvSpPr/>
+          <p:nvPr/>
+        </p:nvSpPr>
+        <p:spPr>
+          <a:xfrm>
+            <a:off x="548640" y="3611880"/>
+            <a:ext cx="11064240" cy="1051560"/>
+          </a:xfrm>
+          <a:prstGeom prst="roundRect">
+            <a:avLst>
+              <a:gd name="adj" fmla="val 7826"/>
+            </a:avLst>
+          </a:prstGeom>
+          <a:solidFill>
+            <a:srgbClr val="FFFFFF"/>
+          </a:solidFill>
+          <a:ln w="12700">
+            <a:solidFill>
+              <a:srgbClr val="DCE6EB"/>
+            </a:solidFill>
+            <a:prstDash val="solid"/>
+          </a:ln>
+          <a:effectLst>
+            <a:outerShdw sx="100000" sy="100000" kx="0" ky="0" algn="bl" rotWithShape="0" blurRad="63500" dist="25400" dir="5400000">
+              <a:srgbClr val="C7D4DB">
+                <a:alpha val="50000"/>
+              </a:srgbClr>
+            </a:outerShdw>
+          </a:effectLst>
+        </p:spPr>
+      </p:sp>
+      <p:sp>
+        <p:nvSpPr>
+          <p:cNvPr id="9" name="Shape 7"/>
+          <p:cNvSpPr/>
+          <p:nvPr/>
+        </p:nvSpPr>
+        <p:spPr>
+          <a:xfrm>
+            <a:off x="868680" y="3904488"/>
+            <a:ext cx="457200" cy="457200"/>
+          </a:xfrm>
+          <a:prstGeom prst="ellipse">
+            <a:avLst/>
+          </a:prstGeom>
+          <a:solidFill>
+            <a:srgbClr val="27607A"/>
+          </a:solidFill>
+          <a:ln/>
+        </p:spPr>
+      </p:sp>
+      <p:sp>
+        <p:nvSpPr>
+          <p:cNvPr id="10" name="Text 8"/>
+          <p:cNvSpPr/>
+          <p:nvPr/>
+        </p:nvSpPr>
+        <p:spPr>
+          <a:xfrm>
+            <a:off x="868680" y="3904488"/>
+            <a:ext cx="457200" cy="457200"/>
+          </a:xfrm>
+          <a:prstGeom prst="rect">
+            <a:avLst/>
+          </a:prstGeom>
+          <a:noFill/>
+          <a:ln/>
+        </p:spPr>
+        <p:txBody>
+          <a:bodyPr wrap="square" lIns="0" tIns="0" rIns="0" bIns="0" rtlCol="0" anchor="ctr"/>
+          <a:lstStyle/>
+          <a:p>
+            <a:pPr algn="ctr" indent="0" marL="0">
+              <a:buNone/>
+            </a:pPr>
+            <a:r>
+              <a:rPr lang="en-US" sz="1300" b="1" dirty="0">
+                <a:solidFill>
+                  <a:srgbClr val="FFFFFF"/>
+                </a:solidFill>
+                <a:latin typeface="Cambria" pitchFamily="34" charset="0"/>
+                <a:ea typeface="Cambria" pitchFamily="34" charset="-122"/>
+                <a:cs typeface="Cambria" pitchFamily="34" charset="-120"/>
+              </a:rPr>
+              <a:t>2</a:t>
+            </a:r>
+            <a:endParaRPr lang="en-US" sz="1300" dirty="0"/>
+          </a:p>
+        </p:txBody>
+      </p:sp>
+      <p:sp>
+        <p:nvSpPr>
+          <p:cNvPr id="11" name="Text 9"/>
+          <p:cNvSpPr/>
+          <p:nvPr/>
+        </p:nvSpPr>
+        <p:spPr>
+          <a:xfrm>
+            <a:off x="1508760" y="3776472"/>
+            <a:ext cx="9875520" cy="731520"/>
+          </a:xfrm>
+          <a:prstGeom prst="rect">
+            <a:avLst/>
+          </a:prstGeom>
+          <a:noFill/>
+          <a:ln/>
+        </p:spPr>
+        <p:txBody>
+          <a:bodyPr wrap="square" lIns="0" tIns="0" rIns="0" bIns="0" rtlCol="0" anchor="ctr"/>
+          <a:lstStyle/>
+          <a:p>
+            <a:pPr indent="0" marL="0">
+              <a:buNone/>
+            </a:pPr>
+            <a:r>
+              <a:rPr lang="en-US" sz="1500" b="1" dirty="0">
+                <a:solidFill>
+                  <a:srgbClr val="0F2733"/>
                 </a:solidFill>
                 <a:latin typeface="Calibri" pitchFamily="34" charset="0"/>
                 <a:ea typeface="Calibri" pitchFamily="34" charset="-122"/>
                 <a:cs typeface="Calibri" pitchFamily="34" charset="-120"/>
               </a:rPr>
+              <a:t>Replacing a value.  </a:t>
+            </a:r>
+            <a:pPr indent="0" marL="0">
+              <a:buNone/>
+            </a:pPr>
+            <a:r>
+              <a:rPr lang="en-US" sz="1500" dirty="0">
+                <a:solidFill>
+                  <a:srgbClr val="4A5A63"/>
+                </a:solidFill>
+                <a:latin typeface="Calibri" pitchFamily="34" charset="0"/>
+                <a:ea typeface="Calibri" pitchFamily="34" charset="-122"/>
+                <a:cs typeface="Calibri" pitchFamily="34" charset="-120"/>
+              </a:rPr>
+              <a:t>Last one wins, the rest are discarded. Session length works this way.</a:t>
+            </a:r>
+            <a:endParaRPr lang="en-US" sz="1500" dirty="0"/>
+          </a:p>
+        </p:txBody>
+      </p:sp>
+      <p:sp>
+        <p:nvSpPr>
+          <p:cNvPr id="12" name="Shape 10"/>
+          <p:cNvSpPr/>
+          <p:nvPr/>
+        </p:nvSpPr>
+        <p:spPr>
+          <a:xfrm>
+            <a:off x="548640" y="4846320"/>
+            <a:ext cx="11064240" cy="1051560"/>
+          </a:xfrm>
+          <a:prstGeom prst="roundRect">
+            <a:avLst>
+              <a:gd name="adj" fmla="val 7826"/>
+            </a:avLst>
+          </a:prstGeom>
+          <a:solidFill>
+            <a:srgbClr val="FFFFFF"/>
+          </a:solidFill>
+          <a:ln w="12700">
+            <a:solidFill>
+              <a:srgbClr val="DCE6EB"/>
+            </a:solidFill>
+            <a:prstDash val="solid"/>
+          </a:ln>
+          <a:effectLst>
+            <a:outerShdw sx="100000" sy="100000" kx="0" ky="0" algn="bl" rotWithShape="0" blurRad="63500" dist="25400" dir="5400000">
+              <a:srgbClr val="C7D4DB">
+                <a:alpha val="50000"/>
+              </a:srgbClr>
+            </a:outerShdw>
+          </a:effectLst>
+        </p:spPr>
+      </p:sp>
+      <p:sp>
+        <p:nvSpPr>
+          <p:cNvPr id="13" name="Shape 11"/>
+          <p:cNvSpPr/>
+          <p:nvPr/>
+        </p:nvSpPr>
+        <p:spPr>
+          <a:xfrm>
+            <a:off x="868680" y="5138928"/>
+            <a:ext cx="457200" cy="457200"/>
+          </a:xfrm>
+          <a:prstGeom prst="ellipse">
+            <a:avLst/>
+          </a:prstGeom>
+          <a:solidFill>
+            <a:srgbClr val="27607A"/>
+          </a:solidFill>
+          <a:ln/>
+        </p:spPr>
+      </p:sp>
+      <p:sp>
+        <p:nvSpPr>
+          <p:cNvPr id="14" name="Text 12"/>
+          <p:cNvSpPr/>
+          <p:nvPr/>
+        </p:nvSpPr>
+        <p:spPr>
+          <a:xfrm>
+            <a:off x="868680" y="5138928"/>
+            <a:ext cx="457200" cy="457200"/>
+          </a:xfrm>
+          <a:prstGeom prst="rect">
+            <a:avLst/>
+          </a:prstGeom>
+          <a:noFill/>
+          <a:ln/>
+        </p:spPr>
+        <p:txBody>
+          <a:bodyPr wrap="square" lIns="0" tIns="0" rIns="0" bIns="0" rtlCol="0" anchor="ctr"/>
+          <a:lstStyle/>
+          <a:p>
+            <a:pPr algn="ctr" indent="0" marL="0">
+              <a:buNone/>
+            </a:pPr>
+            <a:r>
+              <a:rPr lang="en-US" sz="1300" b="1" dirty="0">
+                <a:solidFill>
+                  <a:srgbClr val="FFFFFF"/>
+                </a:solidFill>
+                <a:latin typeface="Cambria" pitchFamily="34" charset="0"/>
+                <a:ea typeface="Cambria" pitchFamily="34" charset="-122"/>
+                <a:cs typeface="Cambria" pitchFamily="34" charset="-120"/>
+              </a:rPr>
+              <a:t>3</a:t>
+            </a:r>
+            <a:endParaRPr lang="en-US" sz="1300" dirty="0"/>
+          </a:p>
+        </p:txBody>
+      </p:sp>
+      <p:sp>
+        <p:nvSpPr>
+          <p:cNvPr id="15" name="Text 13"/>
+          <p:cNvSpPr/>
+          <p:nvPr/>
+        </p:nvSpPr>
+        <p:spPr>
+          <a:xfrm>
+            <a:off x="1508760" y="5010912"/>
+            <a:ext cx="9875520" cy="731520"/>
+          </a:xfrm>
+          <a:prstGeom prst="rect">
+            <a:avLst/>
+          </a:prstGeom>
+          <a:noFill/>
+          <a:ln/>
+        </p:spPr>
+        <p:txBody>
+          <a:bodyPr wrap="square" lIns="0" tIns="0" rIns="0" bIns="0" rtlCol="0" anchor="ctr"/>
+          <a:lstStyle/>
+          <a:p>
+            <a:pPr indent="0" marL="0">
+              <a:buNone/>
+            </a:pPr>
+            <a:r>
+              <a:rPr lang="en-US" sz="1500" b="1" dirty="0">
+                <a:solidFill>
+                  <a:srgbClr val="0F2733"/>
+                </a:solidFill>
+                <a:latin typeface="Calibri" pitchFamily="34" charset="0"/>
+                <a:ea typeface="Calibri" pitchFamily="34" charset="-122"/>
+                <a:cs typeface="Calibri" pitchFamily="34" charset="-120"/>
+              </a:rPr>
+              <a:t>Nothing tells you which you wrote.  </a:t>
+            </a:r>
+            <a:pPr indent="0" marL="0">
+              <a:buNone/>
+            </a:pPr>
+            <a:r>
+              <a:rPr lang="en-US" sz="1500" dirty="0">
+                <a:solidFill>
+                  <a:srgbClr val="4A5A63"/>
+                </a:solidFill>
+                <a:latin typeface="Calibri" pitchFamily="34" charset="0"/>
+                <a:ea typeface="Calibri" pitchFamily="34" charset="-122"/>
+                <a:cs typeface="Calibri" pitchFamily="34" charset="-120"/>
+              </a:rPr>
+              <a:t>Both are add_filter(). Both look identical at the call site.</a:t>
+            </a:r>
+            <a:endParaRPr lang="en-US" sz="1500" dirty="0"/>
+          </a:p>
+        </p:txBody>
+      </p:sp>
+      <p:sp>
+        <p:nvSpPr>
+          <p:cNvPr id="16" name="Text 14"/>
+          <p:cNvSpPr/>
+          <p:nvPr/>
+        </p:nvSpPr>
+        <p:spPr>
+          <a:xfrm>
+            <a:off x="502920" y="6428232"/>
+            <a:ext cx="7315200" cy="274320"/>
+          </a:xfrm>
+          <a:prstGeom prst="rect">
+            <a:avLst/>
+          </a:prstGeom>
+          <a:noFill/>
+          <a:ln/>
+        </p:spPr>
+        <p:txBody>
+          <a:bodyPr wrap="square" lIns="0" tIns="0" rIns="0" bIns="0" rtlCol="0" anchor="ctr"/>
+          <a:lstStyle/>
+          <a:p>
+            <a:pPr algn="l" indent="0" marL="0">
+              <a:buNone/>
+            </a:pPr>
+            <a:r>
+              <a:rPr lang="en-US" sz="900" b="1" dirty="0">
+                <a:solidFill>
+                  <a:srgbClr val="C88F33"/>
+                </a:solidFill>
+                <a:latin typeface="Calibri" pitchFamily="34" charset="0"/>
+                <a:ea typeface="Calibri" pitchFamily="34" charset="-122"/>
+                <a:cs typeface="Calibri" pitchFamily="34" charset="-120"/>
+              </a:rPr>
+              <a:t>WPYEG</a:t>
+            </a:r>
+            <a:pPr algn="l" indent="0" marL="0">
+              <a:buNone/>
+            </a:pPr>
+            <a:r>
+              <a:rPr lang="en-US" sz="900" dirty="0">
+                <a:solidFill>
+                  <a:srgbClr val="8A9AA3"/>
+                </a:solidFill>
+                <a:latin typeface="Calibri" pitchFamily="34" charset="0"/>
+                <a:ea typeface="Calibri" pitchFamily="34" charset="-122"/>
+                <a:cs typeface="Calibri" pitchFamily="34" charset="-120"/>
+              </a:rPr>
               <a:t>  ·  Better by Default</a:t>
             </a:r>
             <a:endParaRPr lang="en-US" sz="900" dirty="0"/>
@@ -30656,7 +30767,7 @@
       </p:sp>
       <p:sp>
         <p:nvSpPr>
-          <p:cNvPr id="8" name="Text 6"/>
+          <p:cNvPr id="17" name="Text 15"/>
           <p:cNvSpPr/>
           <p:nvPr/>
         </p:nvSpPr>
@@ -30758,7 +30869,7 @@
                 <a:ea typeface="Cambria" pitchFamily="34" charset="-122"/>
                 <a:cs typeface="Cambria" pitchFamily="34" charset="-120"/>
               </a:rPr>
-              <a:t>We tried to automate it twice. Both were wrong.</a:t>
+              <a:t>Check any site in about a minute</a:t>
             </a:r>
             <a:endParaRPr lang="en-US" sz="3200" dirty="0"/>
           </a:p>
@@ -30772,8 +30883,8 @@
         </p:nvSpPr>
         <p:spPr>
           <a:xfrm>
-            <a:off x="548640" y="1371600"/>
-            <a:ext cx="10881360" cy="731520"/>
+            <a:off x="548640" y="1325880"/>
+            <a:ext cx="10881360" cy="640080"/>
           </a:xfrm>
           <a:prstGeom prst="rect">
             <a:avLst/>
@@ -30797,7 +30908,7 @@
                 <a:ea typeface="Calibri" pitchFamily="34" charset="-122"/>
                 <a:cs typeface="Calibri" pitchFamily="34" charset="-120"/>
               </a:rPr>
-              <a:t>Two sibling plugins built the checker. Both attempts shipped, and both were withdrawn.</a:t>
+              <a:t>WordPress keeps every registered callback in one global. Ask it who is on the hook you care about.</a:t>
             </a:r>
             <a:endParaRPr lang="en-US" sz="1600" dirty="0"/>
           </a:p>
@@ -30811,27 +30922,27 @@
         </p:nvSpPr>
         <p:spPr>
           <a:xfrm>
-            <a:off x="548640" y="2377440"/>
-            <a:ext cx="11064240" cy="1051560"/>
+            <a:off x="548640" y="2103120"/>
+            <a:ext cx="11064240" cy="2286000"/>
           </a:xfrm>
           <a:prstGeom prst="roundRect">
             <a:avLst>
-              <a:gd name="adj" fmla="val 7826"/>
+              <a:gd name="adj" fmla="val 3200"/>
             </a:avLst>
           </a:prstGeom>
           <a:solidFill>
-            <a:srgbClr val="FFFFFF"/>
+            <a:srgbClr val="0E2836"/>
           </a:solidFill>
           <a:ln w="12700">
             <a:solidFill>
-              <a:srgbClr val="DCE6EB"/>
+              <a:srgbClr val="27607A"/>
             </a:solidFill>
             <a:prstDash val="solid"/>
           </a:ln>
           <a:effectLst>
-            <a:outerShdw sx="100000" sy="100000" kx="0" ky="0" algn="bl" rotWithShape="0" blurRad="63500" dist="25400" dir="5400000">
-              <a:srgbClr val="C7D4DB">
-                <a:alpha val="50000"/>
+            <a:outerShdw sx="100000" sy="100000" kx="0" ky="0" algn="bl" rotWithShape="0" blurRad="76200" dist="38100" dir="5400000">
+              <a:srgbClr val="0A1A22">
+                <a:alpha val="40000"/>
               </a:srgbClr>
             </a:outerShdw>
           </a:effectLst>
@@ -30839,23 +30950,145 @@
       </p:sp>
       <p:sp>
         <p:nvSpPr>
-          <p:cNvPr id="5" name="Shape 3"/>
-          <p:cNvSpPr/>
-          <p:nvPr/>
-        </p:nvSpPr>
-        <p:spPr>
-          <a:xfrm>
-            <a:off x="868680" y="2670048"/>
-            <a:ext cx="457200" cy="457200"/>
-          </a:xfrm>
-          <a:prstGeom prst="ellipse">
-            <a:avLst/>
-          </a:prstGeom>
-          <a:solidFill>
-            <a:srgbClr val="27607A"/>
-          </a:solidFill>
-          <a:ln/>
-        </p:spPr>
+          <p:cNvPr id="5" name="Text 3"/>
+          <p:cNvSpPr/>
+          <p:nvPr/>
+        </p:nvSpPr>
+        <p:spPr>
+          <a:xfrm>
+            <a:off x="749808" y="2267712"/>
+            <a:ext cx="10661904" cy="1956816"/>
+          </a:xfrm>
+          <a:prstGeom prst="rect">
+            <a:avLst/>
+          </a:prstGeom>
+          <a:noFill/>
+          <a:ln/>
+        </p:spPr>
+        <p:txBody>
+          <a:bodyPr wrap="square" lIns="0" tIns="0" rIns="0" bIns="0" rtlCol="0" anchor="t"/>
+          <a:lstStyle/>
+          <a:p>
+            <a:pPr algn="l" indent="0" marL="0">
+              <a:lnSpc>
+                <a:spcPct val="108000"/>
+              </a:lnSpc>
+              <a:buNone/>
+            </a:pPr>
+            <a:r>
+              <a:rPr lang="en-US" sz="1250" dirty="0">
+                <a:solidFill>
+                  <a:srgbClr val="8FBF9F"/>
+                </a:solidFill>
+                <a:latin typeface="Courier New" pitchFamily="34" charset="0"/>
+                <a:ea typeface="Courier New" pitchFamily="34" charset="-122"/>
+                <a:cs typeface="Courier New" pitchFamily="34" charset="-120"/>
+              </a:rPr>
+              <a:t>// run this inside: wp eval '...'</a:t>
+            </a:r>
+            <a:endParaRPr lang="en-US" sz="1250" dirty="0"/>
+          </a:p>
+          <a:p>
+            <a:pPr algn="l" indent="0" marL="0">
+              <a:lnSpc>
+                <a:spcPct val="108000"/>
+              </a:lnSpc>
+              <a:buNone/>
+            </a:pPr>
+            <a:r>
+              <a:rPr lang="en-US" sz="1250" dirty="0">
+                <a:solidFill>
+                  <a:srgbClr val="DCEAF1"/>
+                </a:solidFill>
+                <a:latin typeface="Courier New" pitchFamily="34" charset="0"/>
+                <a:ea typeface="Courier New" pitchFamily="34" charset="-122"/>
+                <a:cs typeface="Courier New" pitchFamily="34" charset="-120"/>
+              </a:rPr>
+              <a:t>global $wp_filter; $hook = 'auth_cookie_expiration';</a:t>
+            </a:r>
+            <a:endParaRPr lang="en-US" sz="1250" dirty="0"/>
+          </a:p>
+          <a:p>
+            <a:pPr algn="l" indent="0" marL="0">
+              <a:lnSpc>
+                <a:spcPct val="108000"/>
+              </a:lnSpc>
+              <a:buNone/>
+            </a:pPr>
+            <a:r>
+              <a:rPr lang="en-US" sz="1250" dirty="0">
+                <a:solidFill>
+                  <a:srgbClr val="E7C070"/>
+                </a:solidFill>
+                <a:latin typeface="Courier New" pitchFamily="34" charset="0"/>
+                <a:ea typeface="Courier New" pitchFamily="34" charset="-122"/>
+                <a:cs typeface="Courier New" pitchFamily="34" charset="-120"/>
+              </a:rPr>
+              <a:t>if ( empty( $wp_filter[ $hook ] ) ) { echo "nobody is filtering it\n"; return; }</a:t>
+            </a:r>
+            <a:endParaRPr lang="en-US" sz="1250" dirty="0"/>
+          </a:p>
+          <a:p>
+            <a:pPr algn="l" indent="0" marL="0">
+              <a:lnSpc>
+                <a:spcPct val="108000"/>
+              </a:lnSpc>
+              <a:buNone/>
+            </a:pPr>
+            <a:r>
+              <a:rPr lang="en-US" sz="1250" dirty="0">
+                <a:solidFill>
+                  <a:srgbClr val="DCEAF1"/>
+                </a:solidFill>
+                <a:latin typeface="Courier New" pitchFamily="34" charset="0"/>
+                <a:ea typeface="Courier New" pitchFamily="34" charset="-122"/>
+                <a:cs typeface="Courier New" pitchFamily="34" charset="-120"/>
+              </a:rPr>
+              <a:t>foreach ( $wp_filter[ $hook ]-&gt;callbacks as $prio =&gt; $cbs ) {</a:t>
+            </a:r>
+            <a:endParaRPr lang="en-US" sz="1250" dirty="0"/>
+          </a:p>
+          <a:p>
+            <a:pPr algn="l" indent="0" marL="0">
+              <a:lnSpc>
+                <a:spcPct val="108000"/>
+              </a:lnSpc>
+              <a:buNone/>
+            </a:pPr>
+            <a:r>
+              <a:rPr lang="en-US" sz="1250" dirty="0">
+                <a:solidFill>
+                  <a:srgbClr val="DCEAF1"/>
+                </a:solidFill>
+                <a:latin typeface="Courier New" pitchFamily="34" charset="0"/>
+                <a:ea typeface="Courier New" pitchFamily="34" charset="-122"/>
+                <a:cs typeface="Courier New" pitchFamily="34" charset="-120"/>
+              </a:rPr>
+              <a:t>    foreach ( $cbs as $id =&gt; $cb ) { printf( "%-6s %s\n", $prio, $id ); }</a:t>
+            </a:r>
+            <a:endParaRPr lang="en-US" sz="1250" dirty="0"/>
+          </a:p>
+          <a:p>
+            <a:pPr algn="l" indent="0" marL="0">
+              <a:lnSpc>
+                <a:spcPct val="108000"/>
+              </a:lnSpc>
+              <a:buNone/>
+            </a:pPr>
+            <a:r>
+              <a:rPr lang="en-US" sz="1250" dirty="0">
+                <a:solidFill>
+                  <a:srgbClr val="8FBF9F"/>
+                </a:solidFill>
+                <a:latin typeface="Courier New" pitchFamily="34" charset="0"/>
+                <a:ea typeface="Courier New" pitchFamily="34" charset="-122"/>
+                <a:cs typeface="Courier New" pitchFamily="34" charset="-120"/>
+              </a:rPr>
+              <a:t>}   // each line is one callback; several means shared, not settled</a:t>
+            </a:r>
+            <a:endParaRPr lang="en-US" sz="1250" dirty="0"/>
+          </a:p>
+        </p:txBody>
       </p:sp>
       <p:sp>
         <p:nvSpPr>
@@ -30865,8 +31098,8 @@
         </p:nvSpPr>
         <p:spPr>
           <a:xfrm>
-            <a:off x="868680" y="2670048"/>
-            <a:ext cx="457200" cy="457200"/>
+            <a:off x="548640" y="4617720"/>
+            <a:ext cx="10881360" cy="548640"/>
           </a:xfrm>
           <a:prstGeom prst="rect">
             <a:avLst/>
@@ -30878,416 +31111,71 @@
           <a:bodyPr wrap="square" lIns="0" tIns="0" rIns="0" bIns="0" rtlCol="0" anchor="ctr"/>
           <a:lstStyle/>
           <a:p>
-            <a:pPr algn="ctr" indent="0" marL="0">
-              <a:buNone/>
-            </a:pPr>
-            <a:r>
-              <a:rPr lang="en-US" sz="1300" b="1" dirty="0">
-                <a:solidFill>
-                  <a:srgbClr val="FFFFFF"/>
-                </a:solidFill>
-                <a:latin typeface="Cambria" pitchFamily="34" charset="0"/>
-                <a:ea typeface="Cambria" pitchFamily="34" charset="-122"/>
-                <a:cs typeface="Cambria" pitchFamily="34" charset="-120"/>
-              </a:rPr>
-              <a:t>1</a:t>
-            </a:r>
-            <a:endParaRPr lang="en-US" sz="1300" dirty="0"/>
-          </a:p>
-        </p:txBody>
-      </p:sp>
-      <p:sp>
-        <p:nvSpPr>
-          <p:cNvPr id="7" name="Text 5"/>
-          <p:cNvSpPr/>
-          <p:nvPr/>
-        </p:nvSpPr>
-        <p:spPr>
-          <a:xfrm>
-            <a:off x="1508760" y="2542032"/>
-            <a:ext cx="9875520" cy="731520"/>
-          </a:xfrm>
-          <a:prstGeom prst="rect">
-            <a:avLst/>
-          </a:prstGeom>
-          <a:noFill/>
-          <a:ln/>
-        </p:spPr>
-        <p:txBody>
-          <a:bodyPr wrap="square" lIns="0" tIns="0" rIns="0" bIns="0" rtlCol="0" anchor="ctr"/>
-          <a:lstStyle/>
-          <a:p>
             <a:pPr indent="0" marL="0">
               <a:buNone/>
             </a:pPr>
             <a:r>
-              <a:rPr lang="en-US" sz="1500" b="1" dirty="0">
-                <a:solidFill>
-                  <a:srgbClr val="0F2733"/>
+              <a:rPr lang="en-US" sz="1500" i="1" dirty="0">
+                <a:solidFill>
+                  <a:srgbClr val="4A5A63"/>
                 </a:solidFill>
                 <a:latin typeface="Calibri" pitchFamily="34" charset="0"/>
                 <a:ea typeface="Calibri" pitchFamily="34" charset="-122"/>
                 <a:cs typeface="Calibri" pitchFamily="34" charset="-120"/>
               </a:rPr>
-              <a:t>Read the plugin's code for clues.  </a:t>
-            </a:r>
-            <a:pPr indent="0" marL="0">
-              <a:buNone/>
-            </a:pPr>
-            <a:r>
-              <a:rPr lang="en-US" sz="1500" dirty="0">
-                <a:solidFill>
-                  <a:srgbClr val="4A5A63"/>
+              <a:t>Several entries means they share the hook. Whether anyone is losing depends on what the callbacks do — go and read them.</a:t>
+            </a:r>
+            <a:endParaRPr lang="en-US" sz="1500" dirty="0"/>
+          </a:p>
+        </p:txBody>
+      </p:sp>
+      <p:sp>
+        <p:nvSpPr>
+          <p:cNvPr id="7" name="Text 5"/>
+          <p:cNvSpPr/>
+          <p:nvPr/>
+        </p:nvSpPr>
+        <p:spPr>
+          <a:xfrm>
+            <a:off x="502920" y="6428232"/>
+            <a:ext cx="7315200" cy="274320"/>
+          </a:xfrm>
+          <a:prstGeom prst="rect">
+            <a:avLst/>
+          </a:prstGeom>
+          <a:noFill/>
+          <a:ln/>
+        </p:spPr>
+        <p:txBody>
+          <a:bodyPr wrap="square" lIns="0" tIns="0" rIns="0" bIns="0" rtlCol="0" anchor="ctr"/>
+          <a:lstStyle/>
+          <a:p>
+            <a:pPr algn="l" indent="0" marL="0">
+              <a:buNone/>
+            </a:pPr>
+            <a:r>
+              <a:rPr lang="en-US" sz="900" b="1" dirty="0">
+                <a:solidFill>
+                  <a:srgbClr val="C88F33"/>
                 </a:solidFill>
                 <a:latin typeface="Calibri" pitchFamily="34" charset="0"/>
                 <a:ea typeface="Calibri" pitchFamily="34" charset="-122"/>
                 <a:cs typeface="Calibri" pitchFamily="34" charset="-120"/>
               </a:rPr>
-              <a:t>Named plugins that were doing nothing at all.</a:t>
-            </a:r>
-            <a:endParaRPr lang="en-US" sz="1500" dirty="0"/>
-          </a:p>
-        </p:txBody>
-      </p:sp>
-      <p:sp>
-        <p:nvSpPr>
-          <p:cNvPr id="8" name="Shape 6"/>
-          <p:cNvSpPr/>
-          <p:nvPr/>
-        </p:nvSpPr>
-        <p:spPr>
-          <a:xfrm>
-            <a:off x="548640" y="3611880"/>
-            <a:ext cx="11064240" cy="1051560"/>
-          </a:xfrm>
-          <a:prstGeom prst="roundRect">
-            <a:avLst>
-              <a:gd name="adj" fmla="val 7826"/>
-            </a:avLst>
-          </a:prstGeom>
-          <a:solidFill>
-            <a:srgbClr val="FFFFFF"/>
-          </a:solidFill>
-          <a:ln w="12700">
-            <a:solidFill>
-              <a:srgbClr val="DCE6EB"/>
-            </a:solidFill>
-            <a:prstDash val="solid"/>
-          </a:ln>
-          <a:effectLst>
-            <a:outerShdw sx="100000" sy="100000" kx="0" ky="0" algn="bl" rotWithShape="0" blurRad="63500" dist="25400" dir="5400000">
-              <a:srgbClr val="C7D4DB">
-                <a:alpha val="50000"/>
-              </a:srgbClr>
-            </a:outerShdw>
-          </a:effectLst>
-        </p:spPr>
-      </p:sp>
-      <p:sp>
-        <p:nvSpPr>
-          <p:cNvPr id="9" name="Shape 7"/>
-          <p:cNvSpPr/>
-          <p:nvPr/>
-        </p:nvSpPr>
-        <p:spPr>
-          <a:xfrm>
-            <a:off x="868680" y="3904488"/>
-            <a:ext cx="457200" cy="457200"/>
-          </a:xfrm>
-          <a:prstGeom prst="ellipse">
-            <a:avLst/>
-          </a:prstGeom>
-          <a:solidFill>
-            <a:srgbClr val="27607A"/>
-          </a:solidFill>
-          <a:ln/>
-        </p:spPr>
-      </p:sp>
-      <p:sp>
-        <p:nvSpPr>
-          <p:cNvPr id="10" name="Text 8"/>
-          <p:cNvSpPr/>
-          <p:nvPr/>
-        </p:nvSpPr>
-        <p:spPr>
-          <a:xfrm>
-            <a:off x="868680" y="3904488"/>
-            <a:ext cx="457200" cy="457200"/>
-          </a:xfrm>
-          <a:prstGeom prst="rect">
-            <a:avLst/>
-          </a:prstGeom>
-          <a:noFill/>
-          <a:ln/>
-        </p:spPr>
-        <p:txBody>
-          <a:bodyPr wrap="square" lIns="0" tIns="0" rIns="0" bIns="0" rtlCol="0" anchor="ctr"/>
-          <a:lstStyle/>
-          <a:p>
-            <a:pPr algn="ctr" indent="0" marL="0">
-              <a:buNone/>
-            </a:pPr>
-            <a:r>
-              <a:rPr lang="en-US" sz="1300" b="1" dirty="0">
-                <a:solidFill>
-                  <a:srgbClr val="FFFFFF"/>
-                </a:solidFill>
-                <a:latin typeface="Cambria" pitchFamily="34" charset="0"/>
-                <a:ea typeface="Cambria" pitchFamily="34" charset="-122"/>
-                <a:cs typeface="Cambria" pitchFamily="34" charset="-120"/>
-              </a:rPr>
-              <a:t>2</a:t>
-            </a:r>
-            <a:endParaRPr lang="en-US" sz="1300" dirty="0"/>
-          </a:p>
-        </p:txBody>
-      </p:sp>
-      <p:sp>
-        <p:nvSpPr>
-          <p:cNvPr id="11" name="Text 9"/>
-          <p:cNvSpPr/>
-          <p:nvPr/>
-        </p:nvSpPr>
-        <p:spPr>
-          <a:xfrm>
-            <a:off x="1508760" y="3776472"/>
-            <a:ext cx="9875520" cy="731520"/>
-          </a:xfrm>
-          <a:prstGeom prst="rect">
-            <a:avLst/>
-          </a:prstGeom>
-          <a:noFill/>
-          <a:ln/>
-        </p:spPr>
-        <p:txBody>
-          <a:bodyPr wrap="square" lIns="0" tIns="0" rIns="0" bIns="0" rtlCol="0" anchor="ctr"/>
-          <a:lstStyle/>
-          <a:p>
-            <a:pPr indent="0" marL="0">
-              <a:buNone/>
-            </a:pPr>
-            <a:r>
-              <a:rPr lang="en-US" sz="1500" b="1" dirty="0">
-                <a:solidFill>
-                  <a:srgbClr val="0F2733"/>
+              <a:t>WPYEG</a:t>
+            </a:r>
+            <a:pPr algn="l" indent="0" marL="0">
+              <a:buNone/>
+            </a:pPr>
+            <a:r>
+              <a:rPr lang="en-US" sz="900" dirty="0">
+                <a:solidFill>
+                  <a:srgbClr val="8A9AA3"/>
                 </a:solidFill>
                 <a:latin typeface="Calibri" pitchFamily="34" charset="0"/>
                 <a:ea typeface="Calibri" pitchFamily="34" charset="-122"/>
                 <a:cs typeface="Calibri" pitchFamily="34" charset="-120"/>
               </a:rPr>
-              <a:t>Run the setting, see what comes out.  </a:t>
-            </a:r>
-            <a:pPr indent="0" marL="0">
-              <a:buNone/>
-            </a:pPr>
-            <a:r>
-              <a:rPr lang="en-US" sz="1500" dirty="0">
-                <a:solidFill>
-                  <a:srgbClr val="4A5A63"/>
-                </a:solidFill>
-                <a:latin typeface="Calibri" pitchFamily="34" charset="0"/>
-                <a:ea typeface="Calibri" pitchFamily="34" charset="-122"/>
-                <a:cs typeface="Calibri" pitchFamily="34" charset="-120"/>
-              </a:rPr>
-              <a:t>Meant running other people's code to check on them.</a:t>
-            </a:r>
-            <a:endParaRPr lang="en-US" sz="1500" dirty="0"/>
-          </a:p>
-        </p:txBody>
-      </p:sp>
-      <p:sp>
-        <p:nvSpPr>
-          <p:cNvPr id="12" name="Shape 10"/>
-          <p:cNvSpPr/>
-          <p:nvPr/>
-        </p:nvSpPr>
-        <p:spPr>
-          <a:xfrm>
-            <a:off x="548640" y="4846320"/>
-            <a:ext cx="11064240" cy="1051560"/>
-          </a:xfrm>
-          <a:prstGeom prst="roundRect">
-            <a:avLst>
-              <a:gd name="adj" fmla="val 7826"/>
-            </a:avLst>
-          </a:prstGeom>
-          <a:solidFill>
-            <a:srgbClr val="FFFFFF"/>
-          </a:solidFill>
-          <a:ln w="12700">
-            <a:solidFill>
-              <a:srgbClr val="DCE6EB"/>
-            </a:solidFill>
-            <a:prstDash val="solid"/>
-          </a:ln>
-          <a:effectLst>
-            <a:outerShdw sx="100000" sy="100000" kx="0" ky="0" algn="bl" rotWithShape="0" blurRad="63500" dist="25400" dir="5400000">
-              <a:srgbClr val="C7D4DB">
-                <a:alpha val="50000"/>
-              </a:srgbClr>
-            </a:outerShdw>
-          </a:effectLst>
-        </p:spPr>
-      </p:sp>
-      <p:sp>
-        <p:nvSpPr>
-          <p:cNvPr id="13" name="Shape 11"/>
-          <p:cNvSpPr/>
-          <p:nvPr/>
-        </p:nvSpPr>
-        <p:spPr>
-          <a:xfrm>
-            <a:off x="868680" y="5138928"/>
-            <a:ext cx="457200" cy="457200"/>
-          </a:xfrm>
-          <a:prstGeom prst="ellipse">
-            <a:avLst/>
-          </a:prstGeom>
-          <a:solidFill>
-            <a:srgbClr val="27607A"/>
-          </a:solidFill>
-          <a:ln/>
-        </p:spPr>
-      </p:sp>
-      <p:sp>
-        <p:nvSpPr>
-          <p:cNvPr id="14" name="Text 12"/>
-          <p:cNvSpPr/>
-          <p:nvPr/>
-        </p:nvSpPr>
-        <p:spPr>
-          <a:xfrm>
-            <a:off x="868680" y="5138928"/>
-            <a:ext cx="457200" cy="457200"/>
-          </a:xfrm>
-          <a:prstGeom prst="rect">
-            <a:avLst/>
-          </a:prstGeom>
-          <a:noFill/>
-          <a:ln/>
-        </p:spPr>
-        <p:txBody>
-          <a:bodyPr wrap="square" lIns="0" tIns="0" rIns="0" bIns="0" rtlCol="0" anchor="ctr"/>
-          <a:lstStyle/>
-          <a:p>
-            <a:pPr algn="ctr" indent="0" marL="0">
-              <a:buNone/>
-            </a:pPr>
-            <a:r>
-              <a:rPr lang="en-US" sz="1300" b="1" dirty="0">
-                <a:solidFill>
-                  <a:srgbClr val="FFFFFF"/>
-                </a:solidFill>
-                <a:latin typeface="Cambria" pitchFamily="34" charset="0"/>
-                <a:ea typeface="Cambria" pitchFamily="34" charset="-122"/>
-                <a:cs typeface="Cambria" pitchFamily="34" charset="-120"/>
-              </a:rPr>
-              <a:t>3</a:t>
-            </a:r>
-            <a:endParaRPr lang="en-US" sz="1300" dirty="0"/>
-          </a:p>
-        </p:txBody>
-      </p:sp>
-      <p:sp>
-        <p:nvSpPr>
-          <p:cNvPr id="15" name="Text 13"/>
-          <p:cNvSpPr/>
-          <p:nvPr/>
-        </p:nvSpPr>
-        <p:spPr>
-          <a:xfrm>
-            <a:off x="1508760" y="5010912"/>
-            <a:ext cx="9875520" cy="731520"/>
-          </a:xfrm>
-          <a:prstGeom prst="rect">
-            <a:avLst/>
-          </a:prstGeom>
-          <a:noFill/>
-          <a:ln/>
-        </p:spPr>
-        <p:txBody>
-          <a:bodyPr wrap="square" lIns="0" tIns="0" rIns="0" bIns="0" rtlCol="0" anchor="ctr"/>
-          <a:lstStyle/>
-          <a:p>
-            <a:pPr indent="0" marL="0">
-              <a:buNone/>
-            </a:pPr>
-            <a:r>
-              <a:rPr lang="en-US" sz="1500" b="1" dirty="0">
-                <a:solidFill>
-                  <a:srgbClr val="0F2733"/>
-                </a:solidFill>
-                <a:latin typeface="Calibri" pitchFamily="34" charset="0"/>
-                <a:ea typeface="Calibri" pitchFamily="34" charset="-122"/>
-                <a:cs typeface="Calibri" pitchFamily="34" charset="-120"/>
-              </a:rPr>
-              <a:t>What worked: say less.  </a:t>
-            </a:r>
-            <a:pPr indent="0" marL="0">
-              <a:buNone/>
-            </a:pPr>
-            <a:r>
-              <a:rPr lang="en-US" sz="1500" dirty="0">
-                <a:solidFill>
-                  <a:srgbClr val="4A5A63"/>
-                </a:solidFill>
-                <a:latin typeface="Calibri" pitchFamily="34" charset="0"/>
-                <a:ea typeface="Calibri" pitchFamily="34" charset="-122"/>
-                <a:cs typeface="Calibri" pitchFamily="34" charset="-120"/>
-              </a:rPr>
-              <a:t>Report what you can prove, and admit what you cannot see.</a:t>
-            </a:r>
-            <a:endParaRPr lang="en-US" sz="1500" dirty="0"/>
-          </a:p>
-        </p:txBody>
-      </p:sp>
-      <p:sp>
-        <p:nvSpPr>
-          <p:cNvPr id="16" name="Text 14"/>
-          <p:cNvSpPr/>
-          <p:nvPr/>
-        </p:nvSpPr>
-        <p:spPr>
-          <a:xfrm>
-            <a:off x="502920" y="6428232"/>
-            <a:ext cx="7315200" cy="274320"/>
-          </a:xfrm>
-          <a:prstGeom prst="rect">
-            <a:avLst/>
-          </a:prstGeom>
-          <a:noFill/>
-          <a:ln/>
-        </p:spPr>
-        <p:txBody>
-          <a:bodyPr wrap="square" lIns="0" tIns="0" rIns="0" bIns="0" rtlCol="0" anchor="ctr"/>
-          <a:lstStyle/>
-          <a:p>
-            <a:pPr algn="l" indent="0" marL="0">
-              <a:buNone/>
-            </a:pPr>
-            <a:r>
-              <a:rPr lang="en-US" sz="900" b="1" dirty="0">
-                <a:solidFill>
-                  <a:srgbClr val="C88F33"/>
-                </a:solidFill>
-                <a:latin typeface="Calibri" pitchFamily="34" charset="0"/>
-                <a:ea typeface="Calibri" pitchFamily="34" charset="-122"/>
-                <a:cs typeface="Calibri" pitchFamily="34" charset="-120"/>
-              </a:rPr>
-              <a:t>WPYEG</a:t>
-            </a:r>
-            <a:pPr algn="l" indent="0" marL="0">
-              <a:buNone/>
-            </a:pPr>
-            <a:r>
-              <a:rPr lang="en-US" sz="900" dirty="0">
-                <a:solidFill>
-                  <a:srgbClr val="8A9AA3"/>
-                </a:solidFill>
-                <a:latin typeface="Calibri" pitchFamily="34" charset="0"/>
-                <a:ea typeface="Calibri" pitchFamily="34" charset="-122"/>
-                <a:cs typeface="Calibri" pitchFamily="34" charset="-120"/>
-              </a:rPr>
               <a:t>  ·  Better by Default</a:t>
             </a:r>
             <a:endParaRPr lang="en-US" sz="900" dirty="0"/>
@@ -31296,7 +31184,7 @@
       </p:sp>
       <p:sp>
         <p:nvSpPr>
-          <p:cNvPr id="17" name="Text 15"/>
+          <p:cNvPr id="8" name="Text 6"/>
           <p:cNvSpPr/>
           <p:nvPr/>
         </p:nvSpPr>
@@ -32013,6 +31901,646 @@
     <p:bg>
       <p:bgPr>
         <a:solidFill>
+          <a:srgbClr val="F5F8FA"/>
+        </a:solidFill>
+      </p:bgPr>
+    </p:bg>
+    <p:spTree>
+      <p:nvGrpSpPr>
+        <p:cNvPr id="1" name=""/>
+        <p:cNvGrpSpPr/>
+        <p:nvPr/>
+      </p:nvGrpSpPr>
+      <p:grpSpPr>
+        <a:xfrm>
+          <a:off x="0" y="0"/>
+          <a:ext cx="0" cy="0"/>
+          <a:chOff x="0" y="0"/>
+          <a:chExt cx="0" cy="0"/>
+        </a:xfrm>
+      </p:grpSpPr>
+      <p:sp>
+        <p:nvSpPr>
+          <p:cNvPr id="2" name="Text 0"/>
+          <p:cNvSpPr/>
+          <p:nvPr/>
+        </p:nvSpPr>
+        <p:spPr>
+          <a:xfrm>
+            <a:off x="548640" y="502920"/>
+            <a:ext cx="11064240" cy="822960"/>
+          </a:xfrm>
+          <a:prstGeom prst="rect">
+            <a:avLst/>
+          </a:prstGeom>
+          <a:noFill/>
+          <a:ln/>
+        </p:spPr>
+        <p:txBody>
+          <a:bodyPr wrap="square" lIns="0" tIns="0" rIns="0" bIns="0" rtlCol="0" anchor="ctr"/>
+          <a:lstStyle/>
+          <a:p>
+            <a:pPr indent="0" marL="0">
+              <a:buNone/>
+            </a:pPr>
+            <a:r>
+              <a:rPr lang="en-US" sz="3200" b="1" dirty="0">
+                <a:solidFill>
+                  <a:srgbClr val="0F2733"/>
+                </a:solidFill>
+                <a:latin typeface="Cambria" pitchFamily="34" charset="0"/>
+                <a:ea typeface="Cambria" pitchFamily="34" charset="-122"/>
+                <a:cs typeface="Cambria" pitchFamily="34" charset="-120"/>
+              </a:rPr>
+              <a:t>Three attempts. Two were withdrawn.</a:t>
+            </a:r>
+            <a:endParaRPr lang="en-US" sz="3200" dirty="0"/>
+          </a:p>
+        </p:txBody>
+      </p:sp>
+      <p:sp>
+        <p:nvSpPr>
+          <p:cNvPr id="3" name="Text 1"/>
+          <p:cNvSpPr/>
+          <p:nvPr/>
+        </p:nvSpPr>
+        <p:spPr>
+          <a:xfrm>
+            <a:off x="548640" y="1371600"/>
+            <a:ext cx="10881360" cy="731520"/>
+          </a:xfrm>
+          <a:prstGeom prst="rect">
+            <a:avLst/>
+          </a:prstGeom>
+          <a:noFill/>
+          <a:ln/>
+        </p:spPr>
+        <p:txBody>
+          <a:bodyPr wrap="square" lIns="0" tIns="0" rIns="0" bIns="0" rtlCol="0" anchor="ctr"/>
+          <a:lstStyle/>
+          <a:p>
+            <a:pPr indent="0" marL="0">
+              <a:buNone/>
+            </a:pPr>
+            <a:r>
+              <a:rPr lang="en-US" sz="1600" dirty="0">
+                <a:solidFill>
+                  <a:srgbClr val="4A5A63"/>
+                </a:solidFill>
+                <a:latin typeface="Calibri" pitchFamily="34" charset="0"/>
+                <a:ea typeface="Calibri" pitchFamily="34" charset="-122"/>
+                <a:cs typeface="Calibri" pitchFamily="34" charset="-120"/>
+              </a:rPr>
+              <a:t>The useful third design observes real filter runs without pretending it can identify the culprit.</a:t>
+            </a:r>
+            <a:endParaRPr lang="en-US" sz="1600" dirty="0"/>
+          </a:p>
+        </p:txBody>
+      </p:sp>
+      <p:sp>
+        <p:nvSpPr>
+          <p:cNvPr id="4" name="Shape 2"/>
+          <p:cNvSpPr/>
+          <p:nvPr/>
+        </p:nvSpPr>
+        <p:spPr>
+          <a:xfrm>
+            <a:off x="548640" y="2377440"/>
+            <a:ext cx="11064240" cy="1051560"/>
+          </a:xfrm>
+          <a:prstGeom prst="roundRect">
+            <a:avLst>
+              <a:gd name="adj" fmla="val 7826"/>
+            </a:avLst>
+          </a:prstGeom>
+          <a:solidFill>
+            <a:srgbClr val="FFFFFF"/>
+          </a:solidFill>
+          <a:ln w="12700">
+            <a:solidFill>
+              <a:srgbClr val="DCE6EB"/>
+            </a:solidFill>
+            <a:prstDash val="solid"/>
+          </a:ln>
+          <a:effectLst>
+            <a:outerShdw sx="100000" sy="100000" kx="0" ky="0" algn="bl" rotWithShape="0" blurRad="63500" dist="25400" dir="5400000">
+              <a:srgbClr val="C7D4DB">
+                <a:alpha val="50000"/>
+              </a:srgbClr>
+            </a:outerShdw>
+          </a:effectLst>
+        </p:spPr>
+      </p:sp>
+      <p:sp>
+        <p:nvSpPr>
+          <p:cNvPr id="5" name="Shape 3"/>
+          <p:cNvSpPr/>
+          <p:nvPr/>
+        </p:nvSpPr>
+        <p:spPr>
+          <a:xfrm>
+            <a:off x="868680" y="2670048"/>
+            <a:ext cx="457200" cy="457200"/>
+          </a:xfrm>
+          <a:prstGeom prst="ellipse">
+            <a:avLst/>
+          </a:prstGeom>
+          <a:solidFill>
+            <a:srgbClr val="27607A"/>
+          </a:solidFill>
+          <a:ln/>
+        </p:spPr>
+      </p:sp>
+      <p:sp>
+        <p:nvSpPr>
+          <p:cNvPr id="6" name="Text 4"/>
+          <p:cNvSpPr/>
+          <p:nvPr/>
+        </p:nvSpPr>
+        <p:spPr>
+          <a:xfrm>
+            <a:off x="868680" y="2670048"/>
+            <a:ext cx="457200" cy="457200"/>
+          </a:xfrm>
+          <a:prstGeom prst="rect">
+            <a:avLst/>
+          </a:prstGeom>
+          <a:noFill/>
+          <a:ln/>
+        </p:spPr>
+        <p:txBody>
+          <a:bodyPr wrap="square" lIns="0" tIns="0" rIns="0" bIns="0" rtlCol="0" anchor="ctr"/>
+          <a:lstStyle/>
+          <a:p>
+            <a:pPr algn="ctr" indent="0" marL="0">
+              <a:buNone/>
+            </a:pPr>
+            <a:r>
+              <a:rPr lang="en-US" sz="1300" b="1" dirty="0">
+                <a:solidFill>
+                  <a:srgbClr val="FFFFFF"/>
+                </a:solidFill>
+                <a:latin typeface="Cambria" pitchFamily="34" charset="0"/>
+                <a:ea typeface="Cambria" pitchFamily="34" charset="-122"/>
+                <a:cs typeface="Cambria" pitchFamily="34" charset="-120"/>
+              </a:rPr>
+              <a:t>1</a:t>
+            </a:r>
+            <a:endParaRPr lang="en-US" sz="1300" dirty="0"/>
+          </a:p>
+        </p:txBody>
+      </p:sp>
+      <p:sp>
+        <p:nvSpPr>
+          <p:cNvPr id="7" name="Text 5"/>
+          <p:cNvSpPr/>
+          <p:nvPr/>
+        </p:nvSpPr>
+        <p:spPr>
+          <a:xfrm>
+            <a:off x="1508760" y="2542032"/>
+            <a:ext cx="9875520" cy="731520"/>
+          </a:xfrm>
+          <a:prstGeom prst="rect">
+            <a:avLst/>
+          </a:prstGeom>
+          <a:noFill/>
+          <a:ln/>
+        </p:spPr>
+        <p:txBody>
+          <a:bodyPr wrap="square" lIns="0" tIns="0" rIns="0" bIns="0" rtlCol="0" anchor="ctr"/>
+          <a:lstStyle/>
+          <a:p>
+            <a:pPr indent="0" marL="0">
+              <a:buNone/>
+            </a:pPr>
+            <a:r>
+              <a:rPr lang="en-US" sz="1500" b="1" dirty="0">
+                <a:solidFill>
+                  <a:srgbClr val="0F2733"/>
+                </a:solidFill>
+                <a:latin typeface="Calibri" pitchFamily="34" charset="0"/>
+                <a:ea typeface="Calibri" pitchFamily="34" charset="-122"/>
+                <a:cs typeface="Calibri" pitchFamily="34" charset="-120"/>
+              </a:rPr>
+              <a:t>Read the plugin's code for clues.  </a:t>
+            </a:r>
+            <a:pPr indent="0" marL="0">
+              <a:buNone/>
+            </a:pPr>
+            <a:r>
+              <a:rPr lang="en-US" sz="1500" dirty="0">
+                <a:solidFill>
+                  <a:srgbClr val="4A5A63"/>
+                </a:solidFill>
+                <a:latin typeface="Calibri" pitchFamily="34" charset="0"/>
+                <a:ea typeface="Calibri" pitchFamily="34" charset="-122"/>
+                <a:cs typeface="Calibri" pitchFamily="34" charset="-120"/>
+              </a:rPr>
+              <a:t>Named plugins that were doing nothing at all.</a:t>
+            </a:r>
+            <a:endParaRPr lang="en-US" sz="1500" dirty="0"/>
+          </a:p>
+        </p:txBody>
+      </p:sp>
+      <p:sp>
+        <p:nvSpPr>
+          <p:cNvPr id="8" name="Shape 6"/>
+          <p:cNvSpPr/>
+          <p:nvPr/>
+        </p:nvSpPr>
+        <p:spPr>
+          <a:xfrm>
+            <a:off x="548640" y="3611880"/>
+            <a:ext cx="11064240" cy="1051560"/>
+          </a:xfrm>
+          <a:prstGeom prst="roundRect">
+            <a:avLst>
+              <a:gd name="adj" fmla="val 7826"/>
+            </a:avLst>
+          </a:prstGeom>
+          <a:solidFill>
+            <a:srgbClr val="FFFFFF"/>
+          </a:solidFill>
+          <a:ln w="12700">
+            <a:solidFill>
+              <a:srgbClr val="DCE6EB"/>
+            </a:solidFill>
+            <a:prstDash val="solid"/>
+          </a:ln>
+          <a:effectLst>
+            <a:outerShdw sx="100000" sy="100000" kx="0" ky="0" algn="bl" rotWithShape="0" blurRad="63500" dist="25400" dir="5400000">
+              <a:srgbClr val="C7D4DB">
+                <a:alpha val="50000"/>
+              </a:srgbClr>
+            </a:outerShdw>
+          </a:effectLst>
+        </p:spPr>
+      </p:sp>
+      <p:sp>
+        <p:nvSpPr>
+          <p:cNvPr id="9" name="Shape 7"/>
+          <p:cNvSpPr/>
+          <p:nvPr/>
+        </p:nvSpPr>
+        <p:spPr>
+          <a:xfrm>
+            <a:off x="868680" y="3904488"/>
+            <a:ext cx="457200" cy="457200"/>
+          </a:xfrm>
+          <a:prstGeom prst="ellipse">
+            <a:avLst/>
+          </a:prstGeom>
+          <a:solidFill>
+            <a:srgbClr val="27607A"/>
+          </a:solidFill>
+          <a:ln/>
+        </p:spPr>
+      </p:sp>
+      <p:sp>
+        <p:nvSpPr>
+          <p:cNvPr id="10" name="Text 8"/>
+          <p:cNvSpPr/>
+          <p:nvPr/>
+        </p:nvSpPr>
+        <p:spPr>
+          <a:xfrm>
+            <a:off x="868680" y="3904488"/>
+            <a:ext cx="457200" cy="457200"/>
+          </a:xfrm>
+          <a:prstGeom prst="rect">
+            <a:avLst/>
+          </a:prstGeom>
+          <a:noFill/>
+          <a:ln/>
+        </p:spPr>
+        <p:txBody>
+          <a:bodyPr wrap="square" lIns="0" tIns="0" rIns="0" bIns="0" rtlCol="0" anchor="ctr"/>
+          <a:lstStyle/>
+          <a:p>
+            <a:pPr algn="ctr" indent="0" marL="0">
+              <a:buNone/>
+            </a:pPr>
+            <a:r>
+              <a:rPr lang="en-US" sz="1300" b="1" dirty="0">
+                <a:solidFill>
+                  <a:srgbClr val="FFFFFF"/>
+                </a:solidFill>
+                <a:latin typeface="Cambria" pitchFamily="34" charset="0"/>
+                <a:ea typeface="Cambria" pitchFamily="34" charset="-122"/>
+                <a:cs typeface="Cambria" pitchFamily="34" charset="-120"/>
+              </a:rPr>
+              <a:t>2</a:t>
+            </a:r>
+            <a:endParaRPr lang="en-US" sz="1300" dirty="0"/>
+          </a:p>
+        </p:txBody>
+      </p:sp>
+      <p:sp>
+        <p:nvSpPr>
+          <p:cNvPr id="11" name="Text 9"/>
+          <p:cNvSpPr/>
+          <p:nvPr/>
+        </p:nvSpPr>
+        <p:spPr>
+          <a:xfrm>
+            <a:off x="1508760" y="3776472"/>
+            <a:ext cx="9875520" cy="731520"/>
+          </a:xfrm>
+          <a:prstGeom prst="rect">
+            <a:avLst/>
+          </a:prstGeom>
+          <a:noFill/>
+          <a:ln/>
+        </p:spPr>
+        <p:txBody>
+          <a:bodyPr wrap="square" lIns="0" tIns="0" rIns="0" bIns="0" rtlCol="0" anchor="ctr"/>
+          <a:lstStyle/>
+          <a:p>
+            <a:pPr indent="0" marL="0">
+              <a:buNone/>
+            </a:pPr>
+            <a:r>
+              <a:rPr lang="en-US" sz="1500" b="1" dirty="0">
+                <a:solidFill>
+                  <a:srgbClr val="0F2733"/>
+                </a:solidFill>
+                <a:latin typeface="Calibri" pitchFamily="34" charset="0"/>
+                <a:ea typeface="Calibri" pitchFamily="34" charset="-122"/>
+                <a:cs typeface="Calibri" pitchFamily="34" charset="-120"/>
+              </a:rPr>
+              <a:t>Run the setting, see what comes out.  </a:t>
+            </a:r>
+            <a:pPr indent="0" marL="0">
+              <a:buNone/>
+            </a:pPr>
+            <a:r>
+              <a:rPr lang="en-US" sz="1500" dirty="0">
+                <a:solidFill>
+                  <a:srgbClr val="4A5A63"/>
+                </a:solidFill>
+                <a:latin typeface="Calibri" pitchFamily="34" charset="0"/>
+                <a:ea typeface="Calibri" pitchFamily="34" charset="-122"/>
+                <a:cs typeface="Calibri" pitchFamily="34" charset="-120"/>
+              </a:rPr>
+              <a:t>Meant running other people's code to check on them.</a:t>
+            </a:r>
+            <a:endParaRPr lang="en-US" sz="1500" dirty="0"/>
+          </a:p>
+        </p:txBody>
+      </p:sp>
+      <p:sp>
+        <p:nvSpPr>
+          <p:cNvPr id="12" name="Shape 10"/>
+          <p:cNvSpPr/>
+          <p:nvPr/>
+        </p:nvSpPr>
+        <p:spPr>
+          <a:xfrm>
+            <a:off x="548640" y="4846320"/>
+            <a:ext cx="11064240" cy="1051560"/>
+          </a:xfrm>
+          <a:prstGeom prst="roundRect">
+            <a:avLst>
+              <a:gd name="adj" fmla="val 7826"/>
+            </a:avLst>
+          </a:prstGeom>
+          <a:solidFill>
+            <a:srgbClr val="FFFFFF"/>
+          </a:solidFill>
+          <a:ln w="12700">
+            <a:solidFill>
+              <a:srgbClr val="DCE6EB"/>
+            </a:solidFill>
+            <a:prstDash val="solid"/>
+          </a:ln>
+          <a:effectLst>
+            <a:outerShdw sx="100000" sy="100000" kx="0" ky="0" algn="bl" rotWithShape="0" blurRad="63500" dist="25400" dir="5400000">
+              <a:srgbClr val="C7D4DB">
+                <a:alpha val="50000"/>
+              </a:srgbClr>
+            </a:outerShdw>
+          </a:effectLst>
+        </p:spPr>
+      </p:sp>
+      <p:sp>
+        <p:nvSpPr>
+          <p:cNvPr id="13" name="Shape 11"/>
+          <p:cNvSpPr/>
+          <p:nvPr/>
+        </p:nvSpPr>
+        <p:spPr>
+          <a:xfrm>
+            <a:off x="868680" y="5138928"/>
+            <a:ext cx="457200" cy="457200"/>
+          </a:xfrm>
+          <a:prstGeom prst="ellipse">
+            <a:avLst/>
+          </a:prstGeom>
+          <a:solidFill>
+            <a:srgbClr val="27607A"/>
+          </a:solidFill>
+          <a:ln/>
+        </p:spPr>
+      </p:sp>
+      <p:sp>
+        <p:nvSpPr>
+          <p:cNvPr id="14" name="Text 12"/>
+          <p:cNvSpPr/>
+          <p:nvPr/>
+        </p:nvSpPr>
+        <p:spPr>
+          <a:xfrm>
+            <a:off x="868680" y="5138928"/>
+            <a:ext cx="457200" cy="457200"/>
+          </a:xfrm>
+          <a:prstGeom prst="rect">
+            <a:avLst/>
+          </a:prstGeom>
+          <a:noFill/>
+          <a:ln/>
+        </p:spPr>
+        <p:txBody>
+          <a:bodyPr wrap="square" lIns="0" tIns="0" rIns="0" bIns="0" rtlCol="0" anchor="ctr"/>
+          <a:lstStyle/>
+          <a:p>
+            <a:pPr algn="ctr" indent="0" marL="0">
+              <a:buNone/>
+            </a:pPr>
+            <a:r>
+              <a:rPr lang="en-US" sz="1300" b="1" dirty="0">
+                <a:solidFill>
+                  <a:srgbClr val="FFFFFF"/>
+                </a:solidFill>
+                <a:latin typeface="Cambria" pitchFamily="34" charset="0"/>
+                <a:ea typeface="Cambria" pitchFamily="34" charset="-122"/>
+                <a:cs typeface="Cambria" pitchFamily="34" charset="-120"/>
+              </a:rPr>
+              <a:t>3</a:t>
+            </a:r>
+            <a:endParaRPr lang="en-US" sz="1300" dirty="0"/>
+          </a:p>
+        </p:txBody>
+      </p:sp>
+      <p:sp>
+        <p:nvSpPr>
+          <p:cNvPr id="15" name="Text 13"/>
+          <p:cNvSpPr/>
+          <p:nvPr/>
+        </p:nvSpPr>
+        <p:spPr>
+          <a:xfrm>
+            <a:off x="1508760" y="5010912"/>
+            <a:ext cx="9875520" cy="731520"/>
+          </a:xfrm>
+          <a:prstGeom prst="rect">
+            <a:avLst/>
+          </a:prstGeom>
+          <a:noFill/>
+          <a:ln/>
+        </p:spPr>
+        <p:txBody>
+          <a:bodyPr wrap="square" lIns="0" tIns="0" rIns="0" bIns="0" rtlCol="0" anchor="ctr"/>
+          <a:lstStyle/>
+          <a:p>
+            <a:pPr indent="0" marL="0">
+              <a:buNone/>
+            </a:pPr>
+            <a:r>
+              <a:rPr lang="en-US" sz="1500" b="1" dirty="0">
+                <a:solidFill>
+                  <a:srgbClr val="0F2733"/>
+                </a:solidFill>
+                <a:latin typeface="Calibri" pitchFamily="34" charset="0"/>
+                <a:ea typeface="Calibri" pitchFamily="34" charset="-122"/>
+                <a:cs typeface="Calibri" pitchFamily="34" charset="-120"/>
+              </a:rPr>
+              <a:t>Observe real runs at PHP_INT_MAX.  </a:t>
+            </a:r>
+            <a:pPr indent="0" marL="0">
+              <a:buNone/>
+            </a:pPr>
+            <a:r>
+              <a:rPr lang="en-US" sz="1500" dirty="0">
+                <a:solidFill>
+                  <a:srgbClr val="4A5A63"/>
+                </a:solidFill>
+                <a:latin typeface="Calibri" pitchFamily="34" charset="0"/>
+                <a:ea typeface="Calibri" pitchFamily="34" charset="-122"/>
+                <a:cs typeface="Calibri" pitchFamily="34" charset="-120"/>
+              </a:rPr>
+              <a:t>Detects divergence late, without attribution; same-priority callbacks can still run later.</a:t>
+            </a:r>
+            <a:endParaRPr lang="en-US" sz="1500" dirty="0"/>
+          </a:p>
+        </p:txBody>
+      </p:sp>
+      <p:sp>
+        <p:nvSpPr>
+          <p:cNvPr id="16" name="Text 14"/>
+          <p:cNvSpPr/>
+          <p:nvPr/>
+        </p:nvSpPr>
+        <p:spPr>
+          <a:xfrm>
+            <a:off x="502920" y="6428232"/>
+            <a:ext cx="7315200" cy="274320"/>
+          </a:xfrm>
+          <a:prstGeom prst="rect">
+            <a:avLst/>
+          </a:prstGeom>
+          <a:noFill/>
+          <a:ln/>
+        </p:spPr>
+        <p:txBody>
+          <a:bodyPr wrap="square" lIns="0" tIns="0" rIns="0" bIns="0" rtlCol="0" anchor="ctr"/>
+          <a:lstStyle/>
+          <a:p>
+            <a:pPr algn="l" indent="0" marL="0">
+              <a:buNone/>
+            </a:pPr>
+            <a:r>
+              <a:rPr lang="en-US" sz="900" b="1" dirty="0">
+                <a:solidFill>
+                  <a:srgbClr val="C88F33"/>
+                </a:solidFill>
+                <a:latin typeface="Calibri" pitchFamily="34" charset="0"/>
+                <a:ea typeface="Calibri" pitchFamily="34" charset="-122"/>
+                <a:cs typeface="Calibri" pitchFamily="34" charset="-120"/>
+              </a:rPr>
+              <a:t>WPYEG</a:t>
+            </a:r>
+            <a:pPr algn="l" indent="0" marL="0">
+              <a:buNone/>
+            </a:pPr>
+            <a:r>
+              <a:rPr lang="en-US" sz="900" dirty="0">
+                <a:solidFill>
+                  <a:srgbClr val="8A9AA3"/>
+                </a:solidFill>
+                <a:latin typeface="Calibri" pitchFamily="34" charset="0"/>
+                <a:ea typeface="Calibri" pitchFamily="34" charset="-122"/>
+                <a:cs typeface="Calibri" pitchFamily="34" charset="-120"/>
+              </a:rPr>
+              <a:t>  ·  Better by Default</a:t>
+            </a:r>
+            <a:endParaRPr lang="en-US" sz="900" dirty="0"/>
+          </a:p>
+        </p:txBody>
+      </p:sp>
+      <p:sp>
+        <p:nvSpPr>
+          <p:cNvPr id="17" name="Text 15"/>
+          <p:cNvSpPr/>
+          <p:nvPr/>
+        </p:nvSpPr>
+        <p:spPr>
+          <a:xfrm>
+            <a:off x="11155680" y="6428232"/>
+            <a:ext cx="548640" cy="274320"/>
+          </a:xfrm>
+          <a:prstGeom prst="rect">
+            <a:avLst/>
+          </a:prstGeom>
+          <a:noFill/>
+          <a:ln/>
+        </p:spPr>
+        <p:txBody>
+          <a:bodyPr wrap="square" lIns="0" tIns="0" rIns="0" bIns="0" rtlCol="0" anchor="ctr"/>
+          <a:lstStyle/>
+          <a:p>
+            <a:pPr algn="r" indent="0" marL="0">
+              <a:buNone/>
+            </a:pPr>
+            <a:r>
+              <a:rPr lang="en-US" sz="900" dirty="0">
+                <a:solidFill>
+                  <a:srgbClr val="8A9AA3"/>
+                </a:solidFill>
+                <a:latin typeface="Calibri" pitchFamily="34" charset="0"/>
+                <a:ea typeface="Calibri" pitchFamily="34" charset="-122"/>
+                <a:cs typeface="Calibri" pitchFamily="34" charset="-120"/>
+              </a:rPr>
+              <a:t>37</a:t>
+            </a:r>
+            <a:endParaRPr lang="en-US" sz="900" dirty="0"/>
+          </a:p>
+        </p:txBody>
+      </p:sp>
+    </p:spTree>
+  </p:cSld>
+  <p:clrMapOvr>
+    <a:masterClrMapping/>
+  </p:clrMapOvr>
+</p:sld>
+</file>
+
+<file path=ppt/slides/slide41.xml><?xml version="1.0" encoding="utf-8"?>
+<p:sld xmlns:a="http://schemas.openxmlformats.org/drawingml/2006/main" xmlns:r="http://schemas.openxmlformats.org/officeDocument/2006/relationships" xmlns:p="http://schemas.openxmlformats.org/presentationml/2006/main">
+  <p:cSld name="Slide 41">
+    <p:bg>
+      <p:bgPr>
+        <a:solidFill>
           <a:srgbClr val="27607A"/>
         </a:solidFill>
       </p:bgPr>
@@ -32257,7 +32785,7 @@
                 <a:ea typeface="Calibri" pitchFamily="34" charset="-122"/>
                 <a:cs typeface="Calibri" pitchFamily="34" charset="-120"/>
               </a:rPr>
-              <a:t>37</a:t>
+              <a:t>38</a:t>
             </a:r>
             <a:endParaRPr lang="en-US" sz="900" dirty="0"/>
           </a:p>
@@ -32271,9 +32799,9 @@
 </p:sld>
 </file>
 
-<file path=ppt/slides/slide41.xml><?xml version="1.0" encoding="utf-8"?>
+<file path=ppt/slides/slide42.xml><?xml version="1.0" encoding="utf-8"?>
 <p:sld xmlns:a="http://schemas.openxmlformats.org/drawingml/2006/main" xmlns:r="http://schemas.openxmlformats.org/officeDocument/2006/relationships" xmlns:p="http://schemas.openxmlformats.org/presentationml/2006/main">
-  <p:cSld name="Slide 41">
+  <p:cSld name="Slide 42">
     <p:bg>
       <p:bgPr>
         <a:solidFill>
